--- a/submission/Anvil - AI Builder Cup Submission v2.pptx
+++ b/submission/Anvil - AI Builder Cup Submission v2.pptx
@@ -1,50 +1,50 @@
 
 <file path=ppt/presentation.xml><?xml version="1.0" encoding="utf-8"?>
-<p:presentation xmlns:a="http://schemas.openxmlformats.org/drawingml/2006/main" xmlns:r="http://schemas.openxmlformats.org/officeDocument/2006/relationships" xmlns:mc="http://schemas.openxmlformats.org/markup-compatibility/2006" xmlns:mv="urn:schemas-microsoft-com:mac:vml" xmlns:p="http://schemas.openxmlformats.org/presentationml/2006/main" xmlns:c="http://schemas.openxmlformats.org/drawingml/2006/chart" xmlns:dgm="http://schemas.openxmlformats.org/drawingml/2006/diagram" xmlns:o="urn:schemas-microsoft-com:office:office" xmlns:v="urn:schemas-microsoft-com:vml" xmlns:pvml="urn:schemas-microsoft-com:office:powerpoint" xmlns:com="http://schemas.openxmlformats.org/drawingml/2006/compatibility" xmlns:p14="http://schemas.microsoft.com/office/powerpoint/2010/main" xmlns:p15="http://schemas.microsoft.com/office/powerpoint/2012/main" xmlns:ahyp="http://schemas.microsoft.com/office/drawing/2018/hyperlinkcolor" autoCompressPictures="0" embedTrueTypeFonts="1" strictFirstAndLastChars="0" saveSubsetFonts="1">
+<p:presentation xmlns:a="http://schemas.openxmlformats.org/drawingml/2006/main" xmlns:r="http://schemas.openxmlformats.org/officeDocument/2006/relationships" xmlns:p="http://schemas.openxmlformats.org/presentationml/2006/main" strictFirstAndLastChars="0" embedTrueTypeFonts="1" saveSubsetFonts="1" autoCompressPictures="0">
   <p:sldMasterIdLst>
-    <p:sldMasterId id="2147483659" r:id="rId4"/>
+    <p:sldMasterId id="2147483659" r:id="rId1"/>
   </p:sldMasterIdLst>
   <p:notesMasterIdLst>
-    <p:notesMasterId r:id="rId5"/>
+    <p:notesMasterId r:id="rId17"/>
   </p:notesMasterIdLst>
   <p:sldIdLst>
-    <p:sldId id="256" r:id="rId6"/>
-    <p:sldId id="258" r:id="rId8"/>
-    <p:sldId id="259" r:id="rId9"/>
-    <p:sldId id="260" r:id="rId10"/>
-    <p:sldId id="261" r:id="rId11"/>
-    <p:sldId id="262" r:id="rId12"/>
-    <p:sldId id="263" r:id="rId13"/>
-    <p:sldId id="264" r:id="rId14"/>
-    <p:sldId id="265" r:id="rId15"/>
-    <p:sldId id="266" r:id="rId16"/>
-    <p:sldId id="267" r:id="rId17"/>
-    <p:sldId id="268" r:id="rId18"/>
-    <p:sldId id="269" r:id="rId19"/>
-    <p:sldId id="270" r:id="rId20"/>
-    <p:sldId id="271" r:id="rId21"/>
+    <p:sldId id="256" r:id="rId2"/>
+    <p:sldId id="258" r:id="rId3"/>
+    <p:sldId id="259" r:id="rId4"/>
+    <p:sldId id="260" r:id="rId5"/>
+    <p:sldId id="261" r:id="rId6"/>
+    <p:sldId id="262" r:id="rId7"/>
+    <p:sldId id="263" r:id="rId8"/>
+    <p:sldId id="264" r:id="rId9"/>
+    <p:sldId id="265" r:id="rId10"/>
+    <p:sldId id="266" r:id="rId11"/>
+    <p:sldId id="267" r:id="rId12"/>
+    <p:sldId id="268" r:id="rId13"/>
+    <p:sldId id="269" r:id="rId14"/>
+    <p:sldId id="270" r:id="rId15"/>
+    <p:sldId id="271" r:id="rId16"/>
   </p:sldIdLst>
-  <p:sldSz cy="5143500" cx="9144000"/>
+  <p:sldSz cx="9144000" cy="5143500" type="screen16x9"/>
   <p:notesSz cx="6858000" cy="9144000"/>
   <p:embeddedFontLst>
     <p:embeddedFont>
-      <p:font typeface="Google Sans Flex Medium"/>
+      <p:font typeface="Google Sans Flex" panose="020B0604020202020204" charset="0"/>
+      <p:regular r:id="rId18"/>
+      <p:bold r:id="rId19"/>
+    </p:embeddedFont>
+    <p:embeddedFont>
+      <p:font typeface="Google Sans Flex Medium" panose="020B0604020202020204" charset="0"/>
+      <p:regular r:id="rId20"/>
+      <p:bold r:id="rId21"/>
+    </p:embeddedFont>
+    <p:embeddedFont>
+      <p:font typeface="Google Sans Flex SemiBold" panose="020B0604020202020204" charset="0"/>
       <p:regular r:id="rId22"/>
       <p:bold r:id="rId23"/>
     </p:embeddedFont>
-    <p:embeddedFont>
-      <p:font typeface="Google Sans Flex"/>
-      <p:regular r:id="rId24"/>
-      <p:bold r:id="rId25"/>
-    </p:embeddedFont>
-    <p:embeddedFont>
-      <p:font typeface="Google Sans Flex SemiBold"/>
-      <p:regular r:id="rId26"/>
-      <p:bold r:id="rId27"/>
-    </p:embeddedFont>
   </p:embeddedFontLst>
   <p:defaultTextStyle>
-    <a:defPPr lvl="0" marR="0" rtl="0" algn="l">
+    <a:defPPr marR="0" lvl="0" algn="l" rtl="0">
       <a:lnSpc>
         <a:spcPct val="100000"/>
       </a:lnSpc>
@@ -55,7 +55,7 @@
         <a:spcPts val="0"/>
       </a:spcAft>
     </a:defPPr>
-    <a:lvl1pPr lvl="0" marR="0" rtl="0" algn="l">
+    <a:lvl1pPr marR="0" lvl="0" algn="l" rtl="0">
       <a:lnSpc>
         <a:spcPct val="100000"/>
       </a:lnSpc>
@@ -69,7 +69,7 @@
         <a:srgbClr val="000000"/>
       </a:buClr>
       <a:buFont typeface="Arial"/>
-      <a:defRPr b="0" i="0" spc="0" sz="1400" u="none" cap="none" strike="noStrike">
+      <a:defRPr sz="1400" b="0" i="0" u="none" strike="noStrike" cap="none" spc="0">
         <a:solidFill>
           <a:srgbClr val="000000"/>
         </a:solidFill>
@@ -79,7 +79,7 @@
         <a:sym typeface="Arial"/>
       </a:defRPr>
     </a:lvl1pPr>
-    <a:lvl2pPr lvl="1" marR="0" rtl="0" algn="l">
+    <a:lvl2pPr marR="0" lvl="1" algn="l" rtl="0">
       <a:lnSpc>
         <a:spcPct val="100000"/>
       </a:lnSpc>
@@ -93,7 +93,7 @@
         <a:srgbClr val="000000"/>
       </a:buClr>
       <a:buFont typeface="Arial"/>
-      <a:defRPr b="0" i="0" spc="0" sz="1400" u="none" cap="none" strike="noStrike">
+      <a:defRPr sz="1400" b="0" i="0" u="none" strike="noStrike" cap="none" spc="0">
         <a:solidFill>
           <a:srgbClr val="000000"/>
         </a:solidFill>
@@ -103,7 +103,7 @@
         <a:sym typeface="Arial"/>
       </a:defRPr>
     </a:lvl2pPr>
-    <a:lvl3pPr lvl="2" marR="0" rtl="0" algn="l">
+    <a:lvl3pPr marR="0" lvl="2" algn="l" rtl="0">
       <a:lnSpc>
         <a:spcPct val="100000"/>
       </a:lnSpc>
@@ -117,7 +117,7 @@
         <a:srgbClr val="000000"/>
       </a:buClr>
       <a:buFont typeface="Arial"/>
-      <a:defRPr b="0" i="0" spc="0" sz="1400" u="none" cap="none" strike="noStrike">
+      <a:defRPr sz="1400" b="0" i="0" u="none" strike="noStrike" cap="none" spc="0">
         <a:solidFill>
           <a:srgbClr val="000000"/>
         </a:solidFill>
@@ -127,7 +127,7 @@
         <a:sym typeface="Arial"/>
       </a:defRPr>
     </a:lvl3pPr>
-    <a:lvl4pPr lvl="3" marR="0" rtl="0" algn="l">
+    <a:lvl4pPr marR="0" lvl="3" algn="l" rtl="0">
       <a:lnSpc>
         <a:spcPct val="100000"/>
       </a:lnSpc>
@@ -141,7 +141,7 @@
         <a:srgbClr val="000000"/>
       </a:buClr>
       <a:buFont typeface="Arial"/>
-      <a:defRPr b="0" i="0" spc="0" sz="1400" u="none" cap="none" strike="noStrike">
+      <a:defRPr sz="1400" b="0" i="0" u="none" strike="noStrike" cap="none" spc="0">
         <a:solidFill>
           <a:srgbClr val="000000"/>
         </a:solidFill>
@@ -151,7 +151,7 @@
         <a:sym typeface="Arial"/>
       </a:defRPr>
     </a:lvl4pPr>
-    <a:lvl5pPr lvl="4" marR="0" rtl="0" algn="l">
+    <a:lvl5pPr marR="0" lvl="4" algn="l" rtl="0">
       <a:lnSpc>
         <a:spcPct val="100000"/>
       </a:lnSpc>
@@ -165,7 +165,7 @@
         <a:srgbClr val="000000"/>
       </a:buClr>
       <a:buFont typeface="Arial"/>
-      <a:defRPr b="0" i="0" spc="0" sz="1400" u="none" cap="none" strike="noStrike">
+      <a:defRPr sz="1400" b="0" i="0" u="none" strike="noStrike" cap="none" spc="0">
         <a:solidFill>
           <a:srgbClr val="000000"/>
         </a:solidFill>
@@ -175,7 +175,7 @@
         <a:sym typeface="Arial"/>
       </a:defRPr>
     </a:lvl5pPr>
-    <a:lvl6pPr lvl="5" marR="0" rtl="0" algn="l">
+    <a:lvl6pPr marR="0" lvl="5" algn="l" rtl="0">
       <a:lnSpc>
         <a:spcPct val="100000"/>
       </a:lnSpc>
@@ -189,7 +189,7 @@
         <a:srgbClr val="000000"/>
       </a:buClr>
       <a:buFont typeface="Arial"/>
-      <a:defRPr b="0" i="0" spc="0" sz="1400" u="none" cap="none" strike="noStrike">
+      <a:defRPr sz="1400" b="0" i="0" u="none" strike="noStrike" cap="none" spc="0">
         <a:solidFill>
           <a:srgbClr val="000000"/>
         </a:solidFill>
@@ -199,7 +199,7 @@
         <a:sym typeface="Arial"/>
       </a:defRPr>
     </a:lvl6pPr>
-    <a:lvl7pPr lvl="6" marR="0" rtl="0" algn="l">
+    <a:lvl7pPr marR="0" lvl="6" algn="l" rtl="0">
       <a:lnSpc>
         <a:spcPct val="100000"/>
       </a:lnSpc>
@@ -213,7 +213,7 @@
         <a:srgbClr val="000000"/>
       </a:buClr>
       <a:buFont typeface="Arial"/>
-      <a:defRPr b="0" i="0" spc="0" sz="1400" u="none" cap="none" strike="noStrike">
+      <a:defRPr sz="1400" b="0" i="0" u="none" strike="noStrike" cap="none" spc="0">
         <a:solidFill>
           <a:srgbClr val="000000"/>
         </a:solidFill>
@@ -223,7 +223,7 @@
         <a:sym typeface="Arial"/>
       </a:defRPr>
     </a:lvl7pPr>
-    <a:lvl8pPr lvl="7" marR="0" rtl="0" algn="l">
+    <a:lvl8pPr marR="0" lvl="7" algn="l" rtl="0">
       <a:lnSpc>
         <a:spcPct val="100000"/>
       </a:lnSpc>
@@ -237,7 +237,7 @@
         <a:srgbClr val="000000"/>
       </a:buClr>
       <a:buFont typeface="Arial"/>
-      <a:defRPr b="0" i="0" spc="0" sz="1400" u="none" cap="none" strike="noStrike">
+      <a:defRPr sz="1400" b="0" i="0" u="none" strike="noStrike" cap="none" spc="0">
         <a:solidFill>
           <a:srgbClr val="000000"/>
         </a:solidFill>
@@ -247,7 +247,7 @@
         <a:sym typeface="Arial"/>
       </a:defRPr>
     </a:lvl8pPr>
-    <a:lvl9pPr lvl="8" marR="0" rtl="0" algn="l">
+    <a:lvl9pPr marR="0" lvl="8" algn="l" rtl="0">
       <a:lnSpc>
         <a:spcPct val="100000"/>
       </a:lnSpc>
@@ -261,7 +261,7 @@
         <a:srgbClr val="000000"/>
       </a:buClr>
       <a:buFont typeface="Arial"/>
-      <a:defRPr b="0" i="0" spc="0" sz="1400" u="none" cap="none" strike="noStrike">
+      <a:defRPr sz="1400" b="0" i="0" u="none" strike="noStrike" cap="none" spc="0">
         <a:solidFill>
           <a:srgbClr val="000000"/>
         </a:solidFill>
@@ -274,7 +274,7 @@
   </p:defaultTextStyle>
   <p:extLst>
     <p:ext uri="{EFAFB233-063F-42B5-8137-9DF3F51BA10A}">
-      <p15:sldGuideLst>
+      <p15:sldGuideLst xmlns:p15="http://schemas.microsoft.com/office/powerpoint/2012/main">
         <p15:guide id="1" orient="horz" pos="1620">
           <p15:clr>
             <a:srgbClr val="747775"/>
@@ -292,11 +292,16 @@
 </file>
 
 <file path=ppt/notesMasters/notesMaster1.xml><?xml version="1.0" encoding="utf-8"?>
-<p:notesMaster xmlns:a="http://schemas.openxmlformats.org/drawingml/2006/main" xmlns:r="http://schemas.openxmlformats.org/officeDocument/2006/relationships" xmlns:mc="http://schemas.openxmlformats.org/markup-compatibility/2006" xmlns:mv="urn:schemas-microsoft-com:mac:vml" xmlns:p="http://schemas.openxmlformats.org/presentationml/2006/main" xmlns:c="http://schemas.openxmlformats.org/drawingml/2006/chart" xmlns:dgm="http://schemas.openxmlformats.org/drawingml/2006/diagram" xmlns:o="urn:schemas-microsoft-com:office:office" xmlns:v="urn:schemas-microsoft-com:vml" xmlns:pvml="urn:schemas-microsoft-com:office:powerpoint" xmlns:com="http://schemas.openxmlformats.org/drawingml/2006/compatibility" xmlns:p14="http://schemas.microsoft.com/office/powerpoint/2010/main" xmlns:p15="http://schemas.microsoft.com/office/powerpoint/2012/main" xmlns:ahyp="http://schemas.microsoft.com/office/drawing/2018/hyperlinkcolor">
+<p:notesMaster xmlns:a="http://schemas.openxmlformats.org/drawingml/2006/main" xmlns:r="http://schemas.openxmlformats.org/officeDocument/2006/relationships" xmlns:p="http://schemas.openxmlformats.org/presentationml/2006/main">
   <p:cSld>
+    <p:bg>
+      <p:bgRef idx="1001">
+        <a:schemeClr val="bg1"/>
+      </p:bgRef>
+    </p:bg>
     <p:spTree>
       <p:nvGrpSpPr>
-        <p:cNvPr id="2" name="Shape 2"/>
+        <p:cNvPr id="1" name="Shape 2"/>
         <p:cNvGrpSpPr/>
         <p:nvPr/>
       </p:nvGrpSpPr>
@@ -311,9 +316,11 @@
       <p:sp>
         <p:nvSpPr>
           <p:cNvPr id="3" name="Google Shape;3;n"/>
-          <p:cNvSpPr/>
+          <p:cNvSpPr>
+            <a:spLocks noGrp="1" noRot="1" noChangeAspect="1"/>
+          </p:cNvSpPr>
           <p:nvPr>
-            <p:ph idx="2" type="sldImg"/>
+            <p:ph type="sldImg" idx="2"/>
           </p:nvPr>
         </p:nvSpPr>
         <p:spPr>
@@ -322,9 +329,13 @@
             <a:ext cx="6096075" cy="3429000"/>
           </a:xfrm>
           <a:custGeom>
-            <a:rect b="b" l="l" r="r" t="t"/>
+            <a:avLst/>
+            <a:gdLst/>
+            <a:ahLst/>
+            <a:cxnLst/>
+            <a:rect l="l" t="t" r="r" b="b"/>
             <a:pathLst>
-              <a:path extrusionOk="0" h="120000" w="120000">
+              <a:path w="120000" h="120000" extrusionOk="0">
                 <a:moveTo>
                   <a:pt x="0" y="0"/>
                 </a:moveTo>
@@ -342,23 +353,25 @@
             </a:pathLst>
           </a:custGeom>
           <a:noFill/>
-          <a:ln cap="flat" cmpd="sng" w="9525">
+          <a:ln w="9525" cap="flat" cmpd="sng">
             <a:solidFill>
               <a:srgbClr val="000000"/>
             </a:solidFill>
             <a:prstDash val="solid"/>
             <a:round/>
-            <a:headEnd len="sm" w="sm" type="none"/>
-            <a:tailEnd len="sm" w="sm" type="none"/>
+            <a:headEnd type="none" w="sm" len="sm"/>
+            <a:tailEnd type="none" w="sm" len="sm"/>
           </a:ln>
         </p:spPr>
       </p:sp>
       <p:sp>
         <p:nvSpPr>
           <p:cNvPr id="4" name="Google Shape;4;n"/>
-          <p:cNvSpPr txBox="1"/>
+          <p:cNvSpPr txBox="1">
+            <a:spLocks noGrp="1"/>
+          </p:cNvSpPr>
           <p:nvPr>
-            <p:ph idx="1" type="body"/>
+            <p:ph type="body" idx="1"/>
           </p:nvPr>
         </p:nvSpPr>
         <p:spPr>
@@ -375,11 +388,11 @@
           </a:ln>
         </p:spPr>
         <p:txBody>
-          <a:bodyPr anchorCtr="0" anchor="t" bIns="91425" lIns="91425" spcFirstLastPara="1" rIns="91425" wrap="square" tIns="91425">
+          <a:bodyPr spcFirstLastPara="1" wrap="square" lIns="91425" tIns="91425" rIns="91425" bIns="91425" anchor="t" anchorCtr="0">
             <a:noAutofit/>
           </a:bodyPr>
           <a:lstStyle>
-            <a:lvl1pPr indent="-298450" lvl="0" marL="457200">
+            <a:lvl1pPr marL="457200" lvl="0" indent="-298450">
               <a:spcBef>
                 <a:spcPts val="0"/>
               </a:spcBef>
@@ -390,7 +403,7 @@
               <a:buChar char="●"/>
               <a:defRPr sz="1100"/>
             </a:lvl1pPr>
-            <a:lvl2pPr indent="-298450" lvl="1" marL="914400">
+            <a:lvl2pPr marL="914400" lvl="1" indent="-298450">
               <a:spcBef>
                 <a:spcPts val="0"/>
               </a:spcBef>
@@ -401,7 +414,7 @@
               <a:buChar char="○"/>
               <a:defRPr sz="1100"/>
             </a:lvl2pPr>
-            <a:lvl3pPr indent="-298450" lvl="2" marL="1371600">
+            <a:lvl3pPr marL="1371600" lvl="2" indent="-298450">
               <a:spcBef>
                 <a:spcPts val="0"/>
               </a:spcBef>
@@ -412,7 +425,7 @@
               <a:buChar char="■"/>
               <a:defRPr sz="1100"/>
             </a:lvl3pPr>
-            <a:lvl4pPr indent="-298450" lvl="3" marL="1828800">
+            <a:lvl4pPr marL="1828800" lvl="3" indent="-298450">
               <a:spcBef>
                 <a:spcPts val="0"/>
               </a:spcBef>
@@ -423,7 +436,7 @@
               <a:buChar char="●"/>
               <a:defRPr sz="1100"/>
             </a:lvl4pPr>
-            <a:lvl5pPr indent="-298450" lvl="4" marL="2286000">
+            <a:lvl5pPr marL="2286000" lvl="4" indent="-298450">
               <a:spcBef>
                 <a:spcPts val="0"/>
               </a:spcBef>
@@ -434,7 +447,7 @@
               <a:buChar char="○"/>
               <a:defRPr sz="1100"/>
             </a:lvl5pPr>
-            <a:lvl6pPr indent="-298450" lvl="5" marL="2743200">
+            <a:lvl6pPr marL="2743200" lvl="5" indent="-298450">
               <a:spcBef>
                 <a:spcPts val="0"/>
               </a:spcBef>
@@ -445,7 +458,7 @@
               <a:buChar char="■"/>
               <a:defRPr sz="1100"/>
             </a:lvl6pPr>
-            <a:lvl7pPr indent="-298450" lvl="6" marL="3200400">
+            <a:lvl7pPr marL="3200400" lvl="6" indent="-298450">
               <a:spcBef>
                 <a:spcPts val="0"/>
               </a:spcBef>
@@ -456,7 +469,7 @@
               <a:buChar char="●"/>
               <a:defRPr sz="1100"/>
             </a:lvl7pPr>
-            <a:lvl8pPr indent="-298450" lvl="7" marL="3657600">
+            <a:lvl8pPr marL="3657600" lvl="7" indent="-298450">
               <a:spcBef>
                 <a:spcPts val="0"/>
               </a:spcBef>
@@ -467,7 +480,7 @@
               <a:buChar char="○"/>
               <a:defRPr sz="1100"/>
             </a:lvl8pPr>
-            <a:lvl9pPr indent="-298450" lvl="8" marL="4114800">
+            <a:lvl9pPr marL="4114800" lvl="8" indent="-298450">
               <a:spcBef>
                 <a:spcPts val="0"/>
               </a:spcBef>
@@ -479,14 +492,16 @@
               <a:defRPr sz="1100"/>
             </a:lvl9pPr>
           </a:lstStyle>
-          <a:p/>
+          <a:p>
+            <a:endParaRPr/>
+          </a:p>
         </p:txBody>
       </p:sp>
     </p:spTree>
   </p:cSld>
-  <p:clrMap accent1="accent1" accent2="accent2" accent3="accent3" accent4="accent4" accent5="accent5" accent6="accent6" bg1="lt1" bg2="dk2" tx1="dk1" tx2="lt2" folHlink="folHlink" hlink="hlink"/>
+  <p:clrMap bg1="lt1" tx1="dk1" bg2="dk2" tx2="lt2" accent1="accent1" accent2="accent2" accent3="accent3" accent4="accent4" accent5="accent5" accent6="accent6" hlink="hlink" folHlink="folHlink"/>
   <p:notesStyle>
-    <a:defPPr lvl="0" marR="0" rtl="0" algn="l">
+    <a:defPPr marR="0" lvl="0" algn="l" rtl="0">
       <a:lnSpc>
         <a:spcPct val="100000"/>
       </a:lnSpc>
@@ -497,7 +512,7 @@
         <a:spcPts val="0"/>
       </a:spcAft>
     </a:defPPr>
-    <a:lvl1pPr lvl="0" marR="0" rtl="0" algn="l">
+    <a:lvl1pPr marR="0" lvl="0" algn="l" rtl="0">
       <a:lnSpc>
         <a:spcPct val="100000"/>
       </a:lnSpc>
@@ -511,7 +526,7 @@
         <a:srgbClr val="000000"/>
       </a:buClr>
       <a:buFont typeface="Arial"/>
-      <a:defRPr b="0" i="0" spc="0" sz="1400" u="none" cap="none" strike="noStrike">
+      <a:defRPr sz="1400" b="0" i="0" u="none" strike="noStrike" cap="none" spc="0">
         <a:solidFill>
           <a:srgbClr val="000000"/>
         </a:solidFill>
@@ -521,7 +536,7 @@
         <a:sym typeface="Arial"/>
       </a:defRPr>
     </a:lvl1pPr>
-    <a:lvl2pPr lvl="1" marR="0" rtl="0" algn="l">
+    <a:lvl2pPr marR="0" lvl="1" algn="l" rtl="0">
       <a:lnSpc>
         <a:spcPct val="100000"/>
       </a:lnSpc>
@@ -535,7 +550,7 @@
         <a:srgbClr val="000000"/>
       </a:buClr>
       <a:buFont typeface="Arial"/>
-      <a:defRPr b="0" i="0" spc="0" sz="1400" u="none" cap="none" strike="noStrike">
+      <a:defRPr sz="1400" b="0" i="0" u="none" strike="noStrike" cap="none" spc="0">
         <a:solidFill>
           <a:srgbClr val="000000"/>
         </a:solidFill>
@@ -545,7 +560,7 @@
         <a:sym typeface="Arial"/>
       </a:defRPr>
     </a:lvl2pPr>
-    <a:lvl3pPr lvl="2" marR="0" rtl="0" algn="l">
+    <a:lvl3pPr marR="0" lvl="2" algn="l" rtl="0">
       <a:lnSpc>
         <a:spcPct val="100000"/>
       </a:lnSpc>
@@ -559,7 +574,7 @@
         <a:srgbClr val="000000"/>
       </a:buClr>
       <a:buFont typeface="Arial"/>
-      <a:defRPr b="0" i="0" spc="0" sz="1400" u="none" cap="none" strike="noStrike">
+      <a:defRPr sz="1400" b="0" i="0" u="none" strike="noStrike" cap="none" spc="0">
         <a:solidFill>
           <a:srgbClr val="000000"/>
         </a:solidFill>
@@ -569,7 +584,7 @@
         <a:sym typeface="Arial"/>
       </a:defRPr>
     </a:lvl3pPr>
-    <a:lvl4pPr lvl="3" marR="0" rtl="0" algn="l">
+    <a:lvl4pPr marR="0" lvl="3" algn="l" rtl="0">
       <a:lnSpc>
         <a:spcPct val="100000"/>
       </a:lnSpc>
@@ -583,7 +598,7 @@
         <a:srgbClr val="000000"/>
       </a:buClr>
       <a:buFont typeface="Arial"/>
-      <a:defRPr b="0" i="0" spc="0" sz="1400" u="none" cap="none" strike="noStrike">
+      <a:defRPr sz="1400" b="0" i="0" u="none" strike="noStrike" cap="none" spc="0">
         <a:solidFill>
           <a:srgbClr val="000000"/>
         </a:solidFill>
@@ -593,7 +608,7 @@
         <a:sym typeface="Arial"/>
       </a:defRPr>
     </a:lvl4pPr>
-    <a:lvl5pPr lvl="4" marR="0" rtl="0" algn="l">
+    <a:lvl5pPr marR="0" lvl="4" algn="l" rtl="0">
       <a:lnSpc>
         <a:spcPct val="100000"/>
       </a:lnSpc>
@@ -607,7 +622,7 @@
         <a:srgbClr val="000000"/>
       </a:buClr>
       <a:buFont typeface="Arial"/>
-      <a:defRPr b="0" i="0" spc="0" sz="1400" u="none" cap="none" strike="noStrike">
+      <a:defRPr sz="1400" b="0" i="0" u="none" strike="noStrike" cap="none" spc="0">
         <a:solidFill>
           <a:srgbClr val="000000"/>
         </a:solidFill>
@@ -617,7 +632,7 @@
         <a:sym typeface="Arial"/>
       </a:defRPr>
     </a:lvl5pPr>
-    <a:lvl6pPr lvl="5" marR="0" rtl="0" algn="l">
+    <a:lvl6pPr marR="0" lvl="5" algn="l" rtl="0">
       <a:lnSpc>
         <a:spcPct val="100000"/>
       </a:lnSpc>
@@ -631,7 +646,7 @@
         <a:srgbClr val="000000"/>
       </a:buClr>
       <a:buFont typeface="Arial"/>
-      <a:defRPr b="0" i="0" spc="0" sz="1400" u="none" cap="none" strike="noStrike">
+      <a:defRPr sz="1400" b="0" i="0" u="none" strike="noStrike" cap="none" spc="0">
         <a:solidFill>
           <a:srgbClr val="000000"/>
         </a:solidFill>
@@ -641,7 +656,7 @@
         <a:sym typeface="Arial"/>
       </a:defRPr>
     </a:lvl6pPr>
-    <a:lvl7pPr lvl="6" marR="0" rtl="0" algn="l">
+    <a:lvl7pPr marR="0" lvl="6" algn="l" rtl="0">
       <a:lnSpc>
         <a:spcPct val="100000"/>
       </a:lnSpc>
@@ -655,7 +670,7 @@
         <a:srgbClr val="000000"/>
       </a:buClr>
       <a:buFont typeface="Arial"/>
-      <a:defRPr b="0" i="0" spc="0" sz="1400" u="none" cap="none" strike="noStrike">
+      <a:defRPr sz="1400" b="0" i="0" u="none" strike="noStrike" cap="none" spc="0">
         <a:solidFill>
           <a:srgbClr val="000000"/>
         </a:solidFill>
@@ -665,7 +680,7 @@
         <a:sym typeface="Arial"/>
       </a:defRPr>
     </a:lvl7pPr>
-    <a:lvl8pPr lvl="7" marR="0" rtl="0" algn="l">
+    <a:lvl8pPr marR="0" lvl="7" algn="l" rtl="0">
       <a:lnSpc>
         <a:spcPct val="100000"/>
       </a:lnSpc>
@@ -679,7 +694,7 @@
         <a:srgbClr val="000000"/>
       </a:buClr>
       <a:buFont typeface="Arial"/>
-      <a:defRPr b="0" i="0" spc="0" sz="1400" u="none" cap="none" strike="noStrike">
+      <a:defRPr sz="1400" b="0" i="0" u="none" strike="noStrike" cap="none" spc="0">
         <a:solidFill>
           <a:srgbClr val="000000"/>
         </a:solidFill>
@@ -689,7 +704,7 @@
         <a:sym typeface="Arial"/>
       </a:defRPr>
     </a:lvl8pPr>
-    <a:lvl9pPr lvl="8" marR="0" rtl="0" algn="l">
+    <a:lvl9pPr marR="0" lvl="8" algn="l" rtl="0">
       <a:lnSpc>
         <a:spcPct val="100000"/>
       </a:lnSpc>
@@ -703,7 +718,7 @@
         <a:srgbClr val="000000"/>
       </a:buClr>
       <a:buFont typeface="Arial"/>
-      <a:defRPr b="0" i="0" spc="0" sz="1400" u="none" cap="none" strike="noStrike">
+      <a:defRPr sz="1400" b="0" i="0" u="none" strike="noStrike" cap="none" spc="0">
         <a:solidFill>
           <a:srgbClr val="000000"/>
         </a:solidFill>
@@ -718,11 +733,11 @@
 </file>
 
 <file path=ppt/notesSlides/notesSlide1.xml><?xml version="1.0" encoding="utf-8"?>
-<p:notes xmlns:a="http://schemas.openxmlformats.org/drawingml/2006/main" xmlns:r="http://schemas.openxmlformats.org/officeDocument/2006/relationships" xmlns:mc="http://schemas.openxmlformats.org/markup-compatibility/2006" xmlns:mv="urn:schemas-microsoft-com:mac:vml" xmlns:p="http://schemas.openxmlformats.org/presentationml/2006/main" xmlns:c="http://schemas.openxmlformats.org/drawingml/2006/chart" xmlns:dgm="http://schemas.openxmlformats.org/drawingml/2006/diagram" xmlns:o="urn:schemas-microsoft-com:office:office" xmlns:v="urn:schemas-microsoft-com:vml" xmlns:pvml="urn:schemas-microsoft-com:office:powerpoint" xmlns:com="http://schemas.openxmlformats.org/drawingml/2006/compatibility" xmlns:p14="http://schemas.microsoft.com/office/powerpoint/2010/main" xmlns:p15="http://schemas.microsoft.com/office/powerpoint/2012/main" xmlns:ahyp="http://schemas.microsoft.com/office/drawing/2018/hyperlinkcolor" showMasterPhAnim="0" showMasterSp="0">
+<p:notes xmlns:a="http://schemas.openxmlformats.org/drawingml/2006/main" xmlns:r="http://schemas.openxmlformats.org/officeDocument/2006/relationships" xmlns:p="http://schemas.openxmlformats.org/presentationml/2006/main" showMasterSp="0" showMasterPhAnim="0">
   <p:cSld>
     <p:spTree>
       <p:nvGrpSpPr>
-        <p:cNvPr id="50" name="Shape 50"/>
+        <p:cNvPr id="1" name="Shape 50"/>
         <p:cNvGrpSpPr/>
         <p:nvPr/>
       </p:nvGrpSpPr>
@@ -737,20 +752,26 @@
       <p:sp>
         <p:nvSpPr>
           <p:cNvPr id="51" name="Google Shape;51;p:notes"/>
-          <p:cNvSpPr/>
+          <p:cNvSpPr>
+            <a:spLocks noGrp="1" noRot="1" noChangeAspect="1"/>
+          </p:cNvSpPr>
           <p:nvPr>
-            <p:ph idx="2" type="sldImg"/>
+            <p:ph type="sldImg" idx="2"/>
           </p:nvPr>
         </p:nvSpPr>
         <p:spPr>
           <a:xfrm>
-            <a:off x="381300" y="685800"/>
-            <a:ext cx="6096075" cy="3429000"/>
+            <a:off x="381000" y="685800"/>
+            <a:ext cx="6096000" cy="3429000"/>
           </a:xfrm>
           <a:custGeom>
-            <a:rect b="b" l="l" r="r" t="t"/>
+            <a:avLst/>
+            <a:gdLst/>
+            <a:ahLst/>
+            <a:cxnLst/>
+            <a:rect l="l" t="t" r="r" b="b"/>
             <a:pathLst>
-              <a:path extrusionOk="0" h="120000" w="120000">
+              <a:path w="120000" h="120000" extrusionOk="0">
                 <a:moveTo>
                   <a:pt x="0" y="0"/>
                 </a:moveTo>
@@ -772,9 +793,11 @@
       <p:sp>
         <p:nvSpPr>
           <p:cNvPr id="52" name="Google Shape;52;p:notes"/>
-          <p:cNvSpPr txBox="1"/>
+          <p:cNvSpPr txBox="1">
+            <a:spLocks noGrp="1"/>
+          </p:cNvSpPr>
           <p:nvPr>
-            <p:ph idx="1" type="body"/>
+            <p:ph type="body" idx="1"/>
           </p:nvPr>
         </p:nvSpPr>
         <p:spPr>
@@ -787,23 +810,20 @@
           </a:prstGeom>
         </p:spPr>
         <p:txBody>
-          <a:bodyPr anchorCtr="0" anchor="t" bIns="91425" lIns="91425" spcFirstLastPara="1" rIns="91425" wrap="square" tIns="91425">
+          <a:bodyPr spcFirstLastPara="1" wrap="square" lIns="91425" tIns="91425" rIns="91425" bIns="91425" anchor="t" anchorCtr="0">
             <a:noAutofit/>
           </a:bodyPr>
           <a:lstStyle/>
           <a:p>
-            <a:pPr indent="0" lvl="0" marL="0" rtl="0" algn="l">
-              <a:spcBef>
-                <a:spcPts val="0"/>
-              </a:spcBef>
-              <a:spcAft>
-                <a:spcPts val="0"/>
-              </a:spcAft>
-              <a:buNone/>
-            </a:pPr>
-            <a:r>
-              <a:t/>
-            </a:r>
+            <a:pPr marL="0" lvl="0" indent="0" algn="l" rtl="0">
+              <a:spcBef>
+                <a:spcPts val="0"/>
+              </a:spcBef>
+              <a:spcAft>
+                <a:spcPts val="0"/>
+              </a:spcAft>
+              <a:buNone/>
+            </a:pPr>
             <a:endParaRPr/>
           </a:p>
         </p:txBody>
@@ -817,11 +837,11 @@
 </file>
 
 <file path=ppt/notesSlides/notesSlide10.xml><?xml version="1.0" encoding="utf-8"?>
-<p:notes xmlns:a="http://schemas.openxmlformats.org/drawingml/2006/main" xmlns:r="http://schemas.openxmlformats.org/officeDocument/2006/relationships" xmlns:mc="http://schemas.openxmlformats.org/markup-compatibility/2006" xmlns:mv="urn:schemas-microsoft-com:mac:vml" xmlns:p="http://schemas.openxmlformats.org/presentationml/2006/main" xmlns:c="http://schemas.openxmlformats.org/drawingml/2006/chart" xmlns:dgm="http://schemas.openxmlformats.org/drawingml/2006/diagram" xmlns:o="urn:schemas-microsoft-com:office:office" xmlns:v="urn:schemas-microsoft-com:vml" xmlns:pvml="urn:schemas-microsoft-com:office:powerpoint" xmlns:com="http://schemas.openxmlformats.org/drawingml/2006/compatibility" xmlns:p14="http://schemas.microsoft.com/office/powerpoint/2010/main" xmlns:p15="http://schemas.microsoft.com/office/powerpoint/2012/main" xmlns:ahyp="http://schemas.microsoft.com/office/drawing/2018/hyperlinkcolor" showMasterPhAnim="0" showMasterSp="0">
+<p:notes xmlns:a="http://schemas.openxmlformats.org/drawingml/2006/main" xmlns:r="http://schemas.openxmlformats.org/officeDocument/2006/relationships" xmlns:p="http://schemas.openxmlformats.org/presentationml/2006/main" showMasterSp="0" showMasterPhAnim="0">
   <p:cSld>
     <p:spTree>
       <p:nvGrpSpPr>
-        <p:cNvPr id="120" name="Shape 120"/>
+        <p:cNvPr id="1" name="Shape 128"/>
         <p:cNvGrpSpPr/>
         <p:nvPr/>
       </p:nvGrpSpPr>
@@ -835,10 +855,12 @@
       </p:grpSpPr>
       <p:sp>
         <p:nvSpPr>
-          <p:cNvPr id="121" name="Google Shape;121;g3fb085bff3c_0_41:notes"/>
-          <p:cNvSpPr/>
+          <p:cNvPr id="129" name="Google Shape;129;g3fb085bff3c_0_46:notes"/>
+          <p:cNvSpPr>
+            <a:spLocks noGrp="1" noRot="1" noChangeAspect="1"/>
+          </p:cNvSpPr>
           <p:nvPr>
-            <p:ph idx="2" type="sldImg"/>
+            <p:ph type="sldImg" idx="2"/>
           </p:nvPr>
         </p:nvSpPr>
         <p:spPr>
@@ -847,9 +869,13 @@
             <a:ext cx="6096000" cy="3429000"/>
           </a:xfrm>
           <a:custGeom>
-            <a:rect b="b" l="l" r="r" t="t"/>
+            <a:avLst/>
+            <a:gdLst/>
+            <a:ahLst/>
+            <a:cxnLst/>
+            <a:rect l="l" t="t" r="r" b="b"/>
             <a:pathLst>
-              <a:path extrusionOk="0" h="120000" w="120000">
+              <a:path w="120000" h="120000" extrusionOk="0">
                 <a:moveTo>
                   <a:pt x="0" y="0"/>
                 </a:moveTo>
@@ -870,10 +896,12 @@
       </p:sp>
       <p:sp>
         <p:nvSpPr>
-          <p:cNvPr id="122" name="Google Shape;122;g3fb085bff3c_0_41:notes"/>
-          <p:cNvSpPr txBox="1"/>
+          <p:cNvPr id="130" name="Google Shape;130;g3fb085bff3c_0_46:notes"/>
+          <p:cNvSpPr txBox="1">
+            <a:spLocks noGrp="1"/>
+          </p:cNvSpPr>
           <p:nvPr>
-            <p:ph idx="1" type="body"/>
+            <p:ph type="body" idx="1"/>
           </p:nvPr>
         </p:nvSpPr>
         <p:spPr>
@@ -886,23 +914,20 @@
           </a:prstGeom>
         </p:spPr>
         <p:txBody>
-          <a:bodyPr anchorCtr="0" anchor="t" bIns="91425" lIns="91425" spcFirstLastPara="1" rIns="91425" wrap="square" tIns="91425">
+          <a:bodyPr spcFirstLastPara="1" wrap="square" lIns="91425" tIns="91425" rIns="91425" bIns="91425" anchor="t" anchorCtr="0">
             <a:noAutofit/>
           </a:bodyPr>
           <a:lstStyle/>
           <a:p>
-            <a:pPr indent="0" lvl="0" marL="0" rtl="0" algn="l">
-              <a:spcBef>
-                <a:spcPts val="0"/>
-              </a:spcBef>
-              <a:spcAft>
-                <a:spcPts val="0"/>
-              </a:spcAft>
-              <a:buNone/>
-            </a:pPr>
-            <a:r>
-              <a:t/>
-            </a:r>
+            <a:pPr marL="0" lvl="0" indent="0" algn="l" rtl="0">
+              <a:spcBef>
+                <a:spcPts val="0"/>
+              </a:spcBef>
+              <a:spcAft>
+                <a:spcPts val="0"/>
+              </a:spcAft>
+              <a:buNone/>
+            </a:pPr>
             <a:endParaRPr/>
           </a:p>
         </p:txBody>
@@ -916,11 +941,11 @@
 </file>
 
 <file path=ppt/notesSlides/notesSlide11.xml><?xml version="1.0" encoding="utf-8"?>
-<p:notes xmlns:a="http://schemas.openxmlformats.org/drawingml/2006/main" xmlns:r="http://schemas.openxmlformats.org/officeDocument/2006/relationships" xmlns:mc="http://schemas.openxmlformats.org/markup-compatibility/2006" xmlns:mv="urn:schemas-microsoft-com:mac:vml" xmlns:p="http://schemas.openxmlformats.org/presentationml/2006/main" xmlns:c="http://schemas.openxmlformats.org/drawingml/2006/chart" xmlns:dgm="http://schemas.openxmlformats.org/drawingml/2006/diagram" xmlns:o="urn:schemas-microsoft-com:office:office" xmlns:v="urn:schemas-microsoft-com:vml" xmlns:pvml="urn:schemas-microsoft-com:office:powerpoint" xmlns:com="http://schemas.openxmlformats.org/drawingml/2006/compatibility" xmlns:p14="http://schemas.microsoft.com/office/powerpoint/2010/main" xmlns:p15="http://schemas.microsoft.com/office/powerpoint/2012/main" xmlns:ahyp="http://schemas.microsoft.com/office/drawing/2018/hyperlinkcolor" showMasterPhAnim="0" showMasterSp="0">
+<p:notes xmlns:a="http://schemas.openxmlformats.org/drawingml/2006/main" xmlns:r="http://schemas.openxmlformats.org/officeDocument/2006/relationships" xmlns:p="http://schemas.openxmlformats.org/presentationml/2006/main" showMasterSp="0" showMasterPhAnim="0">
   <p:cSld>
     <p:spTree>
       <p:nvGrpSpPr>
-        <p:cNvPr id="128" name="Shape 128"/>
+        <p:cNvPr id="1" name="Shape 136"/>
         <p:cNvGrpSpPr/>
         <p:nvPr/>
       </p:nvGrpSpPr>
@@ -934,10 +959,12 @@
       </p:grpSpPr>
       <p:sp>
         <p:nvSpPr>
-          <p:cNvPr id="129" name="Google Shape;129;g3fb085bff3c_0_46:notes"/>
-          <p:cNvSpPr/>
+          <p:cNvPr id="137" name="Google Shape;137;g3fb085bff3c_0_51:notes"/>
+          <p:cNvSpPr>
+            <a:spLocks noGrp="1" noRot="1" noChangeAspect="1"/>
+          </p:cNvSpPr>
           <p:nvPr>
-            <p:ph idx="2" type="sldImg"/>
+            <p:ph type="sldImg" idx="2"/>
           </p:nvPr>
         </p:nvSpPr>
         <p:spPr>
@@ -946,9 +973,13 @@
             <a:ext cx="6096000" cy="3429000"/>
           </a:xfrm>
           <a:custGeom>
-            <a:rect b="b" l="l" r="r" t="t"/>
+            <a:avLst/>
+            <a:gdLst/>
+            <a:ahLst/>
+            <a:cxnLst/>
+            <a:rect l="l" t="t" r="r" b="b"/>
             <a:pathLst>
-              <a:path extrusionOk="0" h="120000" w="120000">
+              <a:path w="120000" h="120000" extrusionOk="0">
                 <a:moveTo>
                   <a:pt x="0" y="0"/>
                 </a:moveTo>
@@ -969,10 +1000,12 @@
       </p:sp>
       <p:sp>
         <p:nvSpPr>
-          <p:cNvPr id="130" name="Google Shape;130;g3fb085bff3c_0_46:notes"/>
-          <p:cNvSpPr txBox="1"/>
+          <p:cNvPr id="138" name="Google Shape;138;g3fb085bff3c_0_51:notes"/>
+          <p:cNvSpPr txBox="1">
+            <a:spLocks noGrp="1"/>
+          </p:cNvSpPr>
           <p:nvPr>
-            <p:ph idx="1" type="body"/>
+            <p:ph type="body" idx="1"/>
           </p:nvPr>
         </p:nvSpPr>
         <p:spPr>
@@ -985,23 +1018,20 @@
           </a:prstGeom>
         </p:spPr>
         <p:txBody>
-          <a:bodyPr anchorCtr="0" anchor="t" bIns="91425" lIns="91425" spcFirstLastPara="1" rIns="91425" wrap="square" tIns="91425">
+          <a:bodyPr spcFirstLastPara="1" wrap="square" lIns="91425" tIns="91425" rIns="91425" bIns="91425" anchor="t" anchorCtr="0">
             <a:noAutofit/>
           </a:bodyPr>
           <a:lstStyle/>
           <a:p>
-            <a:pPr indent="0" lvl="0" marL="0" rtl="0" algn="l">
-              <a:spcBef>
-                <a:spcPts val="0"/>
-              </a:spcBef>
-              <a:spcAft>
-                <a:spcPts val="0"/>
-              </a:spcAft>
-              <a:buNone/>
-            </a:pPr>
-            <a:r>
-              <a:t/>
-            </a:r>
+            <a:pPr marL="0" lvl="0" indent="0" algn="l" rtl="0">
+              <a:spcBef>
+                <a:spcPts val="0"/>
+              </a:spcBef>
+              <a:spcAft>
+                <a:spcPts val="0"/>
+              </a:spcAft>
+              <a:buNone/>
+            </a:pPr>
             <a:endParaRPr/>
           </a:p>
         </p:txBody>
@@ -1015,11 +1045,11 @@
 </file>
 
 <file path=ppt/notesSlides/notesSlide12.xml><?xml version="1.0" encoding="utf-8"?>
-<p:notes xmlns:a="http://schemas.openxmlformats.org/drawingml/2006/main" xmlns:r="http://schemas.openxmlformats.org/officeDocument/2006/relationships" xmlns:mc="http://schemas.openxmlformats.org/markup-compatibility/2006" xmlns:mv="urn:schemas-microsoft-com:mac:vml" xmlns:p="http://schemas.openxmlformats.org/presentationml/2006/main" xmlns:c="http://schemas.openxmlformats.org/drawingml/2006/chart" xmlns:dgm="http://schemas.openxmlformats.org/drawingml/2006/diagram" xmlns:o="urn:schemas-microsoft-com:office:office" xmlns:v="urn:schemas-microsoft-com:vml" xmlns:pvml="urn:schemas-microsoft-com:office:powerpoint" xmlns:com="http://schemas.openxmlformats.org/drawingml/2006/compatibility" xmlns:p14="http://schemas.microsoft.com/office/powerpoint/2010/main" xmlns:p15="http://schemas.microsoft.com/office/powerpoint/2012/main" xmlns:ahyp="http://schemas.microsoft.com/office/drawing/2018/hyperlinkcolor" showMasterPhAnim="0" showMasterSp="0">
+<p:notes xmlns:a="http://schemas.openxmlformats.org/drawingml/2006/main" xmlns:r="http://schemas.openxmlformats.org/officeDocument/2006/relationships" xmlns:p="http://schemas.openxmlformats.org/presentationml/2006/main" showMasterSp="0" showMasterPhAnim="0">
   <p:cSld>
     <p:spTree>
       <p:nvGrpSpPr>
-        <p:cNvPr id="136" name="Shape 136"/>
+        <p:cNvPr id="1" name="Shape 144"/>
         <p:cNvGrpSpPr/>
         <p:nvPr/>
       </p:nvGrpSpPr>
@@ -1033,10 +1063,12 @@
       </p:grpSpPr>
       <p:sp>
         <p:nvSpPr>
-          <p:cNvPr id="137" name="Google Shape;137;g3fb085bff3c_0_51:notes"/>
-          <p:cNvSpPr/>
+          <p:cNvPr id="145" name="Google Shape;145;g3fb085bff3c_0_56:notes"/>
+          <p:cNvSpPr>
+            <a:spLocks noGrp="1" noRot="1" noChangeAspect="1"/>
+          </p:cNvSpPr>
           <p:nvPr>
-            <p:ph idx="2" type="sldImg"/>
+            <p:ph type="sldImg" idx="2"/>
           </p:nvPr>
         </p:nvSpPr>
         <p:spPr>
@@ -1045,9 +1077,13 @@
             <a:ext cx="6096000" cy="3429000"/>
           </a:xfrm>
           <a:custGeom>
-            <a:rect b="b" l="l" r="r" t="t"/>
+            <a:avLst/>
+            <a:gdLst/>
+            <a:ahLst/>
+            <a:cxnLst/>
+            <a:rect l="l" t="t" r="r" b="b"/>
             <a:pathLst>
-              <a:path extrusionOk="0" h="120000" w="120000">
+              <a:path w="120000" h="120000" extrusionOk="0">
                 <a:moveTo>
                   <a:pt x="0" y="0"/>
                 </a:moveTo>
@@ -1068,10 +1104,12 @@
       </p:sp>
       <p:sp>
         <p:nvSpPr>
-          <p:cNvPr id="138" name="Google Shape;138;g3fb085bff3c_0_51:notes"/>
-          <p:cNvSpPr txBox="1"/>
+          <p:cNvPr id="146" name="Google Shape;146;g3fb085bff3c_0_56:notes"/>
+          <p:cNvSpPr txBox="1">
+            <a:spLocks noGrp="1"/>
+          </p:cNvSpPr>
           <p:nvPr>
-            <p:ph idx="1" type="body"/>
+            <p:ph type="body" idx="1"/>
           </p:nvPr>
         </p:nvSpPr>
         <p:spPr>
@@ -1084,23 +1122,20 @@
           </a:prstGeom>
         </p:spPr>
         <p:txBody>
-          <a:bodyPr anchorCtr="0" anchor="t" bIns="91425" lIns="91425" spcFirstLastPara="1" rIns="91425" wrap="square" tIns="91425">
+          <a:bodyPr spcFirstLastPara="1" wrap="square" lIns="91425" tIns="91425" rIns="91425" bIns="91425" anchor="t" anchorCtr="0">
             <a:noAutofit/>
           </a:bodyPr>
           <a:lstStyle/>
           <a:p>
-            <a:pPr indent="0" lvl="0" marL="0" rtl="0" algn="l">
-              <a:spcBef>
-                <a:spcPts val="0"/>
-              </a:spcBef>
-              <a:spcAft>
-                <a:spcPts val="0"/>
-              </a:spcAft>
-              <a:buNone/>
-            </a:pPr>
-            <a:r>
-              <a:t/>
-            </a:r>
+            <a:pPr marL="0" lvl="0" indent="0" algn="l" rtl="0">
+              <a:spcBef>
+                <a:spcPts val="0"/>
+              </a:spcBef>
+              <a:spcAft>
+                <a:spcPts val="0"/>
+              </a:spcAft>
+              <a:buNone/>
+            </a:pPr>
             <a:endParaRPr/>
           </a:p>
         </p:txBody>
@@ -1114,11 +1149,11 @@
 </file>
 
 <file path=ppt/notesSlides/notesSlide13.xml><?xml version="1.0" encoding="utf-8"?>
-<p:notes xmlns:a="http://schemas.openxmlformats.org/drawingml/2006/main" xmlns:r="http://schemas.openxmlformats.org/officeDocument/2006/relationships" xmlns:mc="http://schemas.openxmlformats.org/markup-compatibility/2006" xmlns:mv="urn:schemas-microsoft-com:mac:vml" xmlns:p="http://schemas.openxmlformats.org/presentationml/2006/main" xmlns:c="http://schemas.openxmlformats.org/drawingml/2006/chart" xmlns:dgm="http://schemas.openxmlformats.org/drawingml/2006/diagram" xmlns:o="urn:schemas-microsoft-com:office:office" xmlns:v="urn:schemas-microsoft-com:vml" xmlns:pvml="urn:schemas-microsoft-com:office:powerpoint" xmlns:com="http://schemas.openxmlformats.org/drawingml/2006/compatibility" xmlns:p14="http://schemas.microsoft.com/office/powerpoint/2010/main" xmlns:p15="http://schemas.microsoft.com/office/powerpoint/2012/main" xmlns:ahyp="http://schemas.microsoft.com/office/drawing/2018/hyperlinkcolor" showMasterPhAnim="0" showMasterSp="0">
+<p:notes xmlns:a="http://schemas.openxmlformats.org/drawingml/2006/main" xmlns:r="http://schemas.openxmlformats.org/officeDocument/2006/relationships" xmlns:p="http://schemas.openxmlformats.org/presentationml/2006/main" showMasterSp="0" showMasterPhAnim="0">
   <p:cSld>
     <p:spTree>
       <p:nvGrpSpPr>
-        <p:cNvPr id="144" name="Shape 144"/>
+        <p:cNvPr id="1" name="Shape 152"/>
         <p:cNvGrpSpPr/>
         <p:nvPr/>
       </p:nvGrpSpPr>
@@ -1132,10 +1167,12 @@
       </p:grpSpPr>
       <p:sp>
         <p:nvSpPr>
-          <p:cNvPr id="145" name="Google Shape;145;g3fb085bff3c_0_56:notes"/>
-          <p:cNvSpPr/>
+          <p:cNvPr id="153" name="Google Shape;153;g3fb085bff3c_0_61:notes"/>
+          <p:cNvSpPr>
+            <a:spLocks noGrp="1" noRot="1" noChangeAspect="1"/>
+          </p:cNvSpPr>
           <p:nvPr>
-            <p:ph idx="2" type="sldImg"/>
+            <p:ph type="sldImg" idx="2"/>
           </p:nvPr>
         </p:nvSpPr>
         <p:spPr>
@@ -1144,9 +1181,13 @@
             <a:ext cx="6096000" cy="3429000"/>
           </a:xfrm>
           <a:custGeom>
-            <a:rect b="b" l="l" r="r" t="t"/>
+            <a:avLst/>
+            <a:gdLst/>
+            <a:ahLst/>
+            <a:cxnLst/>
+            <a:rect l="l" t="t" r="r" b="b"/>
             <a:pathLst>
-              <a:path extrusionOk="0" h="120000" w="120000">
+              <a:path w="120000" h="120000" extrusionOk="0">
                 <a:moveTo>
                   <a:pt x="0" y="0"/>
                 </a:moveTo>
@@ -1167,10 +1208,12 @@
       </p:sp>
       <p:sp>
         <p:nvSpPr>
-          <p:cNvPr id="146" name="Google Shape;146;g3fb085bff3c_0_56:notes"/>
-          <p:cNvSpPr txBox="1"/>
+          <p:cNvPr id="154" name="Google Shape;154;g3fb085bff3c_0_61:notes"/>
+          <p:cNvSpPr txBox="1">
+            <a:spLocks noGrp="1"/>
+          </p:cNvSpPr>
           <p:nvPr>
-            <p:ph idx="1" type="body"/>
+            <p:ph type="body" idx="1"/>
           </p:nvPr>
         </p:nvSpPr>
         <p:spPr>
@@ -1183,23 +1226,20 @@
           </a:prstGeom>
         </p:spPr>
         <p:txBody>
-          <a:bodyPr anchorCtr="0" anchor="t" bIns="91425" lIns="91425" spcFirstLastPara="1" rIns="91425" wrap="square" tIns="91425">
+          <a:bodyPr spcFirstLastPara="1" wrap="square" lIns="91425" tIns="91425" rIns="91425" bIns="91425" anchor="t" anchorCtr="0">
             <a:noAutofit/>
           </a:bodyPr>
           <a:lstStyle/>
           <a:p>
-            <a:pPr indent="0" lvl="0" marL="0" rtl="0" algn="l">
-              <a:spcBef>
-                <a:spcPts val="0"/>
-              </a:spcBef>
-              <a:spcAft>
-                <a:spcPts val="0"/>
-              </a:spcAft>
-              <a:buNone/>
-            </a:pPr>
-            <a:r>
-              <a:t/>
-            </a:r>
+            <a:pPr marL="0" lvl="0" indent="0" algn="l" rtl="0">
+              <a:spcBef>
+                <a:spcPts val="0"/>
+              </a:spcBef>
+              <a:spcAft>
+                <a:spcPts val="0"/>
+              </a:spcAft>
+              <a:buNone/>
+            </a:pPr>
             <a:endParaRPr/>
           </a:p>
         </p:txBody>
@@ -1213,11 +1253,11 @@
 </file>
 
 <file path=ppt/notesSlides/notesSlide14.xml><?xml version="1.0" encoding="utf-8"?>
-<p:notes xmlns:a="http://schemas.openxmlformats.org/drawingml/2006/main" xmlns:r="http://schemas.openxmlformats.org/officeDocument/2006/relationships" xmlns:mc="http://schemas.openxmlformats.org/markup-compatibility/2006" xmlns:mv="urn:schemas-microsoft-com:mac:vml" xmlns:p="http://schemas.openxmlformats.org/presentationml/2006/main" xmlns:c="http://schemas.openxmlformats.org/drawingml/2006/chart" xmlns:dgm="http://schemas.openxmlformats.org/drawingml/2006/diagram" xmlns:o="urn:schemas-microsoft-com:office:office" xmlns:v="urn:schemas-microsoft-com:vml" xmlns:pvml="urn:schemas-microsoft-com:office:powerpoint" xmlns:com="http://schemas.openxmlformats.org/drawingml/2006/compatibility" xmlns:p14="http://schemas.microsoft.com/office/powerpoint/2010/main" xmlns:p15="http://schemas.microsoft.com/office/powerpoint/2012/main" xmlns:ahyp="http://schemas.microsoft.com/office/drawing/2018/hyperlinkcolor" showMasterPhAnim="0" showMasterSp="0">
+<p:notes xmlns:a="http://schemas.openxmlformats.org/drawingml/2006/main" xmlns:r="http://schemas.openxmlformats.org/officeDocument/2006/relationships" xmlns:p="http://schemas.openxmlformats.org/presentationml/2006/main" showMasterSp="0" showMasterPhAnim="0">
   <p:cSld>
     <p:spTree>
       <p:nvGrpSpPr>
-        <p:cNvPr id="152" name="Shape 152"/>
+        <p:cNvPr id="1" name="Shape 160"/>
         <p:cNvGrpSpPr/>
         <p:nvPr/>
       </p:nvGrpSpPr>
@@ -1231,10 +1271,12 @@
       </p:grpSpPr>
       <p:sp>
         <p:nvSpPr>
-          <p:cNvPr id="153" name="Google Shape;153;g3fb085bff3c_0_61:notes"/>
-          <p:cNvSpPr/>
+          <p:cNvPr id="161" name="Google Shape;161;g3fb085bff3c_0_107:notes"/>
+          <p:cNvSpPr>
+            <a:spLocks noGrp="1" noRot="1" noChangeAspect="1"/>
+          </p:cNvSpPr>
           <p:nvPr>
-            <p:ph idx="2" type="sldImg"/>
+            <p:ph type="sldImg" idx="2"/>
           </p:nvPr>
         </p:nvSpPr>
         <p:spPr>
@@ -1243,9 +1285,13 @@
             <a:ext cx="6096000" cy="3429000"/>
           </a:xfrm>
           <a:custGeom>
-            <a:rect b="b" l="l" r="r" t="t"/>
+            <a:avLst/>
+            <a:gdLst/>
+            <a:ahLst/>
+            <a:cxnLst/>
+            <a:rect l="l" t="t" r="r" b="b"/>
             <a:pathLst>
-              <a:path extrusionOk="0" h="120000" w="120000">
+              <a:path w="120000" h="120000" extrusionOk="0">
                 <a:moveTo>
                   <a:pt x="0" y="0"/>
                 </a:moveTo>
@@ -1266,10 +1312,12 @@
       </p:sp>
       <p:sp>
         <p:nvSpPr>
-          <p:cNvPr id="154" name="Google Shape;154;g3fb085bff3c_0_61:notes"/>
-          <p:cNvSpPr txBox="1"/>
+          <p:cNvPr id="162" name="Google Shape;162;g3fb085bff3c_0_107:notes"/>
+          <p:cNvSpPr txBox="1">
+            <a:spLocks noGrp="1"/>
+          </p:cNvSpPr>
           <p:nvPr>
-            <p:ph idx="1" type="body"/>
+            <p:ph type="body" idx="1"/>
           </p:nvPr>
         </p:nvSpPr>
         <p:spPr>
@@ -1282,23 +1330,20 @@
           </a:prstGeom>
         </p:spPr>
         <p:txBody>
-          <a:bodyPr anchorCtr="0" anchor="t" bIns="91425" lIns="91425" spcFirstLastPara="1" rIns="91425" wrap="square" tIns="91425">
+          <a:bodyPr spcFirstLastPara="1" wrap="square" lIns="91425" tIns="91425" rIns="91425" bIns="91425" anchor="t" anchorCtr="0">
             <a:noAutofit/>
           </a:bodyPr>
           <a:lstStyle/>
           <a:p>
-            <a:pPr indent="0" lvl="0" marL="0" rtl="0" algn="l">
-              <a:spcBef>
-                <a:spcPts val="0"/>
-              </a:spcBef>
-              <a:spcAft>
-                <a:spcPts val="0"/>
-              </a:spcAft>
-              <a:buNone/>
-            </a:pPr>
-            <a:r>
-              <a:t/>
-            </a:r>
+            <a:pPr marL="0" lvl="0" indent="0" algn="l" rtl="0">
+              <a:spcBef>
+                <a:spcPts val="0"/>
+              </a:spcBef>
+              <a:spcAft>
+                <a:spcPts val="0"/>
+              </a:spcAft>
+              <a:buNone/>
+            </a:pPr>
             <a:endParaRPr/>
           </a:p>
         </p:txBody>
@@ -1312,11 +1357,11 @@
 </file>
 
 <file path=ppt/notesSlides/notesSlide15.xml><?xml version="1.0" encoding="utf-8"?>
-<p:notes xmlns:a="http://schemas.openxmlformats.org/drawingml/2006/main" xmlns:r="http://schemas.openxmlformats.org/officeDocument/2006/relationships" xmlns:mc="http://schemas.openxmlformats.org/markup-compatibility/2006" xmlns:mv="urn:schemas-microsoft-com:mac:vml" xmlns:p="http://schemas.openxmlformats.org/presentationml/2006/main" xmlns:c="http://schemas.openxmlformats.org/drawingml/2006/chart" xmlns:dgm="http://schemas.openxmlformats.org/drawingml/2006/diagram" xmlns:o="urn:schemas-microsoft-com:office:office" xmlns:v="urn:schemas-microsoft-com:vml" xmlns:pvml="urn:schemas-microsoft-com:office:powerpoint" xmlns:com="http://schemas.openxmlformats.org/drawingml/2006/compatibility" xmlns:p14="http://schemas.microsoft.com/office/powerpoint/2010/main" xmlns:p15="http://schemas.microsoft.com/office/powerpoint/2012/main" xmlns:ahyp="http://schemas.microsoft.com/office/drawing/2018/hyperlinkcolor" showMasterPhAnim="0" showMasterSp="0">
+<p:notes xmlns:a="http://schemas.openxmlformats.org/drawingml/2006/main" xmlns:r="http://schemas.openxmlformats.org/officeDocument/2006/relationships" xmlns:p="http://schemas.openxmlformats.org/presentationml/2006/main" showMasterSp="0" showMasterPhAnim="0">
   <p:cSld>
     <p:spTree>
       <p:nvGrpSpPr>
-        <p:cNvPr id="160" name="Shape 160"/>
+        <p:cNvPr id="1" name="Shape 167"/>
         <p:cNvGrpSpPr/>
         <p:nvPr/>
       </p:nvGrpSpPr>
@@ -1330,10 +1375,12 @@
       </p:grpSpPr>
       <p:sp>
         <p:nvSpPr>
-          <p:cNvPr id="161" name="Google Shape;161;g3fb085bff3c_0_107:notes"/>
-          <p:cNvSpPr/>
+          <p:cNvPr id="168" name="Google Shape;168;g3fb085bff3c_0_66:notes"/>
+          <p:cNvSpPr>
+            <a:spLocks noGrp="1" noRot="1" noChangeAspect="1"/>
+          </p:cNvSpPr>
           <p:nvPr>
-            <p:ph idx="2" type="sldImg"/>
+            <p:ph type="sldImg" idx="2"/>
           </p:nvPr>
         </p:nvSpPr>
         <p:spPr>
@@ -1342,9 +1389,13 @@
             <a:ext cx="6096000" cy="3429000"/>
           </a:xfrm>
           <a:custGeom>
-            <a:rect b="b" l="l" r="r" t="t"/>
+            <a:avLst/>
+            <a:gdLst/>
+            <a:ahLst/>
+            <a:cxnLst/>
+            <a:rect l="l" t="t" r="r" b="b"/>
             <a:pathLst>
-              <a:path extrusionOk="0" h="120000" w="120000">
+              <a:path w="120000" h="120000" extrusionOk="0">
                 <a:moveTo>
                   <a:pt x="0" y="0"/>
                 </a:moveTo>
@@ -1365,10 +1416,12 @@
       </p:sp>
       <p:sp>
         <p:nvSpPr>
-          <p:cNvPr id="162" name="Google Shape;162;g3fb085bff3c_0_107:notes"/>
-          <p:cNvSpPr txBox="1"/>
+          <p:cNvPr id="169" name="Google Shape;169;g3fb085bff3c_0_66:notes"/>
+          <p:cNvSpPr txBox="1">
+            <a:spLocks noGrp="1"/>
+          </p:cNvSpPr>
           <p:nvPr>
-            <p:ph idx="1" type="body"/>
+            <p:ph type="body" idx="1"/>
           </p:nvPr>
         </p:nvSpPr>
         <p:spPr>
@@ -1381,23 +1434,20 @@
           </a:prstGeom>
         </p:spPr>
         <p:txBody>
-          <a:bodyPr anchorCtr="0" anchor="t" bIns="91425" lIns="91425" spcFirstLastPara="1" rIns="91425" wrap="square" tIns="91425">
+          <a:bodyPr spcFirstLastPara="1" wrap="square" lIns="91425" tIns="91425" rIns="91425" bIns="91425" anchor="t" anchorCtr="0">
             <a:noAutofit/>
           </a:bodyPr>
           <a:lstStyle/>
           <a:p>
-            <a:pPr indent="0" lvl="0" marL="0" rtl="0" algn="l">
-              <a:spcBef>
-                <a:spcPts val="0"/>
-              </a:spcBef>
-              <a:spcAft>
-                <a:spcPts val="0"/>
-              </a:spcAft>
-              <a:buNone/>
-            </a:pPr>
-            <a:r>
-              <a:t/>
-            </a:r>
+            <a:pPr marL="0" lvl="0" indent="0" algn="l" rtl="0">
+              <a:spcBef>
+                <a:spcPts val="0"/>
+              </a:spcBef>
+              <a:spcAft>
+                <a:spcPts val="0"/>
+              </a:spcAft>
+              <a:buNone/>
+            </a:pPr>
             <a:endParaRPr/>
           </a:p>
         </p:txBody>
@@ -1410,12 +1460,12 @@
 </p:notes>
 </file>
 
-<file path=ppt/notesSlides/notesSlide16.xml><?xml version="1.0" encoding="utf-8"?>
-<p:notes xmlns:a="http://schemas.openxmlformats.org/drawingml/2006/main" xmlns:r="http://schemas.openxmlformats.org/officeDocument/2006/relationships" xmlns:mc="http://schemas.openxmlformats.org/markup-compatibility/2006" xmlns:mv="urn:schemas-microsoft-com:mac:vml" xmlns:p="http://schemas.openxmlformats.org/presentationml/2006/main" xmlns:c="http://schemas.openxmlformats.org/drawingml/2006/chart" xmlns:dgm="http://schemas.openxmlformats.org/drawingml/2006/diagram" xmlns:o="urn:schemas-microsoft-com:office:office" xmlns:v="urn:schemas-microsoft-com:vml" xmlns:pvml="urn:schemas-microsoft-com:office:powerpoint" xmlns:com="http://schemas.openxmlformats.org/drawingml/2006/compatibility" xmlns:p14="http://schemas.microsoft.com/office/powerpoint/2010/main" xmlns:p15="http://schemas.microsoft.com/office/powerpoint/2012/main" xmlns:ahyp="http://schemas.microsoft.com/office/drawing/2018/hyperlinkcolor" showMasterPhAnim="0" showMasterSp="0">
+<file path=ppt/notesSlides/notesSlide2.xml><?xml version="1.0" encoding="utf-8"?>
+<p:notes xmlns:a="http://schemas.openxmlformats.org/drawingml/2006/main" xmlns:r="http://schemas.openxmlformats.org/officeDocument/2006/relationships" xmlns:p="http://schemas.openxmlformats.org/presentationml/2006/main" showMasterSp="0" showMasterPhAnim="0">
   <p:cSld>
     <p:spTree>
       <p:nvGrpSpPr>
-        <p:cNvPr id="167" name="Shape 167"/>
+        <p:cNvPr id="1" name="Shape 65"/>
         <p:cNvGrpSpPr/>
         <p:nvPr/>
       </p:nvGrpSpPr>
@@ -1429,10 +1479,12 @@
       </p:grpSpPr>
       <p:sp>
         <p:nvSpPr>
-          <p:cNvPr id="168" name="Google Shape;168;g3fb085bff3c_0_66:notes"/>
-          <p:cNvSpPr/>
+          <p:cNvPr id="66" name="Google Shape;66;g3fb085bff3c_0_4:notes"/>
+          <p:cNvSpPr>
+            <a:spLocks noGrp="1" noRot="1" noChangeAspect="1"/>
+          </p:cNvSpPr>
           <p:nvPr>
-            <p:ph idx="2" type="sldImg"/>
+            <p:ph type="sldImg" idx="2"/>
           </p:nvPr>
         </p:nvSpPr>
         <p:spPr>
@@ -1441,9 +1493,13 @@
             <a:ext cx="6096000" cy="3429000"/>
           </a:xfrm>
           <a:custGeom>
-            <a:rect b="b" l="l" r="r" t="t"/>
+            <a:avLst/>
+            <a:gdLst/>
+            <a:ahLst/>
+            <a:cxnLst/>
+            <a:rect l="l" t="t" r="r" b="b"/>
             <a:pathLst>
-              <a:path extrusionOk="0" h="120000" w="120000">
+              <a:path w="120000" h="120000" extrusionOk="0">
                 <a:moveTo>
                   <a:pt x="0" y="0"/>
                 </a:moveTo>
@@ -1464,10 +1520,12 @@
       </p:sp>
       <p:sp>
         <p:nvSpPr>
-          <p:cNvPr id="169" name="Google Shape;169;g3fb085bff3c_0_66:notes"/>
-          <p:cNvSpPr txBox="1"/>
+          <p:cNvPr id="67" name="Google Shape;67;g3fb085bff3c_0_4:notes"/>
+          <p:cNvSpPr txBox="1">
+            <a:spLocks noGrp="1"/>
+          </p:cNvSpPr>
           <p:nvPr>
-            <p:ph idx="1" type="body"/>
+            <p:ph type="body" idx="1"/>
           </p:nvPr>
         </p:nvSpPr>
         <p:spPr>
@@ -1480,23 +1538,20 @@
           </a:prstGeom>
         </p:spPr>
         <p:txBody>
-          <a:bodyPr anchorCtr="0" anchor="t" bIns="91425" lIns="91425" spcFirstLastPara="1" rIns="91425" wrap="square" tIns="91425">
+          <a:bodyPr spcFirstLastPara="1" wrap="square" lIns="91425" tIns="91425" rIns="91425" bIns="91425" anchor="t" anchorCtr="0">
             <a:noAutofit/>
           </a:bodyPr>
           <a:lstStyle/>
           <a:p>
-            <a:pPr indent="0" lvl="0" marL="0" rtl="0" algn="l">
-              <a:spcBef>
-                <a:spcPts val="0"/>
-              </a:spcBef>
-              <a:spcAft>
-                <a:spcPts val="0"/>
-              </a:spcAft>
-              <a:buNone/>
-            </a:pPr>
-            <a:r>
-              <a:t/>
-            </a:r>
+            <a:pPr marL="0" lvl="0" indent="0" algn="l" rtl="0">
+              <a:spcBef>
+                <a:spcPts val="0"/>
+              </a:spcBef>
+              <a:spcAft>
+                <a:spcPts val="0"/>
+              </a:spcAft>
+              <a:buNone/>
+            </a:pPr>
             <a:endParaRPr/>
           </a:p>
         </p:txBody>
@@ -1510,11 +1565,11 @@
 </file>
 
 <file path=ppt/notesSlides/notesSlide3.xml><?xml version="1.0" encoding="utf-8"?>
-<p:notes xmlns:a="http://schemas.openxmlformats.org/drawingml/2006/main" xmlns:r="http://schemas.openxmlformats.org/officeDocument/2006/relationships" xmlns:mc="http://schemas.openxmlformats.org/markup-compatibility/2006" xmlns:mv="urn:schemas-microsoft-com:mac:vml" xmlns:p="http://schemas.openxmlformats.org/presentationml/2006/main" xmlns:c="http://schemas.openxmlformats.org/drawingml/2006/chart" xmlns:dgm="http://schemas.openxmlformats.org/drawingml/2006/diagram" xmlns:o="urn:schemas-microsoft-com:office:office" xmlns:v="urn:schemas-microsoft-com:vml" xmlns:pvml="urn:schemas-microsoft-com:office:powerpoint" xmlns:com="http://schemas.openxmlformats.org/drawingml/2006/compatibility" xmlns:p14="http://schemas.microsoft.com/office/powerpoint/2010/main" xmlns:p15="http://schemas.microsoft.com/office/powerpoint/2012/main" xmlns:ahyp="http://schemas.microsoft.com/office/drawing/2018/hyperlinkcolor" showMasterPhAnim="0" showMasterSp="0">
+<p:notes xmlns:a="http://schemas.openxmlformats.org/drawingml/2006/main" xmlns:r="http://schemas.openxmlformats.org/officeDocument/2006/relationships" xmlns:p="http://schemas.openxmlformats.org/presentationml/2006/main" showMasterSp="0" showMasterPhAnim="0">
   <p:cSld>
     <p:spTree>
       <p:nvGrpSpPr>
-        <p:cNvPr id="65" name="Shape 65"/>
+        <p:cNvPr id="1" name="Shape 72"/>
         <p:cNvGrpSpPr/>
         <p:nvPr/>
       </p:nvGrpSpPr>
@@ -1528,10 +1583,12 @@
       </p:grpSpPr>
       <p:sp>
         <p:nvSpPr>
-          <p:cNvPr id="66" name="Google Shape;66;g3fb085bff3c_0_4:notes"/>
-          <p:cNvSpPr/>
+          <p:cNvPr id="73" name="Google Shape;73;g3fb085bff3c_0_11:notes"/>
+          <p:cNvSpPr>
+            <a:spLocks noGrp="1" noRot="1" noChangeAspect="1"/>
+          </p:cNvSpPr>
           <p:nvPr>
-            <p:ph idx="2" type="sldImg"/>
+            <p:ph type="sldImg" idx="2"/>
           </p:nvPr>
         </p:nvSpPr>
         <p:spPr>
@@ -1540,9 +1597,13 @@
             <a:ext cx="6096000" cy="3429000"/>
           </a:xfrm>
           <a:custGeom>
-            <a:rect b="b" l="l" r="r" t="t"/>
+            <a:avLst/>
+            <a:gdLst/>
+            <a:ahLst/>
+            <a:cxnLst/>
+            <a:rect l="l" t="t" r="r" b="b"/>
             <a:pathLst>
-              <a:path extrusionOk="0" h="120000" w="120000">
+              <a:path w="120000" h="120000" extrusionOk="0">
                 <a:moveTo>
                   <a:pt x="0" y="0"/>
                 </a:moveTo>
@@ -1563,10 +1624,12 @@
       </p:sp>
       <p:sp>
         <p:nvSpPr>
-          <p:cNvPr id="67" name="Google Shape;67;g3fb085bff3c_0_4:notes"/>
-          <p:cNvSpPr txBox="1"/>
+          <p:cNvPr id="74" name="Google Shape;74;g3fb085bff3c_0_11:notes"/>
+          <p:cNvSpPr txBox="1">
+            <a:spLocks noGrp="1"/>
+          </p:cNvSpPr>
           <p:nvPr>
-            <p:ph idx="1" type="body"/>
+            <p:ph type="body" idx="1"/>
           </p:nvPr>
         </p:nvSpPr>
         <p:spPr>
@@ -1579,23 +1642,20 @@
           </a:prstGeom>
         </p:spPr>
         <p:txBody>
-          <a:bodyPr anchorCtr="0" anchor="t" bIns="91425" lIns="91425" spcFirstLastPara="1" rIns="91425" wrap="square" tIns="91425">
+          <a:bodyPr spcFirstLastPara="1" wrap="square" lIns="91425" tIns="91425" rIns="91425" bIns="91425" anchor="t" anchorCtr="0">
             <a:noAutofit/>
           </a:bodyPr>
           <a:lstStyle/>
           <a:p>
-            <a:pPr indent="0" lvl="0" marL="0" rtl="0" algn="l">
-              <a:spcBef>
-                <a:spcPts val="0"/>
-              </a:spcBef>
-              <a:spcAft>
-                <a:spcPts val="0"/>
-              </a:spcAft>
-              <a:buNone/>
-            </a:pPr>
-            <a:r>
-              <a:t/>
-            </a:r>
+            <a:pPr marL="0" lvl="0" indent="0" algn="l" rtl="0">
+              <a:spcBef>
+                <a:spcPts val="0"/>
+              </a:spcBef>
+              <a:spcAft>
+                <a:spcPts val="0"/>
+              </a:spcAft>
+              <a:buNone/>
+            </a:pPr>
             <a:endParaRPr/>
           </a:p>
         </p:txBody>
@@ -1609,11 +1669,11 @@
 </file>
 
 <file path=ppt/notesSlides/notesSlide4.xml><?xml version="1.0" encoding="utf-8"?>
-<p:notes xmlns:a="http://schemas.openxmlformats.org/drawingml/2006/main" xmlns:r="http://schemas.openxmlformats.org/officeDocument/2006/relationships" xmlns:mc="http://schemas.openxmlformats.org/markup-compatibility/2006" xmlns:mv="urn:schemas-microsoft-com:mac:vml" xmlns:p="http://schemas.openxmlformats.org/presentationml/2006/main" xmlns:c="http://schemas.openxmlformats.org/drawingml/2006/chart" xmlns:dgm="http://schemas.openxmlformats.org/drawingml/2006/diagram" xmlns:o="urn:schemas-microsoft-com:office:office" xmlns:v="urn:schemas-microsoft-com:vml" xmlns:pvml="urn:schemas-microsoft-com:office:powerpoint" xmlns:com="http://schemas.openxmlformats.org/drawingml/2006/compatibility" xmlns:p14="http://schemas.microsoft.com/office/powerpoint/2010/main" xmlns:p15="http://schemas.microsoft.com/office/powerpoint/2012/main" xmlns:ahyp="http://schemas.microsoft.com/office/drawing/2018/hyperlinkcolor" showMasterPhAnim="0" showMasterSp="0">
+<p:notes xmlns:a="http://schemas.openxmlformats.org/drawingml/2006/main" xmlns:r="http://schemas.openxmlformats.org/officeDocument/2006/relationships" xmlns:p="http://schemas.openxmlformats.org/presentationml/2006/main" showMasterSp="0" showMasterPhAnim="0">
   <p:cSld>
     <p:spTree>
       <p:nvGrpSpPr>
-        <p:cNvPr id="72" name="Shape 72"/>
+        <p:cNvPr id="1" name="Shape 80"/>
         <p:cNvGrpSpPr/>
         <p:nvPr/>
       </p:nvGrpSpPr>
@@ -1627,10 +1687,12 @@
       </p:grpSpPr>
       <p:sp>
         <p:nvSpPr>
-          <p:cNvPr id="73" name="Google Shape;73;g3fb085bff3c_0_11:notes"/>
-          <p:cNvSpPr/>
+          <p:cNvPr id="81" name="Google Shape;81;g3fb085bff3c_0_16:notes"/>
+          <p:cNvSpPr>
+            <a:spLocks noGrp="1" noRot="1" noChangeAspect="1"/>
+          </p:cNvSpPr>
           <p:nvPr>
-            <p:ph idx="2" type="sldImg"/>
+            <p:ph type="sldImg" idx="2"/>
           </p:nvPr>
         </p:nvSpPr>
         <p:spPr>
@@ -1639,9 +1701,13 @@
             <a:ext cx="6096000" cy="3429000"/>
           </a:xfrm>
           <a:custGeom>
-            <a:rect b="b" l="l" r="r" t="t"/>
+            <a:avLst/>
+            <a:gdLst/>
+            <a:ahLst/>
+            <a:cxnLst/>
+            <a:rect l="l" t="t" r="r" b="b"/>
             <a:pathLst>
-              <a:path extrusionOk="0" h="120000" w="120000">
+              <a:path w="120000" h="120000" extrusionOk="0">
                 <a:moveTo>
                   <a:pt x="0" y="0"/>
                 </a:moveTo>
@@ -1662,10 +1728,12 @@
       </p:sp>
       <p:sp>
         <p:nvSpPr>
-          <p:cNvPr id="74" name="Google Shape;74;g3fb085bff3c_0_11:notes"/>
-          <p:cNvSpPr txBox="1"/>
+          <p:cNvPr id="82" name="Google Shape;82;g3fb085bff3c_0_16:notes"/>
+          <p:cNvSpPr txBox="1">
+            <a:spLocks noGrp="1"/>
+          </p:cNvSpPr>
           <p:nvPr>
-            <p:ph idx="1" type="body"/>
+            <p:ph type="body" idx="1"/>
           </p:nvPr>
         </p:nvSpPr>
         <p:spPr>
@@ -1678,23 +1746,20 @@
           </a:prstGeom>
         </p:spPr>
         <p:txBody>
-          <a:bodyPr anchorCtr="0" anchor="t" bIns="91425" lIns="91425" spcFirstLastPara="1" rIns="91425" wrap="square" tIns="91425">
+          <a:bodyPr spcFirstLastPara="1" wrap="square" lIns="91425" tIns="91425" rIns="91425" bIns="91425" anchor="t" anchorCtr="0">
             <a:noAutofit/>
           </a:bodyPr>
           <a:lstStyle/>
           <a:p>
-            <a:pPr indent="0" lvl="0" marL="0" rtl="0" algn="l">
-              <a:spcBef>
-                <a:spcPts val="0"/>
-              </a:spcBef>
-              <a:spcAft>
-                <a:spcPts val="0"/>
-              </a:spcAft>
-              <a:buNone/>
-            </a:pPr>
-            <a:r>
-              <a:t/>
-            </a:r>
+            <a:pPr marL="0" lvl="0" indent="0" algn="l" rtl="0">
+              <a:spcBef>
+                <a:spcPts val="0"/>
+              </a:spcBef>
+              <a:spcAft>
+                <a:spcPts val="0"/>
+              </a:spcAft>
+              <a:buNone/>
+            </a:pPr>
             <a:endParaRPr/>
           </a:p>
         </p:txBody>
@@ -1708,11 +1773,11 @@
 </file>
 
 <file path=ppt/notesSlides/notesSlide5.xml><?xml version="1.0" encoding="utf-8"?>
-<p:notes xmlns:a="http://schemas.openxmlformats.org/drawingml/2006/main" xmlns:r="http://schemas.openxmlformats.org/officeDocument/2006/relationships" xmlns:mc="http://schemas.openxmlformats.org/markup-compatibility/2006" xmlns:mv="urn:schemas-microsoft-com:mac:vml" xmlns:p="http://schemas.openxmlformats.org/presentationml/2006/main" xmlns:c="http://schemas.openxmlformats.org/drawingml/2006/chart" xmlns:dgm="http://schemas.openxmlformats.org/drawingml/2006/diagram" xmlns:o="urn:schemas-microsoft-com:office:office" xmlns:v="urn:schemas-microsoft-com:vml" xmlns:pvml="urn:schemas-microsoft-com:office:powerpoint" xmlns:com="http://schemas.openxmlformats.org/drawingml/2006/compatibility" xmlns:p14="http://schemas.microsoft.com/office/powerpoint/2010/main" xmlns:p15="http://schemas.microsoft.com/office/powerpoint/2012/main" xmlns:ahyp="http://schemas.microsoft.com/office/drawing/2018/hyperlinkcolor" showMasterPhAnim="0" showMasterSp="0">
+<p:notes xmlns:a="http://schemas.openxmlformats.org/drawingml/2006/main" xmlns:r="http://schemas.openxmlformats.org/officeDocument/2006/relationships" xmlns:p="http://schemas.openxmlformats.org/presentationml/2006/main" showMasterSp="0" showMasterPhAnim="0">
   <p:cSld>
     <p:spTree>
       <p:nvGrpSpPr>
-        <p:cNvPr id="80" name="Shape 80"/>
+        <p:cNvPr id="1" name="Shape 88"/>
         <p:cNvGrpSpPr/>
         <p:nvPr/>
       </p:nvGrpSpPr>
@@ -1726,10 +1791,12 @@
       </p:grpSpPr>
       <p:sp>
         <p:nvSpPr>
-          <p:cNvPr id="81" name="Google Shape;81;g3fb085bff3c_0_16:notes"/>
-          <p:cNvSpPr/>
+          <p:cNvPr id="89" name="Google Shape;89;g3fb085bff3c_0_21:notes"/>
+          <p:cNvSpPr>
+            <a:spLocks noGrp="1" noRot="1" noChangeAspect="1"/>
+          </p:cNvSpPr>
           <p:nvPr>
-            <p:ph idx="2" type="sldImg"/>
+            <p:ph type="sldImg" idx="2"/>
           </p:nvPr>
         </p:nvSpPr>
         <p:spPr>
@@ -1738,9 +1805,13 @@
             <a:ext cx="6096000" cy="3429000"/>
           </a:xfrm>
           <a:custGeom>
-            <a:rect b="b" l="l" r="r" t="t"/>
+            <a:avLst/>
+            <a:gdLst/>
+            <a:ahLst/>
+            <a:cxnLst/>
+            <a:rect l="l" t="t" r="r" b="b"/>
             <a:pathLst>
-              <a:path extrusionOk="0" h="120000" w="120000">
+              <a:path w="120000" h="120000" extrusionOk="0">
                 <a:moveTo>
                   <a:pt x="0" y="0"/>
                 </a:moveTo>
@@ -1761,10 +1832,12 @@
       </p:sp>
       <p:sp>
         <p:nvSpPr>
-          <p:cNvPr id="82" name="Google Shape;82;g3fb085bff3c_0_16:notes"/>
-          <p:cNvSpPr txBox="1"/>
+          <p:cNvPr id="90" name="Google Shape;90;g3fb085bff3c_0_21:notes"/>
+          <p:cNvSpPr txBox="1">
+            <a:spLocks noGrp="1"/>
+          </p:cNvSpPr>
           <p:nvPr>
-            <p:ph idx="1" type="body"/>
+            <p:ph type="body" idx="1"/>
           </p:nvPr>
         </p:nvSpPr>
         <p:spPr>
@@ -1777,23 +1850,20 @@
           </a:prstGeom>
         </p:spPr>
         <p:txBody>
-          <a:bodyPr anchorCtr="0" anchor="t" bIns="91425" lIns="91425" spcFirstLastPara="1" rIns="91425" wrap="square" tIns="91425">
+          <a:bodyPr spcFirstLastPara="1" wrap="square" lIns="91425" tIns="91425" rIns="91425" bIns="91425" anchor="t" anchorCtr="0">
             <a:noAutofit/>
           </a:bodyPr>
           <a:lstStyle/>
           <a:p>
-            <a:pPr indent="0" lvl="0" marL="0" rtl="0" algn="l">
-              <a:spcBef>
-                <a:spcPts val="0"/>
-              </a:spcBef>
-              <a:spcAft>
-                <a:spcPts val="0"/>
-              </a:spcAft>
-              <a:buNone/>
-            </a:pPr>
-            <a:r>
-              <a:t/>
-            </a:r>
+            <a:pPr marL="0" lvl="0" indent="0" algn="l" rtl="0">
+              <a:spcBef>
+                <a:spcPts val="0"/>
+              </a:spcBef>
+              <a:spcAft>
+                <a:spcPts val="0"/>
+              </a:spcAft>
+              <a:buNone/>
+            </a:pPr>
             <a:endParaRPr/>
           </a:p>
         </p:txBody>
@@ -1807,11 +1877,11 @@
 </file>
 
 <file path=ppt/notesSlides/notesSlide6.xml><?xml version="1.0" encoding="utf-8"?>
-<p:notes xmlns:a="http://schemas.openxmlformats.org/drawingml/2006/main" xmlns:r="http://schemas.openxmlformats.org/officeDocument/2006/relationships" xmlns:mc="http://schemas.openxmlformats.org/markup-compatibility/2006" xmlns:mv="urn:schemas-microsoft-com:mac:vml" xmlns:p="http://schemas.openxmlformats.org/presentationml/2006/main" xmlns:c="http://schemas.openxmlformats.org/drawingml/2006/chart" xmlns:dgm="http://schemas.openxmlformats.org/drawingml/2006/diagram" xmlns:o="urn:schemas-microsoft-com:office:office" xmlns:v="urn:schemas-microsoft-com:vml" xmlns:pvml="urn:schemas-microsoft-com:office:powerpoint" xmlns:com="http://schemas.openxmlformats.org/drawingml/2006/compatibility" xmlns:p14="http://schemas.microsoft.com/office/powerpoint/2010/main" xmlns:p15="http://schemas.microsoft.com/office/powerpoint/2012/main" xmlns:ahyp="http://schemas.microsoft.com/office/drawing/2018/hyperlinkcolor" showMasterPhAnim="0" showMasterSp="0">
+<p:notes xmlns:a="http://schemas.openxmlformats.org/drawingml/2006/main" xmlns:r="http://schemas.openxmlformats.org/officeDocument/2006/relationships" xmlns:p="http://schemas.openxmlformats.org/presentationml/2006/main" showMasterSp="0" showMasterPhAnim="0">
   <p:cSld>
     <p:spTree>
       <p:nvGrpSpPr>
-        <p:cNvPr id="88" name="Shape 88"/>
+        <p:cNvPr id="1" name="Shape 96"/>
         <p:cNvGrpSpPr/>
         <p:nvPr/>
       </p:nvGrpSpPr>
@@ -1825,10 +1895,12 @@
       </p:grpSpPr>
       <p:sp>
         <p:nvSpPr>
-          <p:cNvPr id="89" name="Google Shape;89;g3fb085bff3c_0_21:notes"/>
-          <p:cNvSpPr/>
+          <p:cNvPr id="97" name="Google Shape;97;g3fb085bff3c_0_26:notes"/>
+          <p:cNvSpPr>
+            <a:spLocks noGrp="1" noRot="1" noChangeAspect="1"/>
+          </p:cNvSpPr>
           <p:nvPr>
-            <p:ph idx="2" type="sldImg"/>
+            <p:ph type="sldImg" idx="2"/>
           </p:nvPr>
         </p:nvSpPr>
         <p:spPr>
@@ -1837,9 +1909,13 @@
             <a:ext cx="6096000" cy="3429000"/>
           </a:xfrm>
           <a:custGeom>
-            <a:rect b="b" l="l" r="r" t="t"/>
+            <a:avLst/>
+            <a:gdLst/>
+            <a:ahLst/>
+            <a:cxnLst/>
+            <a:rect l="l" t="t" r="r" b="b"/>
             <a:pathLst>
-              <a:path extrusionOk="0" h="120000" w="120000">
+              <a:path w="120000" h="120000" extrusionOk="0">
                 <a:moveTo>
                   <a:pt x="0" y="0"/>
                 </a:moveTo>
@@ -1860,10 +1936,12 @@
       </p:sp>
       <p:sp>
         <p:nvSpPr>
-          <p:cNvPr id="90" name="Google Shape;90;g3fb085bff3c_0_21:notes"/>
-          <p:cNvSpPr txBox="1"/>
+          <p:cNvPr id="98" name="Google Shape;98;g3fb085bff3c_0_26:notes"/>
+          <p:cNvSpPr txBox="1">
+            <a:spLocks noGrp="1"/>
+          </p:cNvSpPr>
           <p:nvPr>
-            <p:ph idx="1" type="body"/>
+            <p:ph type="body" idx="1"/>
           </p:nvPr>
         </p:nvSpPr>
         <p:spPr>
@@ -1876,23 +1954,20 @@
           </a:prstGeom>
         </p:spPr>
         <p:txBody>
-          <a:bodyPr anchorCtr="0" anchor="t" bIns="91425" lIns="91425" spcFirstLastPara="1" rIns="91425" wrap="square" tIns="91425">
+          <a:bodyPr spcFirstLastPara="1" wrap="square" lIns="91425" tIns="91425" rIns="91425" bIns="91425" anchor="t" anchorCtr="0">
             <a:noAutofit/>
           </a:bodyPr>
           <a:lstStyle/>
           <a:p>
-            <a:pPr indent="0" lvl="0" marL="0" rtl="0" algn="l">
-              <a:spcBef>
-                <a:spcPts val="0"/>
-              </a:spcBef>
-              <a:spcAft>
-                <a:spcPts val="0"/>
-              </a:spcAft>
-              <a:buNone/>
-            </a:pPr>
-            <a:r>
-              <a:t/>
-            </a:r>
+            <a:pPr marL="0" lvl="0" indent="0" algn="l" rtl="0">
+              <a:spcBef>
+                <a:spcPts val="0"/>
+              </a:spcBef>
+              <a:spcAft>
+                <a:spcPts val="0"/>
+              </a:spcAft>
+              <a:buNone/>
+            </a:pPr>
             <a:endParaRPr/>
           </a:p>
         </p:txBody>
@@ -1906,11 +1981,11 @@
 </file>
 
 <file path=ppt/notesSlides/notesSlide7.xml><?xml version="1.0" encoding="utf-8"?>
-<p:notes xmlns:a="http://schemas.openxmlformats.org/drawingml/2006/main" xmlns:r="http://schemas.openxmlformats.org/officeDocument/2006/relationships" xmlns:mc="http://schemas.openxmlformats.org/markup-compatibility/2006" xmlns:mv="urn:schemas-microsoft-com:mac:vml" xmlns:p="http://schemas.openxmlformats.org/presentationml/2006/main" xmlns:c="http://schemas.openxmlformats.org/drawingml/2006/chart" xmlns:dgm="http://schemas.openxmlformats.org/drawingml/2006/diagram" xmlns:o="urn:schemas-microsoft-com:office:office" xmlns:v="urn:schemas-microsoft-com:vml" xmlns:pvml="urn:schemas-microsoft-com:office:powerpoint" xmlns:com="http://schemas.openxmlformats.org/drawingml/2006/compatibility" xmlns:p14="http://schemas.microsoft.com/office/powerpoint/2010/main" xmlns:p15="http://schemas.microsoft.com/office/powerpoint/2012/main" xmlns:ahyp="http://schemas.microsoft.com/office/drawing/2018/hyperlinkcolor" showMasterPhAnim="0" showMasterSp="0">
+<p:notes xmlns:a="http://schemas.openxmlformats.org/drawingml/2006/main" xmlns:r="http://schemas.openxmlformats.org/officeDocument/2006/relationships" xmlns:p="http://schemas.openxmlformats.org/presentationml/2006/main" showMasterSp="0" showMasterPhAnim="0">
   <p:cSld>
     <p:spTree>
       <p:nvGrpSpPr>
-        <p:cNvPr id="96" name="Shape 96"/>
+        <p:cNvPr id="1" name="Shape 104"/>
         <p:cNvGrpSpPr/>
         <p:nvPr/>
       </p:nvGrpSpPr>
@@ -1924,10 +1999,12 @@
       </p:grpSpPr>
       <p:sp>
         <p:nvSpPr>
-          <p:cNvPr id="97" name="Google Shape;97;g3fb085bff3c_0_26:notes"/>
-          <p:cNvSpPr/>
+          <p:cNvPr id="105" name="Google Shape;105;g3fb085bff3c_0_31:notes"/>
+          <p:cNvSpPr>
+            <a:spLocks noGrp="1" noRot="1" noChangeAspect="1"/>
+          </p:cNvSpPr>
           <p:nvPr>
-            <p:ph idx="2" type="sldImg"/>
+            <p:ph type="sldImg" idx="2"/>
           </p:nvPr>
         </p:nvSpPr>
         <p:spPr>
@@ -1936,9 +2013,13 @@
             <a:ext cx="6096000" cy="3429000"/>
           </a:xfrm>
           <a:custGeom>
-            <a:rect b="b" l="l" r="r" t="t"/>
+            <a:avLst/>
+            <a:gdLst/>
+            <a:ahLst/>
+            <a:cxnLst/>
+            <a:rect l="l" t="t" r="r" b="b"/>
             <a:pathLst>
-              <a:path extrusionOk="0" h="120000" w="120000">
+              <a:path w="120000" h="120000" extrusionOk="0">
                 <a:moveTo>
                   <a:pt x="0" y="0"/>
                 </a:moveTo>
@@ -1959,10 +2040,12 @@
       </p:sp>
       <p:sp>
         <p:nvSpPr>
-          <p:cNvPr id="98" name="Google Shape;98;g3fb085bff3c_0_26:notes"/>
-          <p:cNvSpPr txBox="1"/>
+          <p:cNvPr id="106" name="Google Shape;106;g3fb085bff3c_0_31:notes"/>
+          <p:cNvSpPr txBox="1">
+            <a:spLocks noGrp="1"/>
+          </p:cNvSpPr>
           <p:nvPr>
-            <p:ph idx="1" type="body"/>
+            <p:ph type="body" idx="1"/>
           </p:nvPr>
         </p:nvSpPr>
         <p:spPr>
@@ -1975,23 +2058,20 @@
           </a:prstGeom>
         </p:spPr>
         <p:txBody>
-          <a:bodyPr anchorCtr="0" anchor="t" bIns="91425" lIns="91425" spcFirstLastPara="1" rIns="91425" wrap="square" tIns="91425">
+          <a:bodyPr spcFirstLastPara="1" wrap="square" lIns="91425" tIns="91425" rIns="91425" bIns="91425" anchor="t" anchorCtr="0">
             <a:noAutofit/>
           </a:bodyPr>
           <a:lstStyle/>
           <a:p>
-            <a:pPr indent="0" lvl="0" marL="0" rtl="0" algn="l">
-              <a:spcBef>
-                <a:spcPts val="0"/>
-              </a:spcBef>
-              <a:spcAft>
-                <a:spcPts val="0"/>
-              </a:spcAft>
-              <a:buNone/>
-            </a:pPr>
-            <a:r>
-              <a:t/>
-            </a:r>
+            <a:pPr marL="0" lvl="0" indent="0" algn="l" rtl="0">
+              <a:spcBef>
+                <a:spcPts val="0"/>
+              </a:spcBef>
+              <a:spcAft>
+                <a:spcPts val="0"/>
+              </a:spcAft>
+              <a:buNone/>
+            </a:pPr>
             <a:endParaRPr/>
           </a:p>
         </p:txBody>
@@ -2005,11 +2085,11 @@
 </file>
 
 <file path=ppt/notesSlides/notesSlide8.xml><?xml version="1.0" encoding="utf-8"?>
-<p:notes xmlns:a="http://schemas.openxmlformats.org/drawingml/2006/main" xmlns:r="http://schemas.openxmlformats.org/officeDocument/2006/relationships" xmlns:mc="http://schemas.openxmlformats.org/markup-compatibility/2006" xmlns:mv="urn:schemas-microsoft-com:mac:vml" xmlns:p="http://schemas.openxmlformats.org/presentationml/2006/main" xmlns:c="http://schemas.openxmlformats.org/drawingml/2006/chart" xmlns:dgm="http://schemas.openxmlformats.org/drawingml/2006/diagram" xmlns:o="urn:schemas-microsoft-com:office:office" xmlns:v="urn:schemas-microsoft-com:vml" xmlns:pvml="urn:schemas-microsoft-com:office:powerpoint" xmlns:com="http://schemas.openxmlformats.org/drawingml/2006/compatibility" xmlns:p14="http://schemas.microsoft.com/office/powerpoint/2010/main" xmlns:p15="http://schemas.microsoft.com/office/powerpoint/2012/main" xmlns:ahyp="http://schemas.microsoft.com/office/drawing/2018/hyperlinkcolor" showMasterPhAnim="0" showMasterSp="0">
+<p:notes xmlns:a="http://schemas.openxmlformats.org/drawingml/2006/main" xmlns:r="http://schemas.openxmlformats.org/officeDocument/2006/relationships" xmlns:p="http://schemas.openxmlformats.org/presentationml/2006/main" showMasterSp="0" showMasterPhAnim="0">
   <p:cSld>
     <p:spTree>
       <p:nvGrpSpPr>
-        <p:cNvPr id="104" name="Shape 104"/>
+        <p:cNvPr id="1" name="Shape 112"/>
         <p:cNvGrpSpPr/>
         <p:nvPr/>
       </p:nvGrpSpPr>
@@ -2023,10 +2103,12 @@
       </p:grpSpPr>
       <p:sp>
         <p:nvSpPr>
-          <p:cNvPr id="105" name="Google Shape;105;g3fb085bff3c_0_31:notes"/>
-          <p:cNvSpPr/>
+          <p:cNvPr id="113" name="Google Shape;113;g3fb085bff3c_0_36:notes"/>
+          <p:cNvSpPr>
+            <a:spLocks noGrp="1" noRot="1" noChangeAspect="1"/>
+          </p:cNvSpPr>
           <p:nvPr>
-            <p:ph idx="2" type="sldImg"/>
+            <p:ph type="sldImg" idx="2"/>
           </p:nvPr>
         </p:nvSpPr>
         <p:spPr>
@@ -2035,9 +2117,13 @@
             <a:ext cx="6096000" cy="3429000"/>
           </a:xfrm>
           <a:custGeom>
-            <a:rect b="b" l="l" r="r" t="t"/>
+            <a:avLst/>
+            <a:gdLst/>
+            <a:ahLst/>
+            <a:cxnLst/>
+            <a:rect l="l" t="t" r="r" b="b"/>
             <a:pathLst>
-              <a:path extrusionOk="0" h="120000" w="120000">
+              <a:path w="120000" h="120000" extrusionOk="0">
                 <a:moveTo>
                   <a:pt x="0" y="0"/>
                 </a:moveTo>
@@ -2058,10 +2144,12 @@
       </p:sp>
       <p:sp>
         <p:nvSpPr>
-          <p:cNvPr id="106" name="Google Shape;106;g3fb085bff3c_0_31:notes"/>
-          <p:cNvSpPr txBox="1"/>
+          <p:cNvPr id="114" name="Google Shape;114;g3fb085bff3c_0_36:notes"/>
+          <p:cNvSpPr txBox="1">
+            <a:spLocks noGrp="1"/>
+          </p:cNvSpPr>
           <p:nvPr>
-            <p:ph idx="1" type="body"/>
+            <p:ph type="body" idx="1"/>
           </p:nvPr>
         </p:nvSpPr>
         <p:spPr>
@@ -2074,23 +2162,20 @@
           </a:prstGeom>
         </p:spPr>
         <p:txBody>
-          <a:bodyPr anchorCtr="0" anchor="t" bIns="91425" lIns="91425" spcFirstLastPara="1" rIns="91425" wrap="square" tIns="91425">
+          <a:bodyPr spcFirstLastPara="1" wrap="square" lIns="91425" tIns="91425" rIns="91425" bIns="91425" anchor="t" anchorCtr="0">
             <a:noAutofit/>
           </a:bodyPr>
           <a:lstStyle/>
           <a:p>
-            <a:pPr indent="0" lvl="0" marL="0" rtl="0" algn="l">
-              <a:spcBef>
-                <a:spcPts val="0"/>
-              </a:spcBef>
-              <a:spcAft>
-                <a:spcPts val="0"/>
-              </a:spcAft>
-              <a:buNone/>
-            </a:pPr>
-            <a:r>
-              <a:t/>
-            </a:r>
+            <a:pPr marL="0" lvl="0" indent="0" algn="l" rtl="0">
+              <a:spcBef>
+                <a:spcPts val="0"/>
+              </a:spcBef>
+              <a:spcAft>
+                <a:spcPts val="0"/>
+              </a:spcAft>
+              <a:buNone/>
+            </a:pPr>
             <a:endParaRPr/>
           </a:p>
         </p:txBody>
@@ -2104,11 +2189,11 @@
 </file>
 
 <file path=ppt/notesSlides/notesSlide9.xml><?xml version="1.0" encoding="utf-8"?>
-<p:notes xmlns:a="http://schemas.openxmlformats.org/drawingml/2006/main" xmlns:r="http://schemas.openxmlformats.org/officeDocument/2006/relationships" xmlns:mc="http://schemas.openxmlformats.org/markup-compatibility/2006" xmlns:mv="urn:schemas-microsoft-com:mac:vml" xmlns:p="http://schemas.openxmlformats.org/presentationml/2006/main" xmlns:c="http://schemas.openxmlformats.org/drawingml/2006/chart" xmlns:dgm="http://schemas.openxmlformats.org/drawingml/2006/diagram" xmlns:o="urn:schemas-microsoft-com:office:office" xmlns:v="urn:schemas-microsoft-com:vml" xmlns:pvml="urn:schemas-microsoft-com:office:powerpoint" xmlns:com="http://schemas.openxmlformats.org/drawingml/2006/compatibility" xmlns:p14="http://schemas.microsoft.com/office/powerpoint/2010/main" xmlns:p15="http://schemas.microsoft.com/office/powerpoint/2012/main" xmlns:ahyp="http://schemas.microsoft.com/office/drawing/2018/hyperlinkcolor" showMasterPhAnim="0" showMasterSp="0">
+<p:notes xmlns:a="http://schemas.openxmlformats.org/drawingml/2006/main" xmlns:r="http://schemas.openxmlformats.org/officeDocument/2006/relationships" xmlns:p="http://schemas.openxmlformats.org/presentationml/2006/main" showMasterSp="0" showMasterPhAnim="0">
   <p:cSld>
     <p:spTree>
       <p:nvGrpSpPr>
-        <p:cNvPr id="112" name="Shape 112"/>
+        <p:cNvPr id="1" name="Shape 120"/>
         <p:cNvGrpSpPr/>
         <p:nvPr/>
       </p:nvGrpSpPr>
@@ -2122,10 +2207,12 @@
       </p:grpSpPr>
       <p:sp>
         <p:nvSpPr>
-          <p:cNvPr id="113" name="Google Shape;113;g3fb085bff3c_0_36:notes"/>
-          <p:cNvSpPr/>
+          <p:cNvPr id="121" name="Google Shape;121;g3fb085bff3c_0_41:notes"/>
+          <p:cNvSpPr>
+            <a:spLocks noGrp="1" noRot="1" noChangeAspect="1"/>
+          </p:cNvSpPr>
           <p:nvPr>
-            <p:ph idx="2" type="sldImg"/>
+            <p:ph type="sldImg" idx="2"/>
           </p:nvPr>
         </p:nvSpPr>
         <p:spPr>
@@ -2134,9 +2221,13 @@
             <a:ext cx="6096000" cy="3429000"/>
           </a:xfrm>
           <a:custGeom>
-            <a:rect b="b" l="l" r="r" t="t"/>
+            <a:avLst/>
+            <a:gdLst/>
+            <a:ahLst/>
+            <a:cxnLst/>
+            <a:rect l="l" t="t" r="r" b="b"/>
             <a:pathLst>
-              <a:path extrusionOk="0" h="120000" w="120000">
+              <a:path w="120000" h="120000" extrusionOk="0">
                 <a:moveTo>
                   <a:pt x="0" y="0"/>
                 </a:moveTo>
@@ -2157,10 +2248,12 @@
       </p:sp>
       <p:sp>
         <p:nvSpPr>
-          <p:cNvPr id="114" name="Google Shape;114;g3fb085bff3c_0_36:notes"/>
-          <p:cNvSpPr txBox="1"/>
+          <p:cNvPr id="122" name="Google Shape;122;g3fb085bff3c_0_41:notes"/>
+          <p:cNvSpPr txBox="1">
+            <a:spLocks noGrp="1"/>
+          </p:cNvSpPr>
           <p:nvPr>
-            <p:ph idx="1" type="body"/>
+            <p:ph type="body" idx="1"/>
           </p:nvPr>
         </p:nvSpPr>
         <p:spPr>
@@ -2173,23 +2266,20 @@
           </a:prstGeom>
         </p:spPr>
         <p:txBody>
-          <a:bodyPr anchorCtr="0" anchor="t" bIns="91425" lIns="91425" spcFirstLastPara="1" rIns="91425" wrap="square" tIns="91425">
+          <a:bodyPr spcFirstLastPara="1" wrap="square" lIns="91425" tIns="91425" rIns="91425" bIns="91425" anchor="t" anchorCtr="0">
             <a:noAutofit/>
           </a:bodyPr>
           <a:lstStyle/>
           <a:p>
-            <a:pPr indent="0" lvl="0" marL="0" rtl="0" algn="l">
-              <a:spcBef>
-                <a:spcPts val="0"/>
-              </a:spcBef>
-              <a:spcAft>
-                <a:spcPts val="0"/>
-              </a:spcAft>
-              <a:buNone/>
-            </a:pPr>
-            <a:r>
-              <a:t/>
-            </a:r>
+            <a:pPr marL="0" lvl="0" indent="0" algn="l" rtl="0">
+              <a:spcBef>
+                <a:spcPts val="0"/>
+              </a:spcBef>
+              <a:spcAft>
+                <a:spcPts val="0"/>
+              </a:spcAft>
+              <a:buNone/>
+            </a:pPr>
             <a:endParaRPr/>
           </a:p>
         </p:txBody>
@@ -2203,11 +2293,11 @@
 </file>
 
 <file path=ppt/slideLayouts/slideLayout1.xml><?xml version="1.0" encoding="utf-8"?>
-<p:sldLayout xmlns:a="http://schemas.openxmlformats.org/drawingml/2006/main" xmlns:r="http://schemas.openxmlformats.org/officeDocument/2006/relationships" xmlns:mc="http://schemas.openxmlformats.org/markup-compatibility/2006" xmlns:mv="urn:schemas-microsoft-com:mac:vml" xmlns:p="http://schemas.openxmlformats.org/presentationml/2006/main" xmlns:c="http://schemas.openxmlformats.org/drawingml/2006/chart" xmlns:dgm="http://schemas.openxmlformats.org/drawingml/2006/diagram" xmlns:o="urn:schemas-microsoft-com:office:office" xmlns:v="urn:schemas-microsoft-com:vml" xmlns:pvml="urn:schemas-microsoft-com:office:powerpoint" xmlns:com="http://schemas.openxmlformats.org/drawingml/2006/compatibility" xmlns:p14="http://schemas.microsoft.com/office/powerpoint/2010/main" xmlns:p15="http://schemas.microsoft.com/office/powerpoint/2012/main" xmlns:ahyp="http://schemas.microsoft.com/office/drawing/2018/hyperlinkcolor" matchingName="Title slide" type="title">
+<p:sldLayout xmlns:a="http://schemas.openxmlformats.org/drawingml/2006/main" xmlns:r="http://schemas.openxmlformats.org/officeDocument/2006/relationships" xmlns:p="http://schemas.openxmlformats.org/presentationml/2006/main" matchingName="Title slide" type="title">
   <p:cSld name="TITLE">
     <p:spTree>
       <p:nvGrpSpPr>
-        <p:cNvPr id="9" name="Shape 9"/>
+        <p:cNvPr id="1" name="Shape 9"/>
         <p:cNvGrpSpPr/>
         <p:nvPr/>
       </p:nvGrpSpPr>
@@ -2222,7 +2312,9 @@
       <p:sp>
         <p:nvSpPr>
           <p:cNvPr id="10" name="Google Shape;10;p2"/>
-          <p:cNvSpPr txBox="1"/>
+          <p:cNvSpPr txBox="1">
+            <a:spLocks noGrp="1"/>
+          </p:cNvSpPr>
           <p:nvPr>
             <p:ph type="ctrTitle"/>
           </p:nvPr>
@@ -2237,7 +2329,7 @@
           </a:prstGeom>
         </p:spPr>
         <p:txBody>
-          <a:bodyPr anchorCtr="0" anchor="b" bIns="91425" lIns="91425" spcFirstLastPara="1" rIns="91425" wrap="square" tIns="91425">
+          <a:bodyPr spcFirstLastPara="1" wrap="square" lIns="91425" tIns="91425" rIns="91425" bIns="91425" anchor="b" anchorCtr="0">
             <a:normAutofit/>
           </a:bodyPr>
           <a:lstStyle>
@@ -2341,15 +2433,19 @@
               <a:defRPr sz="5200"/>
             </a:lvl9pPr>
           </a:lstStyle>
-          <a:p/>
+          <a:p>
+            <a:endParaRPr/>
+          </a:p>
         </p:txBody>
       </p:sp>
       <p:sp>
         <p:nvSpPr>
           <p:cNvPr id="11" name="Google Shape;11;p2"/>
-          <p:cNvSpPr txBox="1"/>
+          <p:cNvSpPr txBox="1">
+            <a:spLocks noGrp="1"/>
+          </p:cNvSpPr>
           <p:nvPr>
-            <p:ph idx="1" type="subTitle"/>
+            <p:ph type="subTitle" idx="1"/>
           </p:nvPr>
         </p:nvSpPr>
         <p:spPr>
@@ -2362,7 +2458,7 @@
           </a:prstGeom>
         </p:spPr>
         <p:txBody>
-          <a:bodyPr anchorCtr="0" anchor="t" bIns="91425" lIns="91425" spcFirstLastPara="1" rIns="91425" wrap="square" tIns="91425">
+          <a:bodyPr spcFirstLastPara="1" wrap="square" lIns="91425" tIns="91425" rIns="91425" bIns="91425" anchor="t" anchorCtr="0">
             <a:normAutofit/>
           </a:bodyPr>
           <a:lstStyle>
@@ -2493,15 +2589,19 @@
               <a:defRPr sz="2800"/>
             </a:lvl9pPr>
           </a:lstStyle>
-          <a:p/>
+          <a:p>
+            <a:endParaRPr/>
+          </a:p>
         </p:txBody>
       </p:sp>
       <p:sp>
         <p:nvSpPr>
           <p:cNvPr id="12" name="Google Shape;12;p2"/>
-          <p:cNvSpPr txBox="1"/>
+          <p:cNvSpPr txBox="1">
+            <a:spLocks noGrp="1"/>
+          </p:cNvSpPr>
           <p:nvPr>
-            <p:ph idx="12" type="sldNum"/>
+            <p:ph type="sldNum" idx="12"/>
           </p:nvPr>
         </p:nvSpPr>
         <p:spPr>
@@ -2514,7 +2614,7 @@
           </a:prstGeom>
         </p:spPr>
         <p:txBody>
-          <a:bodyPr anchorCtr="0" anchor="ctr" bIns="91425" lIns="91425" spcFirstLastPara="1" rIns="91425" wrap="square" tIns="91425">
+          <a:bodyPr spcFirstLastPara="1" wrap="square" lIns="91425" tIns="91425" rIns="91425" bIns="91425" anchor="ctr" anchorCtr="0">
             <a:normAutofit/>
           </a:bodyPr>
           <a:lstStyle>
@@ -2556,7 +2656,7 @@
             </a:lvl9pPr>
           </a:lstStyle>
           <a:p>
-            <a:pPr indent="0" lvl="0" marL="0" rtl="0" algn="r">
+            <a:pPr marL="0" lvl="0" indent="0" algn="r" rtl="0">
               <a:spcBef>
                 <a:spcPts val="0"/>
               </a:spcBef>
@@ -2582,11 +2682,11 @@
 </file>
 
 <file path=ppt/slideLayouts/slideLayout10.xml><?xml version="1.0" encoding="utf-8"?>
-<p:sldLayout xmlns:a="http://schemas.openxmlformats.org/drawingml/2006/main" xmlns:r="http://schemas.openxmlformats.org/officeDocument/2006/relationships" xmlns:mc="http://schemas.openxmlformats.org/markup-compatibility/2006" xmlns:mv="urn:schemas-microsoft-com:mac:vml" xmlns:p="http://schemas.openxmlformats.org/presentationml/2006/main" xmlns:c="http://schemas.openxmlformats.org/drawingml/2006/chart" xmlns:dgm="http://schemas.openxmlformats.org/drawingml/2006/diagram" xmlns:o="urn:schemas-microsoft-com:office:office" xmlns:v="urn:schemas-microsoft-com:vml" xmlns:pvml="urn:schemas-microsoft-com:office:powerpoint" xmlns:com="http://schemas.openxmlformats.org/drawingml/2006/compatibility" xmlns:p14="http://schemas.microsoft.com/office/powerpoint/2010/main" xmlns:p15="http://schemas.microsoft.com/office/powerpoint/2012/main" xmlns:ahyp="http://schemas.microsoft.com/office/drawing/2018/hyperlinkcolor" matchingName="Big number">
+<p:sldLayout xmlns:a="http://schemas.openxmlformats.org/drawingml/2006/main" xmlns:r="http://schemas.openxmlformats.org/officeDocument/2006/relationships" xmlns:p="http://schemas.openxmlformats.org/presentationml/2006/main" matchingName="Big number">
   <p:cSld name="BIG_NUMBER">
     <p:spTree>
       <p:nvGrpSpPr>
-        <p:cNvPr id="44" name="Shape 44"/>
+        <p:cNvPr id="1" name="Shape 44"/>
         <p:cNvGrpSpPr/>
         <p:nvPr/>
       </p:nvGrpSpPr>
@@ -2601,9 +2701,11 @@
       <p:sp>
         <p:nvSpPr>
           <p:cNvPr id="45" name="Google Shape;45;p11"/>
-          <p:cNvSpPr txBox="1"/>
+          <p:cNvSpPr txBox="1">
+            <a:spLocks noGrp="1"/>
+          </p:cNvSpPr>
           <p:nvPr>
-            <p:ph hasCustomPrompt="1" type="title"/>
+            <p:ph type="title" hasCustomPrompt="1"/>
           </p:nvPr>
         </p:nvSpPr>
         <p:spPr>
@@ -2616,7 +2718,7 @@
           </a:prstGeom>
         </p:spPr>
         <p:txBody>
-          <a:bodyPr anchorCtr="0" anchor="b" bIns="91425" lIns="91425" spcFirstLastPara="1" rIns="91425" wrap="square" tIns="91425">
+          <a:bodyPr spcFirstLastPara="1" wrap="square" lIns="91425" tIns="91425" rIns="91425" bIns="91425" anchor="b" anchorCtr="0">
             <a:normAutofit/>
           </a:bodyPr>
           <a:lstStyle>
@@ -2730,9 +2832,11 @@
       <p:sp>
         <p:nvSpPr>
           <p:cNvPr id="46" name="Google Shape;46;p11"/>
-          <p:cNvSpPr txBox="1"/>
+          <p:cNvSpPr txBox="1">
+            <a:spLocks noGrp="1"/>
+          </p:cNvSpPr>
           <p:nvPr>
-            <p:ph idx="1" type="body"/>
+            <p:ph type="body" idx="1"/>
           </p:nvPr>
         </p:nvSpPr>
         <p:spPr>
@@ -2745,11 +2849,11 @@
           </a:prstGeom>
         </p:spPr>
         <p:txBody>
-          <a:bodyPr anchorCtr="0" anchor="t" bIns="91425" lIns="91425" spcFirstLastPara="1" rIns="91425" wrap="square" tIns="91425">
+          <a:bodyPr spcFirstLastPara="1" wrap="square" lIns="91425" tIns="91425" rIns="91425" bIns="91425" anchor="t" anchorCtr="0">
             <a:normAutofit/>
           </a:bodyPr>
           <a:lstStyle>
-            <a:lvl1pPr indent="-342900" lvl="0" marL="457200" algn="ctr">
+            <a:lvl1pPr marL="457200" lvl="0" indent="-342900" algn="ctr">
               <a:spcBef>
                 <a:spcPts val="0"/>
               </a:spcBef>
@@ -2760,7 +2864,7 @@
               <a:buChar char="●"/>
               <a:defRPr/>
             </a:lvl1pPr>
-            <a:lvl2pPr indent="-317500" lvl="1" marL="914400" algn="ctr">
+            <a:lvl2pPr marL="914400" lvl="1" indent="-317500" algn="ctr">
               <a:spcBef>
                 <a:spcPts val="0"/>
               </a:spcBef>
@@ -2771,7 +2875,7 @@
               <a:buChar char="○"/>
               <a:defRPr/>
             </a:lvl2pPr>
-            <a:lvl3pPr indent="-317500" lvl="2" marL="1371600" algn="ctr">
+            <a:lvl3pPr marL="1371600" lvl="2" indent="-317500" algn="ctr">
               <a:spcBef>
                 <a:spcPts val="0"/>
               </a:spcBef>
@@ -2782,7 +2886,7 @@
               <a:buChar char="■"/>
               <a:defRPr/>
             </a:lvl3pPr>
-            <a:lvl4pPr indent="-317500" lvl="3" marL="1828800" algn="ctr">
+            <a:lvl4pPr marL="1828800" lvl="3" indent="-317500" algn="ctr">
               <a:spcBef>
                 <a:spcPts val="0"/>
               </a:spcBef>
@@ -2793,7 +2897,7 @@
               <a:buChar char="●"/>
               <a:defRPr/>
             </a:lvl4pPr>
-            <a:lvl5pPr indent="-317500" lvl="4" marL="2286000" algn="ctr">
+            <a:lvl5pPr marL="2286000" lvl="4" indent="-317500" algn="ctr">
               <a:spcBef>
                 <a:spcPts val="0"/>
               </a:spcBef>
@@ -2804,7 +2908,7 @@
               <a:buChar char="○"/>
               <a:defRPr/>
             </a:lvl5pPr>
-            <a:lvl6pPr indent="-317500" lvl="5" marL="2743200" algn="ctr">
+            <a:lvl6pPr marL="2743200" lvl="5" indent="-317500" algn="ctr">
               <a:spcBef>
                 <a:spcPts val="0"/>
               </a:spcBef>
@@ -2815,7 +2919,7 @@
               <a:buChar char="■"/>
               <a:defRPr/>
             </a:lvl6pPr>
-            <a:lvl7pPr indent="-317500" lvl="6" marL="3200400" algn="ctr">
+            <a:lvl7pPr marL="3200400" lvl="6" indent="-317500" algn="ctr">
               <a:spcBef>
                 <a:spcPts val="0"/>
               </a:spcBef>
@@ -2826,7 +2930,7 @@
               <a:buChar char="●"/>
               <a:defRPr/>
             </a:lvl7pPr>
-            <a:lvl8pPr indent="-317500" lvl="7" marL="3657600" algn="ctr">
+            <a:lvl8pPr marL="3657600" lvl="7" indent="-317500" algn="ctr">
               <a:spcBef>
                 <a:spcPts val="0"/>
               </a:spcBef>
@@ -2837,7 +2941,7 @@
               <a:buChar char="○"/>
               <a:defRPr/>
             </a:lvl8pPr>
-            <a:lvl9pPr indent="-317500" lvl="8" marL="4114800" algn="ctr">
+            <a:lvl9pPr marL="4114800" lvl="8" indent="-317500" algn="ctr">
               <a:spcBef>
                 <a:spcPts val="0"/>
               </a:spcBef>
@@ -2849,15 +2953,19 @@
               <a:defRPr/>
             </a:lvl9pPr>
           </a:lstStyle>
-          <a:p/>
+          <a:p>
+            <a:endParaRPr/>
+          </a:p>
         </p:txBody>
       </p:sp>
       <p:sp>
         <p:nvSpPr>
           <p:cNvPr id="47" name="Google Shape;47;p11"/>
-          <p:cNvSpPr txBox="1"/>
+          <p:cNvSpPr txBox="1">
+            <a:spLocks noGrp="1"/>
+          </p:cNvSpPr>
           <p:nvPr>
-            <p:ph idx="12" type="sldNum"/>
+            <p:ph type="sldNum" idx="12"/>
           </p:nvPr>
         </p:nvSpPr>
         <p:spPr>
@@ -2870,7 +2978,7 @@
           </a:prstGeom>
         </p:spPr>
         <p:txBody>
-          <a:bodyPr anchorCtr="0" anchor="ctr" bIns="91425" lIns="91425" spcFirstLastPara="1" rIns="91425" wrap="square" tIns="91425">
+          <a:bodyPr spcFirstLastPara="1" wrap="square" lIns="91425" tIns="91425" rIns="91425" bIns="91425" anchor="ctr" anchorCtr="0">
             <a:normAutofit/>
           </a:bodyPr>
           <a:lstStyle>
@@ -2912,7 +3020,7 @@
             </a:lvl9pPr>
           </a:lstStyle>
           <a:p>
-            <a:pPr indent="0" lvl="0" marL="0" rtl="0" algn="r">
+            <a:pPr marL="0" lvl="0" indent="0" algn="r" rtl="0">
               <a:spcBef>
                 <a:spcPts val="0"/>
               </a:spcBef>
@@ -2938,11 +3046,11 @@
 </file>
 
 <file path=ppt/slideLayouts/slideLayout11.xml><?xml version="1.0" encoding="utf-8"?>
-<p:sldLayout xmlns:a="http://schemas.openxmlformats.org/drawingml/2006/main" xmlns:r="http://schemas.openxmlformats.org/officeDocument/2006/relationships" xmlns:mc="http://schemas.openxmlformats.org/markup-compatibility/2006" xmlns:mv="urn:schemas-microsoft-com:mac:vml" xmlns:p="http://schemas.openxmlformats.org/presentationml/2006/main" xmlns:c="http://schemas.openxmlformats.org/drawingml/2006/chart" xmlns:dgm="http://schemas.openxmlformats.org/drawingml/2006/diagram" xmlns:o="urn:schemas-microsoft-com:office:office" xmlns:v="urn:schemas-microsoft-com:vml" xmlns:pvml="urn:schemas-microsoft-com:office:powerpoint" xmlns:com="http://schemas.openxmlformats.org/drawingml/2006/compatibility" xmlns:p14="http://schemas.microsoft.com/office/powerpoint/2010/main" xmlns:p15="http://schemas.microsoft.com/office/powerpoint/2012/main" xmlns:ahyp="http://schemas.microsoft.com/office/drawing/2018/hyperlinkcolor" matchingName="Blank" type="blank">
+<p:sldLayout xmlns:a="http://schemas.openxmlformats.org/drawingml/2006/main" xmlns:r="http://schemas.openxmlformats.org/officeDocument/2006/relationships" xmlns:p="http://schemas.openxmlformats.org/presentationml/2006/main" matchingName="Blank" type="blank">
   <p:cSld name="BLANK">
     <p:spTree>
       <p:nvGrpSpPr>
-        <p:cNvPr id="48" name="Shape 48"/>
+        <p:cNvPr id="1" name="Shape 48"/>
         <p:cNvGrpSpPr/>
         <p:nvPr/>
       </p:nvGrpSpPr>
@@ -2957,9 +3065,11 @@
       <p:sp>
         <p:nvSpPr>
           <p:cNvPr id="49" name="Google Shape;49;p12"/>
-          <p:cNvSpPr txBox="1"/>
+          <p:cNvSpPr txBox="1">
+            <a:spLocks noGrp="1"/>
+          </p:cNvSpPr>
           <p:nvPr>
-            <p:ph idx="12" type="sldNum"/>
+            <p:ph type="sldNum" idx="12"/>
           </p:nvPr>
         </p:nvSpPr>
         <p:spPr>
@@ -2972,7 +3082,7 @@
           </a:prstGeom>
         </p:spPr>
         <p:txBody>
-          <a:bodyPr anchorCtr="0" anchor="ctr" bIns="91425" lIns="91425" spcFirstLastPara="1" rIns="91425" wrap="square" tIns="91425">
+          <a:bodyPr spcFirstLastPara="1" wrap="square" lIns="91425" tIns="91425" rIns="91425" bIns="91425" anchor="ctr" anchorCtr="0">
             <a:normAutofit/>
           </a:bodyPr>
           <a:lstStyle>
@@ -3014,7 +3124,7 @@
             </a:lvl9pPr>
           </a:lstStyle>
           <a:p>
-            <a:pPr indent="0" lvl="0" marL="0" rtl="0" algn="r">
+            <a:pPr marL="0" lvl="0" indent="0" algn="r" rtl="0">
               <a:spcBef>
                 <a:spcPts val="0"/>
               </a:spcBef>
@@ -3040,11 +3150,11 @@
 </file>
 
 <file path=ppt/slideLayouts/slideLayout2.xml><?xml version="1.0" encoding="utf-8"?>
-<p:sldLayout xmlns:a="http://schemas.openxmlformats.org/drawingml/2006/main" xmlns:r="http://schemas.openxmlformats.org/officeDocument/2006/relationships" xmlns:mc="http://schemas.openxmlformats.org/markup-compatibility/2006" xmlns:mv="urn:schemas-microsoft-com:mac:vml" xmlns:p="http://schemas.openxmlformats.org/presentationml/2006/main" xmlns:c="http://schemas.openxmlformats.org/drawingml/2006/chart" xmlns:dgm="http://schemas.openxmlformats.org/drawingml/2006/diagram" xmlns:o="urn:schemas-microsoft-com:office:office" xmlns:v="urn:schemas-microsoft-com:vml" xmlns:pvml="urn:schemas-microsoft-com:office:powerpoint" xmlns:com="http://schemas.openxmlformats.org/drawingml/2006/compatibility" xmlns:p14="http://schemas.microsoft.com/office/powerpoint/2010/main" xmlns:p15="http://schemas.microsoft.com/office/powerpoint/2012/main" xmlns:ahyp="http://schemas.microsoft.com/office/drawing/2018/hyperlinkcolor" matchingName="Section header" type="secHead">
+<p:sldLayout xmlns:a="http://schemas.openxmlformats.org/drawingml/2006/main" xmlns:r="http://schemas.openxmlformats.org/officeDocument/2006/relationships" xmlns:p="http://schemas.openxmlformats.org/presentationml/2006/main" matchingName="Section header" type="secHead">
   <p:cSld name="SECTION_HEADER">
     <p:spTree>
       <p:nvGrpSpPr>
-        <p:cNvPr id="13" name="Shape 13"/>
+        <p:cNvPr id="1" name="Shape 13"/>
         <p:cNvGrpSpPr/>
         <p:nvPr/>
       </p:nvGrpSpPr>
@@ -3059,7 +3169,9 @@
       <p:sp>
         <p:nvSpPr>
           <p:cNvPr id="14" name="Google Shape;14;p3"/>
-          <p:cNvSpPr txBox="1"/>
+          <p:cNvSpPr txBox="1">
+            <a:spLocks noGrp="1"/>
+          </p:cNvSpPr>
           <p:nvPr>
             <p:ph type="title"/>
           </p:nvPr>
@@ -3074,7 +3186,7 @@
           </a:prstGeom>
         </p:spPr>
         <p:txBody>
-          <a:bodyPr anchorCtr="0" anchor="ctr" bIns="91425" lIns="91425" spcFirstLastPara="1" rIns="91425" wrap="square" tIns="91425">
+          <a:bodyPr spcFirstLastPara="1" wrap="square" lIns="91425" tIns="91425" rIns="91425" bIns="91425" anchor="ctr" anchorCtr="0">
             <a:normAutofit/>
           </a:bodyPr>
           <a:lstStyle>
@@ -3178,15 +3290,19 @@
               <a:defRPr sz="3600"/>
             </a:lvl9pPr>
           </a:lstStyle>
-          <a:p/>
+          <a:p>
+            <a:endParaRPr/>
+          </a:p>
         </p:txBody>
       </p:sp>
       <p:sp>
         <p:nvSpPr>
           <p:cNvPr id="15" name="Google Shape;15;p3"/>
-          <p:cNvSpPr txBox="1"/>
+          <p:cNvSpPr txBox="1">
+            <a:spLocks noGrp="1"/>
+          </p:cNvSpPr>
           <p:nvPr>
-            <p:ph idx="12" type="sldNum"/>
+            <p:ph type="sldNum" idx="12"/>
           </p:nvPr>
         </p:nvSpPr>
         <p:spPr>
@@ -3199,7 +3315,7 @@
           </a:prstGeom>
         </p:spPr>
         <p:txBody>
-          <a:bodyPr anchorCtr="0" anchor="ctr" bIns="91425" lIns="91425" spcFirstLastPara="1" rIns="91425" wrap="square" tIns="91425">
+          <a:bodyPr spcFirstLastPara="1" wrap="square" lIns="91425" tIns="91425" rIns="91425" bIns="91425" anchor="ctr" anchorCtr="0">
             <a:normAutofit/>
           </a:bodyPr>
           <a:lstStyle>
@@ -3241,7 +3357,7 @@
             </a:lvl9pPr>
           </a:lstStyle>
           <a:p>
-            <a:pPr indent="0" lvl="0" marL="0" rtl="0" algn="r">
+            <a:pPr marL="0" lvl="0" indent="0" algn="r" rtl="0">
               <a:spcBef>
                 <a:spcPts val="0"/>
               </a:spcBef>
@@ -3267,11 +3383,11 @@
 </file>
 
 <file path=ppt/slideLayouts/slideLayout3.xml><?xml version="1.0" encoding="utf-8"?>
-<p:sldLayout xmlns:a="http://schemas.openxmlformats.org/drawingml/2006/main" xmlns:r="http://schemas.openxmlformats.org/officeDocument/2006/relationships" xmlns:mc="http://schemas.openxmlformats.org/markup-compatibility/2006" xmlns:mv="urn:schemas-microsoft-com:mac:vml" xmlns:p="http://schemas.openxmlformats.org/presentationml/2006/main" xmlns:c="http://schemas.openxmlformats.org/drawingml/2006/chart" xmlns:dgm="http://schemas.openxmlformats.org/drawingml/2006/diagram" xmlns:o="urn:schemas-microsoft-com:office:office" xmlns:v="urn:schemas-microsoft-com:vml" xmlns:pvml="urn:schemas-microsoft-com:office:powerpoint" xmlns:com="http://schemas.openxmlformats.org/drawingml/2006/compatibility" xmlns:p14="http://schemas.microsoft.com/office/powerpoint/2010/main" xmlns:p15="http://schemas.microsoft.com/office/powerpoint/2012/main" xmlns:ahyp="http://schemas.microsoft.com/office/drawing/2018/hyperlinkcolor" matchingName="Title and body" type="tx">
+<p:sldLayout xmlns:a="http://schemas.openxmlformats.org/drawingml/2006/main" xmlns:r="http://schemas.openxmlformats.org/officeDocument/2006/relationships" xmlns:p="http://schemas.openxmlformats.org/presentationml/2006/main" matchingName="Title and body" type="tx">
   <p:cSld name="TITLE_AND_BODY">
     <p:spTree>
       <p:nvGrpSpPr>
-        <p:cNvPr id="16" name="Shape 16"/>
+        <p:cNvPr id="1" name="Shape 16"/>
         <p:cNvGrpSpPr/>
         <p:nvPr/>
       </p:nvGrpSpPr>
@@ -3286,7 +3402,9 @@
       <p:sp>
         <p:nvSpPr>
           <p:cNvPr id="17" name="Google Shape;17;p4"/>
-          <p:cNvSpPr txBox="1"/>
+          <p:cNvSpPr txBox="1">
+            <a:spLocks noGrp="1"/>
+          </p:cNvSpPr>
           <p:nvPr>
             <p:ph type="title"/>
           </p:nvPr>
@@ -3301,7 +3419,7 @@
           </a:prstGeom>
         </p:spPr>
         <p:txBody>
-          <a:bodyPr anchorCtr="0" anchor="t" bIns="91425" lIns="91425" spcFirstLastPara="1" rIns="91425" wrap="square" tIns="91425">
+          <a:bodyPr spcFirstLastPara="1" wrap="square" lIns="91425" tIns="91425" rIns="91425" bIns="91425" anchor="t" anchorCtr="0">
             <a:normAutofit/>
           </a:bodyPr>
           <a:lstStyle>
@@ -3405,15 +3523,19 @@
               <a:defRPr/>
             </a:lvl9pPr>
           </a:lstStyle>
-          <a:p/>
+          <a:p>
+            <a:endParaRPr/>
+          </a:p>
         </p:txBody>
       </p:sp>
       <p:sp>
         <p:nvSpPr>
           <p:cNvPr id="18" name="Google Shape;18;p4"/>
-          <p:cNvSpPr txBox="1"/>
+          <p:cNvSpPr txBox="1">
+            <a:spLocks noGrp="1"/>
+          </p:cNvSpPr>
           <p:nvPr>
-            <p:ph idx="1" type="body"/>
+            <p:ph type="body" idx="1"/>
           </p:nvPr>
         </p:nvSpPr>
         <p:spPr>
@@ -3426,11 +3548,11 @@
           </a:prstGeom>
         </p:spPr>
         <p:txBody>
-          <a:bodyPr anchorCtr="0" anchor="t" bIns="91425" lIns="91425" spcFirstLastPara="1" rIns="91425" wrap="square" tIns="91425">
+          <a:bodyPr spcFirstLastPara="1" wrap="square" lIns="91425" tIns="91425" rIns="91425" bIns="91425" anchor="t" anchorCtr="0">
             <a:normAutofit/>
           </a:bodyPr>
           <a:lstStyle>
-            <a:lvl1pPr indent="-342900" lvl="0" marL="457200">
+            <a:lvl1pPr marL="457200" lvl="0" indent="-342900">
               <a:spcBef>
                 <a:spcPts val="0"/>
               </a:spcBef>
@@ -3441,7 +3563,7 @@
               <a:buChar char="●"/>
               <a:defRPr/>
             </a:lvl1pPr>
-            <a:lvl2pPr indent="-317500" lvl="1" marL="914400">
+            <a:lvl2pPr marL="914400" lvl="1" indent="-317500">
               <a:spcBef>
                 <a:spcPts val="0"/>
               </a:spcBef>
@@ -3452,7 +3574,7 @@
               <a:buChar char="○"/>
               <a:defRPr/>
             </a:lvl2pPr>
-            <a:lvl3pPr indent="-317500" lvl="2" marL="1371600">
+            <a:lvl3pPr marL="1371600" lvl="2" indent="-317500">
               <a:spcBef>
                 <a:spcPts val="0"/>
               </a:spcBef>
@@ -3463,7 +3585,7 @@
               <a:buChar char="■"/>
               <a:defRPr/>
             </a:lvl3pPr>
-            <a:lvl4pPr indent="-317500" lvl="3" marL="1828800">
+            <a:lvl4pPr marL="1828800" lvl="3" indent="-317500">
               <a:spcBef>
                 <a:spcPts val="0"/>
               </a:spcBef>
@@ -3474,7 +3596,7 @@
               <a:buChar char="●"/>
               <a:defRPr/>
             </a:lvl4pPr>
-            <a:lvl5pPr indent="-317500" lvl="4" marL="2286000">
+            <a:lvl5pPr marL="2286000" lvl="4" indent="-317500">
               <a:spcBef>
                 <a:spcPts val="0"/>
               </a:spcBef>
@@ -3485,7 +3607,7 @@
               <a:buChar char="○"/>
               <a:defRPr/>
             </a:lvl5pPr>
-            <a:lvl6pPr indent="-317500" lvl="5" marL="2743200">
+            <a:lvl6pPr marL="2743200" lvl="5" indent="-317500">
               <a:spcBef>
                 <a:spcPts val="0"/>
               </a:spcBef>
@@ -3496,7 +3618,7 @@
               <a:buChar char="■"/>
               <a:defRPr/>
             </a:lvl6pPr>
-            <a:lvl7pPr indent="-317500" lvl="6" marL="3200400">
+            <a:lvl7pPr marL="3200400" lvl="6" indent="-317500">
               <a:spcBef>
                 <a:spcPts val="0"/>
               </a:spcBef>
@@ -3507,7 +3629,7 @@
               <a:buChar char="●"/>
               <a:defRPr/>
             </a:lvl7pPr>
-            <a:lvl8pPr indent="-317500" lvl="7" marL="3657600">
+            <a:lvl8pPr marL="3657600" lvl="7" indent="-317500">
               <a:spcBef>
                 <a:spcPts val="0"/>
               </a:spcBef>
@@ -3518,7 +3640,7 @@
               <a:buChar char="○"/>
               <a:defRPr/>
             </a:lvl8pPr>
-            <a:lvl9pPr indent="-317500" lvl="8" marL="4114800">
+            <a:lvl9pPr marL="4114800" lvl="8" indent="-317500">
               <a:spcBef>
                 <a:spcPts val="0"/>
               </a:spcBef>
@@ -3530,15 +3652,19 @@
               <a:defRPr/>
             </a:lvl9pPr>
           </a:lstStyle>
-          <a:p/>
+          <a:p>
+            <a:endParaRPr/>
+          </a:p>
         </p:txBody>
       </p:sp>
       <p:sp>
         <p:nvSpPr>
           <p:cNvPr id="19" name="Google Shape;19;p4"/>
-          <p:cNvSpPr txBox="1"/>
+          <p:cNvSpPr txBox="1">
+            <a:spLocks noGrp="1"/>
+          </p:cNvSpPr>
           <p:nvPr>
-            <p:ph idx="12" type="sldNum"/>
+            <p:ph type="sldNum" idx="12"/>
           </p:nvPr>
         </p:nvSpPr>
         <p:spPr>
@@ -3551,7 +3677,7 @@
           </a:prstGeom>
         </p:spPr>
         <p:txBody>
-          <a:bodyPr anchorCtr="0" anchor="ctr" bIns="91425" lIns="91425" spcFirstLastPara="1" rIns="91425" wrap="square" tIns="91425">
+          <a:bodyPr spcFirstLastPara="1" wrap="square" lIns="91425" tIns="91425" rIns="91425" bIns="91425" anchor="ctr" anchorCtr="0">
             <a:normAutofit/>
           </a:bodyPr>
           <a:lstStyle>
@@ -3593,7 +3719,7 @@
             </a:lvl9pPr>
           </a:lstStyle>
           <a:p>
-            <a:pPr indent="0" lvl="0" marL="0" rtl="0" algn="r">
+            <a:pPr marL="0" lvl="0" indent="0" algn="r" rtl="0">
               <a:spcBef>
                 <a:spcPts val="0"/>
               </a:spcBef>
@@ -3619,11 +3745,11 @@
 </file>
 
 <file path=ppt/slideLayouts/slideLayout4.xml><?xml version="1.0" encoding="utf-8"?>
-<p:sldLayout xmlns:a="http://schemas.openxmlformats.org/drawingml/2006/main" xmlns:r="http://schemas.openxmlformats.org/officeDocument/2006/relationships" xmlns:mc="http://schemas.openxmlformats.org/markup-compatibility/2006" xmlns:mv="urn:schemas-microsoft-com:mac:vml" xmlns:p="http://schemas.openxmlformats.org/presentationml/2006/main" xmlns:c="http://schemas.openxmlformats.org/drawingml/2006/chart" xmlns:dgm="http://schemas.openxmlformats.org/drawingml/2006/diagram" xmlns:o="urn:schemas-microsoft-com:office:office" xmlns:v="urn:schemas-microsoft-com:vml" xmlns:pvml="urn:schemas-microsoft-com:office:powerpoint" xmlns:com="http://schemas.openxmlformats.org/drawingml/2006/compatibility" xmlns:p14="http://schemas.microsoft.com/office/powerpoint/2010/main" xmlns:p15="http://schemas.microsoft.com/office/powerpoint/2012/main" xmlns:ahyp="http://schemas.microsoft.com/office/drawing/2018/hyperlinkcolor" matchingName="Title and two columns" type="twoColTx">
+<p:sldLayout xmlns:a="http://schemas.openxmlformats.org/drawingml/2006/main" xmlns:r="http://schemas.openxmlformats.org/officeDocument/2006/relationships" xmlns:p="http://schemas.openxmlformats.org/presentationml/2006/main" matchingName="Title and two columns" type="twoColTx">
   <p:cSld name="TITLE_AND_TWO_COLUMNS">
     <p:spTree>
       <p:nvGrpSpPr>
-        <p:cNvPr id="20" name="Shape 20"/>
+        <p:cNvPr id="1" name="Shape 20"/>
         <p:cNvGrpSpPr/>
         <p:nvPr/>
       </p:nvGrpSpPr>
@@ -3638,7 +3764,9 @@
       <p:sp>
         <p:nvSpPr>
           <p:cNvPr id="21" name="Google Shape;21;p5"/>
-          <p:cNvSpPr txBox="1"/>
+          <p:cNvSpPr txBox="1">
+            <a:spLocks noGrp="1"/>
+          </p:cNvSpPr>
           <p:nvPr>
             <p:ph type="title"/>
           </p:nvPr>
@@ -3653,7 +3781,7 @@
           </a:prstGeom>
         </p:spPr>
         <p:txBody>
-          <a:bodyPr anchorCtr="0" anchor="t" bIns="91425" lIns="91425" spcFirstLastPara="1" rIns="91425" wrap="square" tIns="91425">
+          <a:bodyPr spcFirstLastPara="1" wrap="square" lIns="91425" tIns="91425" rIns="91425" bIns="91425" anchor="t" anchorCtr="0">
             <a:normAutofit/>
           </a:bodyPr>
           <a:lstStyle>
@@ -3757,15 +3885,19 @@
               <a:defRPr/>
             </a:lvl9pPr>
           </a:lstStyle>
-          <a:p/>
+          <a:p>
+            <a:endParaRPr/>
+          </a:p>
         </p:txBody>
       </p:sp>
       <p:sp>
         <p:nvSpPr>
           <p:cNvPr id="22" name="Google Shape;22;p5"/>
-          <p:cNvSpPr txBox="1"/>
+          <p:cNvSpPr txBox="1">
+            <a:spLocks noGrp="1"/>
+          </p:cNvSpPr>
           <p:nvPr>
-            <p:ph idx="1" type="body"/>
+            <p:ph type="body" idx="1"/>
           </p:nvPr>
         </p:nvSpPr>
         <p:spPr>
@@ -3778,11 +3910,11 @@
           </a:prstGeom>
         </p:spPr>
         <p:txBody>
-          <a:bodyPr anchorCtr="0" anchor="t" bIns="91425" lIns="91425" spcFirstLastPara="1" rIns="91425" wrap="square" tIns="91425">
+          <a:bodyPr spcFirstLastPara="1" wrap="square" lIns="91425" tIns="91425" rIns="91425" bIns="91425" anchor="t" anchorCtr="0">
             <a:normAutofit/>
           </a:bodyPr>
           <a:lstStyle>
-            <a:lvl1pPr indent="-317500" lvl="0" marL="457200">
+            <a:lvl1pPr marL="457200" lvl="0" indent="-317500">
               <a:spcBef>
                 <a:spcPts val="0"/>
               </a:spcBef>
@@ -3793,7 +3925,7 @@
               <a:buChar char="●"/>
               <a:defRPr sz="1400"/>
             </a:lvl1pPr>
-            <a:lvl2pPr indent="-304800" lvl="1" marL="914400">
+            <a:lvl2pPr marL="914400" lvl="1" indent="-304800">
               <a:spcBef>
                 <a:spcPts val="0"/>
               </a:spcBef>
@@ -3804,7 +3936,7 @@
               <a:buChar char="○"/>
               <a:defRPr sz="1200"/>
             </a:lvl2pPr>
-            <a:lvl3pPr indent="-304800" lvl="2" marL="1371600">
+            <a:lvl3pPr marL="1371600" lvl="2" indent="-304800">
               <a:spcBef>
                 <a:spcPts val="0"/>
               </a:spcBef>
@@ -3815,7 +3947,7 @@
               <a:buChar char="■"/>
               <a:defRPr sz="1200"/>
             </a:lvl3pPr>
-            <a:lvl4pPr indent="-304800" lvl="3" marL="1828800">
+            <a:lvl4pPr marL="1828800" lvl="3" indent="-304800">
               <a:spcBef>
                 <a:spcPts val="0"/>
               </a:spcBef>
@@ -3826,7 +3958,7 @@
               <a:buChar char="●"/>
               <a:defRPr sz="1200"/>
             </a:lvl4pPr>
-            <a:lvl5pPr indent="-304800" lvl="4" marL="2286000">
+            <a:lvl5pPr marL="2286000" lvl="4" indent="-304800">
               <a:spcBef>
                 <a:spcPts val="0"/>
               </a:spcBef>
@@ -3837,7 +3969,7 @@
               <a:buChar char="○"/>
               <a:defRPr sz="1200"/>
             </a:lvl5pPr>
-            <a:lvl6pPr indent="-304800" lvl="5" marL="2743200">
+            <a:lvl6pPr marL="2743200" lvl="5" indent="-304800">
               <a:spcBef>
                 <a:spcPts val="0"/>
               </a:spcBef>
@@ -3848,7 +3980,7 @@
               <a:buChar char="■"/>
               <a:defRPr sz="1200"/>
             </a:lvl6pPr>
-            <a:lvl7pPr indent="-304800" lvl="6" marL="3200400">
+            <a:lvl7pPr marL="3200400" lvl="6" indent="-304800">
               <a:spcBef>
                 <a:spcPts val="0"/>
               </a:spcBef>
@@ -3859,7 +3991,7 @@
               <a:buChar char="●"/>
               <a:defRPr sz="1200"/>
             </a:lvl7pPr>
-            <a:lvl8pPr indent="-304800" lvl="7" marL="3657600">
+            <a:lvl8pPr marL="3657600" lvl="7" indent="-304800">
               <a:spcBef>
                 <a:spcPts val="0"/>
               </a:spcBef>
@@ -3870,7 +4002,7 @@
               <a:buChar char="○"/>
               <a:defRPr sz="1200"/>
             </a:lvl8pPr>
-            <a:lvl9pPr indent="-304800" lvl="8" marL="4114800">
+            <a:lvl9pPr marL="4114800" lvl="8" indent="-304800">
               <a:spcBef>
                 <a:spcPts val="0"/>
               </a:spcBef>
@@ -3882,15 +4014,19 @@
               <a:defRPr sz="1200"/>
             </a:lvl9pPr>
           </a:lstStyle>
-          <a:p/>
+          <a:p>
+            <a:endParaRPr/>
+          </a:p>
         </p:txBody>
       </p:sp>
       <p:sp>
         <p:nvSpPr>
           <p:cNvPr id="23" name="Google Shape;23;p5"/>
-          <p:cNvSpPr txBox="1"/>
+          <p:cNvSpPr txBox="1">
+            <a:spLocks noGrp="1"/>
+          </p:cNvSpPr>
           <p:nvPr>
-            <p:ph idx="2" type="body"/>
+            <p:ph type="body" idx="2"/>
           </p:nvPr>
         </p:nvSpPr>
         <p:spPr>
@@ -3903,11 +4039,11 @@
           </a:prstGeom>
         </p:spPr>
         <p:txBody>
-          <a:bodyPr anchorCtr="0" anchor="t" bIns="91425" lIns="91425" spcFirstLastPara="1" rIns="91425" wrap="square" tIns="91425">
+          <a:bodyPr spcFirstLastPara="1" wrap="square" lIns="91425" tIns="91425" rIns="91425" bIns="91425" anchor="t" anchorCtr="0">
             <a:normAutofit/>
           </a:bodyPr>
           <a:lstStyle>
-            <a:lvl1pPr indent="-317500" lvl="0" marL="457200">
+            <a:lvl1pPr marL="457200" lvl="0" indent="-317500">
               <a:spcBef>
                 <a:spcPts val="0"/>
               </a:spcBef>
@@ -3918,7 +4054,7 @@
               <a:buChar char="●"/>
               <a:defRPr sz="1400"/>
             </a:lvl1pPr>
-            <a:lvl2pPr indent="-304800" lvl="1" marL="914400">
+            <a:lvl2pPr marL="914400" lvl="1" indent="-304800">
               <a:spcBef>
                 <a:spcPts val="0"/>
               </a:spcBef>
@@ -3929,7 +4065,7 @@
               <a:buChar char="○"/>
               <a:defRPr sz="1200"/>
             </a:lvl2pPr>
-            <a:lvl3pPr indent="-304800" lvl="2" marL="1371600">
+            <a:lvl3pPr marL="1371600" lvl="2" indent="-304800">
               <a:spcBef>
                 <a:spcPts val="0"/>
               </a:spcBef>
@@ -3940,7 +4076,7 @@
               <a:buChar char="■"/>
               <a:defRPr sz="1200"/>
             </a:lvl3pPr>
-            <a:lvl4pPr indent="-304800" lvl="3" marL="1828800">
+            <a:lvl4pPr marL="1828800" lvl="3" indent="-304800">
               <a:spcBef>
                 <a:spcPts val="0"/>
               </a:spcBef>
@@ -3951,7 +4087,7 @@
               <a:buChar char="●"/>
               <a:defRPr sz="1200"/>
             </a:lvl4pPr>
-            <a:lvl5pPr indent="-304800" lvl="4" marL="2286000">
+            <a:lvl5pPr marL="2286000" lvl="4" indent="-304800">
               <a:spcBef>
                 <a:spcPts val="0"/>
               </a:spcBef>
@@ -3962,7 +4098,7 @@
               <a:buChar char="○"/>
               <a:defRPr sz="1200"/>
             </a:lvl5pPr>
-            <a:lvl6pPr indent="-304800" lvl="5" marL="2743200">
+            <a:lvl6pPr marL="2743200" lvl="5" indent="-304800">
               <a:spcBef>
                 <a:spcPts val="0"/>
               </a:spcBef>
@@ -3973,7 +4109,7 @@
               <a:buChar char="■"/>
               <a:defRPr sz="1200"/>
             </a:lvl6pPr>
-            <a:lvl7pPr indent="-304800" lvl="6" marL="3200400">
+            <a:lvl7pPr marL="3200400" lvl="6" indent="-304800">
               <a:spcBef>
                 <a:spcPts val="0"/>
               </a:spcBef>
@@ -3984,7 +4120,7 @@
               <a:buChar char="●"/>
               <a:defRPr sz="1200"/>
             </a:lvl7pPr>
-            <a:lvl8pPr indent="-304800" lvl="7" marL="3657600">
+            <a:lvl8pPr marL="3657600" lvl="7" indent="-304800">
               <a:spcBef>
                 <a:spcPts val="0"/>
               </a:spcBef>
@@ -3995,7 +4131,7 @@
               <a:buChar char="○"/>
               <a:defRPr sz="1200"/>
             </a:lvl8pPr>
-            <a:lvl9pPr indent="-304800" lvl="8" marL="4114800">
+            <a:lvl9pPr marL="4114800" lvl="8" indent="-304800">
               <a:spcBef>
                 <a:spcPts val="0"/>
               </a:spcBef>
@@ -4007,15 +4143,19 @@
               <a:defRPr sz="1200"/>
             </a:lvl9pPr>
           </a:lstStyle>
-          <a:p/>
+          <a:p>
+            <a:endParaRPr/>
+          </a:p>
         </p:txBody>
       </p:sp>
       <p:sp>
         <p:nvSpPr>
           <p:cNvPr id="24" name="Google Shape;24;p5"/>
-          <p:cNvSpPr txBox="1"/>
+          <p:cNvSpPr txBox="1">
+            <a:spLocks noGrp="1"/>
+          </p:cNvSpPr>
           <p:nvPr>
-            <p:ph idx="12" type="sldNum"/>
+            <p:ph type="sldNum" idx="12"/>
           </p:nvPr>
         </p:nvSpPr>
         <p:spPr>
@@ -4028,7 +4168,7 @@
           </a:prstGeom>
         </p:spPr>
         <p:txBody>
-          <a:bodyPr anchorCtr="0" anchor="ctr" bIns="91425" lIns="91425" spcFirstLastPara="1" rIns="91425" wrap="square" tIns="91425">
+          <a:bodyPr spcFirstLastPara="1" wrap="square" lIns="91425" tIns="91425" rIns="91425" bIns="91425" anchor="ctr" anchorCtr="0">
             <a:normAutofit/>
           </a:bodyPr>
           <a:lstStyle>
@@ -4070,7 +4210,7 @@
             </a:lvl9pPr>
           </a:lstStyle>
           <a:p>
-            <a:pPr indent="0" lvl="0" marL="0" rtl="0" algn="r">
+            <a:pPr marL="0" lvl="0" indent="0" algn="r" rtl="0">
               <a:spcBef>
                 <a:spcPts val="0"/>
               </a:spcBef>
@@ -4096,11 +4236,11 @@
 </file>
 
 <file path=ppt/slideLayouts/slideLayout5.xml><?xml version="1.0" encoding="utf-8"?>
-<p:sldLayout xmlns:a="http://schemas.openxmlformats.org/drawingml/2006/main" xmlns:r="http://schemas.openxmlformats.org/officeDocument/2006/relationships" xmlns:mc="http://schemas.openxmlformats.org/markup-compatibility/2006" xmlns:mv="urn:schemas-microsoft-com:mac:vml" xmlns:p="http://schemas.openxmlformats.org/presentationml/2006/main" xmlns:c="http://schemas.openxmlformats.org/drawingml/2006/chart" xmlns:dgm="http://schemas.openxmlformats.org/drawingml/2006/diagram" xmlns:o="urn:schemas-microsoft-com:office:office" xmlns:v="urn:schemas-microsoft-com:vml" xmlns:pvml="urn:schemas-microsoft-com:office:powerpoint" xmlns:com="http://schemas.openxmlformats.org/drawingml/2006/compatibility" xmlns:p14="http://schemas.microsoft.com/office/powerpoint/2010/main" xmlns:p15="http://schemas.microsoft.com/office/powerpoint/2012/main" xmlns:ahyp="http://schemas.microsoft.com/office/drawing/2018/hyperlinkcolor" matchingName="Title only" type="titleOnly">
+<p:sldLayout xmlns:a="http://schemas.openxmlformats.org/drawingml/2006/main" xmlns:r="http://schemas.openxmlformats.org/officeDocument/2006/relationships" xmlns:p="http://schemas.openxmlformats.org/presentationml/2006/main" matchingName="Title only" type="titleOnly">
   <p:cSld name="TITLE_ONLY">
     <p:spTree>
       <p:nvGrpSpPr>
-        <p:cNvPr id="25" name="Shape 25"/>
+        <p:cNvPr id="1" name="Shape 25"/>
         <p:cNvGrpSpPr/>
         <p:nvPr/>
       </p:nvGrpSpPr>
@@ -4115,7 +4255,9 @@
       <p:sp>
         <p:nvSpPr>
           <p:cNvPr id="26" name="Google Shape;26;p6"/>
-          <p:cNvSpPr txBox="1"/>
+          <p:cNvSpPr txBox="1">
+            <a:spLocks noGrp="1"/>
+          </p:cNvSpPr>
           <p:nvPr>
             <p:ph type="title"/>
           </p:nvPr>
@@ -4130,7 +4272,7 @@
           </a:prstGeom>
         </p:spPr>
         <p:txBody>
-          <a:bodyPr anchorCtr="0" anchor="t" bIns="91425" lIns="91425" spcFirstLastPara="1" rIns="91425" wrap="square" tIns="91425">
+          <a:bodyPr spcFirstLastPara="1" wrap="square" lIns="91425" tIns="91425" rIns="91425" bIns="91425" anchor="t" anchorCtr="0">
             <a:normAutofit/>
           </a:bodyPr>
           <a:lstStyle>
@@ -4234,15 +4376,19 @@
               <a:defRPr/>
             </a:lvl9pPr>
           </a:lstStyle>
-          <a:p/>
+          <a:p>
+            <a:endParaRPr/>
+          </a:p>
         </p:txBody>
       </p:sp>
       <p:sp>
         <p:nvSpPr>
           <p:cNvPr id="27" name="Google Shape;27;p6"/>
-          <p:cNvSpPr txBox="1"/>
+          <p:cNvSpPr txBox="1">
+            <a:spLocks noGrp="1"/>
+          </p:cNvSpPr>
           <p:nvPr>
-            <p:ph idx="12" type="sldNum"/>
+            <p:ph type="sldNum" idx="12"/>
           </p:nvPr>
         </p:nvSpPr>
         <p:spPr>
@@ -4255,7 +4401,7 @@
           </a:prstGeom>
         </p:spPr>
         <p:txBody>
-          <a:bodyPr anchorCtr="0" anchor="ctr" bIns="91425" lIns="91425" spcFirstLastPara="1" rIns="91425" wrap="square" tIns="91425">
+          <a:bodyPr spcFirstLastPara="1" wrap="square" lIns="91425" tIns="91425" rIns="91425" bIns="91425" anchor="ctr" anchorCtr="0">
             <a:normAutofit/>
           </a:bodyPr>
           <a:lstStyle>
@@ -4297,7 +4443,7 @@
             </a:lvl9pPr>
           </a:lstStyle>
           <a:p>
-            <a:pPr indent="0" lvl="0" marL="0" rtl="0" algn="r">
+            <a:pPr marL="0" lvl="0" indent="0" algn="r" rtl="0">
               <a:spcBef>
                 <a:spcPts val="0"/>
               </a:spcBef>
@@ -4323,11 +4469,11 @@
 </file>
 
 <file path=ppt/slideLayouts/slideLayout6.xml><?xml version="1.0" encoding="utf-8"?>
-<p:sldLayout xmlns:a="http://schemas.openxmlformats.org/drawingml/2006/main" xmlns:r="http://schemas.openxmlformats.org/officeDocument/2006/relationships" xmlns:mc="http://schemas.openxmlformats.org/markup-compatibility/2006" xmlns:mv="urn:schemas-microsoft-com:mac:vml" xmlns:p="http://schemas.openxmlformats.org/presentationml/2006/main" xmlns:c="http://schemas.openxmlformats.org/drawingml/2006/chart" xmlns:dgm="http://schemas.openxmlformats.org/drawingml/2006/diagram" xmlns:o="urn:schemas-microsoft-com:office:office" xmlns:v="urn:schemas-microsoft-com:vml" xmlns:pvml="urn:schemas-microsoft-com:office:powerpoint" xmlns:com="http://schemas.openxmlformats.org/drawingml/2006/compatibility" xmlns:p14="http://schemas.microsoft.com/office/powerpoint/2010/main" xmlns:p15="http://schemas.microsoft.com/office/powerpoint/2012/main" xmlns:ahyp="http://schemas.microsoft.com/office/drawing/2018/hyperlinkcolor" matchingName="One column text">
+<p:sldLayout xmlns:a="http://schemas.openxmlformats.org/drawingml/2006/main" xmlns:r="http://schemas.openxmlformats.org/officeDocument/2006/relationships" xmlns:p="http://schemas.openxmlformats.org/presentationml/2006/main" matchingName="One column text">
   <p:cSld name="ONE_COLUMN_TEXT">
     <p:spTree>
       <p:nvGrpSpPr>
-        <p:cNvPr id="28" name="Shape 28"/>
+        <p:cNvPr id="1" name="Shape 28"/>
         <p:cNvGrpSpPr/>
         <p:nvPr/>
       </p:nvGrpSpPr>
@@ -4342,7 +4488,9 @@
       <p:sp>
         <p:nvSpPr>
           <p:cNvPr id="29" name="Google Shape;29;p7"/>
-          <p:cNvSpPr txBox="1"/>
+          <p:cNvSpPr txBox="1">
+            <a:spLocks noGrp="1"/>
+          </p:cNvSpPr>
           <p:nvPr>
             <p:ph type="title"/>
           </p:nvPr>
@@ -4357,7 +4505,7 @@
           </a:prstGeom>
         </p:spPr>
         <p:txBody>
-          <a:bodyPr anchorCtr="0" anchor="b" bIns="91425" lIns="91425" spcFirstLastPara="1" rIns="91425" wrap="square" tIns="91425">
+          <a:bodyPr spcFirstLastPara="1" wrap="square" lIns="91425" tIns="91425" rIns="91425" bIns="91425" anchor="b" anchorCtr="0">
             <a:normAutofit/>
           </a:bodyPr>
           <a:lstStyle>
@@ -4461,15 +4609,19 @@
               <a:defRPr sz="2400"/>
             </a:lvl9pPr>
           </a:lstStyle>
-          <a:p/>
+          <a:p>
+            <a:endParaRPr/>
+          </a:p>
         </p:txBody>
       </p:sp>
       <p:sp>
         <p:nvSpPr>
           <p:cNvPr id="30" name="Google Shape;30;p7"/>
-          <p:cNvSpPr txBox="1"/>
+          <p:cNvSpPr txBox="1">
+            <a:spLocks noGrp="1"/>
+          </p:cNvSpPr>
           <p:nvPr>
-            <p:ph idx="1" type="body"/>
+            <p:ph type="body" idx="1"/>
           </p:nvPr>
         </p:nvSpPr>
         <p:spPr>
@@ -4482,11 +4634,11 @@
           </a:prstGeom>
         </p:spPr>
         <p:txBody>
-          <a:bodyPr anchorCtr="0" anchor="t" bIns="91425" lIns="91425" spcFirstLastPara="1" rIns="91425" wrap="square" tIns="91425">
+          <a:bodyPr spcFirstLastPara="1" wrap="square" lIns="91425" tIns="91425" rIns="91425" bIns="91425" anchor="t" anchorCtr="0">
             <a:normAutofit/>
           </a:bodyPr>
           <a:lstStyle>
-            <a:lvl1pPr indent="-304800" lvl="0" marL="457200">
+            <a:lvl1pPr marL="457200" lvl="0" indent="-304800">
               <a:spcBef>
                 <a:spcPts val="0"/>
               </a:spcBef>
@@ -4497,7 +4649,7 @@
               <a:buChar char="●"/>
               <a:defRPr sz="1200"/>
             </a:lvl1pPr>
-            <a:lvl2pPr indent="-304800" lvl="1" marL="914400">
+            <a:lvl2pPr marL="914400" lvl="1" indent="-304800">
               <a:spcBef>
                 <a:spcPts val="0"/>
               </a:spcBef>
@@ -4508,7 +4660,7 @@
               <a:buChar char="○"/>
               <a:defRPr sz="1200"/>
             </a:lvl2pPr>
-            <a:lvl3pPr indent="-304800" lvl="2" marL="1371600">
+            <a:lvl3pPr marL="1371600" lvl="2" indent="-304800">
               <a:spcBef>
                 <a:spcPts val="0"/>
               </a:spcBef>
@@ -4519,7 +4671,7 @@
               <a:buChar char="■"/>
               <a:defRPr sz="1200"/>
             </a:lvl3pPr>
-            <a:lvl4pPr indent="-304800" lvl="3" marL="1828800">
+            <a:lvl4pPr marL="1828800" lvl="3" indent="-304800">
               <a:spcBef>
                 <a:spcPts val="0"/>
               </a:spcBef>
@@ -4530,7 +4682,7 @@
               <a:buChar char="●"/>
               <a:defRPr sz="1200"/>
             </a:lvl4pPr>
-            <a:lvl5pPr indent="-304800" lvl="4" marL="2286000">
+            <a:lvl5pPr marL="2286000" lvl="4" indent="-304800">
               <a:spcBef>
                 <a:spcPts val="0"/>
               </a:spcBef>
@@ -4541,7 +4693,7 @@
               <a:buChar char="○"/>
               <a:defRPr sz="1200"/>
             </a:lvl5pPr>
-            <a:lvl6pPr indent="-304800" lvl="5" marL="2743200">
+            <a:lvl6pPr marL="2743200" lvl="5" indent="-304800">
               <a:spcBef>
                 <a:spcPts val="0"/>
               </a:spcBef>
@@ -4552,7 +4704,7 @@
               <a:buChar char="■"/>
               <a:defRPr sz="1200"/>
             </a:lvl6pPr>
-            <a:lvl7pPr indent="-304800" lvl="6" marL="3200400">
+            <a:lvl7pPr marL="3200400" lvl="6" indent="-304800">
               <a:spcBef>
                 <a:spcPts val="0"/>
               </a:spcBef>
@@ -4563,7 +4715,7 @@
               <a:buChar char="●"/>
               <a:defRPr sz="1200"/>
             </a:lvl7pPr>
-            <a:lvl8pPr indent="-304800" lvl="7" marL="3657600">
+            <a:lvl8pPr marL="3657600" lvl="7" indent="-304800">
               <a:spcBef>
                 <a:spcPts val="0"/>
               </a:spcBef>
@@ -4574,7 +4726,7 @@
               <a:buChar char="○"/>
               <a:defRPr sz="1200"/>
             </a:lvl8pPr>
-            <a:lvl9pPr indent="-304800" lvl="8" marL="4114800">
+            <a:lvl9pPr marL="4114800" lvl="8" indent="-304800">
               <a:spcBef>
                 <a:spcPts val="0"/>
               </a:spcBef>
@@ -4586,15 +4738,19 @@
               <a:defRPr sz="1200"/>
             </a:lvl9pPr>
           </a:lstStyle>
-          <a:p/>
+          <a:p>
+            <a:endParaRPr/>
+          </a:p>
         </p:txBody>
       </p:sp>
       <p:sp>
         <p:nvSpPr>
           <p:cNvPr id="31" name="Google Shape;31;p7"/>
-          <p:cNvSpPr txBox="1"/>
+          <p:cNvSpPr txBox="1">
+            <a:spLocks noGrp="1"/>
+          </p:cNvSpPr>
           <p:nvPr>
-            <p:ph idx="12" type="sldNum"/>
+            <p:ph type="sldNum" idx="12"/>
           </p:nvPr>
         </p:nvSpPr>
         <p:spPr>
@@ -4607,7 +4763,7 @@
           </a:prstGeom>
         </p:spPr>
         <p:txBody>
-          <a:bodyPr anchorCtr="0" anchor="ctr" bIns="91425" lIns="91425" spcFirstLastPara="1" rIns="91425" wrap="square" tIns="91425">
+          <a:bodyPr spcFirstLastPara="1" wrap="square" lIns="91425" tIns="91425" rIns="91425" bIns="91425" anchor="ctr" anchorCtr="0">
             <a:normAutofit/>
           </a:bodyPr>
           <a:lstStyle>
@@ -4649,7 +4805,7 @@
             </a:lvl9pPr>
           </a:lstStyle>
           <a:p>
-            <a:pPr indent="0" lvl="0" marL="0" rtl="0" algn="r">
+            <a:pPr marL="0" lvl="0" indent="0" algn="r" rtl="0">
               <a:spcBef>
                 <a:spcPts val="0"/>
               </a:spcBef>
@@ -4675,11 +4831,11 @@
 </file>
 
 <file path=ppt/slideLayouts/slideLayout7.xml><?xml version="1.0" encoding="utf-8"?>
-<p:sldLayout xmlns:a="http://schemas.openxmlformats.org/drawingml/2006/main" xmlns:r="http://schemas.openxmlformats.org/officeDocument/2006/relationships" xmlns:mc="http://schemas.openxmlformats.org/markup-compatibility/2006" xmlns:mv="urn:schemas-microsoft-com:mac:vml" xmlns:p="http://schemas.openxmlformats.org/presentationml/2006/main" xmlns:c="http://schemas.openxmlformats.org/drawingml/2006/chart" xmlns:dgm="http://schemas.openxmlformats.org/drawingml/2006/diagram" xmlns:o="urn:schemas-microsoft-com:office:office" xmlns:v="urn:schemas-microsoft-com:vml" xmlns:pvml="urn:schemas-microsoft-com:office:powerpoint" xmlns:com="http://schemas.openxmlformats.org/drawingml/2006/compatibility" xmlns:p14="http://schemas.microsoft.com/office/powerpoint/2010/main" xmlns:p15="http://schemas.microsoft.com/office/powerpoint/2012/main" xmlns:ahyp="http://schemas.microsoft.com/office/drawing/2018/hyperlinkcolor" matchingName="Main point">
+<p:sldLayout xmlns:a="http://schemas.openxmlformats.org/drawingml/2006/main" xmlns:r="http://schemas.openxmlformats.org/officeDocument/2006/relationships" xmlns:p="http://schemas.openxmlformats.org/presentationml/2006/main" matchingName="Main point">
   <p:cSld name="MAIN_POINT">
     <p:spTree>
       <p:nvGrpSpPr>
-        <p:cNvPr id="32" name="Shape 32"/>
+        <p:cNvPr id="1" name="Shape 32"/>
         <p:cNvGrpSpPr/>
         <p:nvPr/>
       </p:nvGrpSpPr>
@@ -4694,7 +4850,9 @@
       <p:sp>
         <p:nvSpPr>
           <p:cNvPr id="33" name="Google Shape;33;p8"/>
-          <p:cNvSpPr txBox="1"/>
+          <p:cNvSpPr txBox="1">
+            <a:spLocks noGrp="1"/>
+          </p:cNvSpPr>
           <p:nvPr>
             <p:ph type="title"/>
           </p:nvPr>
@@ -4709,7 +4867,7 @@
           </a:prstGeom>
         </p:spPr>
         <p:txBody>
-          <a:bodyPr anchorCtr="0" anchor="ctr" bIns="91425" lIns="91425" spcFirstLastPara="1" rIns="91425" wrap="square" tIns="91425">
+          <a:bodyPr spcFirstLastPara="1" wrap="square" lIns="91425" tIns="91425" rIns="91425" bIns="91425" anchor="ctr" anchorCtr="0">
             <a:normAutofit/>
           </a:bodyPr>
           <a:lstStyle>
@@ -4813,15 +4971,19 @@
               <a:defRPr sz="4800"/>
             </a:lvl9pPr>
           </a:lstStyle>
-          <a:p/>
+          <a:p>
+            <a:endParaRPr/>
+          </a:p>
         </p:txBody>
       </p:sp>
       <p:sp>
         <p:nvSpPr>
           <p:cNvPr id="34" name="Google Shape;34;p8"/>
-          <p:cNvSpPr txBox="1"/>
+          <p:cNvSpPr txBox="1">
+            <a:spLocks noGrp="1"/>
+          </p:cNvSpPr>
           <p:nvPr>
-            <p:ph idx="12" type="sldNum"/>
+            <p:ph type="sldNum" idx="12"/>
           </p:nvPr>
         </p:nvSpPr>
         <p:spPr>
@@ -4834,7 +4996,7 @@
           </a:prstGeom>
         </p:spPr>
         <p:txBody>
-          <a:bodyPr anchorCtr="0" anchor="ctr" bIns="91425" lIns="91425" spcFirstLastPara="1" rIns="91425" wrap="square" tIns="91425">
+          <a:bodyPr spcFirstLastPara="1" wrap="square" lIns="91425" tIns="91425" rIns="91425" bIns="91425" anchor="ctr" anchorCtr="0">
             <a:normAutofit/>
           </a:bodyPr>
           <a:lstStyle>
@@ -4876,7 +5038,7 @@
             </a:lvl9pPr>
           </a:lstStyle>
           <a:p>
-            <a:pPr indent="0" lvl="0" marL="0" rtl="0" algn="r">
+            <a:pPr marL="0" lvl="0" indent="0" algn="r" rtl="0">
               <a:spcBef>
                 <a:spcPts val="0"/>
               </a:spcBef>
@@ -4902,11 +5064,11 @@
 </file>
 
 <file path=ppt/slideLayouts/slideLayout8.xml><?xml version="1.0" encoding="utf-8"?>
-<p:sldLayout xmlns:a="http://schemas.openxmlformats.org/drawingml/2006/main" xmlns:r="http://schemas.openxmlformats.org/officeDocument/2006/relationships" xmlns:mc="http://schemas.openxmlformats.org/markup-compatibility/2006" xmlns:mv="urn:schemas-microsoft-com:mac:vml" xmlns:p="http://schemas.openxmlformats.org/presentationml/2006/main" xmlns:c="http://schemas.openxmlformats.org/drawingml/2006/chart" xmlns:dgm="http://schemas.openxmlformats.org/drawingml/2006/diagram" xmlns:o="urn:schemas-microsoft-com:office:office" xmlns:v="urn:schemas-microsoft-com:vml" xmlns:pvml="urn:schemas-microsoft-com:office:powerpoint" xmlns:com="http://schemas.openxmlformats.org/drawingml/2006/compatibility" xmlns:p14="http://schemas.microsoft.com/office/powerpoint/2010/main" xmlns:p15="http://schemas.microsoft.com/office/powerpoint/2012/main" xmlns:ahyp="http://schemas.microsoft.com/office/drawing/2018/hyperlinkcolor" matchingName="Section title and description">
+<p:sldLayout xmlns:a="http://schemas.openxmlformats.org/drawingml/2006/main" xmlns:r="http://schemas.openxmlformats.org/officeDocument/2006/relationships" xmlns:p="http://schemas.openxmlformats.org/presentationml/2006/main" matchingName="Section title and description">
   <p:cSld name="SECTION_TITLE_AND_DESCRIPTION">
     <p:spTree>
       <p:nvGrpSpPr>
-        <p:cNvPr id="35" name="Shape 35"/>
+        <p:cNvPr id="1" name="Shape 35"/>
         <p:cNvGrpSpPr/>
         <p:nvPr/>
       </p:nvGrpSpPr>
@@ -4940,23 +5102,20 @@
           </a:ln>
         </p:spPr>
         <p:txBody>
-          <a:bodyPr anchorCtr="0" anchor="ctr" bIns="91425" lIns="91425" spcFirstLastPara="1" rIns="91425" wrap="square" tIns="91425">
+          <a:bodyPr spcFirstLastPara="1" wrap="square" lIns="91425" tIns="91425" rIns="91425" bIns="91425" anchor="ctr" anchorCtr="0">
             <a:noAutofit/>
           </a:bodyPr>
           <a:lstStyle/>
           <a:p>
-            <a:pPr indent="0" lvl="0" marL="0" rtl="0" algn="l">
-              <a:spcBef>
-                <a:spcPts val="0"/>
-              </a:spcBef>
-              <a:spcAft>
-                <a:spcPts val="0"/>
-              </a:spcAft>
-              <a:buNone/>
-            </a:pPr>
-            <a:r>
-              <a:t/>
-            </a:r>
+            <a:pPr marL="0" lvl="0" indent="0" algn="l" rtl="0">
+              <a:spcBef>
+                <a:spcPts val="0"/>
+              </a:spcBef>
+              <a:spcAft>
+                <a:spcPts val="0"/>
+              </a:spcAft>
+              <a:buNone/>
+            </a:pPr>
             <a:endParaRPr/>
           </a:p>
         </p:txBody>
@@ -4964,7 +5123,9 @@
       <p:sp>
         <p:nvSpPr>
           <p:cNvPr id="37" name="Google Shape;37;p9"/>
-          <p:cNvSpPr txBox="1"/>
+          <p:cNvSpPr txBox="1">
+            <a:spLocks noGrp="1"/>
+          </p:cNvSpPr>
           <p:nvPr>
             <p:ph type="title"/>
           </p:nvPr>
@@ -4979,7 +5140,7 @@
           </a:prstGeom>
         </p:spPr>
         <p:txBody>
-          <a:bodyPr anchorCtr="0" anchor="b" bIns="91425" lIns="91425" spcFirstLastPara="1" rIns="91425" wrap="square" tIns="91425">
+          <a:bodyPr spcFirstLastPara="1" wrap="square" lIns="91425" tIns="91425" rIns="91425" bIns="91425" anchor="b" anchorCtr="0">
             <a:normAutofit/>
           </a:bodyPr>
           <a:lstStyle>
@@ -5083,15 +5244,19 @@
               <a:defRPr sz="4200"/>
             </a:lvl9pPr>
           </a:lstStyle>
-          <a:p/>
+          <a:p>
+            <a:endParaRPr/>
+          </a:p>
         </p:txBody>
       </p:sp>
       <p:sp>
         <p:nvSpPr>
           <p:cNvPr id="38" name="Google Shape;38;p9"/>
-          <p:cNvSpPr txBox="1"/>
+          <p:cNvSpPr txBox="1">
+            <a:spLocks noGrp="1"/>
+          </p:cNvSpPr>
           <p:nvPr>
-            <p:ph idx="1" type="subTitle"/>
+            <p:ph type="subTitle" idx="1"/>
           </p:nvPr>
         </p:nvSpPr>
         <p:spPr>
@@ -5104,7 +5269,7 @@
           </a:prstGeom>
         </p:spPr>
         <p:txBody>
-          <a:bodyPr anchorCtr="0" anchor="t" bIns="91425" lIns="91425" spcFirstLastPara="1" rIns="91425" wrap="square" tIns="91425">
+          <a:bodyPr spcFirstLastPara="1" wrap="square" lIns="91425" tIns="91425" rIns="91425" bIns="91425" anchor="t" anchorCtr="0">
             <a:normAutofit/>
           </a:bodyPr>
           <a:lstStyle>
@@ -5235,15 +5400,19 @@
               <a:defRPr sz="2100"/>
             </a:lvl9pPr>
           </a:lstStyle>
-          <a:p/>
+          <a:p>
+            <a:endParaRPr/>
+          </a:p>
         </p:txBody>
       </p:sp>
       <p:sp>
         <p:nvSpPr>
           <p:cNvPr id="39" name="Google Shape;39;p9"/>
-          <p:cNvSpPr txBox="1"/>
+          <p:cNvSpPr txBox="1">
+            <a:spLocks noGrp="1"/>
+          </p:cNvSpPr>
           <p:nvPr>
-            <p:ph idx="2" type="body"/>
+            <p:ph type="body" idx="2"/>
           </p:nvPr>
         </p:nvSpPr>
         <p:spPr>
@@ -5256,11 +5425,11 @@
           </a:prstGeom>
         </p:spPr>
         <p:txBody>
-          <a:bodyPr anchorCtr="0" anchor="ctr" bIns="91425" lIns="91425" spcFirstLastPara="1" rIns="91425" wrap="square" tIns="91425">
+          <a:bodyPr spcFirstLastPara="1" wrap="square" lIns="91425" tIns="91425" rIns="91425" bIns="91425" anchor="ctr" anchorCtr="0">
             <a:normAutofit/>
           </a:bodyPr>
           <a:lstStyle>
-            <a:lvl1pPr indent="-342900" lvl="0" marL="457200">
+            <a:lvl1pPr marL="457200" lvl="0" indent="-342900">
               <a:spcBef>
                 <a:spcPts val="0"/>
               </a:spcBef>
@@ -5271,7 +5440,7 @@
               <a:buChar char="●"/>
               <a:defRPr/>
             </a:lvl1pPr>
-            <a:lvl2pPr indent="-317500" lvl="1" marL="914400">
+            <a:lvl2pPr marL="914400" lvl="1" indent="-317500">
               <a:spcBef>
                 <a:spcPts val="0"/>
               </a:spcBef>
@@ -5282,7 +5451,7 @@
               <a:buChar char="○"/>
               <a:defRPr/>
             </a:lvl2pPr>
-            <a:lvl3pPr indent="-317500" lvl="2" marL="1371600">
+            <a:lvl3pPr marL="1371600" lvl="2" indent="-317500">
               <a:spcBef>
                 <a:spcPts val="0"/>
               </a:spcBef>
@@ -5293,7 +5462,7 @@
               <a:buChar char="■"/>
               <a:defRPr/>
             </a:lvl3pPr>
-            <a:lvl4pPr indent="-317500" lvl="3" marL="1828800">
+            <a:lvl4pPr marL="1828800" lvl="3" indent="-317500">
               <a:spcBef>
                 <a:spcPts val="0"/>
               </a:spcBef>
@@ -5304,7 +5473,7 @@
               <a:buChar char="●"/>
               <a:defRPr/>
             </a:lvl4pPr>
-            <a:lvl5pPr indent="-317500" lvl="4" marL="2286000">
+            <a:lvl5pPr marL="2286000" lvl="4" indent="-317500">
               <a:spcBef>
                 <a:spcPts val="0"/>
               </a:spcBef>
@@ -5315,7 +5484,7 @@
               <a:buChar char="○"/>
               <a:defRPr/>
             </a:lvl5pPr>
-            <a:lvl6pPr indent="-317500" lvl="5" marL="2743200">
+            <a:lvl6pPr marL="2743200" lvl="5" indent="-317500">
               <a:spcBef>
                 <a:spcPts val="0"/>
               </a:spcBef>
@@ -5326,7 +5495,7 @@
               <a:buChar char="■"/>
               <a:defRPr/>
             </a:lvl6pPr>
-            <a:lvl7pPr indent="-317500" lvl="6" marL="3200400">
+            <a:lvl7pPr marL="3200400" lvl="6" indent="-317500">
               <a:spcBef>
                 <a:spcPts val="0"/>
               </a:spcBef>
@@ -5337,7 +5506,7 @@
               <a:buChar char="●"/>
               <a:defRPr/>
             </a:lvl7pPr>
-            <a:lvl8pPr indent="-317500" lvl="7" marL="3657600">
+            <a:lvl8pPr marL="3657600" lvl="7" indent="-317500">
               <a:spcBef>
                 <a:spcPts val="0"/>
               </a:spcBef>
@@ -5348,7 +5517,7 @@
               <a:buChar char="○"/>
               <a:defRPr/>
             </a:lvl8pPr>
-            <a:lvl9pPr indent="-317500" lvl="8" marL="4114800">
+            <a:lvl9pPr marL="4114800" lvl="8" indent="-317500">
               <a:spcBef>
                 <a:spcPts val="0"/>
               </a:spcBef>
@@ -5360,15 +5529,19 @@
               <a:defRPr/>
             </a:lvl9pPr>
           </a:lstStyle>
-          <a:p/>
+          <a:p>
+            <a:endParaRPr/>
+          </a:p>
         </p:txBody>
       </p:sp>
       <p:sp>
         <p:nvSpPr>
           <p:cNvPr id="40" name="Google Shape;40;p9"/>
-          <p:cNvSpPr txBox="1"/>
+          <p:cNvSpPr txBox="1">
+            <a:spLocks noGrp="1"/>
+          </p:cNvSpPr>
           <p:nvPr>
-            <p:ph idx="12" type="sldNum"/>
+            <p:ph type="sldNum" idx="12"/>
           </p:nvPr>
         </p:nvSpPr>
         <p:spPr>
@@ -5381,7 +5554,7 @@
           </a:prstGeom>
         </p:spPr>
         <p:txBody>
-          <a:bodyPr anchorCtr="0" anchor="ctr" bIns="91425" lIns="91425" spcFirstLastPara="1" rIns="91425" wrap="square" tIns="91425">
+          <a:bodyPr spcFirstLastPara="1" wrap="square" lIns="91425" tIns="91425" rIns="91425" bIns="91425" anchor="ctr" anchorCtr="0">
             <a:normAutofit/>
           </a:bodyPr>
           <a:lstStyle>
@@ -5423,7 +5596,7 @@
             </a:lvl9pPr>
           </a:lstStyle>
           <a:p>
-            <a:pPr indent="0" lvl="0" marL="0" rtl="0" algn="r">
+            <a:pPr marL="0" lvl="0" indent="0" algn="r" rtl="0">
               <a:spcBef>
                 <a:spcPts val="0"/>
               </a:spcBef>
@@ -5449,11 +5622,11 @@
 </file>
 
 <file path=ppt/slideLayouts/slideLayout9.xml><?xml version="1.0" encoding="utf-8"?>
-<p:sldLayout xmlns:a="http://schemas.openxmlformats.org/drawingml/2006/main" xmlns:r="http://schemas.openxmlformats.org/officeDocument/2006/relationships" xmlns:mc="http://schemas.openxmlformats.org/markup-compatibility/2006" xmlns:mv="urn:schemas-microsoft-com:mac:vml" xmlns:p="http://schemas.openxmlformats.org/presentationml/2006/main" xmlns:c="http://schemas.openxmlformats.org/drawingml/2006/chart" xmlns:dgm="http://schemas.openxmlformats.org/drawingml/2006/diagram" xmlns:o="urn:schemas-microsoft-com:office:office" xmlns:v="urn:schemas-microsoft-com:vml" xmlns:pvml="urn:schemas-microsoft-com:office:powerpoint" xmlns:com="http://schemas.openxmlformats.org/drawingml/2006/compatibility" xmlns:p14="http://schemas.microsoft.com/office/powerpoint/2010/main" xmlns:p15="http://schemas.microsoft.com/office/powerpoint/2012/main" xmlns:ahyp="http://schemas.microsoft.com/office/drawing/2018/hyperlinkcolor" matchingName="Caption">
+<p:sldLayout xmlns:a="http://schemas.openxmlformats.org/drawingml/2006/main" xmlns:r="http://schemas.openxmlformats.org/officeDocument/2006/relationships" xmlns:p="http://schemas.openxmlformats.org/presentationml/2006/main" matchingName="Caption">
   <p:cSld name="CAPTION_ONLY">
     <p:spTree>
       <p:nvGrpSpPr>
-        <p:cNvPr id="41" name="Shape 41"/>
+        <p:cNvPr id="1" name="Shape 41"/>
         <p:cNvGrpSpPr/>
         <p:nvPr/>
       </p:nvGrpSpPr>
@@ -5468,9 +5641,11 @@
       <p:sp>
         <p:nvSpPr>
           <p:cNvPr id="42" name="Google Shape;42;p10"/>
-          <p:cNvSpPr txBox="1"/>
+          <p:cNvSpPr txBox="1">
+            <a:spLocks noGrp="1"/>
+          </p:cNvSpPr>
           <p:nvPr>
-            <p:ph idx="1" type="body"/>
+            <p:ph type="body" idx="1"/>
           </p:nvPr>
         </p:nvSpPr>
         <p:spPr>
@@ -5483,11 +5658,11 @@
           </a:prstGeom>
         </p:spPr>
         <p:txBody>
-          <a:bodyPr anchorCtr="0" anchor="ctr" bIns="91425" lIns="91425" spcFirstLastPara="1" rIns="91425" wrap="square" tIns="91425">
+          <a:bodyPr spcFirstLastPara="1" wrap="square" lIns="91425" tIns="91425" rIns="91425" bIns="91425" anchor="ctr" anchorCtr="0">
             <a:normAutofit/>
           </a:bodyPr>
           <a:lstStyle>
-            <a:lvl1pPr indent="-228600" lvl="0" marL="457200">
+            <a:lvl1pPr marL="457200" lvl="0" indent="-228600">
               <a:lnSpc>
                 <a:spcPct val="100000"/>
               </a:lnSpc>
@@ -5502,15 +5677,19 @@
               <a:defRPr/>
             </a:lvl1pPr>
           </a:lstStyle>
-          <a:p/>
+          <a:p>
+            <a:endParaRPr/>
+          </a:p>
         </p:txBody>
       </p:sp>
       <p:sp>
         <p:nvSpPr>
           <p:cNvPr id="43" name="Google Shape;43;p10"/>
-          <p:cNvSpPr txBox="1"/>
+          <p:cNvSpPr txBox="1">
+            <a:spLocks noGrp="1"/>
+          </p:cNvSpPr>
           <p:nvPr>
-            <p:ph idx="12" type="sldNum"/>
+            <p:ph type="sldNum" idx="12"/>
           </p:nvPr>
         </p:nvSpPr>
         <p:spPr>
@@ -5523,7 +5702,7 @@
           </a:prstGeom>
         </p:spPr>
         <p:txBody>
-          <a:bodyPr anchorCtr="0" anchor="ctr" bIns="91425" lIns="91425" spcFirstLastPara="1" rIns="91425" wrap="square" tIns="91425">
+          <a:bodyPr spcFirstLastPara="1" wrap="square" lIns="91425" tIns="91425" rIns="91425" bIns="91425" anchor="ctr" anchorCtr="0">
             <a:normAutofit/>
           </a:bodyPr>
           <a:lstStyle>
@@ -5565,7 +5744,7 @@
             </a:lvl9pPr>
           </a:lstStyle>
           <a:p>
-            <a:pPr indent="0" lvl="0" marL="0" rtl="0" algn="r">
+            <a:pPr marL="0" lvl="0" indent="0" algn="r" rtl="0">
               <a:spcBef>
                 <a:spcPts val="0"/>
               </a:spcBef>
@@ -5591,18 +5770,19 @@
 </file>
 
 <file path=ppt/slideMasters/slideMaster1.xml><?xml version="1.0" encoding="utf-8"?>
-<p:sldMaster xmlns:a="http://schemas.openxmlformats.org/drawingml/2006/main" xmlns:r="http://schemas.openxmlformats.org/officeDocument/2006/relationships" xmlns:mc="http://schemas.openxmlformats.org/markup-compatibility/2006" xmlns:mv="urn:schemas-microsoft-com:mac:vml" xmlns:p="http://schemas.openxmlformats.org/presentationml/2006/main" xmlns:c="http://schemas.openxmlformats.org/drawingml/2006/chart" xmlns:dgm="http://schemas.openxmlformats.org/drawingml/2006/diagram" xmlns:o="urn:schemas-microsoft-com:office:office" xmlns:v="urn:schemas-microsoft-com:vml" xmlns:pvml="urn:schemas-microsoft-com:office:powerpoint" xmlns:com="http://schemas.openxmlformats.org/drawingml/2006/compatibility" xmlns:p14="http://schemas.microsoft.com/office/powerpoint/2010/main" xmlns:p15="http://schemas.microsoft.com/office/powerpoint/2012/main" xmlns:ahyp="http://schemas.microsoft.com/office/drawing/2018/hyperlinkcolor">
+<p:sldMaster xmlns:a="http://schemas.openxmlformats.org/drawingml/2006/main" xmlns:r="http://schemas.openxmlformats.org/officeDocument/2006/relationships" xmlns:p="http://schemas.openxmlformats.org/presentationml/2006/main">
   <p:cSld name="simple-light-2">
     <p:bg>
       <p:bgPr>
         <a:solidFill>
           <a:schemeClr val="lt1"/>
         </a:solidFill>
+        <a:effectLst/>
       </p:bgPr>
     </p:bg>
     <p:spTree>
       <p:nvGrpSpPr>
-        <p:cNvPr id="5" name="Shape 5"/>
+        <p:cNvPr id="1" name="Shape 5"/>
         <p:cNvGrpSpPr/>
         <p:nvPr/>
       </p:nvGrpSpPr>
@@ -5617,7 +5797,9 @@
       <p:sp>
         <p:nvSpPr>
           <p:cNvPr id="6" name="Google Shape;6;p1"/>
-          <p:cNvSpPr txBox="1"/>
+          <p:cNvSpPr txBox="1">
+            <a:spLocks noGrp="1"/>
+          </p:cNvSpPr>
           <p:nvPr>
             <p:ph type="title"/>
           </p:nvPr>
@@ -5636,7 +5818,7 @@
           </a:ln>
         </p:spPr>
         <p:txBody>
-          <a:bodyPr anchorCtr="0" anchor="t" bIns="91425" lIns="91425" spcFirstLastPara="1" rIns="91425" wrap="square" tIns="91425">
+          <a:bodyPr spcFirstLastPara="1" wrap="square" lIns="91425" tIns="91425" rIns="91425" bIns="91425" anchor="t" anchorCtr="0">
             <a:normAutofit/>
           </a:bodyPr>
           <a:lstStyle>
@@ -5803,15 +5985,19 @@
               </a:defRPr>
             </a:lvl9pPr>
           </a:lstStyle>
-          <a:p/>
+          <a:p>
+            <a:endParaRPr/>
+          </a:p>
         </p:txBody>
       </p:sp>
       <p:sp>
         <p:nvSpPr>
           <p:cNvPr id="7" name="Google Shape;7;p1"/>
-          <p:cNvSpPr txBox="1"/>
+          <p:cNvSpPr txBox="1">
+            <a:spLocks noGrp="1"/>
+          </p:cNvSpPr>
           <p:nvPr>
-            <p:ph idx="1" type="body"/>
+            <p:ph type="body" idx="1"/>
           </p:nvPr>
         </p:nvSpPr>
         <p:spPr>
@@ -5828,11 +6014,11 @@
           </a:ln>
         </p:spPr>
         <p:txBody>
-          <a:bodyPr anchorCtr="0" anchor="t" bIns="91425" lIns="91425" spcFirstLastPara="1" rIns="91425" wrap="square" tIns="91425">
+          <a:bodyPr spcFirstLastPara="1" wrap="square" lIns="91425" tIns="91425" rIns="91425" bIns="91425" anchor="t" anchorCtr="0">
             <a:normAutofit/>
           </a:bodyPr>
           <a:lstStyle>
-            <a:lvl1pPr indent="-342900" lvl="0" marL="457200">
+            <a:lvl1pPr marL="457200" lvl="0" indent="-342900">
               <a:lnSpc>
                 <a:spcPct val="115000"/>
               </a:lnSpc>
@@ -5853,7 +6039,7 @@
                 </a:solidFill>
               </a:defRPr>
             </a:lvl1pPr>
-            <a:lvl2pPr indent="-317500" lvl="1" marL="914400">
+            <a:lvl2pPr marL="914400" lvl="1" indent="-317500">
               <a:lnSpc>
                 <a:spcPct val="115000"/>
               </a:lnSpc>
@@ -5874,7 +6060,7 @@
                 </a:solidFill>
               </a:defRPr>
             </a:lvl2pPr>
-            <a:lvl3pPr indent="-317500" lvl="2" marL="1371600">
+            <a:lvl3pPr marL="1371600" lvl="2" indent="-317500">
               <a:lnSpc>
                 <a:spcPct val="115000"/>
               </a:lnSpc>
@@ -5895,7 +6081,7 @@
                 </a:solidFill>
               </a:defRPr>
             </a:lvl3pPr>
-            <a:lvl4pPr indent="-317500" lvl="3" marL="1828800">
+            <a:lvl4pPr marL="1828800" lvl="3" indent="-317500">
               <a:lnSpc>
                 <a:spcPct val="115000"/>
               </a:lnSpc>
@@ -5916,7 +6102,7 @@
                 </a:solidFill>
               </a:defRPr>
             </a:lvl4pPr>
-            <a:lvl5pPr indent="-317500" lvl="4" marL="2286000">
+            <a:lvl5pPr marL="2286000" lvl="4" indent="-317500">
               <a:lnSpc>
                 <a:spcPct val="115000"/>
               </a:lnSpc>
@@ -5937,7 +6123,7 @@
                 </a:solidFill>
               </a:defRPr>
             </a:lvl5pPr>
-            <a:lvl6pPr indent="-317500" lvl="5" marL="2743200">
+            <a:lvl6pPr marL="2743200" lvl="5" indent="-317500">
               <a:lnSpc>
                 <a:spcPct val="115000"/>
               </a:lnSpc>
@@ -5958,7 +6144,7 @@
                 </a:solidFill>
               </a:defRPr>
             </a:lvl6pPr>
-            <a:lvl7pPr indent="-317500" lvl="6" marL="3200400">
+            <a:lvl7pPr marL="3200400" lvl="6" indent="-317500">
               <a:lnSpc>
                 <a:spcPct val="115000"/>
               </a:lnSpc>
@@ -5979,7 +6165,7 @@
                 </a:solidFill>
               </a:defRPr>
             </a:lvl7pPr>
-            <a:lvl8pPr indent="-317500" lvl="7" marL="3657600">
+            <a:lvl8pPr marL="3657600" lvl="7" indent="-317500">
               <a:lnSpc>
                 <a:spcPct val="115000"/>
               </a:lnSpc>
@@ -6000,7 +6186,7 @@
                 </a:solidFill>
               </a:defRPr>
             </a:lvl8pPr>
-            <a:lvl9pPr indent="-317500" lvl="8" marL="4114800">
+            <a:lvl9pPr marL="4114800" lvl="8" indent="-317500">
               <a:lnSpc>
                 <a:spcPct val="115000"/>
               </a:lnSpc>
@@ -6022,15 +6208,19 @@
               </a:defRPr>
             </a:lvl9pPr>
           </a:lstStyle>
-          <a:p/>
+          <a:p>
+            <a:endParaRPr/>
+          </a:p>
         </p:txBody>
       </p:sp>
       <p:sp>
         <p:nvSpPr>
           <p:cNvPr id="8" name="Google Shape;8;p1"/>
-          <p:cNvSpPr txBox="1"/>
+          <p:cNvSpPr txBox="1">
+            <a:spLocks noGrp="1"/>
+          </p:cNvSpPr>
           <p:nvPr>
-            <p:ph idx="12" type="sldNum"/>
+            <p:ph type="sldNum" idx="12"/>
           </p:nvPr>
         </p:nvSpPr>
         <p:spPr>
@@ -6047,7 +6237,7 @@
           </a:ln>
         </p:spPr>
         <p:txBody>
-          <a:bodyPr anchorCtr="0" anchor="ctr" bIns="91425" lIns="91425" spcFirstLastPara="1" rIns="91425" wrap="square" tIns="91425">
+          <a:bodyPr spcFirstLastPara="1" wrap="square" lIns="91425" tIns="91425" rIns="91425" bIns="91425" anchor="ctr" anchorCtr="0">
             <a:normAutofit/>
           </a:bodyPr>
           <a:lstStyle>
@@ -6125,7 +6315,7 @@
             </a:lvl9pPr>
           </a:lstStyle>
           <a:p>
-            <a:pPr indent="0" lvl="0" marL="0" rtl="0" algn="r">
+            <a:pPr marL="0" lvl="0" indent="0" algn="r" rtl="0">
               <a:spcBef>
                 <a:spcPts val="0"/>
               </a:spcBef>
@@ -6144,7 +6334,7 @@
       </p:sp>
     </p:spTree>
   </p:cSld>
-  <p:clrMap accent1="accent1" accent2="accent2" accent3="accent3" accent4="accent4" accent5="accent5" accent6="accent6" bg1="lt1" bg2="dk2" tx1="dk1" tx2="lt2" folHlink="folHlink" hlink="hlink"/>
+  <p:clrMap bg1="lt1" tx1="dk1" bg2="dk2" tx2="lt2" accent1="accent1" accent2="accent2" accent3="accent3" accent4="accent4" accent5="accent5" accent6="accent6" hlink="hlink" folHlink="folHlink"/>
   <p:sldLayoutIdLst>
     <p:sldLayoutId id="2147483648" r:id="rId1"/>
     <p:sldLayoutId id="2147483649" r:id="rId2"/>
@@ -6158,10 +6348,10 @@
     <p:sldLayoutId id="2147483657" r:id="rId10"/>
     <p:sldLayoutId id="2147483658" r:id="rId11"/>
   </p:sldLayoutIdLst>
-  <p:hf dt="0" ftr="0" hdr="0" sldNum="0"/>
+  <p:hf sldNum="0" hdr="0" ftr="0" dt="0"/>
   <p:txStyles>
     <p:titleStyle>
-      <a:defPPr lvl="0" marR="0" rtl="0" algn="l">
+      <a:defPPr marR="0" lvl="0" algn="l" rtl="0">
         <a:lnSpc>
           <a:spcPct val="100000"/>
         </a:lnSpc>
@@ -6172,7 +6362,7 @@
           <a:spcPts val="0"/>
         </a:spcAft>
       </a:defPPr>
-      <a:lvl1pPr lvl="0" marR="0" rtl="0" algn="l">
+      <a:lvl1pPr marR="0" lvl="0" algn="l" rtl="0">
         <a:lnSpc>
           <a:spcPct val="100000"/>
         </a:lnSpc>
@@ -6186,7 +6376,7 @@
           <a:srgbClr val="000000"/>
         </a:buClr>
         <a:buFont typeface="Arial"/>
-        <a:defRPr b="0" i="0" spc="0" sz="1400" u="none" cap="none" strike="noStrike">
+        <a:defRPr sz="1400" b="0" i="0" u="none" strike="noStrike" cap="none" spc="0">
           <a:solidFill>
             <a:srgbClr val="000000"/>
           </a:solidFill>
@@ -6196,7 +6386,7 @@
           <a:sym typeface="Arial"/>
         </a:defRPr>
       </a:lvl1pPr>
-      <a:lvl2pPr lvl="1" marR="0" rtl="0" algn="l">
+      <a:lvl2pPr marR="0" lvl="1" algn="l" rtl="0">
         <a:lnSpc>
           <a:spcPct val="100000"/>
         </a:lnSpc>
@@ -6210,7 +6400,7 @@
           <a:srgbClr val="000000"/>
         </a:buClr>
         <a:buFont typeface="Arial"/>
-        <a:defRPr b="0" i="0" spc="0" sz="1400" u="none" cap="none" strike="noStrike">
+        <a:defRPr sz="1400" b="0" i="0" u="none" strike="noStrike" cap="none" spc="0">
           <a:solidFill>
             <a:srgbClr val="000000"/>
           </a:solidFill>
@@ -6220,7 +6410,7 @@
           <a:sym typeface="Arial"/>
         </a:defRPr>
       </a:lvl2pPr>
-      <a:lvl3pPr lvl="2" marR="0" rtl="0" algn="l">
+      <a:lvl3pPr marR="0" lvl="2" algn="l" rtl="0">
         <a:lnSpc>
           <a:spcPct val="100000"/>
         </a:lnSpc>
@@ -6234,7 +6424,7 @@
           <a:srgbClr val="000000"/>
         </a:buClr>
         <a:buFont typeface="Arial"/>
-        <a:defRPr b="0" i="0" spc="0" sz="1400" u="none" cap="none" strike="noStrike">
+        <a:defRPr sz="1400" b="0" i="0" u="none" strike="noStrike" cap="none" spc="0">
           <a:solidFill>
             <a:srgbClr val="000000"/>
           </a:solidFill>
@@ -6244,7 +6434,7 @@
           <a:sym typeface="Arial"/>
         </a:defRPr>
       </a:lvl3pPr>
-      <a:lvl4pPr lvl="3" marR="0" rtl="0" algn="l">
+      <a:lvl4pPr marR="0" lvl="3" algn="l" rtl="0">
         <a:lnSpc>
           <a:spcPct val="100000"/>
         </a:lnSpc>
@@ -6258,7 +6448,7 @@
           <a:srgbClr val="000000"/>
         </a:buClr>
         <a:buFont typeface="Arial"/>
-        <a:defRPr b="0" i="0" spc="0" sz="1400" u="none" cap="none" strike="noStrike">
+        <a:defRPr sz="1400" b="0" i="0" u="none" strike="noStrike" cap="none" spc="0">
           <a:solidFill>
             <a:srgbClr val="000000"/>
           </a:solidFill>
@@ -6268,7 +6458,7 @@
           <a:sym typeface="Arial"/>
         </a:defRPr>
       </a:lvl4pPr>
-      <a:lvl5pPr lvl="4" marR="0" rtl="0" algn="l">
+      <a:lvl5pPr marR="0" lvl="4" algn="l" rtl="0">
         <a:lnSpc>
           <a:spcPct val="100000"/>
         </a:lnSpc>
@@ -6282,7 +6472,7 @@
           <a:srgbClr val="000000"/>
         </a:buClr>
         <a:buFont typeface="Arial"/>
-        <a:defRPr b="0" i="0" spc="0" sz="1400" u="none" cap="none" strike="noStrike">
+        <a:defRPr sz="1400" b="0" i="0" u="none" strike="noStrike" cap="none" spc="0">
           <a:solidFill>
             <a:srgbClr val="000000"/>
           </a:solidFill>
@@ -6292,7 +6482,7 @@
           <a:sym typeface="Arial"/>
         </a:defRPr>
       </a:lvl5pPr>
-      <a:lvl6pPr lvl="5" marR="0" rtl="0" algn="l">
+      <a:lvl6pPr marR="0" lvl="5" algn="l" rtl="0">
         <a:lnSpc>
           <a:spcPct val="100000"/>
         </a:lnSpc>
@@ -6306,7 +6496,7 @@
           <a:srgbClr val="000000"/>
         </a:buClr>
         <a:buFont typeface="Arial"/>
-        <a:defRPr b="0" i="0" spc="0" sz="1400" u="none" cap="none" strike="noStrike">
+        <a:defRPr sz="1400" b="0" i="0" u="none" strike="noStrike" cap="none" spc="0">
           <a:solidFill>
             <a:srgbClr val="000000"/>
           </a:solidFill>
@@ -6316,7 +6506,7 @@
           <a:sym typeface="Arial"/>
         </a:defRPr>
       </a:lvl6pPr>
-      <a:lvl7pPr lvl="6" marR="0" rtl="0" algn="l">
+      <a:lvl7pPr marR="0" lvl="6" algn="l" rtl="0">
         <a:lnSpc>
           <a:spcPct val="100000"/>
         </a:lnSpc>
@@ -6330,7 +6520,7 @@
           <a:srgbClr val="000000"/>
         </a:buClr>
         <a:buFont typeface="Arial"/>
-        <a:defRPr b="0" i="0" spc="0" sz="1400" u="none" cap="none" strike="noStrike">
+        <a:defRPr sz="1400" b="0" i="0" u="none" strike="noStrike" cap="none" spc="0">
           <a:solidFill>
             <a:srgbClr val="000000"/>
           </a:solidFill>
@@ -6340,7 +6530,7 @@
           <a:sym typeface="Arial"/>
         </a:defRPr>
       </a:lvl7pPr>
-      <a:lvl8pPr lvl="7" marR="0" rtl="0" algn="l">
+      <a:lvl8pPr marR="0" lvl="7" algn="l" rtl="0">
         <a:lnSpc>
           <a:spcPct val="100000"/>
         </a:lnSpc>
@@ -6354,7 +6544,7 @@
           <a:srgbClr val="000000"/>
         </a:buClr>
         <a:buFont typeface="Arial"/>
-        <a:defRPr b="0" i="0" spc="0" sz="1400" u="none" cap="none" strike="noStrike">
+        <a:defRPr sz="1400" b="0" i="0" u="none" strike="noStrike" cap="none" spc="0">
           <a:solidFill>
             <a:srgbClr val="000000"/>
           </a:solidFill>
@@ -6364,7 +6554,7 @@
           <a:sym typeface="Arial"/>
         </a:defRPr>
       </a:lvl8pPr>
-      <a:lvl9pPr lvl="8" marR="0" rtl="0" algn="l">
+      <a:lvl9pPr marR="0" lvl="8" algn="l" rtl="0">
         <a:lnSpc>
           <a:spcPct val="100000"/>
         </a:lnSpc>
@@ -6378,7 +6568,7 @@
           <a:srgbClr val="000000"/>
         </a:buClr>
         <a:buFont typeface="Arial"/>
-        <a:defRPr b="0" i="0" spc="0" sz="1400" u="none" cap="none" strike="noStrike">
+        <a:defRPr sz="1400" b="0" i="0" u="none" strike="noStrike" cap="none" spc="0">
           <a:solidFill>
             <a:srgbClr val="000000"/>
           </a:solidFill>
@@ -6390,7 +6580,7 @@
       </a:lvl9pPr>
     </p:titleStyle>
     <p:bodyStyle>
-      <a:defPPr lvl="0" marR="0" rtl="0" algn="l">
+      <a:defPPr marR="0" lvl="0" algn="l" rtl="0">
         <a:lnSpc>
           <a:spcPct val="100000"/>
         </a:lnSpc>
@@ -6401,7 +6591,7 @@
           <a:spcPts val="0"/>
         </a:spcAft>
       </a:defPPr>
-      <a:lvl1pPr lvl="0" marR="0" rtl="0" algn="l">
+      <a:lvl1pPr marR="0" lvl="0" algn="l" rtl="0">
         <a:lnSpc>
           <a:spcPct val="100000"/>
         </a:lnSpc>
@@ -6415,7 +6605,7 @@
           <a:srgbClr val="000000"/>
         </a:buClr>
         <a:buFont typeface="Arial"/>
-        <a:defRPr b="0" i="0" spc="0" sz="1400" u="none" cap="none" strike="noStrike">
+        <a:defRPr sz="1400" b="0" i="0" u="none" strike="noStrike" cap="none" spc="0">
           <a:solidFill>
             <a:srgbClr val="000000"/>
           </a:solidFill>
@@ -6425,7 +6615,7 @@
           <a:sym typeface="Arial"/>
         </a:defRPr>
       </a:lvl1pPr>
-      <a:lvl2pPr lvl="1" marR="0" rtl="0" algn="l">
+      <a:lvl2pPr marR="0" lvl="1" algn="l" rtl="0">
         <a:lnSpc>
           <a:spcPct val="100000"/>
         </a:lnSpc>
@@ -6439,7 +6629,7 @@
           <a:srgbClr val="000000"/>
         </a:buClr>
         <a:buFont typeface="Arial"/>
-        <a:defRPr b="0" i="0" spc="0" sz="1400" u="none" cap="none" strike="noStrike">
+        <a:defRPr sz="1400" b="0" i="0" u="none" strike="noStrike" cap="none" spc="0">
           <a:solidFill>
             <a:srgbClr val="000000"/>
           </a:solidFill>
@@ -6449,7 +6639,7 @@
           <a:sym typeface="Arial"/>
         </a:defRPr>
       </a:lvl2pPr>
-      <a:lvl3pPr lvl="2" marR="0" rtl="0" algn="l">
+      <a:lvl3pPr marR="0" lvl="2" algn="l" rtl="0">
         <a:lnSpc>
           <a:spcPct val="100000"/>
         </a:lnSpc>
@@ -6463,7 +6653,7 @@
           <a:srgbClr val="000000"/>
         </a:buClr>
         <a:buFont typeface="Arial"/>
-        <a:defRPr b="0" i="0" spc="0" sz="1400" u="none" cap="none" strike="noStrike">
+        <a:defRPr sz="1400" b="0" i="0" u="none" strike="noStrike" cap="none" spc="0">
           <a:solidFill>
             <a:srgbClr val="000000"/>
           </a:solidFill>
@@ -6473,7 +6663,7 @@
           <a:sym typeface="Arial"/>
         </a:defRPr>
       </a:lvl3pPr>
-      <a:lvl4pPr lvl="3" marR="0" rtl="0" algn="l">
+      <a:lvl4pPr marR="0" lvl="3" algn="l" rtl="0">
         <a:lnSpc>
           <a:spcPct val="100000"/>
         </a:lnSpc>
@@ -6487,7 +6677,7 @@
           <a:srgbClr val="000000"/>
         </a:buClr>
         <a:buFont typeface="Arial"/>
-        <a:defRPr b="0" i="0" spc="0" sz="1400" u="none" cap="none" strike="noStrike">
+        <a:defRPr sz="1400" b="0" i="0" u="none" strike="noStrike" cap="none" spc="0">
           <a:solidFill>
             <a:srgbClr val="000000"/>
           </a:solidFill>
@@ -6497,7 +6687,7 @@
           <a:sym typeface="Arial"/>
         </a:defRPr>
       </a:lvl4pPr>
-      <a:lvl5pPr lvl="4" marR="0" rtl="0" algn="l">
+      <a:lvl5pPr marR="0" lvl="4" algn="l" rtl="0">
         <a:lnSpc>
           <a:spcPct val="100000"/>
         </a:lnSpc>
@@ -6511,7 +6701,7 @@
           <a:srgbClr val="000000"/>
         </a:buClr>
         <a:buFont typeface="Arial"/>
-        <a:defRPr b="0" i="0" spc="0" sz="1400" u="none" cap="none" strike="noStrike">
+        <a:defRPr sz="1400" b="0" i="0" u="none" strike="noStrike" cap="none" spc="0">
           <a:solidFill>
             <a:srgbClr val="000000"/>
           </a:solidFill>
@@ -6521,7 +6711,7 @@
           <a:sym typeface="Arial"/>
         </a:defRPr>
       </a:lvl5pPr>
-      <a:lvl6pPr lvl="5" marR="0" rtl="0" algn="l">
+      <a:lvl6pPr marR="0" lvl="5" algn="l" rtl="0">
         <a:lnSpc>
           <a:spcPct val="100000"/>
         </a:lnSpc>
@@ -6535,7 +6725,7 @@
           <a:srgbClr val="000000"/>
         </a:buClr>
         <a:buFont typeface="Arial"/>
-        <a:defRPr b="0" i="0" spc="0" sz="1400" u="none" cap="none" strike="noStrike">
+        <a:defRPr sz="1400" b="0" i="0" u="none" strike="noStrike" cap="none" spc="0">
           <a:solidFill>
             <a:srgbClr val="000000"/>
           </a:solidFill>
@@ -6545,7 +6735,7 @@
           <a:sym typeface="Arial"/>
         </a:defRPr>
       </a:lvl6pPr>
-      <a:lvl7pPr lvl="6" marR="0" rtl="0" algn="l">
+      <a:lvl7pPr marR="0" lvl="6" algn="l" rtl="0">
         <a:lnSpc>
           <a:spcPct val="100000"/>
         </a:lnSpc>
@@ -6559,7 +6749,7 @@
           <a:srgbClr val="000000"/>
         </a:buClr>
         <a:buFont typeface="Arial"/>
-        <a:defRPr b="0" i="0" spc="0" sz="1400" u="none" cap="none" strike="noStrike">
+        <a:defRPr sz="1400" b="0" i="0" u="none" strike="noStrike" cap="none" spc="0">
           <a:solidFill>
             <a:srgbClr val="000000"/>
           </a:solidFill>
@@ -6569,7 +6759,7 @@
           <a:sym typeface="Arial"/>
         </a:defRPr>
       </a:lvl7pPr>
-      <a:lvl8pPr lvl="7" marR="0" rtl="0" algn="l">
+      <a:lvl8pPr marR="0" lvl="7" algn="l" rtl="0">
         <a:lnSpc>
           <a:spcPct val="100000"/>
         </a:lnSpc>
@@ -6583,7 +6773,7 @@
           <a:srgbClr val="000000"/>
         </a:buClr>
         <a:buFont typeface="Arial"/>
-        <a:defRPr b="0" i="0" spc="0" sz="1400" u="none" cap="none" strike="noStrike">
+        <a:defRPr sz="1400" b="0" i="0" u="none" strike="noStrike" cap="none" spc="0">
           <a:solidFill>
             <a:srgbClr val="000000"/>
           </a:solidFill>
@@ -6593,7 +6783,7 @@
           <a:sym typeface="Arial"/>
         </a:defRPr>
       </a:lvl8pPr>
-      <a:lvl9pPr lvl="8" marR="0" rtl="0" algn="l">
+      <a:lvl9pPr marR="0" lvl="8" algn="l" rtl="0">
         <a:lnSpc>
           <a:spcPct val="100000"/>
         </a:lnSpc>
@@ -6607,7 +6797,7 @@
           <a:srgbClr val="000000"/>
         </a:buClr>
         <a:buFont typeface="Arial"/>
-        <a:defRPr b="0" i="0" spc="0" sz="1400" u="none" cap="none" strike="noStrike">
+        <a:defRPr sz="1400" b="0" i="0" u="none" strike="noStrike" cap="none" spc="0">
           <a:solidFill>
             <a:srgbClr val="000000"/>
           </a:solidFill>
@@ -6619,7 +6809,7 @@
       </a:lvl9pPr>
     </p:bodyStyle>
     <p:otherStyle>
-      <a:defPPr lvl="0" marR="0" rtl="0" algn="l">
+      <a:defPPr marR="0" lvl="0" algn="l" rtl="0">
         <a:lnSpc>
           <a:spcPct val="100000"/>
         </a:lnSpc>
@@ -6630,7 +6820,7 @@
           <a:spcPts val="0"/>
         </a:spcAft>
       </a:defPPr>
-      <a:lvl1pPr lvl="0" marR="0" rtl="0" algn="l">
+      <a:lvl1pPr marR="0" lvl="0" algn="l" rtl="0">
         <a:lnSpc>
           <a:spcPct val="100000"/>
         </a:lnSpc>
@@ -6644,7 +6834,7 @@
           <a:srgbClr val="000000"/>
         </a:buClr>
         <a:buFont typeface="Arial"/>
-        <a:defRPr b="0" i="0" spc="0" sz="1400" u="none" cap="none" strike="noStrike">
+        <a:defRPr sz="1400" b="0" i="0" u="none" strike="noStrike" cap="none" spc="0">
           <a:solidFill>
             <a:srgbClr val="000000"/>
           </a:solidFill>
@@ -6654,7 +6844,7 @@
           <a:sym typeface="Arial"/>
         </a:defRPr>
       </a:lvl1pPr>
-      <a:lvl2pPr lvl="1" marR="0" rtl="0" algn="l">
+      <a:lvl2pPr marR="0" lvl="1" algn="l" rtl="0">
         <a:lnSpc>
           <a:spcPct val="100000"/>
         </a:lnSpc>
@@ -6668,7 +6858,7 @@
           <a:srgbClr val="000000"/>
         </a:buClr>
         <a:buFont typeface="Arial"/>
-        <a:defRPr b="0" i="0" spc="0" sz="1400" u="none" cap="none" strike="noStrike">
+        <a:defRPr sz="1400" b="0" i="0" u="none" strike="noStrike" cap="none" spc="0">
           <a:solidFill>
             <a:srgbClr val="000000"/>
           </a:solidFill>
@@ -6678,7 +6868,7 @@
           <a:sym typeface="Arial"/>
         </a:defRPr>
       </a:lvl2pPr>
-      <a:lvl3pPr lvl="2" marR="0" rtl="0" algn="l">
+      <a:lvl3pPr marR="0" lvl="2" algn="l" rtl="0">
         <a:lnSpc>
           <a:spcPct val="100000"/>
         </a:lnSpc>
@@ -6692,7 +6882,7 @@
           <a:srgbClr val="000000"/>
         </a:buClr>
         <a:buFont typeface="Arial"/>
-        <a:defRPr b="0" i="0" spc="0" sz="1400" u="none" cap="none" strike="noStrike">
+        <a:defRPr sz="1400" b="0" i="0" u="none" strike="noStrike" cap="none" spc="0">
           <a:solidFill>
             <a:srgbClr val="000000"/>
           </a:solidFill>
@@ -6702,7 +6892,7 @@
           <a:sym typeface="Arial"/>
         </a:defRPr>
       </a:lvl3pPr>
-      <a:lvl4pPr lvl="3" marR="0" rtl="0" algn="l">
+      <a:lvl4pPr marR="0" lvl="3" algn="l" rtl="0">
         <a:lnSpc>
           <a:spcPct val="100000"/>
         </a:lnSpc>
@@ -6716,7 +6906,7 @@
           <a:srgbClr val="000000"/>
         </a:buClr>
         <a:buFont typeface="Arial"/>
-        <a:defRPr b="0" i="0" spc="0" sz="1400" u="none" cap="none" strike="noStrike">
+        <a:defRPr sz="1400" b="0" i="0" u="none" strike="noStrike" cap="none" spc="0">
           <a:solidFill>
             <a:srgbClr val="000000"/>
           </a:solidFill>
@@ -6726,7 +6916,7 @@
           <a:sym typeface="Arial"/>
         </a:defRPr>
       </a:lvl4pPr>
-      <a:lvl5pPr lvl="4" marR="0" rtl="0" algn="l">
+      <a:lvl5pPr marR="0" lvl="4" algn="l" rtl="0">
         <a:lnSpc>
           <a:spcPct val="100000"/>
         </a:lnSpc>
@@ -6740,7 +6930,7 @@
           <a:srgbClr val="000000"/>
         </a:buClr>
         <a:buFont typeface="Arial"/>
-        <a:defRPr b="0" i="0" spc="0" sz="1400" u="none" cap="none" strike="noStrike">
+        <a:defRPr sz="1400" b="0" i="0" u="none" strike="noStrike" cap="none" spc="0">
           <a:solidFill>
             <a:srgbClr val="000000"/>
           </a:solidFill>
@@ -6750,7 +6940,7 @@
           <a:sym typeface="Arial"/>
         </a:defRPr>
       </a:lvl5pPr>
-      <a:lvl6pPr lvl="5" marR="0" rtl="0" algn="l">
+      <a:lvl6pPr marR="0" lvl="5" algn="l" rtl="0">
         <a:lnSpc>
           <a:spcPct val="100000"/>
         </a:lnSpc>
@@ -6764,7 +6954,7 @@
           <a:srgbClr val="000000"/>
         </a:buClr>
         <a:buFont typeface="Arial"/>
-        <a:defRPr b="0" i="0" spc="0" sz="1400" u="none" cap="none" strike="noStrike">
+        <a:defRPr sz="1400" b="0" i="0" u="none" strike="noStrike" cap="none" spc="0">
           <a:solidFill>
             <a:srgbClr val="000000"/>
           </a:solidFill>
@@ -6774,7 +6964,7 @@
           <a:sym typeface="Arial"/>
         </a:defRPr>
       </a:lvl6pPr>
-      <a:lvl7pPr lvl="6" marR="0" rtl="0" algn="l">
+      <a:lvl7pPr marR="0" lvl="6" algn="l" rtl="0">
         <a:lnSpc>
           <a:spcPct val="100000"/>
         </a:lnSpc>
@@ -6788,7 +6978,7 @@
           <a:srgbClr val="000000"/>
         </a:buClr>
         <a:buFont typeface="Arial"/>
-        <a:defRPr b="0" i="0" spc="0" sz="1400" u="none" cap="none" strike="noStrike">
+        <a:defRPr sz="1400" b="0" i="0" u="none" strike="noStrike" cap="none" spc="0">
           <a:solidFill>
             <a:srgbClr val="000000"/>
           </a:solidFill>
@@ -6798,7 +6988,7 @@
           <a:sym typeface="Arial"/>
         </a:defRPr>
       </a:lvl7pPr>
-      <a:lvl8pPr lvl="7" marR="0" rtl="0" algn="l">
+      <a:lvl8pPr marR="0" lvl="7" algn="l" rtl="0">
         <a:lnSpc>
           <a:spcPct val="100000"/>
         </a:lnSpc>
@@ -6812,7 +7002,7 @@
           <a:srgbClr val="000000"/>
         </a:buClr>
         <a:buFont typeface="Arial"/>
-        <a:defRPr b="0" i="0" spc="0" sz="1400" u="none" cap="none" strike="noStrike">
+        <a:defRPr sz="1400" b="0" i="0" u="none" strike="noStrike" cap="none" spc="0">
           <a:solidFill>
             <a:srgbClr val="000000"/>
           </a:solidFill>
@@ -6822,7 +7012,7 @@
           <a:sym typeface="Arial"/>
         </a:defRPr>
       </a:lvl8pPr>
-      <a:lvl9pPr lvl="8" marR="0" rtl="0" algn="l">
+      <a:lvl9pPr marR="0" lvl="8" algn="l" rtl="0">
         <a:lnSpc>
           <a:spcPct val="100000"/>
         </a:lnSpc>
@@ -6836,7 +7026,7 @@
           <a:srgbClr val="000000"/>
         </a:buClr>
         <a:buFont typeface="Arial"/>
-        <a:defRPr b="0" i="0" spc="0" sz="1400" u="none" cap="none" strike="noStrike">
+        <a:defRPr sz="1400" b="0" i="0" u="none" strike="noStrike" cap="none" spc="0">
           <a:solidFill>
             <a:srgbClr val="000000"/>
           </a:solidFill>
@@ -6852,11 +7042,11 @@
 </file>
 
 <file path=ppt/slides/slide1.xml><?xml version="1.0" encoding="utf-8"?>
-<p:sld xmlns:a="http://schemas.openxmlformats.org/drawingml/2006/main" xmlns:r="http://schemas.openxmlformats.org/officeDocument/2006/relationships" xmlns:mc="http://schemas.openxmlformats.org/markup-compatibility/2006" xmlns:mv="urn:schemas-microsoft-com:mac:vml" xmlns:p="http://schemas.openxmlformats.org/presentationml/2006/main" xmlns:c="http://schemas.openxmlformats.org/drawingml/2006/chart" xmlns:dgm="http://schemas.openxmlformats.org/drawingml/2006/diagram" xmlns:o="urn:schemas-microsoft-com:office:office" xmlns:v="urn:schemas-microsoft-com:vml" xmlns:pvml="urn:schemas-microsoft-com:office:powerpoint" xmlns:com="http://schemas.openxmlformats.org/drawingml/2006/compatibility" xmlns:p14="http://schemas.microsoft.com/office/powerpoint/2010/main" xmlns:p15="http://schemas.microsoft.com/office/powerpoint/2012/main" xmlns:ahyp="http://schemas.microsoft.com/office/drawing/2018/hyperlinkcolor">
+<p:sld xmlns:a="http://schemas.openxmlformats.org/drawingml/2006/main" xmlns:r="http://schemas.openxmlformats.org/officeDocument/2006/relationships" xmlns:p="http://schemas.openxmlformats.org/presentationml/2006/main">
   <p:cSld>
     <p:spTree>
       <p:nvGrpSpPr>
-        <p:cNvPr id="53" name="Shape 53"/>
+        <p:cNvPr id="1" name="Shape 53"/>
         <p:cNvGrpSpPr/>
         <p:nvPr/>
       </p:nvGrpSpPr>
@@ -6888,22 +7078,22 @@
           </a:ln>
         </p:spPr>
         <p:txBody>
-          <a:bodyPr anchorCtr="0" anchor="t" bIns="91425" lIns="91425" spcFirstLastPara="1" rIns="91425" wrap="square" tIns="91425">
+          <a:bodyPr spcFirstLastPara="1" wrap="square" lIns="91425" tIns="91425" rIns="91425" bIns="91425" anchor="t" anchorCtr="0">
             <a:noAutofit/>
           </a:bodyPr>
           <a:lstStyle/>
           <a:p>
-            <a:pPr indent="0" lvl="0" marL="0" rtl="0" algn="l">
-              <a:spcBef>
-                <a:spcPts val="0"/>
-              </a:spcBef>
-              <a:spcAft>
-                <a:spcPts val="0"/>
-              </a:spcAft>
-              <a:buNone/>
-            </a:pPr>
-            <a:r>
-              <a:rPr lang="en-GB" sz="2100">
+            <a:pPr marL="0" lvl="0" indent="0" algn="l" rtl="0">
+              <a:spcBef>
+                <a:spcPts val="0"/>
+              </a:spcBef>
+              <a:spcAft>
+                <a:spcPts val="0"/>
+              </a:spcAft>
+              <a:buNone/>
+            </a:pPr>
+            <a:r>
+              <a:rPr lang="en-GB" sz="2100" dirty="0">
                 <a:latin typeface="Google Sans Flex SemiBold"/>
                 <a:ea typeface="Google Sans Flex SemiBold"/>
                 <a:cs typeface="Google Sans Flex SemiBold"/>
@@ -6911,7 +7101,7 @@
               </a:rPr>
               <a:t>Team Details</a:t>
             </a:r>
-            <a:endParaRPr sz="2100">
+            <a:endParaRPr sz="2100" dirty="0">
               <a:latin typeface="Google Sans Flex SemiBold"/>
               <a:ea typeface="Google Sans Flex SemiBold"/>
               <a:cs typeface="Google Sans Flex SemiBold"/>
@@ -6919,19 +7109,16 @@
             </a:endParaRPr>
           </a:p>
           <a:p>
-            <a:pPr indent="0" lvl="0" marL="0" rtl="0" algn="l">
-              <a:spcBef>
-                <a:spcPts val="0"/>
-              </a:spcBef>
-              <a:spcAft>
-                <a:spcPts val="0"/>
-              </a:spcAft>
-              <a:buNone/>
-            </a:pPr>
-            <a:r>
-              <a:t/>
-            </a:r>
-            <a:endParaRPr sz="1800">
+            <a:pPr marL="0" lvl="0" indent="0" algn="l" rtl="0">
+              <a:spcBef>
+                <a:spcPts val="0"/>
+              </a:spcBef>
+              <a:spcAft>
+                <a:spcPts val="0"/>
+              </a:spcAft>
+              <a:buNone/>
+            </a:pPr>
+            <a:endParaRPr sz="1800" dirty="0">
               <a:latin typeface="Google Sans Flex Medium"/>
               <a:ea typeface="Google Sans Flex Medium"/>
               <a:cs typeface="Google Sans Flex Medium"/>
@@ -6939,7 +7126,7 @@
             </a:endParaRPr>
           </a:p>
           <a:p>
-            <a:pPr indent="-342900" lvl="1" marL="914400" rtl="0" algn="l">
+            <a:pPr marL="914400" lvl="1" indent="-342900" algn="l" rtl="0">
               <a:spcBef>
                 <a:spcPts val="0"/>
               </a:spcBef>
@@ -6951,7 +7138,7 @@
               <a:buAutoNum type="alphaLcPeriod"/>
             </a:pPr>
             <a:r>
-              <a:rPr lang="en-GB" sz="1500">
+              <a:rPr lang="en-GB" sz="1500" dirty="0">
                 <a:latin typeface="Google Sans Flex"/>
                 <a:ea typeface="Google Sans Flex"/>
                 <a:cs typeface="Google Sans Flex"/>
@@ -6960,12 +7147,18 @@
               <a:t>Team name: </a:t>
             </a:r>
             <a:r>
-              <a:rPr sz="1500" b="1">
+              <a:rPr sz="1500" b="1" dirty="0">
                 <a:latin typeface="Arial"/>
               </a:rPr>
-              <a:t> Team Anvil</a:t>
-            </a:r>
-            <a:endParaRPr sz="1800">
+              <a:t> </a:t>
+            </a:r>
+            <a:r>
+              <a:rPr lang="en-IN" sz="1500" b="1" dirty="0">
+                <a:latin typeface="Arial"/>
+              </a:rPr>
+              <a:t> Prompt Pirates</a:t>
+            </a:r>
+            <a:endParaRPr sz="1800" dirty="0">
               <a:latin typeface="Google Sans Flex"/>
               <a:ea typeface="Google Sans Flex"/>
               <a:cs typeface="Google Sans Flex"/>
@@ -6973,7 +7166,7 @@
             </a:endParaRPr>
           </a:p>
           <a:p>
-            <a:pPr indent="-342900" lvl="1" marL="914400" rtl="0" algn="l">
+            <a:pPr marL="914400" lvl="1" indent="-342900" algn="l" rtl="0">
               <a:spcBef>
                 <a:spcPts val="0"/>
               </a:spcBef>
@@ -6985,7 +7178,7 @@
               <a:buAutoNum type="alphaLcPeriod"/>
             </a:pPr>
             <a:r>
-              <a:rPr lang="en-GB" sz="1500">
+              <a:rPr lang="en-GB" sz="1500" dirty="0">
                 <a:latin typeface="Google Sans Flex"/>
                 <a:ea typeface="Google Sans Flex"/>
                 <a:cs typeface="Google Sans Flex"/>
@@ -6994,12 +7187,24 @@
               <a:t>Team leader name: </a:t>
             </a:r>
             <a:r>
-              <a:rPr sz="1500" b="1">
+              <a:rPr sz="1500" b="1" dirty="0">
                 <a:latin typeface="Arial"/>
               </a:rPr>
-              <a:t> Adhish Sekar</a:t>
-            </a:r>
-            <a:endParaRPr sz="1800">
+              <a:t> </a:t>
+            </a:r>
+            <a:r>
+              <a:rPr sz="1500" b="1" dirty="0" err="1">
+                <a:latin typeface="Arial"/>
+              </a:rPr>
+              <a:t>Adhish</a:t>
+            </a:r>
+            <a:r>
+              <a:rPr sz="1500" b="1" dirty="0">
+                <a:latin typeface="Arial"/>
+              </a:rPr>
+              <a:t> Sekar</a:t>
+            </a:r>
+            <a:endParaRPr sz="1800" dirty="0">
               <a:latin typeface="Google Sans Flex"/>
               <a:ea typeface="Google Sans Flex"/>
               <a:cs typeface="Google Sans Flex"/>
@@ -7007,7 +7212,7 @@
             </a:endParaRPr>
           </a:p>
           <a:p>
-            <a:pPr indent="-342900" lvl="1" marL="914400" rtl="0" algn="l">
+            <a:pPr marL="914400" lvl="1" indent="-342900" algn="l" rtl="0">
               <a:spcBef>
                 <a:spcPts val="0"/>
               </a:spcBef>
@@ -7019,7 +7224,7 @@
               <a:buAutoNum type="alphaLcPeriod"/>
             </a:pPr>
             <a:r>
-              <a:rPr lang="en-GB" sz="1200">
+              <a:rPr lang="en-GB" sz="1200" dirty="0">
                 <a:latin typeface="Google Sans Flex"/>
                 <a:ea typeface="Google Sans Flex"/>
                 <a:cs typeface="Google Sans Flex"/>
@@ -7028,12 +7233,12 @@
               <a:t>Problem Statement: </a:t>
             </a:r>
             <a:r>
-              <a:rPr sz="1200" b="0">
+              <a:rPr sz="1200" b="0" dirty="0">
                 <a:latin typeface="Arial"/>
               </a:rPr>
               <a:t> How can enterprises let AI agents spend money on their behalf while guaranteeing that every action stays within what a human authorized? Track: Future of work and enterprise productivity.</a:t>
             </a:r>
-            <a:endParaRPr sz="1800">
+            <a:endParaRPr sz="1800" dirty="0">
               <a:latin typeface="Google Sans Flex"/>
               <a:ea typeface="Google Sans Flex"/>
               <a:cs typeface="Google Sans Flex"/>
@@ -7041,19 +7246,16 @@
             </a:endParaRPr>
           </a:p>
           <a:p>
-            <a:pPr indent="0" lvl="0" marL="0" rtl="0" algn="l">
-              <a:spcBef>
-                <a:spcPts val="0"/>
-              </a:spcBef>
-              <a:spcAft>
-                <a:spcPts val="0"/>
-              </a:spcAft>
-              <a:buNone/>
-            </a:pPr>
-            <a:r>
-              <a:t/>
-            </a:r>
-            <a:endParaRPr sz="1800">
+            <a:pPr marL="0" lvl="0" indent="0" algn="l" rtl="0">
+              <a:spcBef>
+                <a:spcPts val="0"/>
+              </a:spcBef>
+              <a:spcAft>
+                <a:spcPts val="0"/>
+              </a:spcAft>
+              <a:buNone/>
+            </a:pPr>
+            <a:endParaRPr sz="1800" dirty="0">
               <a:latin typeface="Google Sans Flex Medium"/>
               <a:ea typeface="Google Sans Flex Medium"/>
               <a:cs typeface="Google Sans Flex Medium"/>
@@ -7100,7 +7302,7 @@
           <a:blip r:embed="rId4">
             <a:alphaModFix/>
           </a:blip>
-          <a:srcRect b="98001" l="0" r="0" t="0"/>
+          <a:srcRect b="98001"/>
           <a:stretch/>
         </p:blipFill>
         <p:spPr>
@@ -7126,728 +7328,11 @@
 </file>
 
 <file path=ppt/slides/slide10.xml><?xml version="1.0" encoding="utf-8"?>
-<p:sld xmlns:a="http://schemas.openxmlformats.org/drawingml/2006/main" xmlns:r="http://schemas.openxmlformats.org/officeDocument/2006/relationships" xmlns:mc="http://schemas.openxmlformats.org/markup-compatibility/2006" xmlns:mv="urn:schemas-microsoft-com:mac:vml" xmlns:p="http://schemas.openxmlformats.org/presentationml/2006/main" xmlns:c="http://schemas.openxmlformats.org/drawingml/2006/chart" xmlns:dgm="http://schemas.openxmlformats.org/drawingml/2006/diagram" xmlns:o="urn:schemas-microsoft-com:office:office" xmlns:v="urn:schemas-microsoft-com:vml" xmlns:pvml="urn:schemas-microsoft-com:office:powerpoint" xmlns:com="http://schemas.openxmlformats.org/drawingml/2006/compatibility" xmlns:p14="http://schemas.microsoft.com/office/powerpoint/2010/main" xmlns:p15="http://schemas.microsoft.com/office/powerpoint/2012/main" xmlns:ahyp="http://schemas.microsoft.com/office/drawing/2018/hyperlinkcolor">
+<p:sld xmlns:a="http://schemas.openxmlformats.org/drawingml/2006/main" xmlns:r="http://schemas.openxmlformats.org/officeDocument/2006/relationships" xmlns:p="http://schemas.openxmlformats.org/presentationml/2006/main">
   <p:cSld>
     <p:spTree>
       <p:nvGrpSpPr>
-        <p:cNvPr id="123" name="Shape 123"/>
-        <p:cNvGrpSpPr/>
-        <p:nvPr/>
-      </p:nvGrpSpPr>
-      <p:grpSpPr>
-        <a:xfrm>
-          <a:off x="0" y="0"/>
-          <a:ext cx="0" cy="0"/>
-          <a:chOff x="0" y="0"/>
-          <a:chExt cx="0" cy="0"/>
-        </a:xfrm>
-      </p:grpSpPr>
-      <p:pic>
-        <p:nvPicPr>
-          <p:cNvPr id="124" name="Google Shape;124;p22" title="Frame 144.png"/>
-          <p:cNvPicPr preferRelativeResize="0"/>
-          <p:nvPr/>
-        </p:nvPicPr>
-        <p:blipFill rotWithShape="1">
-          <a:blip r:embed="rId3">
-            <a:alphaModFix/>
-          </a:blip>
-          <a:srcRect b="98001" l="0" r="0" t="0"/>
-          <a:stretch/>
-        </p:blipFill>
-        <p:spPr>
-          <a:xfrm>
-            <a:off x="0" y="5093562"/>
-            <a:ext cx="9144000" cy="54275"/>
-          </a:xfrm>
-          <a:prstGeom prst="rect">
-            <a:avLst/>
-          </a:prstGeom>
-          <a:noFill/>
-          <a:ln>
-            <a:noFill/>
-          </a:ln>
-        </p:spPr>
-      </p:pic>
-      <p:pic>
-        <p:nvPicPr>
-          <p:cNvPr id="125" name="Google Shape;125;p22" title="Group 427319979.png"/>
-          <p:cNvPicPr preferRelativeResize="0"/>
-          <p:nvPr/>
-        </p:nvPicPr>
-        <p:blipFill>
-          <a:blip r:embed="rId4">
-            <a:alphaModFix/>
-          </a:blip>
-          <a:stretch>
-            <a:fillRect/>
-          </a:stretch>
-        </p:blipFill>
-        <p:spPr>
-          <a:xfrm>
-            <a:off x="0" y="1"/>
-            <a:ext cx="9144000" cy="507359"/>
-          </a:xfrm>
-          <a:prstGeom prst="rect">
-            <a:avLst/>
-          </a:prstGeom>
-          <a:noFill/>
-          <a:ln>
-            <a:noFill/>
-          </a:ln>
-        </p:spPr>
-      </p:pic>
-      <p:sp>
-        <p:nvSpPr>
-          <p:cNvPr id="126" name="Google Shape;126;p22"/>
-          <p:cNvSpPr/>
-          <p:nvPr/>
-        </p:nvSpPr>
-        <p:spPr>
-          <a:xfrm>
-            <a:off x="-29250" y="5071875"/>
-            <a:ext cx="9173400" cy="97800"/>
-          </a:xfrm>
-          <a:prstGeom prst="rect">
-            <a:avLst/>
-          </a:prstGeom>
-          <a:solidFill>
-            <a:schemeClr val="dk1"/>
-          </a:solidFill>
-          <a:ln>
-            <a:noFill/>
-          </a:ln>
-        </p:spPr>
-        <p:txBody>
-          <a:bodyPr anchorCtr="0" anchor="ctr" bIns="91425" lIns="91425" spcFirstLastPara="1" rIns="91425" wrap="square" tIns="91425">
-            <a:noAutofit/>
-          </a:bodyPr>
-          <a:lstStyle/>
-          <a:p>
-            <a:pPr indent="0" lvl="0" marL="0" rtl="0" algn="ctr">
-              <a:spcBef>
-                <a:spcPts val="0"/>
-              </a:spcBef>
-              <a:spcAft>
-                <a:spcPts val="0"/>
-              </a:spcAft>
-              <a:buNone/>
-            </a:pPr>
-            <a:r>
-              <a:t/>
-            </a:r>
-            <a:endParaRPr/>
-          </a:p>
-        </p:txBody>
-      </p:sp>
-      <p:sp>
-        <p:nvSpPr>
-          <p:cNvPr id="127" name="Google Shape;127;p22"/>
-          <p:cNvSpPr txBox="1"/>
-          <p:nvPr/>
-        </p:nvSpPr>
-        <p:spPr>
-          <a:xfrm>
-            <a:off x="265350" y="663825"/>
-            <a:ext cx="8943000" cy="561900"/>
-          </a:xfrm>
-          <a:prstGeom prst="rect">
-            <a:avLst/>
-          </a:prstGeom>
-          <a:noFill/>
-          <a:ln>
-            <a:noFill/>
-          </a:ln>
-        </p:spPr>
-        <p:txBody>
-          <a:bodyPr anchorCtr="0" anchor="t" bIns="91425" lIns="91425" spcFirstLastPara="1" rIns="91425" wrap="square" tIns="91425">
-            <a:noAutofit/>
-          </a:bodyPr>
-          <a:lstStyle/>
-          <a:p>
-            <a:pPr indent="0" lvl="0" marL="0" rtl="0" algn="l">
-              <a:spcBef>
-                <a:spcPts val="0"/>
-              </a:spcBef>
-              <a:spcAft>
-                <a:spcPts val="0"/>
-              </a:spcAft>
-              <a:buNone/>
-            </a:pPr>
-            <a:r>
-              <a:rPr lang="en-GB" sz="1600">
-                <a:latin typeface="Google Sans Flex Medium"/>
-                <a:ea typeface="Google Sans Flex Medium"/>
-                <a:cs typeface="Google Sans Flex Medium"/>
-                <a:sym typeface="Google Sans Flex Medium"/>
-              </a:rPr>
-              <a:t>Estimated implementation cost (optional)</a:t>
-            </a:r>
-            <a:endParaRPr sz="1600">
-              <a:latin typeface="Google Sans Flex Medium"/>
-              <a:ea typeface="Google Sans Flex Medium"/>
-              <a:cs typeface="Google Sans Flex Medium"/>
-              <a:sym typeface="Google Sans Flex Medium"/>
-            </a:endParaRPr>
-          </a:p>
-        </p:txBody>
-      </p:sp>
-      <p:graphicFrame>
-        <p:nvGraphicFramePr>
-          <p:cNvPr id="128" name="Table 127"/>
-          <p:cNvGraphicFramePr>
-            <a:graphicFrameLocks noGrp="1"/>
-          </p:cNvGraphicFramePr>
-          <p:nvPr/>
-        </p:nvGraphicFramePr>
-        <p:xfrm>
-          <a:off x="274320" y="1143000"/>
-          <a:ext cx="8595360" cy="2816352"/>
-        </p:xfrm>
-        <a:graphic>
-          <a:graphicData uri="http://schemas.openxmlformats.org/drawingml/2006/table">
-            <a:tbl>
-              <a:tblPr firstRow="0" bandRow="0">
-                <a:tableStyleId>{5940675A-B579-460E-94D1-54222C63F5DA}</a:tableStyleId>
-              </a:tblPr>
-              <a:tblGrid>
-                <a:gridCol w="2926080"/>
-                <a:gridCol w="2743200"/>
-                <a:gridCol w="2926080"/>
-              </a:tblGrid>
-              <a:tr h="402336">
-                <a:tc>
-                  <a:txBody>
-                    <a:bodyPr wrap="square"/>
-                    <a:lstStyle/>
-                    <a:p>
-                      <a:r>
-                        <a:rPr sz="1000" b="1" i="0">
-                          <a:solidFill>
-                            <a:srgbClr val="FFFFFF"/>
-                          </a:solidFill>
-                          <a:latin typeface="Arial"/>
-                        </a:rPr>
-                        <a:t>Item</a:t>
-                      </a:r>
-                    </a:p>
-                  </a:txBody>
-                  <a:tcPr marL="54864" marR="54864" marT="22860" marB="22860" anchor="ctr">
-                    <a:solidFill>
-                      <a:srgbClr val="3451D1"/>
-                    </a:solidFill>
-                  </a:tcPr>
-                </a:tc>
-                <a:tc>
-                  <a:txBody>
-                    <a:bodyPr wrap="square"/>
-                    <a:lstStyle/>
-                    <a:p>
-                      <a:r>
-                        <a:rPr sz="1000" b="1" i="0">
-                          <a:solidFill>
-                            <a:srgbClr val="FFFFFF"/>
-                          </a:solidFill>
-                          <a:latin typeface="Arial"/>
-                        </a:rPr>
-                        <a:t>Estimate</a:t>
-                      </a:r>
-                    </a:p>
-                  </a:txBody>
-                  <a:tcPr marL="54864" marR="54864" marT="22860" marB="22860" anchor="ctr">
-                    <a:solidFill>
-                      <a:srgbClr val="3451D1"/>
-                    </a:solidFill>
-                  </a:tcPr>
-                </a:tc>
-                <a:tc>
-                  <a:txBody>
-                    <a:bodyPr wrap="square"/>
-                    <a:lstStyle/>
-                    <a:p>
-                      <a:r>
-                        <a:rPr sz="1000" b="1" i="0">
-                          <a:solidFill>
-                            <a:srgbClr val="FFFFFF"/>
-                          </a:solidFill>
-                          <a:latin typeface="Arial"/>
-                        </a:rPr>
-                        <a:t>Basis</a:t>
-                      </a:r>
-                    </a:p>
-                  </a:txBody>
-                  <a:tcPr marL="54864" marR="54864" marT="22860" marB="22860" anchor="ctr">
-                    <a:solidFill>
-                      <a:srgbClr val="3451D1"/>
-                    </a:solidFill>
-                  </a:tcPr>
-                </a:tc>
-              </a:tr>
-              <a:tr h="402336">
-                <a:tc>
-                  <a:txBody>
-                    <a:bodyPr wrap="square"/>
-                    <a:lstStyle/>
-                    <a:p>
-                      <a:r>
-                        <a:rPr sz="1000" b="1" i="0">
-                          <a:solidFill>
-                            <a:srgbClr val="101828"/>
-                          </a:solidFill>
-                          <a:latin typeface="Arial"/>
-                        </a:rPr>
-                        <a:t>One Gemini audit</a:t>
-                      </a:r>
-                    </a:p>
-                  </a:txBody>
-                  <a:tcPr marL="54864" marR="54864" marT="22860" marB="22860" anchor="ctr">
-                    <a:solidFill>
-                      <a:srgbClr val="FFFFFF"/>
-                    </a:solidFill>
-                  </a:tcPr>
-                </a:tc>
-                <a:tc>
-                  <a:txBody>
-                    <a:bodyPr wrap="square"/>
-                    <a:lstStyle/>
-                    <a:p>
-                      <a:r>
-                        <a:rPr sz="1000" b="0" i="0">
-                          <a:solidFill>
-                            <a:srgbClr val="101828"/>
-                          </a:solidFill>
-                          <a:latin typeface="Arial"/>
-                        </a:rPr>
-                        <a:t>about $0.002</a:t>
-                      </a:r>
-                    </a:p>
-                  </a:txBody>
-                  <a:tcPr marL="54864" marR="54864" marT="22860" marB="22860" anchor="ctr">
-                    <a:solidFill>
-                      <a:srgbClr val="FFFFFF"/>
-                    </a:solidFill>
-                  </a:tcPr>
-                </a:tc>
-                <a:tc>
-                  <a:txBody>
-                    <a:bodyPr wrap="square"/>
-                    <a:lstStyle/>
-                    <a:p>
-                      <a:r>
-                        <a:rPr sz="1000" b="0" i="0">
-                          <a:solidFill>
-                            <a:srgbClr val="101828"/>
-                          </a:solidFill>
-                          <a:latin typeface="Arial"/>
-                        </a:rPr>
-                        <a:t>Measured tokens x Vertex AI list price</a:t>
-                      </a:r>
-                    </a:p>
-                  </a:txBody>
-                  <a:tcPr marL="54864" marR="54864" marT="22860" marB="22860" anchor="ctr">
-                    <a:solidFill>
-                      <a:srgbClr val="FFFFFF"/>
-                    </a:solidFill>
-                  </a:tcPr>
-                </a:tc>
-              </a:tr>
-              <a:tr h="402336">
-                <a:tc>
-                  <a:txBody>
-                    <a:bodyPr wrap="square"/>
-                    <a:lstStyle/>
-                    <a:p>
-                      <a:r>
-                        <a:rPr sz="1000" b="1" i="0">
-                          <a:solidFill>
-                            <a:srgbClr val="101828"/>
-                          </a:solidFill>
-                          <a:latin typeface="Arial"/>
-                        </a:rPr>
-                        <a:t>One five-leg trip (1 plan + 5 audits)</a:t>
-                      </a:r>
-                    </a:p>
-                  </a:txBody>
-                  <a:tcPr marL="54864" marR="54864" marT="22860" marB="22860" anchor="ctr">
-                    <a:solidFill>
-                      <a:srgbClr val="F2F4F7"/>
-                    </a:solidFill>
-                  </a:tcPr>
-                </a:tc>
-                <a:tc>
-                  <a:txBody>
-                    <a:bodyPr wrap="square"/>
-                    <a:lstStyle/>
-                    <a:p>
-                      <a:r>
-                        <a:rPr sz="1000" b="0" i="0">
-                          <a:solidFill>
-                            <a:srgbClr val="101828"/>
-                          </a:solidFill>
-                          <a:latin typeface="Arial"/>
-                        </a:rPr>
-                        <a:t>about $0.015</a:t>
-                      </a:r>
-                    </a:p>
-                  </a:txBody>
-                  <a:tcPr marL="54864" marR="54864" marT="22860" marB="22860" anchor="ctr">
-                    <a:solidFill>
-                      <a:srgbClr val="F2F4F7"/>
-                    </a:solidFill>
-                  </a:tcPr>
-                </a:tc>
-                <a:tc>
-                  <a:txBody>
-                    <a:bodyPr wrap="square"/>
-                    <a:lstStyle/>
-                    <a:p>
-                      <a:r>
-                        <a:rPr sz="1000" b="0" i="0">
-                          <a:solidFill>
-                            <a:srgbClr val="101828"/>
-                          </a:solidFill>
-                          <a:latin typeface="Arial"/>
-                        </a:rPr>
-                        <a:t>Same</a:t>
-                      </a:r>
-                    </a:p>
-                  </a:txBody>
-                  <a:tcPr marL="54864" marR="54864" marT="22860" marB="22860" anchor="ctr">
-                    <a:solidFill>
-                      <a:srgbClr val="F2F4F7"/>
-                    </a:solidFill>
-                  </a:tcPr>
-                </a:tc>
-              </a:tr>
-              <a:tr h="402336">
-                <a:tc>
-                  <a:txBody>
-                    <a:bodyPr wrap="square"/>
-                    <a:lstStyle/>
-                    <a:p>
-                      <a:r>
-                        <a:rPr sz="1000" b="1" i="0">
-                          <a:solidFill>
-                            <a:srgbClr val="101828"/>
-                          </a:solidFill>
-                          <a:latin typeface="Arial"/>
-                        </a:rPr>
-                        <a:t>10,000 audited bookings per month</a:t>
-                      </a:r>
-                    </a:p>
-                  </a:txBody>
-                  <a:tcPr marL="54864" marR="54864" marT="22860" marB="22860" anchor="ctr">
-                    <a:solidFill>
-                      <a:srgbClr val="FFFFFF"/>
-                    </a:solidFill>
-                  </a:tcPr>
-                </a:tc>
-                <a:tc>
-                  <a:txBody>
-                    <a:bodyPr wrap="square"/>
-                    <a:lstStyle/>
-                    <a:p>
-                      <a:r>
-                        <a:rPr sz="1000" b="0" i="0">
-                          <a:solidFill>
-                            <a:srgbClr val="101828"/>
-                          </a:solidFill>
-                          <a:latin typeface="Arial"/>
-                        </a:rPr>
-                        <a:t>about $20 of Gemini</a:t>
-                      </a:r>
-                    </a:p>
-                  </a:txBody>
-                  <a:tcPr marL="54864" marR="54864" marT="22860" marB="22860" anchor="ctr">
-                    <a:solidFill>
-                      <a:srgbClr val="FFFFFF"/>
-                    </a:solidFill>
-                  </a:tcPr>
-                </a:tc>
-                <a:tc>
-                  <a:txBody>
-                    <a:bodyPr wrap="square"/>
-                    <a:lstStyle/>
-                    <a:p>
-                      <a:r>
-                        <a:rPr sz="1000" b="0" i="0">
-                          <a:solidFill>
-                            <a:srgbClr val="101828"/>
-                          </a:solidFill>
-                          <a:latin typeface="Arial"/>
-                        </a:rPr>
-                        <a:t>10,000 x $0.002</a:t>
-                      </a:r>
-                    </a:p>
-                  </a:txBody>
-                  <a:tcPr marL="54864" marR="54864" marT="22860" marB="22860" anchor="ctr">
-                    <a:solidFill>
-                      <a:srgbClr val="FFFFFF"/>
-                    </a:solidFill>
-                  </a:tcPr>
-                </a:tc>
-              </a:tr>
-              <a:tr h="402336">
-                <a:tc>
-                  <a:txBody>
-                    <a:bodyPr wrap="square"/>
-                    <a:lstStyle/>
-                    <a:p>
-                      <a:r>
-                        <a:rPr sz="1000" b="1" i="0">
-                          <a:solidFill>
-                            <a:srgbClr val="101828"/>
-                          </a:solidFill>
-                          <a:latin typeface="Arial"/>
-                        </a:rPr>
-                        <a:t>Cloud Run</a:t>
-                      </a:r>
-                    </a:p>
-                  </a:txBody>
-                  <a:tcPr marL="54864" marR="54864" marT="22860" marB="22860" anchor="ctr">
-                    <a:solidFill>
-                      <a:srgbClr val="F2F4F7"/>
-                    </a:solidFill>
-                  </a:tcPr>
-                </a:tc>
-                <a:tc>
-                  <a:txBody>
-                    <a:bodyPr wrap="square"/>
-                    <a:lstStyle/>
-                    <a:p>
-                      <a:r>
-                        <a:rPr sz="1000" b="0" i="0">
-                          <a:solidFill>
-                            <a:srgbClr val="101828"/>
-                          </a:solidFill>
-                          <a:latin typeface="Arial"/>
-                        </a:rPr>
-                        <a:t>Scales to zero; one always-on instance about $7 to $8 a month</a:t>
-                      </a:r>
-                    </a:p>
-                  </a:txBody>
-                  <a:tcPr marL="54864" marR="54864" marT="22860" marB="22860" anchor="ctr">
-                    <a:solidFill>
-                      <a:srgbClr val="F2F4F7"/>
-                    </a:solidFill>
-                  </a:tcPr>
-                </a:tc>
-                <a:tc>
-                  <a:txBody>
-                    <a:bodyPr wrap="square"/>
-                    <a:lstStyle/>
-                    <a:p>
-                      <a:r>
-                        <a:rPr sz="1000" b="0" i="0">
-                          <a:solidFill>
-                            <a:srgbClr val="101828"/>
-                          </a:solidFill>
-                          <a:latin typeface="Arial"/>
-                        </a:rPr>
-                        <a:t>List-price estimate</a:t>
-                      </a:r>
-                    </a:p>
-                  </a:txBody>
-                  <a:tcPr marL="54864" marR="54864" marT="22860" marB="22860" anchor="ctr">
-                    <a:solidFill>
-                      <a:srgbClr val="F2F4F7"/>
-                    </a:solidFill>
-                  </a:tcPr>
-                </a:tc>
-              </a:tr>
-              <a:tr h="402336">
-                <a:tc>
-                  <a:txBody>
-                    <a:bodyPr wrap="square"/>
-                    <a:lstStyle/>
-                    <a:p>
-                      <a:r>
-                        <a:rPr sz="1000" b="1" i="0">
-                          <a:solidFill>
-                            <a:srgbClr val="101828"/>
-                          </a:solidFill>
-                          <a:latin typeface="Arial"/>
-                        </a:rPr>
-                        <a:t>Firestore, Hosting, Secret Manager</a:t>
-                      </a:r>
-                    </a:p>
-                  </a:txBody>
-                  <a:tcPr marL="54864" marR="54864" marT="22860" marB="22860" anchor="ctr">
-                    <a:solidFill>
-                      <a:srgbClr val="FFFFFF"/>
-                    </a:solidFill>
-                  </a:tcPr>
-                </a:tc>
-                <a:tc>
-                  <a:txBody>
-                    <a:bodyPr wrap="square"/>
-                    <a:lstStyle/>
-                    <a:p>
-                      <a:r>
-                        <a:rPr sz="1000" b="0" i="0">
-                          <a:solidFill>
-                            <a:srgbClr val="101828"/>
-                          </a:solidFill>
-                          <a:latin typeface="Arial"/>
-                        </a:rPr>
-                        <a:t>Free tier at demo scale; under $1 per 10,000 decisions</a:t>
-                      </a:r>
-                    </a:p>
-                  </a:txBody>
-                  <a:tcPr marL="54864" marR="54864" marT="22860" marB="22860" anchor="ctr">
-                    <a:solidFill>
-                      <a:srgbClr val="FFFFFF"/>
-                    </a:solidFill>
-                  </a:tcPr>
-                </a:tc>
-                <a:tc>
-                  <a:txBody>
-                    <a:bodyPr wrap="square"/>
-                    <a:lstStyle/>
-                    <a:p>
-                      <a:r>
-                        <a:rPr sz="1000" b="0" i="0">
-                          <a:solidFill>
-                            <a:srgbClr val="101828"/>
-                          </a:solidFill>
-                          <a:latin typeface="Arial"/>
-                        </a:rPr>
-                        <a:t>Estimate</a:t>
-                      </a:r>
-                    </a:p>
-                  </a:txBody>
-                  <a:tcPr marL="54864" marR="54864" marT="22860" marB="22860" anchor="ctr">
-                    <a:solidFill>
-                      <a:srgbClr val="FFFFFF"/>
-                    </a:solidFill>
-                  </a:tcPr>
-                </a:tc>
-              </a:tr>
-              <a:tr h="402336">
-                <a:tc>
-                  <a:txBody>
-                    <a:bodyPr wrap="square"/>
-                    <a:lstStyle/>
-                    <a:p>
-                      <a:r>
-                        <a:rPr sz="1000" b="1" i="0">
-                          <a:solidFill>
-                            <a:srgbClr val="101828"/>
-                          </a:solidFill>
-                          <a:latin typeface="Arial"/>
-                        </a:rPr>
-                        <a:t>Third-party services</a:t>
-                      </a:r>
-                    </a:p>
-                  </a:txBody>
-                  <a:tcPr marL="54864" marR="54864" marT="22860" marB="22860" anchor="ctr">
-                    <a:solidFill>
-                      <a:srgbClr val="F2F4F7"/>
-                    </a:solidFill>
-                  </a:tcPr>
-                </a:tc>
-                <a:tc>
-                  <a:txBody>
-                    <a:bodyPr wrap="square"/>
-                    <a:lstStyle/>
-                    <a:p>
-                      <a:r>
-                        <a:rPr sz="1000" b="0" i="0">
-                          <a:solidFill>
-                            <a:srgbClr val="101828"/>
-                          </a:solidFill>
-                          <a:latin typeface="Arial"/>
-                        </a:rPr>
-                        <a:t>None: runs only on Google Cloud</a:t>
-                      </a:r>
-                    </a:p>
-                  </a:txBody>
-                  <a:tcPr marL="54864" marR="54864" marT="22860" marB="22860" anchor="ctr">
-                    <a:solidFill>
-                      <a:srgbClr val="F2F4F7"/>
-                    </a:solidFill>
-                  </a:tcPr>
-                </a:tc>
-                <a:tc>
-                  <a:txBody>
-                    <a:bodyPr wrap="square"/>
-                    <a:lstStyle/>
-                    <a:p>
-                      <a:r>
-                        <a:rPr sz="1000" b="0" i="0">
-                          <a:solidFill>
-                            <a:srgbClr val="101828"/>
-                          </a:solidFill>
-                          <a:latin typeface="Arial"/>
-                        </a:rPr>
-                        <a:t>-</a:t>
-                      </a:r>
-                    </a:p>
-                  </a:txBody>
-                  <a:tcPr marL="54864" marR="54864" marT="22860" marB="22860" anchor="ctr">
-                    <a:solidFill>
-                      <a:srgbClr val="F2F4F7"/>
-                    </a:solidFill>
-                  </a:tcPr>
-                </a:tc>
-              </a:tr>
-            </a:tbl>
-          </a:graphicData>
-        </a:graphic>
-      </p:graphicFrame>
-      <p:sp>
-        <p:nvSpPr>
-          <p:cNvPr id="129" name="TextBox 128"/>
-          <p:cNvSpPr txBox="1"/>
-          <p:nvPr/>
-        </p:nvSpPr>
-        <p:spPr>
-          <a:xfrm>
-            <a:off x="274320" y="4114800"/>
-            <a:ext cx="8595360" cy="457200"/>
-          </a:xfrm>
-          <a:prstGeom prst="rect">
-            <a:avLst/>
-          </a:prstGeom>
-          <a:noFill/>
-        </p:spPr>
-        <p:txBody>
-          <a:bodyPr wrap="square" anchor="t" lIns="36576" rIns="36576" tIns="18288" bIns="18288">
-            <a:spAutoFit/>
-          </a:bodyPr>
-          <a:lstStyle/>
-          <a:p>
-            <a:pPr>
-              <a:spcAft>
-                <a:spcPts val="200"/>
-              </a:spcAft>
-            </a:pPr>
-            <a:r>
-              <a:rPr sz="950" b="0" i="1">
-                <a:solidFill>
-                  <a:srgbClr val="667085"/>
-                </a:solidFill>
-                <a:latin typeface="Arial"/>
-              </a:rPr>
-              <a:t>Estimates from list prices, not billing data. A production deployment adds real supplier and payment integrations and single sign-on.</a:t>
-            </a:r>
-          </a:p>
-        </p:txBody>
-      </p:sp>
-    </p:spTree>
-  </p:cSld>
-  <p:clrMapOvr>
-    <a:masterClrMapping/>
-  </p:clrMapOvr>
-</p:sld>
-</file>
-
-<file path=ppt/slides/slide11.xml><?xml version="1.0" encoding="utf-8"?>
-<p:sld xmlns:a="http://schemas.openxmlformats.org/drawingml/2006/main" xmlns:r="http://schemas.openxmlformats.org/officeDocument/2006/relationships" xmlns:mc="http://schemas.openxmlformats.org/markup-compatibility/2006" xmlns:mv="urn:schemas-microsoft-com:mac:vml" xmlns:p="http://schemas.openxmlformats.org/presentationml/2006/main" xmlns:c="http://schemas.openxmlformats.org/drawingml/2006/chart" xmlns:dgm="http://schemas.openxmlformats.org/drawingml/2006/diagram" xmlns:o="urn:schemas-microsoft-com:office:office" xmlns:v="urn:schemas-microsoft-com:vml" xmlns:pvml="urn:schemas-microsoft-com:office:powerpoint" xmlns:com="http://schemas.openxmlformats.org/drawingml/2006/compatibility" xmlns:p14="http://schemas.microsoft.com/office/powerpoint/2010/main" xmlns:p15="http://schemas.microsoft.com/office/powerpoint/2012/main" xmlns:ahyp="http://schemas.microsoft.com/office/drawing/2018/hyperlinkcolor">
-  <p:cSld>
-    <p:spTree>
-      <p:nvGrpSpPr>
-        <p:cNvPr id="131" name="Shape 131"/>
+        <p:cNvPr id="1" name="Shape 131"/>
         <p:cNvGrpSpPr/>
         <p:nvPr/>
       </p:nvGrpSpPr>
@@ -7869,7 +7354,7 @@
           <a:blip r:embed="rId3">
             <a:alphaModFix/>
           </a:blip>
-          <a:srcRect b="98001" l="0" r="0" t="0"/>
+          <a:srcRect b="98001"/>
           <a:stretch/>
         </p:blipFill>
         <p:spPr>
@@ -7936,23 +7421,20 @@
           </a:ln>
         </p:spPr>
         <p:txBody>
-          <a:bodyPr anchorCtr="0" anchor="ctr" bIns="91425" lIns="91425" spcFirstLastPara="1" rIns="91425" wrap="square" tIns="91425">
+          <a:bodyPr spcFirstLastPara="1" wrap="square" lIns="91425" tIns="91425" rIns="91425" bIns="91425" anchor="ctr" anchorCtr="0">
             <a:noAutofit/>
           </a:bodyPr>
           <a:lstStyle/>
           <a:p>
-            <a:pPr indent="0" lvl="0" marL="0" rtl="0" algn="ctr">
-              <a:spcBef>
-                <a:spcPts val="0"/>
-              </a:spcBef>
-              <a:spcAft>
-                <a:spcPts val="0"/>
-              </a:spcAft>
-              <a:buNone/>
-            </a:pPr>
-            <a:r>
-              <a:t/>
-            </a:r>
+            <a:pPr marL="0" lvl="0" indent="0" algn="ctr" rtl="0">
+              <a:spcBef>
+                <a:spcPts val="0"/>
+              </a:spcBef>
+              <a:spcAft>
+                <a:spcPts val="0"/>
+              </a:spcAft>
+              <a:buNone/>
+            </a:pPr>
             <a:endParaRPr/>
           </a:p>
         </p:txBody>
@@ -7977,12 +7459,12 @@
           </a:ln>
         </p:spPr>
         <p:txBody>
-          <a:bodyPr anchorCtr="0" anchor="t" bIns="91425" lIns="91425" spcFirstLastPara="1" rIns="91425" wrap="square" tIns="91425">
+          <a:bodyPr spcFirstLastPara="1" wrap="square" lIns="91425" tIns="91425" rIns="91425" bIns="91425" anchor="t" anchorCtr="0">
             <a:noAutofit/>
           </a:bodyPr>
           <a:lstStyle/>
           <a:p>
-            <a:pPr indent="0" lvl="0" marL="0" rtl="0" algn="l">
+            <a:pPr marL="0" lvl="0" indent="0" algn="l" rtl="0">
               <a:spcBef>
                 <a:spcPts val="0"/>
               </a:spcBef>
@@ -8055,7 +7537,7 @@
           <a:noFill/>
         </p:spPr>
         <p:txBody>
-          <a:bodyPr wrap="square" anchor="t" lIns="36576" rIns="36576" tIns="18288" bIns="18288">
+          <a:bodyPr wrap="square" lIns="36576" tIns="18288" rIns="36576" bIns="18288" anchor="t">
             <a:spAutoFit/>
           </a:bodyPr>
           <a:lstStyle/>
@@ -8123,7 +7605,7 @@
           <a:noFill/>
         </p:spPr>
         <p:txBody>
-          <a:bodyPr wrap="square" anchor="t" lIns="36576" rIns="36576" tIns="18288" bIns="18288">
+          <a:bodyPr wrap="square" lIns="36576" tIns="18288" rIns="36576" bIns="18288" anchor="t">
             <a:spAutoFit/>
           </a:bodyPr>
           <a:lstStyle/>
@@ -8191,7 +7673,7 @@
           <a:noFill/>
         </p:spPr>
         <p:txBody>
-          <a:bodyPr wrap="square" anchor="t" lIns="36576" rIns="36576" tIns="18288" bIns="18288">
+          <a:bodyPr wrap="square" lIns="36576" tIns="18288" rIns="36576" bIns="18288" anchor="t">
             <a:spAutoFit/>
           </a:bodyPr>
           <a:lstStyle/>
@@ -8259,7 +7741,7 @@
           <a:noFill/>
         </p:spPr>
         <p:txBody>
-          <a:bodyPr wrap="square" anchor="t" lIns="36576" rIns="36576" tIns="18288" bIns="18288">
+          <a:bodyPr wrap="square" lIns="36576" tIns="18288" rIns="36576" bIns="18288" anchor="t">
             <a:spAutoFit/>
           </a:bodyPr>
           <a:lstStyle/>
@@ -8327,7 +7809,7 @@
           <a:noFill/>
         </p:spPr>
         <p:txBody>
-          <a:bodyPr wrap="square" anchor="t" lIns="36576" rIns="36576" tIns="18288" bIns="18288">
+          <a:bodyPr wrap="square" lIns="36576" tIns="18288" rIns="36576" bIns="18288" anchor="t">
             <a:spAutoFit/>
           </a:bodyPr>
           <a:lstStyle/>
@@ -8395,7 +7877,7 @@
           <a:noFill/>
         </p:spPr>
         <p:txBody>
-          <a:bodyPr wrap="square" anchor="t" lIns="36576" rIns="36576" tIns="18288" bIns="18288">
+          <a:bodyPr wrap="square" lIns="36576" tIns="18288" rIns="36576" bIns="18288" anchor="t">
             <a:spAutoFit/>
           </a:bodyPr>
           <a:lstStyle/>
@@ -8425,12 +7907,12 @@
 </p:sld>
 </file>
 
-<file path=ppt/slides/slide12.xml><?xml version="1.0" encoding="utf-8"?>
-<p:sld xmlns:a="http://schemas.openxmlformats.org/drawingml/2006/main" xmlns:r="http://schemas.openxmlformats.org/officeDocument/2006/relationships" xmlns:mc="http://schemas.openxmlformats.org/markup-compatibility/2006" xmlns:mv="urn:schemas-microsoft-com:mac:vml" xmlns:p="http://schemas.openxmlformats.org/presentationml/2006/main" xmlns:c="http://schemas.openxmlformats.org/drawingml/2006/chart" xmlns:dgm="http://schemas.openxmlformats.org/drawingml/2006/diagram" xmlns:o="urn:schemas-microsoft-com:office:office" xmlns:v="urn:schemas-microsoft-com:vml" xmlns:pvml="urn:schemas-microsoft-com:office:powerpoint" xmlns:com="http://schemas.openxmlformats.org/drawingml/2006/compatibility" xmlns:p14="http://schemas.microsoft.com/office/powerpoint/2010/main" xmlns:p15="http://schemas.microsoft.com/office/powerpoint/2012/main" xmlns:ahyp="http://schemas.microsoft.com/office/drawing/2018/hyperlinkcolor">
+<file path=ppt/slides/slide11.xml><?xml version="1.0" encoding="utf-8"?>
+<p:sld xmlns:a="http://schemas.openxmlformats.org/drawingml/2006/main" xmlns:r="http://schemas.openxmlformats.org/officeDocument/2006/relationships" xmlns:p="http://schemas.openxmlformats.org/presentationml/2006/main">
   <p:cSld>
     <p:spTree>
       <p:nvGrpSpPr>
-        <p:cNvPr id="139" name="Shape 139"/>
+        <p:cNvPr id="1" name="Shape 139"/>
         <p:cNvGrpSpPr/>
         <p:nvPr/>
       </p:nvGrpSpPr>
@@ -8452,7 +7934,7 @@
           <a:blip r:embed="rId3">
             <a:alphaModFix/>
           </a:blip>
-          <a:srcRect b="98001" l="0" r="0" t="0"/>
+          <a:srcRect b="98001"/>
           <a:stretch/>
         </p:blipFill>
         <p:spPr>
@@ -8519,23 +8001,20 @@
           </a:ln>
         </p:spPr>
         <p:txBody>
-          <a:bodyPr anchorCtr="0" anchor="ctr" bIns="91425" lIns="91425" spcFirstLastPara="1" rIns="91425" wrap="square" tIns="91425">
+          <a:bodyPr spcFirstLastPara="1" wrap="square" lIns="91425" tIns="91425" rIns="91425" bIns="91425" anchor="ctr" anchorCtr="0">
             <a:noAutofit/>
           </a:bodyPr>
           <a:lstStyle/>
           <a:p>
-            <a:pPr indent="0" lvl="0" marL="0" rtl="0" algn="ctr">
-              <a:spcBef>
-                <a:spcPts val="0"/>
-              </a:spcBef>
-              <a:spcAft>
-                <a:spcPts val="0"/>
-              </a:spcAft>
-              <a:buNone/>
-            </a:pPr>
-            <a:r>
-              <a:t/>
-            </a:r>
+            <a:pPr marL="0" lvl="0" indent="0" algn="ctr" rtl="0">
+              <a:spcBef>
+                <a:spcPts val="0"/>
+              </a:spcBef>
+              <a:spcAft>
+                <a:spcPts val="0"/>
+              </a:spcAft>
+              <a:buNone/>
+            </a:pPr>
             <a:endParaRPr/>
           </a:p>
         </p:txBody>
@@ -8560,12 +8039,12 @@
           </a:ln>
         </p:spPr>
         <p:txBody>
-          <a:bodyPr anchorCtr="0" anchor="t" bIns="91425" lIns="91425" spcFirstLastPara="1" rIns="91425" wrap="square" tIns="91425">
+          <a:bodyPr spcFirstLastPara="1" wrap="square" lIns="91425" tIns="91425" rIns="91425" bIns="91425" anchor="t" anchorCtr="0">
             <a:noAutofit/>
           </a:bodyPr>
           <a:lstStyle/>
           <a:p>
-            <a:pPr indent="0" lvl="0" marL="0" rtl="0" algn="l">
+            <a:pPr marL="0" lvl="0" indent="0" algn="l" rtl="0">
               <a:spcBef>
                 <a:spcPts val="0"/>
               </a:spcBef>
@@ -8607,18 +8086,36 @@
         <a:graphic>
           <a:graphicData uri="http://schemas.openxmlformats.org/drawingml/2006/table">
             <a:tbl>
-              <a:tblPr firstRow="0" bandRow="0">
+              <a:tblPr>
                 <a:tableStyleId>{5940675A-B579-460E-94D1-54222C63F5DA}</a:tableStyleId>
               </a:tblPr>
               <a:tblGrid>
-                <a:gridCol w="2377440"/>
-                <a:gridCol w="2834640"/>
-                <a:gridCol w="3383280"/>
+                <a:gridCol w="2377440">
+                  <a:extLst>
+                    <a:ext uri="{9D8B030D-6E8A-4147-A177-3AD203B41FA5}">
+                      <a16:colId xmlns:a16="http://schemas.microsoft.com/office/drawing/2014/main" val="20000"/>
+                    </a:ext>
+                  </a:extLst>
+                </a:gridCol>
+                <a:gridCol w="2834640">
+                  <a:extLst>
+                    <a:ext uri="{9D8B030D-6E8A-4147-A177-3AD203B41FA5}">
+                      <a16:colId xmlns:a16="http://schemas.microsoft.com/office/drawing/2014/main" val="20001"/>
+                    </a:ext>
+                  </a:extLst>
+                </a:gridCol>
+                <a:gridCol w="3383280">
+                  <a:extLst>
+                    <a:ext uri="{9D8B030D-6E8A-4147-A177-3AD203B41FA5}">
+                      <a16:colId xmlns:a16="http://schemas.microsoft.com/office/drawing/2014/main" val="20002"/>
+                    </a:ext>
+                  </a:extLst>
+                </a:gridCol>
               </a:tblGrid>
               <a:tr h="347472">
                 <a:tc>
                   <a:txBody>
-                    <a:bodyPr wrap="square"/>
+                    <a:bodyPr/>
                     <a:lstStyle/>
                     <a:p>
                       <a:r>
@@ -8640,7 +8137,7 @@
                 </a:tc>
                 <a:tc>
                   <a:txBody>
-                    <a:bodyPr wrap="square"/>
+                    <a:bodyPr/>
                     <a:lstStyle/>
                     <a:p>
                       <a:r>
@@ -8662,7 +8159,7 @@
                 </a:tc>
                 <a:tc>
                   <a:txBody>
-                    <a:bodyPr wrap="square"/>
+                    <a:bodyPr/>
                     <a:lstStyle/>
                     <a:p>
                       <a:r>
@@ -8682,11 +8179,16 @@
                     </a:solidFill>
                   </a:tcPr>
                 </a:tc>
+                <a:extLst>
+                  <a:ext uri="{0D108BD9-81ED-4DB2-BD59-A6C34878D82A}">
+                    <a16:rowId xmlns:a16="http://schemas.microsoft.com/office/drawing/2014/main" val="10000"/>
+                  </a:ext>
+                </a:extLst>
               </a:tr>
               <a:tr h="347472">
                 <a:tc>
                   <a:txBody>
-                    <a:bodyPr wrap="square"/>
+                    <a:bodyPr/>
                     <a:lstStyle/>
                     <a:p>
                       <a:r>
@@ -8708,7 +8210,7 @@
                 </a:tc>
                 <a:tc>
                   <a:txBody>
-                    <a:bodyPr wrap="square"/>
+                    <a:bodyPr/>
                     <a:lstStyle/>
                     <a:p>
                       <a:r>
@@ -8730,7 +8232,7 @@
                 </a:tc>
                 <a:tc>
                   <a:txBody>
-                    <a:bodyPr wrap="square"/>
+                    <a:bodyPr/>
                     <a:lstStyle/>
                     <a:p>
                       <a:r>
@@ -8750,11 +8252,16 @@
                     </a:solidFill>
                   </a:tcPr>
                 </a:tc>
+                <a:extLst>
+                  <a:ext uri="{0D108BD9-81ED-4DB2-BD59-A6C34878D82A}">
+                    <a16:rowId xmlns:a16="http://schemas.microsoft.com/office/drawing/2014/main" val="10001"/>
+                  </a:ext>
+                </a:extLst>
               </a:tr>
               <a:tr h="347472">
                 <a:tc>
                   <a:txBody>
-                    <a:bodyPr wrap="square"/>
+                    <a:bodyPr/>
                     <a:lstStyle/>
                     <a:p>
                       <a:r>
@@ -8776,7 +8283,7 @@
                 </a:tc>
                 <a:tc>
                   <a:txBody>
-                    <a:bodyPr wrap="square"/>
+                    <a:bodyPr/>
                     <a:lstStyle/>
                     <a:p>
                       <a:r>
@@ -8798,7 +8305,7 @@
                 </a:tc>
                 <a:tc>
                   <a:txBody>
-                    <a:bodyPr wrap="square"/>
+                    <a:bodyPr/>
                     <a:lstStyle/>
                     <a:p>
                       <a:r>
@@ -8818,11 +8325,16 @@
                     </a:solidFill>
                   </a:tcPr>
                 </a:tc>
+                <a:extLst>
+                  <a:ext uri="{0D108BD9-81ED-4DB2-BD59-A6C34878D82A}">
+                    <a16:rowId xmlns:a16="http://schemas.microsoft.com/office/drawing/2014/main" val="10002"/>
+                  </a:ext>
+                </a:extLst>
               </a:tr>
               <a:tr h="347472">
                 <a:tc>
                   <a:txBody>
-                    <a:bodyPr wrap="square"/>
+                    <a:bodyPr/>
                     <a:lstStyle/>
                     <a:p>
                       <a:r>
@@ -8844,7 +8356,7 @@
                 </a:tc>
                 <a:tc>
                   <a:txBody>
-                    <a:bodyPr wrap="square"/>
+                    <a:bodyPr/>
                     <a:lstStyle/>
                     <a:p>
                       <a:r>
@@ -8866,7 +8378,7 @@
                 </a:tc>
                 <a:tc>
                   <a:txBody>
-                    <a:bodyPr wrap="square"/>
+                    <a:bodyPr/>
                     <a:lstStyle/>
                     <a:p>
                       <a:r>
@@ -8886,11 +8398,16 @@
                     </a:solidFill>
                   </a:tcPr>
                 </a:tc>
+                <a:extLst>
+                  <a:ext uri="{0D108BD9-81ED-4DB2-BD59-A6C34878D82A}">
+                    <a16:rowId xmlns:a16="http://schemas.microsoft.com/office/drawing/2014/main" val="10003"/>
+                  </a:ext>
+                </a:extLst>
               </a:tr>
               <a:tr h="347472">
                 <a:tc>
                   <a:txBody>
-                    <a:bodyPr wrap="square"/>
+                    <a:bodyPr/>
                     <a:lstStyle/>
                     <a:p>
                       <a:r>
@@ -8912,7 +8429,7 @@
                 </a:tc>
                 <a:tc>
                   <a:txBody>
-                    <a:bodyPr wrap="square"/>
+                    <a:bodyPr/>
                     <a:lstStyle/>
                     <a:p>
                       <a:r>
@@ -8934,7 +8451,7 @@
                 </a:tc>
                 <a:tc>
                   <a:txBody>
-                    <a:bodyPr wrap="square"/>
+                    <a:bodyPr/>
                     <a:lstStyle/>
                     <a:p>
                       <a:r>
@@ -8954,11 +8471,16 @@
                     </a:solidFill>
                   </a:tcPr>
                 </a:tc>
+                <a:extLst>
+                  <a:ext uri="{0D108BD9-81ED-4DB2-BD59-A6C34878D82A}">
+                    <a16:rowId xmlns:a16="http://schemas.microsoft.com/office/drawing/2014/main" val="10004"/>
+                  </a:ext>
+                </a:extLst>
               </a:tr>
               <a:tr h="347472">
                 <a:tc>
                   <a:txBody>
-                    <a:bodyPr wrap="square"/>
+                    <a:bodyPr/>
                     <a:lstStyle/>
                     <a:p>
                       <a:r>
@@ -8980,7 +8502,7 @@
                 </a:tc>
                 <a:tc>
                   <a:txBody>
-                    <a:bodyPr wrap="square"/>
+                    <a:bodyPr/>
                     <a:lstStyle/>
                     <a:p>
                       <a:r>
@@ -9002,7 +8524,7 @@
                 </a:tc>
                 <a:tc>
                   <a:txBody>
-                    <a:bodyPr wrap="square"/>
+                    <a:bodyPr/>
                     <a:lstStyle/>
                     <a:p>
                       <a:r>
@@ -9022,11 +8544,16 @@
                     </a:solidFill>
                   </a:tcPr>
                 </a:tc>
+                <a:extLst>
+                  <a:ext uri="{0D108BD9-81ED-4DB2-BD59-A6C34878D82A}">
+                    <a16:rowId xmlns:a16="http://schemas.microsoft.com/office/drawing/2014/main" val="10005"/>
+                  </a:ext>
+                </a:extLst>
               </a:tr>
               <a:tr h="347472">
                 <a:tc>
                   <a:txBody>
-                    <a:bodyPr wrap="square"/>
+                    <a:bodyPr/>
                     <a:lstStyle/>
                     <a:p>
                       <a:r>
@@ -9048,7 +8575,7 @@
                 </a:tc>
                 <a:tc>
                   <a:txBody>
-                    <a:bodyPr wrap="square"/>
+                    <a:bodyPr/>
                     <a:lstStyle/>
                     <a:p>
                       <a:r>
@@ -9070,7 +8597,7 @@
                 </a:tc>
                 <a:tc>
                   <a:txBody>
-                    <a:bodyPr wrap="square"/>
+                    <a:bodyPr/>
                     <a:lstStyle/>
                     <a:p>
                       <a:r>
@@ -9090,11 +8617,16 @@
                     </a:solidFill>
                   </a:tcPr>
                 </a:tc>
+                <a:extLst>
+                  <a:ext uri="{0D108BD9-81ED-4DB2-BD59-A6C34878D82A}">
+                    <a16:rowId xmlns:a16="http://schemas.microsoft.com/office/drawing/2014/main" val="10006"/>
+                  </a:ext>
+                </a:extLst>
               </a:tr>
               <a:tr h="347472">
                 <a:tc>
                   <a:txBody>
-                    <a:bodyPr wrap="square"/>
+                    <a:bodyPr/>
                     <a:lstStyle/>
                     <a:p>
                       <a:r>
@@ -9116,7 +8648,7 @@
                 </a:tc>
                 <a:tc>
                   <a:txBody>
-                    <a:bodyPr wrap="square"/>
+                    <a:bodyPr/>
                     <a:lstStyle/>
                     <a:p>
                       <a:r>
@@ -9138,7 +8670,7 @@
                 </a:tc>
                 <a:tc>
                   <a:txBody>
-                    <a:bodyPr wrap="square"/>
+                    <a:bodyPr/>
                     <a:lstStyle/>
                     <a:p>
                       <a:r>
@@ -9158,11 +8690,16 @@
                     </a:solidFill>
                   </a:tcPr>
                 </a:tc>
+                <a:extLst>
+                  <a:ext uri="{0D108BD9-81ED-4DB2-BD59-A6C34878D82A}">
+                    <a16:rowId xmlns:a16="http://schemas.microsoft.com/office/drawing/2014/main" val="10007"/>
+                  </a:ext>
+                </a:extLst>
               </a:tr>
               <a:tr h="347472">
                 <a:tc>
                   <a:txBody>
-                    <a:bodyPr wrap="square"/>
+                    <a:bodyPr/>
                     <a:lstStyle/>
                     <a:p>
                       <a:r>
@@ -9184,7 +8721,7 @@
                 </a:tc>
                 <a:tc>
                   <a:txBody>
-                    <a:bodyPr wrap="square"/>
+                    <a:bodyPr/>
                     <a:lstStyle/>
                     <a:p>
                       <a:r>
@@ -9206,7 +8743,7 @@
                 </a:tc>
                 <a:tc>
                   <a:txBody>
-                    <a:bodyPr wrap="square"/>
+                    <a:bodyPr/>
                     <a:lstStyle/>
                     <a:p>
                       <a:r>
@@ -9226,6 +8763,11 @@
                     </a:solidFill>
                   </a:tcPr>
                 </a:tc>
+                <a:extLst>
+                  <a:ext uri="{0D108BD9-81ED-4DB2-BD59-A6C34878D82A}">
+                    <a16:rowId xmlns:a16="http://schemas.microsoft.com/office/drawing/2014/main" val="10008"/>
+                  </a:ext>
+                </a:extLst>
               </a:tr>
             </a:tbl>
           </a:graphicData>
@@ -9248,7 +8790,7 @@
           <a:noFill/>
         </p:spPr>
         <p:txBody>
-          <a:bodyPr wrap="square" anchor="t" lIns="36576" rIns="36576" tIns="18288" bIns="18288">
+          <a:bodyPr wrap="square" lIns="36576" tIns="18288" rIns="36576" bIns="18288" anchor="t">
             <a:spAutoFit/>
           </a:bodyPr>
           <a:lstStyle/>
@@ -9278,12 +8820,12 @@
 </p:sld>
 </file>
 
-<file path=ppt/slides/slide13.xml><?xml version="1.0" encoding="utf-8"?>
-<p:sld xmlns:a="http://schemas.openxmlformats.org/drawingml/2006/main" xmlns:r="http://schemas.openxmlformats.org/officeDocument/2006/relationships" xmlns:mc="http://schemas.openxmlformats.org/markup-compatibility/2006" xmlns:mv="urn:schemas-microsoft-com:mac:vml" xmlns:p="http://schemas.openxmlformats.org/presentationml/2006/main" xmlns:c="http://schemas.openxmlformats.org/drawingml/2006/chart" xmlns:dgm="http://schemas.openxmlformats.org/drawingml/2006/diagram" xmlns:o="urn:schemas-microsoft-com:office:office" xmlns:v="urn:schemas-microsoft-com:vml" xmlns:pvml="urn:schemas-microsoft-com:office:powerpoint" xmlns:com="http://schemas.openxmlformats.org/drawingml/2006/compatibility" xmlns:p14="http://schemas.microsoft.com/office/powerpoint/2010/main" xmlns:p15="http://schemas.microsoft.com/office/powerpoint/2012/main" xmlns:ahyp="http://schemas.microsoft.com/office/drawing/2018/hyperlinkcolor">
+<file path=ppt/slides/slide12.xml><?xml version="1.0" encoding="utf-8"?>
+<p:sld xmlns:a="http://schemas.openxmlformats.org/drawingml/2006/main" xmlns:r="http://schemas.openxmlformats.org/officeDocument/2006/relationships" xmlns:p="http://schemas.openxmlformats.org/presentationml/2006/main">
   <p:cSld>
     <p:spTree>
       <p:nvGrpSpPr>
-        <p:cNvPr id="147" name="Shape 147"/>
+        <p:cNvPr id="1" name="Shape 147"/>
         <p:cNvGrpSpPr/>
         <p:nvPr/>
       </p:nvGrpSpPr>
@@ -9305,7 +8847,7 @@
           <a:blip r:embed="rId3">
             <a:alphaModFix/>
           </a:blip>
-          <a:srcRect b="98001" l="0" r="0" t="0"/>
+          <a:srcRect b="98001"/>
           <a:stretch/>
         </p:blipFill>
         <p:spPr>
@@ -9372,23 +8914,20 @@
           </a:ln>
         </p:spPr>
         <p:txBody>
-          <a:bodyPr anchorCtr="0" anchor="ctr" bIns="91425" lIns="91425" spcFirstLastPara="1" rIns="91425" wrap="square" tIns="91425">
+          <a:bodyPr spcFirstLastPara="1" wrap="square" lIns="91425" tIns="91425" rIns="91425" bIns="91425" anchor="ctr" anchorCtr="0">
             <a:noAutofit/>
           </a:bodyPr>
           <a:lstStyle/>
           <a:p>
-            <a:pPr indent="0" lvl="0" marL="0" rtl="0" algn="ctr">
-              <a:spcBef>
-                <a:spcPts val="0"/>
-              </a:spcBef>
-              <a:spcAft>
-                <a:spcPts val="0"/>
-              </a:spcAft>
-              <a:buNone/>
-            </a:pPr>
-            <a:r>
-              <a:t/>
-            </a:r>
+            <a:pPr marL="0" lvl="0" indent="0" algn="ctr" rtl="0">
+              <a:spcBef>
+                <a:spcPts val="0"/>
+              </a:spcBef>
+              <a:spcAft>
+                <a:spcPts val="0"/>
+              </a:spcAft>
+              <a:buNone/>
+            </a:pPr>
             <a:endParaRPr/>
           </a:p>
         </p:txBody>
@@ -9413,12 +8952,12 @@
           </a:ln>
         </p:spPr>
         <p:txBody>
-          <a:bodyPr anchorCtr="0" anchor="t" bIns="91425" lIns="91425" spcFirstLastPara="1" rIns="91425" wrap="square" tIns="91425">
+          <a:bodyPr spcFirstLastPara="1" wrap="square" lIns="91425" tIns="91425" rIns="91425" bIns="91425" anchor="t" anchorCtr="0">
             <a:noAutofit/>
           </a:bodyPr>
           <a:lstStyle/>
           <a:p>
-            <a:pPr indent="0" lvl="0" marL="0" rtl="0" algn="l">
+            <a:pPr marL="0" lvl="0" indent="0" algn="l" rtl="0">
               <a:spcBef>
                 <a:spcPts val="0"/>
               </a:spcBef>
@@ -9484,7 +9023,7 @@
           </a:fontRef>
         </p:style>
         <p:txBody>
-          <a:bodyPr rtlCol="0" anchor="ctr" wrap="square" lIns="54864" rIns="54864" tIns="27432" bIns="27432"/>
+          <a:bodyPr wrap="square" lIns="54864" tIns="27432" rIns="54864" bIns="27432" rtlCol="0" anchor="ctr"/>
           <a:lstStyle/>
           <a:p>
             <a:pPr algn="ctr">
@@ -9543,10 +9082,10 @@
           </a:fontRef>
         </p:style>
         <p:txBody>
-          <a:bodyPr rtlCol="0" anchor="t" wrap="square" lIns="54864" rIns="54864" tIns="27432" bIns="27432"/>
+          <a:bodyPr wrap="square" lIns="54864" tIns="27432" rIns="54864" bIns="27432" rtlCol="0" anchor="t"/>
           <a:lstStyle/>
           <a:p>
-            <a:pPr algn="l" marL="146304" indent="-146304">
+            <a:pPr marL="146304" indent="-146304" algn="l">
               <a:spcAft>
                 <a:spcPts val="500"/>
               </a:spcAft>
@@ -9563,7 +9102,7 @@
             </a:r>
           </a:p>
           <a:p>
-            <a:pPr algn="l" marL="146304" indent="-146304">
+            <a:pPr marL="146304" indent="-146304" algn="l">
               <a:spcAft>
                 <a:spcPts val="500"/>
               </a:spcAft>
@@ -9580,7 +9119,7 @@
             </a:r>
           </a:p>
           <a:p>
-            <a:pPr algn="l" marL="146304" indent="-146304">
+            <a:pPr marL="146304" indent="-146304" algn="l">
               <a:spcAft>
                 <a:spcPts val="500"/>
               </a:spcAft>
@@ -9597,7 +9136,7 @@
             </a:r>
           </a:p>
           <a:p>
-            <a:pPr algn="l" marL="146304" indent="-146304">
+            <a:pPr marL="146304" indent="-146304" algn="l">
               <a:spcAft>
                 <a:spcPts val="500"/>
               </a:spcAft>
@@ -9614,7 +9153,7 @@
             </a:r>
           </a:p>
           <a:p>
-            <a:pPr algn="l" marL="146304" indent="-146304">
+            <a:pPr marL="146304" indent="-146304" algn="l">
               <a:spcAft>
                 <a:spcPts val="500"/>
               </a:spcAft>
@@ -9631,7 +9170,7 @@
             </a:r>
           </a:p>
           <a:p>
-            <a:pPr algn="l" marL="146304" indent="-146304">
+            <a:pPr marL="146304" indent="-146304" algn="l">
               <a:spcAft>
                 <a:spcPts val="500"/>
               </a:spcAft>
@@ -9648,7 +9187,7 @@
             </a:r>
           </a:p>
           <a:p>
-            <a:pPr algn="l" marL="146304" indent="-146304">
+            <a:pPr marL="146304" indent="-146304" algn="l">
               <a:spcAft>
                 <a:spcPts val="500"/>
               </a:spcAft>
@@ -9705,7 +9244,7 @@
           </a:fontRef>
         </p:style>
         <p:txBody>
-          <a:bodyPr rtlCol="0" anchor="ctr" wrap="square" lIns="54864" rIns="54864" tIns="27432" bIns="27432"/>
+          <a:bodyPr wrap="square" lIns="54864" tIns="27432" rIns="54864" bIns="27432" rtlCol="0" anchor="ctr"/>
           <a:lstStyle/>
           <a:p>
             <a:pPr algn="ctr">
@@ -9764,10 +9303,10 @@
           </a:fontRef>
         </p:style>
         <p:txBody>
-          <a:bodyPr rtlCol="0" anchor="t" wrap="square" lIns="54864" rIns="54864" tIns="27432" bIns="27432"/>
+          <a:bodyPr wrap="square" lIns="54864" tIns="27432" rIns="54864" bIns="27432" rtlCol="0" anchor="t"/>
           <a:lstStyle/>
           <a:p>
-            <a:pPr algn="l" marL="146304" indent="-146304">
+            <a:pPr marL="146304" indent="-146304" algn="l">
               <a:spcAft>
                 <a:spcPts val="500"/>
               </a:spcAft>
@@ -9784,7 +9323,7 @@
             </a:r>
           </a:p>
           <a:p>
-            <a:pPr algn="l" marL="146304" indent="-146304">
+            <a:pPr marL="146304" indent="-146304" algn="l">
               <a:spcAft>
                 <a:spcPts val="500"/>
               </a:spcAft>
@@ -9801,7 +9340,7 @@
             </a:r>
           </a:p>
           <a:p>
-            <a:pPr algn="l" marL="146304" indent="-146304">
+            <a:pPr marL="146304" indent="-146304" algn="l">
               <a:spcAft>
                 <a:spcPts val="500"/>
               </a:spcAft>
@@ -9818,7 +9357,7 @@
             </a:r>
           </a:p>
           <a:p>
-            <a:pPr algn="l" marL="146304" indent="-146304">
+            <a:pPr marL="146304" indent="-146304" algn="l">
               <a:spcAft>
                 <a:spcPts val="500"/>
               </a:spcAft>
@@ -9835,7 +9374,7 @@
             </a:r>
           </a:p>
           <a:p>
-            <a:pPr algn="l" marL="146304" indent="-146304">
+            <a:pPr marL="146304" indent="-146304" algn="l">
               <a:spcAft>
                 <a:spcPts val="500"/>
               </a:spcAft>
@@ -9852,7 +9391,7 @@
             </a:r>
           </a:p>
           <a:p>
-            <a:pPr algn="l" marL="146304" indent="-146304">
+            <a:pPr marL="146304" indent="-146304" algn="l">
               <a:spcAft>
                 <a:spcPts val="500"/>
               </a:spcAft>
@@ -9869,7 +9408,7 @@
             </a:r>
           </a:p>
           <a:p>
-            <a:pPr algn="l" marL="146304" indent="-146304">
+            <a:pPr marL="146304" indent="-146304" algn="l">
               <a:spcAft>
                 <a:spcPts val="500"/>
               </a:spcAft>
@@ -9926,7 +9465,7 @@
           </a:fontRef>
         </p:style>
         <p:txBody>
-          <a:bodyPr rtlCol="0" anchor="ctr" wrap="square" lIns="54864" rIns="54864" tIns="27432" bIns="27432"/>
+          <a:bodyPr wrap="square" lIns="54864" tIns="27432" rIns="54864" bIns="27432" rtlCol="0" anchor="ctr"/>
           <a:lstStyle/>
           <a:p>
             <a:pPr algn="ctr">
@@ -9985,10 +9524,10 @@
           </a:fontRef>
         </p:style>
         <p:txBody>
-          <a:bodyPr rtlCol="0" anchor="t" wrap="square" lIns="54864" rIns="54864" tIns="27432" bIns="27432"/>
+          <a:bodyPr wrap="square" lIns="54864" tIns="27432" rIns="54864" bIns="27432" rtlCol="0" anchor="t"/>
           <a:lstStyle/>
           <a:p>
-            <a:pPr algn="l" marL="146304" indent="-146304">
+            <a:pPr marL="146304" indent="-146304" algn="l">
               <a:spcAft>
                 <a:spcPts val="500"/>
               </a:spcAft>
@@ -10005,7 +9544,7 @@
             </a:r>
           </a:p>
           <a:p>
-            <a:pPr algn="l" marL="146304" indent="-146304">
+            <a:pPr marL="146304" indent="-146304" algn="l">
               <a:spcAft>
                 <a:spcPts val="500"/>
               </a:spcAft>
@@ -10022,7 +9561,7 @@
             </a:r>
           </a:p>
           <a:p>
-            <a:pPr algn="l" marL="146304" indent="-146304">
+            <a:pPr marL="146304" indent="-146304" algn="l">
               <a:spcAft>
                 <a:spcPts val="500"/>
               </a:spcAft>
@@ -10039,7 +9578,7 @@
             </a:r>
           </a:p>
           <a:p>
-            <a:pPr algn="l" marL="146304" indent="-146304">
+            <a:pPr marL="146304" indent="-146304" algn="l">
               <a:spcAft>
                 <a:spcPts val="500"/>
               </a:spcAft>
@@ -10056,7 +9595,7 @@
             </a:r>
           </a:p>
           <a:p>
-            <a:pPr algn="l" marL="146304" indent="-146304">
+            <a:pPr marL="146304" indent="-146304" algn="l">
               <a:spcAft>
                 <a:spcPts val="500"/>
               </a:spcAft>
@@ -10073,7 +9612,7 @@
             </a:r>
           </a:p>
           <a:p>
-            <a:pPr algn="l" marL="146304" indent="-146304">
+            <a:pPr marL="146304" indent="-146304" algn="l">
               <a:spcAft>
                 <a:spcPts val="500"/>
               </a:spcAft>
@@ -10099,12 +9638,12 @@
 </p:sld>
 </file>
 
-<file path=ppt/slides/slide14.xml><?xml version="1.0" encoding="utf-8"?>
-<p:sld xmlns:a="http://schemas.openxmlformats.org/drawingml/2006/main" xmlns:r="http://schemas.openxmlformats.org/officeDocument/2006/relationships" xmlns:mc="http://schemas.openxmlformats.org/markup-compatibility/2006" xmlns:mv="urn:schemas-microsoft-com:mac:vml" xmlns:p="http://schemas.openxmlformats.org/presentationml/2006/main" xmlns:c="http://schemas.openxmlformats.org/drawingml/2006/chart" xmlns:dgm="http://schemas.openxmlformats.org/drawingml/2006/diagram" xmlns:o="urn:schemas-microsoft-com:office:office" xmlns:v="urn:schemas-microsoft-com:vml" xmlns:pvml="urn:schemas-microsoft-com:office:powerpoint" xmlns:com="http://schemas.openxmlformats.org/drawingml/2006/compatibility" xmlns:p14="http://schemas.microsoft.com/office/powerpoint/2010/main" xmlns:p15="http://schemas.microsoft.com/office/powerpoint/2012/main" xmlns:ahyp="http://schemas.microsoft.com/office/drawing/2018/hyperlinkcolor">
+<file path=ppt/slides/slide13.xml><?xml version="1.0" encoding="utf-8"?>
+<p:sld xmlns:a="http://schemas.openxmlformats.org/drawingml/2006/main" xmlns:r="http://schemas.openxmlformats.org/officeDocument/2006/relationships" xmlns:p="http://schemas.openxmlformats.org/presentationml/2006/main">
   <p:cSld>
     <p:spTree>
       <p:nvGrpSpPr>
-        <p:cNvPr id="155" name="Shape 155"/>
+        <p:cNvPr id="1" name="Shape 155"/>
         <p:cNvGrpSpPr/>
         <p:nvPr/>
       </p:nvGrpSpPr>
@@ -10126,7 +9665,7 @@
           <a:blip r:embed="rId3">
             <a:alphaModFix/>
           </a:blip>
-          <a:srcRect b="98001" l="0" r="0" t="0"/>
+          <a:srcRect b="98001"/>
           <a:stretch/>
         </p:blipFill>
         <p:spPr>
@@ -10193,23 +9732,20 @@
           </a:ln>
         </p:spPr>
         <p:txBody>
-          <a:bodyPr anchorCtr="0" anchor="ctr" bIns="91425" lIns="91425" spcFirstLastPara="1" rIns="91425" wrap="square" tIns="91425">
+          <a:bodyPr spcFirstLastPara="1" wrap="square" lIns="91425" tIns="91425" rIns="91425" bIns="91425" anchor="ctr" anchorCtr="0">
             <a:noAutofit/>
           </a:bodyPr>
           <a:lstStyle/>
           <a:p>
-            <a:pPr indent="0" lvl="0" marL="0" rtl="0" algn="ctr">
-              <a:spcBef>
-                <a:spcPts val="0"/>
-              </a:spcBef>
-              <a:spcAft>
-                <a:spcPts val="0"/>
-              </a:spcAft>
-              <a:buNone/>
-            </a:pPr>
-            <a:r>
-              <a:t/>
-            </a:r>
+            <a:pPr marL="0" lvl="0" indent="0" algn="ctr" rtl="0">
+              <a:spcBef>
+                <a:spcPts val="0"/>
+              </a:spcBef>
+              <a:spcAft>
+                <a:spcPts val="0"/>
+              </a:spcAft>
+              <a:buNone/>
+            </a:pPr>
             <a:endParaRPr/>
           </a:p>
         </p:txBody>
@@ -10234,12 +9770,12 @@
           </a:ln>
         </p:spPr>
         <p:txBody>
-          <a:bodyPr anchorCtr="0" anchor="t" bIns="91425" lIns="91425" spcFirstLastPara="1" rIns="91425" wrap="square" tIns="91425">
+          <a:bodyPr spcFirstLastPara="1" wrap="square" lIns="91425" tIns="91425" rIns="91425" bIns="91425" anchor="t" anchorCtr="0">
             <a:noAutofit/>
           </a:bodyPr>
           <a:lstStyle/>
           <a:p>
-            <a:pPr indent="0" lvl="0" marL="0" rtl="0" algn="l">
+            <a:pPr marL="0" lvl="0" indent="0" algn="l" rtl="0">
               <a:spcBef>
                 <a:spcPts val="0"/>
               </a:spcBef>
@@ -10265,18 +9801,15 @@
             </a:endParaRPr>
           </a:p>
           <a:p>
-            <a:pPr indent="0" lvl="0" marL="0" rtl="0" algn="l">
-              <a:spcBef>
-                <a:spcPts val="0"/>
-              </a:spcBef>
-              <a:spcAft>
-                <a:spcPts val="0"/>
-              </a:spcAft>
-              <a:buNone/>
-            </a:pPr>
-            <a:r>
-              <a:t/>
-            </a:r>
+            <a:pPr marL="0" lvl="0" indent="0" algn="l" rtl="0">
+              <a:spcBef>
+                <a:spcPts val="0"/>
+              </a:spcBef>
+              <a:spcAft>
+                <a:spcPts val="0"/>
+              </a:spcAft>
+              <a:buNone/>
+            </a:pPr>
             <a:endParaRPr sz="1600">
               <a:latin typeface="Google Sans Flex Medium"/>
               <a:ea typeface="Google Sans Flex Medium"/>
@@ -10285,7 +9818,7 @@
             </a:endParaRPr>
           </a:p>
           <a:p>
-            <a:pPr indent="-317500" lvl="0" marL="457200" rtl="0" algn="l">
+            <a:pPr marL="457200" lvl="0" indent="-317500" algn="l" rtl="0">
               <a:spcBef>
                 <a:spcPts val="0"/>
               </a:spcBef>
@@ -10322,7 +9855,7 @@
             </a:endParaRPr>
           </a:p>
           <a:p>
-            <a:pPr indent="-317500" lvl="0" marL="457200" rtl="0" algn="l">
+            <a:pPr marL="457200" lvl="0" indent="-317500" algn="l" rtl="0">
               <a:spcBef>
                 <a:spcPts val="0"/>
               </a:spcBef>
@@ -10359,7 +9892,7 @@
             </a:endParaRPr>
           </a:p>
           <a:p>
-            <a:pPr indent="-317500" lvl="0" marL="457200" rtl="0" algn="l">
+            <a:pPr marL="457200" lvl="0" indent="-317500" algn="l" rtl="0">
               <a:spcBef>
                 <a:spcPts val="0"/>
               </a:spcBef>
@@ -10396,18 +9929,15 @@
             </a:endParaRPr>
           </a:p>
           <a:p>
-            <a:pPr indent="0" lvl="0" marL="0" rtl="0" algn="l">
-              <a:spcBef>
-                <a:spcPts val="0"/>
-              </a:spcBef>
-              <a:spcAft>
-                <a:spcPts val="0"/>
-              </a:spcAft>
-              <a:buNone/>
-            </a:pPr>
-            <a:r>
-              <a:t/>
-            </a:r>
+            <a:pPr marL="0" lvl="0" indent="0" algn="l" rtl="0">
+              <a:spcBef>
+                <a:spcPts val="0"/>
+              </a:spcBef>
+              <a:spcAft>
+                <a:spcPts val="0"/>
+              </a:spcAft>
+              <a:buNone/>
+            </a:pPr>
             <a:endParaRPr sz="1600">
               <a:latin typeface="Google Sans Flex Medium"/>
               <a:ea typeface="Google Sans Flex Medium"/>
@@ -10434,7 +9964,7 @@
           <a:noFill/>
         </p:spPr>
         <p:txBody>
-          <a:bodyPr wrap="square" anchor="t" lIns="36576" rIns="36576" tIns="18288" bIns="18288">
+          <a:bodyPr wrap="square" lIns="36576" tIns="18288" rIns="36576" bIns="18288" anchor="t">
             <a:spAutoFit/>
           </a:bodyPr>
           <a:lstStyle/>
@@ -10532,12 +10062,12 @@
 </p:sld>
 </file>
 
-<file path=ppt/slides/slide15.xml><?xml version="1.0" encoding="utf-8"?>
-<p:sld xmlns:a="http://schemas.openxmlformats.org/drawingml/2006/main" xmlns:r="http://schemas.openxmlformats.org/officeDocument/2006/relationships" xmlns:mc="http://schemas.openxmlformats.org/markup-compatibility/2006" xmlns:mv="urn:schemas-microsoft-com:mac:vml" xmlns:p="http://schemas.openxmlformats.org/presentationml/2006/main" xmlns:c="http://schemas.openxmlformats.org/drawingml/2006/chart" xmlns:dgm="http://schemas.openxmlformats.org/drawingml/2006/diagram" xmlns:o="urn:schemas-microsoft-com:office:office" xmlns:v="urn:schemas-microsoft-com:vml" xmlns:pvml="urn:schemas-microsoft-com:office:powerpoint" xmlns:com="http://schemas.openxmlformats.org/drawingml/2006/compatibility" xmlns:p14="http://schemas.microsoft.com/office/powerpoint/2010/main" xmlns:p15="http://schemas.microsoft.com/office/powerpoint/2012/main" xmlns:ahyp="http://schemas.microsoft.com/office/drawing/2018/hyperlinkcolor">
+<file path=ppt/slides/slide14.xml><?xml version="1.0" encoding="utf-8"?>
+<p:sld xmlns:a="http://schemas.openxmlformats.org/drawingml/2006/main" xmlns:r="http://schemas.openxmlformats.org/officeDocument/2006/relationships" xmlns:p="http://schemas.openxmlformats.org/presentationml/2006/main">
   <p:cSld>
     <p:spTree>
       <p:nvGrpSpPr>
-        <p:cNvPr id="163" name="Shape 163"/>
+        <p:cNvPr id="1" name="Shape 163"/>
         <p:cNvGrpSpPr/>
         <p:nvPr/>
       </p:nvGrpSpPr>
@@ -10559,7 +10089,7 @@
           <a:blip r:embed="rId3">
             <a:alphaModFix/>
           </a:blip>
-          <a:srcRect b="98001" l="0" r="0" t="0"/>
+          <a:srcRect b="98001"/>
           <a:stretch/>
         </p:blipFill>
         <p:spPr>
@@ -10626,23 +10156,20 @@
           </a:ln>
         </p:spPr>
         <p:txBody>
-          <a:bodyPr anchorCtr="0" anchor="ctr" bIns="91425" lIns="91425" spcFirstLastPara="1" rIns="91425" wrap="square" tIns="91425">
+          <a:bodyPr spcFirstLastPara="1" wrap="square" lIns="91425" tIns="91425" rIns="91425" bIns="91425" anchor="ctr" anchorCtr="0">
             <a:noAutofit/>
           </a:bodyPr>
           <a:lstStyle/>
           <a:p>
-            <a:pPr indent="0" lvl="0" marL="0" rtl="0" algn="ctr">
-              <a:spcBef>
-                <a:spcPts val="0"/>
-              </a:spcBef>
-              <a:spcAft>
-                <a:spcPts val="0"/>
-              </a:spcAft>
-              <a:buNone/>
-            </a:pPr>
-            <a:r>
-              <a:t/>
-            </a:r>
+            <a:pPr marL="0" lvl="0" indent="0" algn="ctr" rtl="0">
+              <a:spcBef>
+                <a:spcPts val="0"/>
+              </a:spcBef>
+              <a:spcAft>
+                <a:spcPts val="0"/>
+              </a:spcAft>
+              <a:buNone/>
+            </a:pPr>
             <a:endParaRPr/>
           </a:p>
         </p:txBody>
@@ -10664,7 +10191,7 @@
           <a:noFill/>
         </p:spPr>
         <p:txBody>
-          <a:bodyPr wrap="square" anchor="t" lIns="36576" rIns="36576" tIns="18288" bIns="18288">
+          <a:bodyPr wrap="square" lIns="36576" tIns="18288" rIns="36576" bIns="18288" anchor="t">
             <a:spAutoFit/>
           </a:bodyPr>
           <a:lstStyle/>
@@ -10727,7 +10254,7 @@
           </a:fontRef>
         </p:style>
         <p:txBody>
-          <a:bodyPr rtlCol="0" anchor="ctr" wrap="square" lIns="54864" rIns="54864" tIns="27432" bIns="27432"/>
+          <a:bodyPr wrap="square" lIns="54864" tIns="27432" rIns="54864" bIns="27432" rtlCol="0" anchor="ctr"/>
           <a:lstStyle/>
           <a:p>
             <a:pPr algn="ctr">
@@ -10840,7 +10367,7 @@
           </a:fontRef>
         </p:style>
         <p:txBody>
-          <a:bodyPr rtlCol="0" anchor="ctr" wrap="square" lIns="54864" rIns="54864" tIns="27432" bIns="27432"/>
+          <a:bodyPr wrap="square" lIns="54864" tIns="27432" rIns="54864" bIns="27432" rtlCol="0" anchor="ctr"/>
           <a:lstStyle/>
           <a:p>
             <a:pPr algn="ctr">
@@ -10953,7 +10480,7 @@
           </a:fontRef>
         </p:style>
         <p:txBody>
-          <a:bodyPr rtlCol="0" anchor="ctr" wrap="square" lIns="54864" rIns="54864" tIns="27432" bIns="27432"/>
+          <a:bodyPr wrap="square" lIns="54864" tIns="27432" rIns="54864" bIns="27432" rtlCol="0" anchor="ctr"/>
           <a:lstStyle/>
           <a:p>
             <a:pPr algn="ctr">
@@ -11066,7 +10593,7 @@
           </a:fontRef>
         </p:style>
         <p:txBody>
-          <a:bodyPr rtlCol="0" anchor="ctr" wrap="square" lIns="54864" rIns="54864" tIns="27432" bIns="27432"/>
+          <a:bodyPr wrap="square" lIns="54864" tIns="27432" rIns="54864" bIns="27432" rtlCol="0" anchor="ctr"/>
           <a:lstStyle/>
           <a:p>
             <a:pPr algn="ctr">
@@ -11119,7 +10646,7 @@
           <a:noFill/>
         </p:spPr>
         <p:txBody>
-          <a:bodyPr wrap="square" anchor="t" lIns="36576" rIns="36576" tIns="18288" bIns="18288">
+          <a:bodyPr wrap="square" lIns="36576" tIns="18288" rIns="36576" bIns="18288" anchor="t">
             <a:spAutoFit/>
           </a:bodyPr>
           <a:lstStyle/>
@@ -11182,7 +10709,7 @@
           </a:fontRef>
         </p:style>
         <p:txBody>
-          <a:bodyPr rtlCol="0" anchor="ctr" wrap="square" lIns="54864" rIns="54864" tIns="27432" bIns="27432"/>
+          <a:bodyPr wrap="square" lIns="54864" tIns="27432" rIns="54864" bIns="27432" rtlCol="0" anchor="ctr"/>
           <a:lstStyle/>
           <a:p>
             <a:pPr algn="ctr">
@@ -11259,7 +10786,7 @@
           </a:fontRef>
         </p:style>
         <p:txBody>
-          <a:bodyPr rtlCol="0" anchor="ctr" wrap="square" lIns="54864" rIns="54864" tIns="27432" bIns="27432"/>
+          <a:bodyPr wrap="square" lIns="54864" tIns="27432" rIns="54864" bIns="27432" rtlCol="0" anchor="ctr"/>
           <a:lstStyle/>
           <a:p>
             <a:pPr algn="ctr">
@@ -11337,7 +10864,7 @@
           </a:fontRef>
         </p:style>
         <p:txBody>
-          <a:bodyPr rtlCol="0" anchor="ctr" wrap="square" lIns="54864" rIns="54864" tIns="27432" bIns="27432"/>
+          <a:bodyPr wrap="square" lIns="54864" tIns="27432" rIns="54864" bIns="27432" rtlCol="0" anchor="ctr"/>
           <a:lstStyle/>
           <a:p>
             <a:pPr algn="ctr">
@@ -11415,7 +10942,7 @@
           </a:fontRef>
         </p:style>
         <p:txBody>
-          <a:bodyPr rtlCol="0" anchor="ctr" wrap="square" lIns="54864" rIns="54864" tIns="27432" bIns="27432"/>
+          <a:bodyPr wrap="square" lIns="54864" tIns="27432" rIns="54864" bIns="27432" rtlCol="0" anchor="ctr"/>
           <a:lstStyle/>
           <a:p>
             <a:pPr algn="ctr">
@@ -11493,7 +11020,7 @@
           </a:fontRef>
         </p:style>
         <p:txBody>
-          <a:bodyPr rtlCol="0" anchor="ctr" wrap="square" lIns="54864" rIns="54864" tIns="27432" bIns="27432"/>
+          <a:bodyPr wrap="square" lIns="54864" tIns="27432" rIns="54864" bIns="27432" rtlCol="0" anchor="ctr"/>
           <a:lstStyle/>
           <a:p>
             <a:pPr algn="ctr">
@@ -11546,7 +11073,7 @@
           <a:noFill/>
         </p:spPr>
         <p:txBody>
-          <a:bodyPr wrap="square" anchor="t" lIns="36576" rIns="36576" tIns="18288" bIns="18288">
+          <a:bodyPr wrap="square" lIns="36576" tIns="18288" rIns="36576" bIns="18288" anchor="t">
             <a:spAutoFit/>
           </a:bodyPr>
           <a:lstStyle/>
@@ -11609,7 +11136,7 @@
           </a:fontRef>
         </p:style>
         <p:txBody>
-          <a:bodyPr rtlCol="0" anchor="ctr" wrap="square" lIns="54864" rIns="54864" tIns="27432" bIns="27432"/>
+          <a:bodyPr wrap="square" lIns="54864" tIns="27432" rIns="54864" bIns="27432" rtlCol="0" anchor="ctr"/>
           <a:lstStyle/>
           <a:p>
             <a:pPr algn="ctr">
@@ -11686,7 +11213,7 @@
           </a:fontRef>
         </p:style>
         <p:txBody>
-          <a:bodyPr rtlCol="0" anchor="ctr" wrap="square" lIns="54864" rIns="54864" tIns="27432" bIns="27432"/>
+          <a:bodyPr wrap="square" lIns="54864" tIns="27432" rIns="54864" bIns="27432" rtlCol="0" anchor="ctr"/>
           <a:lstStyle/>
           <a:p>
             <a:pPr algn="ctr">
@@ -11763,7 +11290,7 @@
           </a:fontRef>
         </p:style>
         <p:txBody>
-          <a:bodyPr rtlCol="0" anchor="ctr" wrap="square" lIns="54864" rIns="54864" tIns="27432" bIns="27432"/>
+          <a:bodyPr wrap="square" lIns="54864" tIns="27432" rIns="54864" bIns="27432" rtlCol="0" anchor="ctr"/>
           <a:lstStyle/>
           <a:p>
             <a:pPr algn="ctr">
@@ -11840,7 +11367,7 @@
           </a:fontRef>
         </p:style>
         <p:txBody>
-          <a:bodyPr rtlCol="0" anchor="ctr" wrap="square" lIns="54864" rIns="54864" tIns="27432" bIns="27432"/>
+          <a:bodyPr wrap="square" lIns="54864" tIns="27432" rIns="54864" bIns="27432" rtlCol="0" anchor="ctr"/>
           <a:lstStyle/>
           <a:p>
             <a:pPr algn="ctr">
@@ -11915,7 +11442,7 @@
           </a:fontRef>
         </p:style>
         <p:txBody>
-          <a:bodyPr rtlCol="0" anchor="ctr" wrap="square" lIns="54864" rIns="54864" tIns="27432" bIns="27432"/>
+          <a:bodyPr wrap="square" lIns="54864" tIns="27432" rIns="54864" bIns="27432" rtlCol="0" anchor="ctr"/>
           <a:lstStyle/>
           <a:p>
             <a:pPr algn="ctr">
@@ -11943,12 +11470,12 @@
 </p:sld>
 </file>
 
-<file path=ppt/slides/slide16.xml><?xml version="1.0" encoding="utf-8"?>
-<p:sld xmlns:a="http://schemas.openxmlformats.org/drawingml/2006/main" xmlns:r="http://schemas.openxmlformats.org/officeDocument/2006/relationships" xmlns:mc="http://schemas.openxmlformats.org/markup-compatibility/2006" xmlns:mv="urn:schemas-microsoft-com:mac:vml" xmlns:p="http://schemas.openxmlformats.org/presentationml/2006/main" xmlns:c="http://schemas.openxmlformats.org/drawingml/2006/chart" xmlns:dgm="http://schemas.openxmlformats.org/drawingml/2006/diagram" xmlns:o="urn:schemas-microsoft-com:office:office" xmlns:v="urn:schemas-microsoft-com:vml" xmlns:pvml="urn:schemas-microsoft-com:office:powerpoint" xmlns:com="http://schemas.openxmlformats.org/drawingml/2006/compatibility" xmlns:p14="http://schemas.microsoft.com/office/powerpoint/2010/main" xmlns:p15="http://schemas.microsoft.com/office/powerpoint/2012/main" xmlns:ahyp="http://schemas.microsoft.com/office/drawing/2018/hyperlinkcolor">
+<file path=ppt/slides/slide15.xml><?xml version="1.0" encoding="utf-8"?>
+<p:sld xmlns:a="http://schemas.openxmlformats.org/drawingml/2006/main" xmlns:r="http://schemas.openxmlformats.org/officeDocument/2006/relationships" xmlns:p="http://schemas.openxmlformats.org/presentationml/2006/main">
   <p:cSld>
     <p:spTree>
       <p:nvGrpSpPr>
-        <p:cNvPr id="170" name="Shape 170"/>
+        <p:cNvPr id="1" name="Shape 170"/>
         <p:cNvGrpSpPr/>
         <p:nvPr/>
       </p:nvGrpSpPr>
@@ -11970,7 +11497,7 @@
           <a:blip r:embed="rId3">
             <a:alphaModFix/>
           </a:blip>
-          <a:srcRect b="98001" l="0" r="0" t="0"/>
+          <a:srcRect b="98001"/>
           <a:stretch/>
         </p:blipFill>
         <p:spPr>
@@ -12023,12 +11550,12 @@
 </p:sld>
 </file>
 
-<file path=ppt/slides/slide3.xml><?xml version="1.0" encoding="utf-8"?>
-<p:sld xmlns:a="http://schemas.openxmlformats.org/drawingml/2006/main" xmlns:r="http://schemas.openxmlformats.org/officeDocument/2006/relationships" xmlns:mc="http://schemas.openxmlformats.org/markup-compatibility/2006" xmlns:mv="urn:schemas-microsoft-com:mac:vml" xmlns:p="http://schemas.openxmlformats.org/presentationml/2006/main" xmlns:c="http://schemas.openxmlformats.org/drawingml/2006/chart" xmlns:dgm="http://schemas.openxmlformats.org/drawingml/2006/diagram" xmlns:o="urn:schemas-microsoft-com:office:office" xmlns:v="urn:schemas-microsoft-com:vml" xmlns:pvml="urn:schemas-microsoft-com:office:powerpoint" xmlns:com="http://schemas.openxmlformats.org/drawingml/2006/compatibility" xmlns:p14="http://schemas.microsoft.com/office/powerpoint/2010/main" xmlns:p15="http://schemas.microsoft.com/office/powerpoint/2012/main" xmlns:ahyp="http://schemas.microsoft.com/office/drawing/2018/hyperlinkcolor">
+<file path=ppt/slides/slide2.xml><?xml version="1.0" encoding="utf-8"?>
+<p:sld xmlns:a="http://schemas.openxmlformats.org/drawingml/2006/main" xmlns:r="http://schemas.openxmlformats.org/officeDocument/2006/relationships" xmlns:p="http://schemas.openxmlformats.org/presentationml/2006/main">
   <p:cSld>
     <p:spTree>
       <p:nvGrpSpPr>
-        <p:cNvPr id="68" name="Shape 68"/>
+        <p:cNvPr id="1" name="Shape 68"/>
         <p:cNvGrpSpPr/>
         <p:nvPr/>
       </p:nvGrpSpPr>
@@ -12090,23 +11617,20 @@
           </a:ln>
         </p:spPr>
         <p:txBody>
-          <a:bodyPr anchorCtr="0" anchor="ctr" bIns="91425" lIns="91425" spcFirstLastPara="1" rIns="91425" wrap="square" tIns="91425">
+          <a:bodyPr spcFirstLastPara="1" wrap="square" lIns="91425" tIns="91425" rIns="91425" bIns="91425" anchor="ctr" anchorCtr="0">
             <a:noAutofit/>
           </a:bodyPr>
           <a:lstStyle/>
           <a:p>
-            <a:pPr indent="0" lvl="0" marL="0" rtl="0" algn="ctr">
-              <a:spcBef>
-                <a:spcPts val="0"/>
-              </a:spcBef>
-              <a:spcAft>
-                <a:spcPts val="0"/>
-              </a:spcAft>
-              <a:buNone/>
-            </a:pPr>
-            <a:r>
-              <a:t/>
-            </a:r>
+            <a:pPr marL="0" lvl="0" indent="0" algn="ctr" rtl="0">
+              <a:spcBef>
+                <a:spcPts val="0"/>
+              </a:spcBef>
+              <a:spcAft>
+                <a:spcPts val="0"/>
+              </a:spcAft>
+              <a:buNone/>
+            </a:pPr>
             <a:endParaRPr/>
           </a:p>
         </p:txBody>
@@ -12131,12 +11655,12 @@
           </a:ln>
         </p:spPr>
         <p:txBody>
-          <a:bodyPr anchorCtr="0" anchor="t" bIns="91425" lIns="91425" spcFirstLastPara="1" rIns="91425" wrap="square" tIns="91425">
+          <a:bodyPr spcFirstLastPara="1" wrap="square" lIns="91425" tIns="91425" rIns="91425" bIns="91425" anchor="t" anchorCtr="0">
             <a:noAutofit/>
           </a:bodyPr>
           <a:lstStyle/>
           <a:p>
-            <a:pPr indent="0" lvl="0" marL="0" rtl="0" algn="l">
+            <a:pPr marL="0" lvl="0" indent="0" algn="l" rtl="0">
               <a:spcBef>
                 <a:spcPts val="0"/>
               </a:spcBef>
@@ -12180,7 +11704,7 @@
           <a:noFill/>
         </p:spPr>
         <p:txBody>
-          <a:bodyPr wrap="square" anchor="t" lIns="36576" rIns="36576" tIns="18288" bIns="18288">
+          <a:bodyPr wrap="square" lIns="36576" tIns="18288" rIns="36576" bIns="18288" anchor="t">
             <a:spAutoFit/>
           </a:bodyPr>
           <a:lstStyle/>
@@ -12219,7 +11743,7 @@
           <a:noFill/>
         </p:spPr>
         <p:txBody>
-          <a:bodyPr wrap="square" anchor="t" lIns="36576" rIns="36576" tIns="18288" bIns="18288">
+          <a:bodyPr wrap="square" lIns="36576" tIns="18288" rIns="36576" bIns="18288" anchor="t">
             <a:spAutoFit/>
           </a:bodyPr>
           <a:lstStyle/>
@@ -12298,7 +11822,7 @@
           </a:fontRef>
         </p:style>
         <p:txBody>
-          <a:bodyPr rtlCol="0" anchor="t" wrap="square" lIns="54864" rIns="54864" tIns="27432" bIns="27432"/>
+          <a:bodyPr wrap="square" lIns="54864" tIns="27432" rIns="54864" bIns="27432" rtlCol="0" anchor="t"/>
           <a:lstStyle/>
           <a:p>
             <a:pPr algn="l">
@@ -12317,7 +11841,7 @@
             </a:r>
           </a:p>
           <a:p>
-            <a:pPr algn="l" marL="146304" indent="-146304">
+            <a:pPr marL="146304" indent="-146304" algn="l">
               <a:spcAft>
                 <a:spcPts val="500"/>
               </a:spcAft>
@@ -12334,7 +11858,7 @@
             </a:r>
           </a:p>
           <a:p>
-            <a:pPr algn="l" marL="146304" indent="-146304">
+            <a:pPr marL="146304" indent="-146304" algn="l">
               <a:spcAft>
                 <a:spcPts val="500"/>
               </a:spcAft>
@@ -12351,7 +11875,7 @@
             </a:r>
           </a:p>
           <a:p>
-            <a:pPr algn="l" marL="146304" indent="-146304">
+            <a:pPr marL="146304" indent="-146304" algn="l">
               <a:spcAft>
                 <a:spcPts val="500"/>
               </a:spcAft>
@@ -12368,7 +11892,7 @@
             </a:r>
           </a:p>
           <a:p>
-            <a:pPr algn="l" marL="146304" indent="-146304">
+            <a:pPr marL="146304" indent="-146304" algn="l">
               <a:spcAft>
                 <a:spcPts val="500"/>
               </a:spcAft>
@@ -12385,7 +11909,7 @@
             </a:r>
           </a:p>
           <a:p>
-            <a:pPr algn="l" marL="146304" indent="-146304">
+            <a:pPr marL="146304" indent="-146304" algn="l">
               <a:spcAft>
                 <a:spcPts val="500"/>
               </a:spcAft>
@@ -12444,7 +11968,7 @@
           </a:fontRef>
         </p:style>
         <p:txBody>
-          <a:bodyPr rtlCol="0" anchor="ctr" wrap="square" lIns="54864" rIns="54864" tIns="27432" bIns="27432"/>
+          <a:bodyPr wrap="square" lIns="54864" tIns="27432" rIns="54864" bIns="27432" rtlCol="0" anchor="ctr"/>
           <a:lstStyle/>
           <a:p>
             <a:pPr algn="ctr">
@@ -12521,7 +12045,7 @@
           </a:fontRef>
         </p:style>
         <p:txBody>
-          <a:bodyPr rtlCol="0" anchor="ctr" wrap="square" lIns="54864" rIns="54864" tIns="27432" bIns="27432"/>
+          <a:bodyPr wrap="square" lIns="54864" tIns="27432" rIns="54864" bIns="27432" rtlCol="0" anchor="ctr"/>
           <a:lstStyle/>
           <a:p>
             <a:pPr algn="ctr">
@@ -12598,7 +12122,7 @@
           </a:fontRef>
         </p:style>
         <p:txBody>
-          <a:bodyPr rtlCol="0" anchor="ctr" wrap="square" lIns="54864" rIns="54864" tIns="27432" bIns="27432"/>
+          <a:bodyPr wrap="square" lIns="54864" tIns="27432" rIns="54864" bIns="27432" rtlCol="0" anchor="ctr"/>
           <a:lstStyle/>
           <a:p>
             <a:pPr algn="ctr">
@@ -12673,7 +12197,7 @@
           </a:fontRef>
         </p:style>
         <p:txBody>
-          <a:bodyPr rtlCol="0" anchor="ctr" wrap="square" lIns="54864" rIns="54864" tIns="27432" bIns="27432"/>
+          <a:bodyPr wrap="square" lIns="54864" tIns="27432" rIns="54864" bIns="27432" rtlCol="0" anchor="ctr"/>
           <a:lstStyle/>
           <a:p>
             <a:pPr algn="ctr">
@@ -12701,12 +12225,12 @@
 </p:sld>
 </file>
 
-<file path=ppt/slides/slide4.xml><?xml version="1.0" encoding="utf-8"?>
-<p:sld xmlns:a="http://schemas.openxmlformats.org/drawingml/2006/main" xmlns:r="http://schemas.openxmlformats.org/officeDocument/2006/relationships" xmlns:mc="http://schemas.openxmlformats.org/markup-compatibility/2006" xmlns:mv="urn:schemas-microsoft-com:mac:vml" xmlns:p="http://schemas.openxmlformats.org/presentationml/2006/main" xmlns:c="http://schemas.openxmlformats.org/drawingml/2006/chart" xmlns:dgm="http://schemas.openxmlformats.org/drawingml/2006/diagram" xmlns:o="urn:schemas-microsoft-com:office:office" xmlns:v="urn:schemas-microsoft-com:vml" xmlns:pvml="urn:schemas-microsoft-com:office:powerpoint" xmlns:com="http://schemas.openxmlformats.org/drawingml/2006/compatibility" xmlns:p14="http://schemas.microsoft.com/office/powerpoint/2010/main" xmlns:p15="http://schemas.microsoft.com/office/powerpoint/2012/main" xmlns:ahyp="http://schemas.microsoft.com/office/drawing/2018/hyperlinkcolor">
+<file path=ppt/slides/slide3.xml><?xml version="1.0" encoding="utf-8"?>
+<p:sld xmlns:a="http://schemas.openxmlformats.org/drawingml/2006/main" xmlns:r="http://schemas.openxmlformats.org/officeDocument/2006/relationships" xmlns:p="http://schemas.openxmlformats.org/presentationml/2006/main">
   <p:cSld>
     <p:spTree>
       <p:nvGrpSpPr>
-        <p:cNvPr id="75" name="Shape 75"/>
+        <p:cNvPr id="1" name="Shape 75"/>
         <p:cNvGrpSpPr/>
         <p:nvPr/>
       </p:nvGrpSpPr>
@@ -12728,7 +12252,7 @@
           <a:blip r:embed="rId3">
             <a:alphaModFix/>
           </a:blip>
-          <a:srcRect b="98001" l="0" r="0" t="0"/>
+          <a:srcRect b="98001"/>
           <a:stretch/>
         </p:blipFill>
         <p:spPr>
@@ -12795,23 +12319,20 @@
           </a:ln>
         </p:spPr>
         <p:txBody>
-          <a:bodyPr anchorCtr="0" anchor="ctr" bIns="91425" lIns="91425" spcFirstLastPara="1" rIns="91425" wrap="square" tIns="91425">
+          <a:bodyPr spcFirstLastPara="1" wrap="square" lIns="91425" tIns="91425" rIns="91425" bIns="91425" anchor="ctr" anchorCtr="0">
             <a:noAutofit/>
           </a:bodyPr>
           <a:lstStyle/>
           <a:p>
-            <a:pPr indent="0" lvl="0" marL="0" rtl="0" algn="ctr">
-              <a:spcBef>
-                <a:spcPts val="0"/>
-              </a:spcBef>
-              <a:spcAft>
-                <a:spcPts val="0"/>
-              </a:spcAft>
-              <a:buNone/>
-            </a:pPr>
-            <a:r>
-              <a:t/>
-            </a:r>
+            <a:pPr marL="0" lvl="0" indent="0" algn="ctr" rtl="0">
+              <a:spcBef>
+                <a:spcPts val="0"/>
+              </a:spcBef>
+              <a:spcAft>
+                <a:spcPts val="0"/>
+              </a:spcAft>
+              <a:buNone/>
+            </a:pPr>
             <a:endParaRPr/>
           </a:p>
         </p:txBody>
@@ -12836,12 +12357,12 @@
           </a:ln>
         </p:spPr>
         <p:txBody>
-          <a:bodyPr anchorCtr="0" anchor="t" bIns="91425" lIns="91425" spcFirstLastPara="1" rIns="91425" wrap="square" tIns="91425">
+          <a:bodyPr spcFirstLastPara="1" wrap="square" lIns="91425" tIns="91425" rIns="91425" bIns="91425" anchor="t" anchorCtr="0">
             <a:noAutofit/>
           </a:bodyPr>
           <a:lstStyle/>
           <a:p>
-            <a:pPr indent="0" lvl="0" marL="0" rtl="0" algn="l">
+            <a:pPr marL="0" lvl="0" indent="0" algn="l" rtl="0">
               <a:spcBef>
                 <a:spcPts val="0"/>
               </a:spcBef>
@@ -12891,18 +12412,36 @@
         <a:graphic>
           <a:graphicData uri="http://schemas.openxmlformats.org/drawingml/2006/table">
             <a:tbl>
-              <a:tblPr firstRow="0" bandRow="0">
+              <a:tblPr>
                 <a:tableStyleId>{5940675A-B579-460E-94D1-54222C63F5DA}</a:tableStyleId>
               </a:tblPr>
               <a:tblGrid>
-                <a:gridCol w="1737360"/>
-                <a:gridCol w="2651760"/>
-                <a:gridCol w="4206240"/>
+                <a:gridCol w="1737360">
+                  <a:extLst>
+                    <a:ext uri="{9D8B030D-6E8A-4147-A177-3AD203B41FA5}">
+                      <a16:colId xmlns:a16="http://schemas.microsoft.com/office/drawing/2014/main" val="20000"/>
+                    </a:ext>
+                  </a:extLst>
+                </a:gridCol>
+                <a:gridCol w="2651760">
+                  <a:extLst>
+                    <a:ext uri="{9D8B030D-6E8A-4147-A177-3AD203B41FA5}">
+                      <a16:colId xmlns:a16="http://schemas.microsoft.com/office/drawing/2014/main" val="20001"/>
+                    </a:ext>
+                  </a:extLst>
+                </a:gridCol>
+                <a:gridCol w="4206240">
+                  <a:extLst>
+                    <a:ext uri="{9D8B030D-6E8A-4147-A177-3AD203B41FA5}">
+                      <a16:colId xmlns:a16="http://schemas.microsoft.com/office/drawing/2014/main" val="20002"/>
+                    </a:ext>
+                  </a:extLst>
+                </a:gridCol>
               </a:tblGrid>
               <a:tr h="274320">
                 <a:tc>
                   <a:txBody>
-                    <a:bodyPr wrap="square"/>
+                    <a:bodyPr/>
                     <a:lstStyle/>
                     <a:p>
                       <a:r>
@@ -12924,7 +12463,7 @@
                 </a:tc>
                 <a:tc>
                   <a:txBody>
-                    <a:bodyPr wrap="square"/>
+                    <a:bodyPr/>
                     <a:lstStyle/>
                     <a:p>
                       <a:r>
@@ -12946,7 +12485,7 @@
                 </a:tc>
                 <a:tc>
                   <a:txBody>
-                    <a:bodyPr wrap="square"/>
+                    <a:bodyPr/>
                     <a:lstStyle/>
                     <a:p>
                       <a:r>
@@ -12966,11 +12505,16 @@
                     </a:solidFill>
                   </a:tcPr>
                 </a:tc>
+                <a:extLst>
+                  <a:ext uri="{0D108BD9-81ED-4DB2-BD59-A6C34878D82A}">
+                    <a16:rowId xmlns:a16="http://schemas.microsoft.com/office/drawing/2014/main" val="10000"/>
+                  </a:ext>
+                </a:extLst>
               </a:tr>
               <a:tr h="274320">
                 <a:tc>
                   <a:txBody>
-                    <a:bodyPr wrap="square"/>
+                    <a:bodyPr/>
                     <a:lstStyle/>
                     <a:p>
                       <a:r>
@@ -12992,7 +12536,7 @@
                 </a:tc>
                 <a:tc>
                   <a:txBody>
-                    <a:bodyPr wrap="square"/>
+                    <a:bodyPr/>
                     <a:lstStyle/>
                     <a:p>
                       <a:r>
@@ -13014,7 +12558,7 @@
                 </a:tc>
                 <a:tc>
                   <a:txBody>
-                    <a:bodyPr wrap="square"/>
+                    <a:bodyPr/>
                     <a:lstStyle/>
                     <a:p>
                       <a:r>
@@ -13034,11 +12578,16 @@
                     </a:solidFill>
                   </a:tcPr>
                 </a:tc>
+                <a:extLst>
+                  <a:ext uri="{0D108BD9-81ED-4DB2-BD59-A6C34878D82A}">
+                    <a16:rowId xmlns:a16="http://schemas.microsoft.com/office/drawing/2014/main" val="10001"/>
+                  </a:ext>
+                </a:extLst>
               </a:tr>
               <a:tr h="274320">
                 <a:tc>
                   <a:txBody>
-                    <a:bodyPr wrap="square"/>
+                    <a:bodyPr/>
                     <a:lstStyle/>
                     <a:p>
                       <a:r>
@@ -13060,7 +12609,7 @@
                 </a:tc>
                 <a:tc>
                   <a:txBody>
-                    <a:bodyPr wrap="square"/>
+                    <a:bodyPr/>
                     <a:lstStyle/>
                     <a:p>
                       <a:r>
@@ -13082,7 +12631,7 @@
                 </a:tc>
                 <a:tc>
                   <a:txBody>
-                    <a:bodyPr wrap="square"/>
+                    <a:bodyPr/>
                     <a:lstStyle/>
                     <a:p>
                       <a:r>
@@ -13102,11 +12651,16 @@
                     </a:solidFill>
                   </a:tcPr>
                 </a:tc>
+                <a:extLst>
+                  <a:ext uri="{0D108BD9-81ED-4DB2-BD59-A6C34878D82A}">
+                    <a16:rowId xmlns:a16="http://schemas.microsoft.com/office/drawing/2014/main" val="10002"/>
+                  </a:ext>
+                </a:extLst>
               </a:tr>
               <a:tr h="274320">
                 <a:tc>
                   <a:txBody>
-                    <a:bodyPr wrap="square"/>
+                    <a:bodyPr/>
                     <a:lstStyle/>
                     <a:p>
                       <a:r>
@@ -13128,7 +12682,7 @@
                 </a:tc>
                 <a:tc>
                   <a:txBody>
-                    <a:bodyPr wrap="square"/>
+                    <a:bodyPr/>
                     <a:lstStyle/>
                     <a:p>
                       <a:r>
@@ -13150,7 +12704,7 @@
                 </a:tc>
                 <a:tc>
                   <a:txBody>
-                    <a:bodyPr wrap="square"/>
+                    <a:bodyPr/>
                     <a:lstStyle/>
                     <a:p>
                       <a:r>
@@ -13170,11 +12724,16 @@
                     </a:solidFill>
                   </a:tcPr>
                 </a:tc>
+                <a:extLst>
+                  <a:ext uri="{0D108BD9-81ED-4DB2-BD59-A6C34878D82A}">
+                    <a16:rowId xmlns:a16="http://schemas.microsoft.com/office/drawing/2014/main" val="10003"/>
+                  </a:ext>
+                </a:extLst>
               </a:tr>
               <a:tr h="274320">
                 <a:tc>
                   <a:txBody>
-                    <a:bodyPr wrap="square"/>
+                    <a:bodyPr/>
                     <a:lstStyle/>
                     <a:p>
                       <a:r>
@@ -13196,7 +12755,7 @@
                 </a:tc>
                 <a:tc>
                   <a:txBody>
-                    <a:bodyPr wrap="square"/>
+                    <a:bodyPr/>
                     <a:lstStyle/>
                     <a:p>
                       <a:r>
@@ -13218,7 +12777,7 @@
                 </a:tc>
                 <a:tc>
                   <a:txBody>
-                    <a:bodyPr wrap="square"/>
+                    <a:bodyPr/>
                     <a:lstStyle/>
                     <a:p>
                       <a:r>
@@ -13238,6 +12797,11 @@
                     </a:solidFill>
                   </a:tcPr>
                 </a:tc>
+                <a:extLst>
+                  <a:ext uri="{0D108BD9-81ED-4DB2-BD59-A6C34878D82A}">
+                    <a16:rowId xmlns:a16="http://schemas.microsoft.com/office/drawing/2014/main" val="10004"/>
+                  </a:ext>
+                </a:extLst>
               </a:tr>
             </a:tbl>
           </a:graphicData>
@@ -13260,7 +12824,7 @@
           <a:noFill/>
         </p:spPr>
         <p:txBody>
-          <a:bodyPr wrap="square" anchor="t" lIns="36576" rIns="36576" tIns="18288" bIns="18288">
+          <a:bodyPr wrap="square" lIns="36576" tIns="18288" rIns="36576" bIns="18288" anchor="t">
             <a:spAutoFit/>
           </a:bodyPr>
           <a:lstStyle/>
@@ -13383,7 +12947,7 @@
           <a:noFill/>
         </p:spPr>
         <p:txBody>
-          <a:bodyPr wrap="square" anchor="t" lIns="36576" rIns="36576" tIns="18288" bIns="18288">
+          <a:bodyPr wrap="square" lIns="36576" tIns="18288" rIns="36576" bIns="18288" anchor="t">
             <a:spAutoFit/>
           </a:bodyPr>
           <a:lstStyle/>
@@ -13515,12 +13079,12 @@
 </p:sld>
 </file>
 
-<file path=ppt/slides/slide5.xml><?xml version="1.0" encoding="utf-8"?>
-<p:sld xmlns:a="http://schemas.openxmlformats.org/drawingml/2006/main" xmlns:r="http://schemas.openxmlformats.org/officeDocument/2006/relationships" xmlns:mc="http://schemas.openxmlformats.org/markup-compatibility/2006" xmlns:mv="urn:schemas-microsoft-com:mac:vml" xmlns:p="http://schemas.openxmlformats.org/presentationml/2006/main" xmlns:c="http://schemas.openxmlformats.org/drawingml/2006/chart" xmlns:dgm="http://schemas.openxmlformats.org/drawingml/2006/diagram" xmlns:o="urn:schemas-microsoft-com:office:office" xmlns:v="urn:schemas-microsoft-com:vml" xmlns:pvml="urn:schemas-microsoft-com:office:powerpoint" xmlns:com="http://schemas.openxmlformats.org/drawingml/2006/compatibility" xmlns:p14="http://schemas.microsoft.com/office/powerpoint/2010/main" xmlns:p15="http://schemas.microsoft.com/office/powerpoint/2012/main" xmlns:ahyp="http://schemas.microsoft.com/office/drawing/2018/hyperlinkcolor">
+<file path=ppt/slides/slide4.xml><?xml version="1.0" encoding="utf-8"?>
+<p:sld xmlns:a="http://schemas.openxmlformats.org/drawingml/2006/main" xmlns:r="http://schemas.openxmlformats.org/officeDocument/2006/relationships" xmlns:p="http://schemas.openxmlformats.org/presentationml/2006/main">
   <p:cSld>
     <p:spTree>
       <p:nvGrpSpPr>
-        <p:cNvPr id="83" name="Shape 83"/>
+        <p:cNvPr id="1" name="Shape 83"/>
         <p:cNvGrpSpPr/>
         <p:nvPr/>
       </p:nvGrpSpPr>
@@ -13542,7 +13106,7 @@
           <a:blip r:embed="rId3">
             <a:alphaModFix/>
           </a:blip>
-          <a:srcRect b="98001" l="0" r="0" t="0"/>
+          <a:srcRect b="98001"/>
           <a:stretch/>
         </p:blipFill>
         <p:spPr>
@@ -13609,23 +13173,20 @@
           </a:ln>
         </p:spPr>
         <p:txBody>
-          <a:bodyPr anchorCtr="0" anchor="ctr" bIns="91425" lIns="91425" spcFirstLastPara="1" rIns="91425" wrap="square" tIns="91425">
+          <a:bodyPr spcFirstLastPara="1" wrap="square" lIns="91425" tIns="91425" rIns="91425" bIns="91425" anchor="ctr" anchorCtr="0">
             <a:noAutofit/>
           </a:bodyPr>
           <a:lstStyle/>
           <a:p>
-            <a:pPr indent="0" lvl="0" marL="0" rtl="0" algn="ctr">
-              <a:spcBef>
-                <a:spcPts val="0"/>
-              </a:spcBef>
-              <a:spcAft>
-                <a:spcPts val="0"/>
-              </a:spcAft>
-              <a:buNone/>
-            </a:pPr>
-            <a:r>
-              <a:t/>
-            </a:r>
+            <a:pPr marL="0" lvl="0" indent="0" algn="ctr" rtl="0">
+              <a:spcBef>
+                <a:spcPts val="0"/>
+              </a:spcBef>
+              <a:spcAft>
+                <a:spcPts val="0"/>
+              </a:spcAft>
+              <a:buNone/>
+            </a:pPr>
             <a:endParaRPr/>
           </a:p>
         </p:txBody>
@@ -13650,12 +13211,12 @@
           </a:ln>
         </p:spPr>
         <p:txBody>
-          <a:bodyPr anchorCtr="0" anchor="t" bIns="91425" lIns="91425" spcFirstLastPara="1" rIns="91425" wrap="square" tIns="91425">
+          <a:bodyPr spcFirstLastPara="1" wrap="square" lIns="91425" tIns="91425" rIns="91425" bIns="91425" anchor="t" anchorCtr="0">
             <a:noAutofit/>
           </a:bodyPr>
           <a:lstStyle/>
           <a:p>
-            <a:pPr indent="0" lvl="0" marL="0" rtl="0" algn="l">
+            <a:pPr marL="0" lvl="0" indent="0" algn="l" rtl="0">
               <a:spcBef>
                 <a:spcPts val="0"/>
               </a:spcBef>
@@ -13721,7 +13282,7 @@
           </a:fontRef>
         </p:style>
         <p:txBody>
-          <a:bodyPr rtlCol="0" anchor="ctr" wrap="square" lIns="54864" rIns="54864" tIns="27432" bIns="27432"/>
+          <a:bodyPr wrap="square" lIns="54864" tIns="27432" rIns="54864" bIns="27432" rtlCol="0" anchor="ctr"/>
           <a:lstStyle/>
           <a:p>
             <a:pPr algn="ctr">
@@ -13780,10 +13341,10 @@
           </a:fontRef>
         </p:style>
         <p:txBody>
-          <a:bodyPr rtlCol="0" anchor="t" wrap="square" lIns="54864" rIns="54864" tIns="27432" bIns="27432"/>
+          <a:bodyPr wrap="square" lIns="54864" tIns="27432" rIns="54864" bIns="27432" rtlCol="0" anchor="t"/>
           <a:lstStyle/>
           <a:p>
-            <a:pPr algn="l" marL="146304" indent="-146304">
+            <a:pPr marL="146304" indent="-146304" algn="l">
               <a:spcAft>
                 <a:spcPts val="500"/>
               </a:spcAft>
@@ -13800,7 +13361,7 @@
             </a:r>
           </a:p>
           <a:p>
-            <a:pPr algn="l" marL="146304" indent="-146304">
+            <a:pPr marL="146304" indent="-146304" algn="l">
               <a:spcAft>
                 <a:spcPts val="500"/>
               </a:spcAft>
@@ -13817,7 +13378,7 @@
             </a:r>
           </a:p>
           <a:p>
-            <a:pPr algn="l" marL="146304" indent="-146304">
+            <a:pPr marL="146304" indent="-146304" algn="l">
               <a:spcAft>
                 <a:spcPts val="500"/>
               </a:spcAft>
@@ -13834,7 +13395,7 @@
             </a:r>
           </a:p>
           <a:p>
-            <a:pPr algn="l" marL="146304" indent="-146304">
+            <a:pPr marL="146304" indent="-146304" algn="l">
               <a:spcAft>
                 <a:spcPts val="500"/>
               </a:spcAft>
@@ -13851,7 +13412,7 @@
             </a:r>
           </a:p>
           <a:p>
-            <a:pPr algn="l" marL="146304" indent="-146304">
+            <a:pPr marL="146304" indent="-146304" algn="l">
               <a:spcAft>
                 <a:spcPts val="500"/>
               </a:spcAft>
@@ -13868,7 +13429,7 @@
             </a:r>
           </a:p>
           <a:p>
-            <a:pPr algn="l" marL="146304" indent="-146304">
+            <a:pPr marL="146304" indent="-146304" algn="l">
               <a:spcAft>
                 <a:spcPts val="500"/>
               </a:spcAft>
@@ -13925,7 +13486,7 @@
           </a:fontRef>
         </p:style>
         <p:txBody>
-          <a:bodyPr rtlCol="0" anchor="ctr" wrap="square" lIns="54864" rIns="54864" tIns="27432" bIns="27432"/>
+          <a:bodyPr wrap="square" lIns="54864" tIns="27432" rIns="54864" bIns="27432" rtlCol="0" anchor="ctr"/>
           <a:lstStyle/>
           <a:p>
             <a:pPr algn="ctr">
@@ -13984,10 +13545,10 @@
           </a:fontRef>
         </p:style>
         <p:txBody>
-          <a:bodyPr rtlCol="0" anchor="t" wrap="square" lIns="54864" rIns="54864" tIns="27432" bIns="27432"/>
+          <a:bodyPr wrap="square" lIns="54864" tIns="27432" rIns="54864" bIns="27432" rtlCol="0" anchor="t"/>
           <a:lstStyle/>
           <a:p>
-            <a:pPr algn="l" marL="146304" indent="-146304">
+            <a:pPr marL="146304" indent="-146304" algn="l">
               <a:spcAft>
                 <a:spcPts val="500"/>
               </a:spcAft>
@@ -14004,7 +13565,7 @@
             </a:r>
           </a:p>
           <a:p>
-            <a:pPr algn="l" marL="146304" indent="-146304">
+            <a:pPr marL="146304" indent="-146304" algn="l">
               <a:spcAft>
                 <a:spcPts val="500"/>
               </a:spcAft>
@@ -14021,7 +13582,7 @@
             </a:r>
           </a:p>
           <a:p>
-            <a:pPr algn="l" marL="146304" indent="-146304">
+            <a:pPr marL="146304" indent="-146304" algn="l">
               <a:spcAft>
                 <a:spcPts val="500"/>
               </a:spcAft>
@@ -14038,7 +13599,7 @@
             </a:r>
           </a:p>
           <a:p>
-            <a:pPr algn="l" marL="146304" indent="-146304">
+            <a:pPr marL="146304" indent="-146304" algn="l">
               <a:spcAft>
                 <a:spcPts val="500"/>
               </a:spcAft>
@@ -14055,7 +13616,7 @@
             </a:r>
           </a:p>
           <a:p>
-            <a:pPr algn="l" marL="146304" indent="-146304">
+            <a:pPr marL="146304" indent="-146304" algn="l">
               <a:spcAft>
                 <a:spcPts val="500"/>
               </a:spcAft>
@@ -14072,7 +13633,7 @@
             </a:r>
           </a:p>
           <a:p>
-            <a:pPr algn="l" marL="146304" indent="-146304">
+            <a:pPr marL="146304" indent="-146304" algn="l">
               <a:spcAft>
                 <a:spcPts val="500"/>
               </a:spcAft>
@@ -14089,7 +13650,7 @@
             </a:r>
           </a:p>
           <a:p>
-            <a:pPr algn="l" marL="146304" indent="-146304">
+            <a:pPr marL="146304" indent="-146304" algn="l">
               <a:spcAft>
                 <a:spcPts val="500"/>
               </a:spcAft>
@@ -14146,7 +13707,7 @@
           </a:fontRef>
         </p:style>
         <p:txBody>
-          <a:bodyPr rtlCol="0" anchor="ctr" wrap="square" lIns="54864" rIns="54864" tIns="27432" bIns="27432"/>
+          <a:bodyPr wrap="square" lIns="54864" tIns="27432" rIns="54864" bIns="27432" rtlCol="0" anchor="ctr"/>
           <a:lstStyle/>
           <a:p>
             <a:pPr algn="ctr">
@@ -14205,10 +13766,10 @@
           </a:fontRef>
         </p:style>
         <p:txBody>
-          <a:bodyPr rtlCol="0" anchor="t" wrap="square" lIns="54864" rIns="54864" tIns="27432" bIns="27432"/>
+          <a:bodyPr wrap="square" lIns="54864" tIns="27432" rIns="54864" bIns="27432" rtlCol="0" anchor="t"/>
           <a:lstStyle/>
           <a:p>
-            <a:pPr algn="l" marL="146304" indent="-146304">
+            <a:pPr marL="146304" indent="-146304" algn="l">
               <a:spcAft>
                 <a:spcPts val="500"/>
               </a:spcAft>
@@ -14225,7 +13786,7 @@
             </a:r>
           </a:p>
           <a:p>
-            <a:pPr algn="l" marL="146304" indent="-146304">
+            <a:pPr marL="146304" indent="-146304" algn="l">
               <a:spcAft>
                 <a:spcPts val="500"/>
               </a:spcAft>
@@ -14242,7 +13803,7 @@
             </a:r>
           </a:p>
           <a:p>
-            <a:pPr algn="l" marL="146304" indent="-146304">
+            <a:pPr marL="146304" indent="-146304" algn="l">
               <a:spcAft>
                 <a:spcPts val="500"/>
               </a:spcAft>
@@ -14259,7 +13820,7 @@
             </a:r>
           </a:p>
           <a:p>
-            <a:pPr algn="l" marL="146304" indent="-146304">
+            <a:pPr marL="146304" indent="-146304" algn="l">
               <a:spcAft>
                 <a:spcPts val="500"/>
               </a:spcAft>
@@ -14276,7 +13837,7 @@
             </a:r>
           </a:p>
           <a:p>
-            <a:pPr algn="l" marL="146304" indent="-146304">
+            <a:pPr marL="146304" indent="-146304" algn="l">
               <a:spcAft>
                 <a:spcPts val="500"/>
               </a:spcAft>
@@ -14293,7 +13854,7 @@
             </a:r>
           </a:p>
           <a:p>
-            <a:pPr algn="l" marL="146304" indent="-146304">
+            <a:pPr marL="146304" indent="-146304" algn="l">
               <a:spcAft>
                 <a:spcPts val="500"/>
               </a:spcAft>
@@ -14310,7 +13871,7 @@
             </a:r>
           </a:p>
           <a:p>
-            <a:pPr algn="l" marL="146304" indent="-146304">
+            <a:pPr marL="146304" indent="-146304" algn="l">
               <a:spcAft>
                 <a:spcPts val="500"/>
               </a:spcAft>
@@ -14336,12 +13897,12 @@
 </p:sld>
 </file>
 
-<file path=ppt/slides/slide6.xml><?xml version="1.0" encoding="utf-8"?>
-<p:sld xmlns:a="http://schemas.openxmlformats.org/drawingml/2006/main" xmlns:r="http://schemas.openxmlformats.org/officeDocument/2006/relationships" xmlns:mc="http://schemas.openxmlformats.org/markup-compatibility/2006" xmlns:mv="urn:schemas-microsoft-com:mac:vml" xmlns:p="http://schemas.openxmlformats.org/presentationml/2006/main" xmlns:c="http://schemas.openxmlformats.org/drawingml/2006/chart" xmlns:dgm="http://schemas.openxmlformats.org/drawingml/2006/diagram" xmlns:o="urn:schemas-microsoft-com:office:office" xmlns:v="urn:schemas-microsoft-com:vml" xmlns:pvml="urn:schemas-microsoft-com:office:powerpoint" xmlns:com="http://schemas.openxmlformats.org/drawingml/2006/compatibility" xmlns:p14="http://schemas.microsoft.com/office/powerpoint/2010/main" xmlns:p15="http://schemas.microsoft.com/office/powerpoint/2012/main" xmlns:ahyp="http://schemas.microsoft.com/office/drawing/2018/hyperlinkcolor">
+<file path=ppt/slides/slide5.xml><?xml version="1.0" encoding="utf-8"?>
+<p:sld xmlns:a="http://schemas.openxmlformats.org/drawingml/2006/main" xmlns:r="http://schemas.openxmlformats.org/officeDocument/2006/relationships" xmlns:p="http://schemas.openxmlformats.org/presentationml/2006/main">
   <p:cSld>
     <p:spTree>
       <p:nvGrpSpPr>
-        <p:cNvPr id="91" name="Shape 91"/>
+        <p:cNvPr id="1" name="Shape 91"/>
         <p:cNvGrpSpPr/>
         <p:nvPr/>
       </p:nvGrpSpPr>
@@ -14363,7 +13924,7 @@
           <a:blip r:embed="rId3">
             <a:alphaModFix/>
           </a:blip>
-          <a:srcRect b="98001" l="0" r="0" t="0"/>
+          <a:srcRect b="98001"/>
           <a:stretch/>
         </p:blipFill>
         <p:spPr>
@@ -14430,23 +13991,20 @@
           </a:ln>
         </p:spPr>
         <p:txBody>
-          <a:bodyPr anchorCtr="0" anchor="ctr" bIns="91425" lIns="91425" spcFirstLastPara="1" rIns="91425" wrap="square" tIns="91425">
+          <a:bodyPr spcFirstLastPara="1" wrap="square" lIns="91425" tIns="91425" rIns="91425" bIns="91425" anchor="ctr" anchorCtr="0">
             <a:noAutofit/>
           </a:bodyPr>
           <a:lstStyle/>
           <a:p>
-            <a:pPr indent="0" lvl="0" marL="0" rtl="0" algn="ctr">
-              <a:spcBef>
-                <a:spcPts val="0"/>
-              </a:spcBef>
-              <a:spcAft>
-                <a:spcPts val="0"/>
-              </a:spcAft>
-              <a:buNone/>
-            </a:pPr>
-            <a:r>
-              <a:t/>
-            </a:r>
+            <a:pPr marL="0" lvl="0" indent="0" algn="ctr" rtl="0">
+              <a:spcBef>
+                <a:spcPts val="0"/>
+              </a:spcBef>
+              <a:spcAft>
+                <a:spcPts val="0"/>
+              </a:spcAft>
+              <a:buNone/>
+            </a:pPr>
             <a:endParaRPr/>
           </a:p>
         </p:txBody>
@@ -14471,12 +14029,12 @@
           </a:ln>
         </p:spPr>
         <p:txBody>
-          <a:bodyPr anchorCtr="0" anchor="t" bIns="91425" lIns="91425" spcFirstLastPara="1" rIns="91425" wrap="square" tIns="91425">
+          <a:bodyPr spcFirstLastPara="1" wrap="square" lIns="91425" tIns="91425" rIns="91425" bIns="91425" anchor="t" anchorCtr="0">
             <a:noAutofit/>
           </a:bodyPr>
           <a:lstStyle/>
           <a:p>
-            <a:pPr indent="0" lvl="0" marL="0" rtl="0" algn="l">
+            <a:pPr marL="0" lvl="0" indent="0" algn="l" rtl="0">
               <a:spcBef>
                 <a:spcPts val="0"/>
               </a:spcBef>
@@ -14520,7 +14078,7 @@
           <a:noFill/>
         </p:spPr>
         <p:txBody>
-          <a:bodyPr wrap="square" anchor="t" lIns="36576" rIns="36576" tIns="18288" bIns="18288">
+          <a:bodyPr wrap="square" lIns="36576" tIns="18288" rIns="36576" bIns="18288" anchor="t">
             <a:spAutoFit/>
           </a:bodyPr>
           <a:lstStyle/>
@@ -14583,7 +14141,7 @@
           </a:fontRef>
         </p:style>
         <p:txBody>
-          <a:bodyPr rtlCol="0" anchor="ctr" wrap="square" lIns="54864" rIns="54864" tIns="27432" bIns="27432"/>
+          <a:bodyPr wrap="square" lIns="54864" tIns="27432" rIns="54864" bIns="27432" rtlCol="0" anchor="ctr"/>
           <a:lstStyle/>
           <a:p>
             <a:pPr algn="ctr">
@@ -14680,7 +14238,7 @@
           </a:fontRef>
         </p:style>
         <p:txBody>
-          <a:bodyPr rtlCol="0" anchor="ctr" wrap="square" lIns="54864" rIns="54864" tIns="27432" bIns="27432"/>
+          <a:bodyPr wrap="square" lIns="54864" tIns="27432" rIns="54864" bIns="27432" rtlCol="0" anchor="ctr"/>
           <a:lstStyle/>
           <a:p>
             <a:pPr algn="ctr">
@@ -14777,7 +14335,7 @@
           </a:fontRef>
         </p:style>
         <p:txBody>
-          <a:bodyPr rtlCol="0" anchor="ctr" wrap="square" lIns="54864" rIns="54864" tIns="27432" bIns="27432"/>
+          <a:bodyPr wrap="square" lIns="54864" tIns="27432" rIns="54864" bIns="27432" rtlCol="0" anchor="ctr"/>
           <a:lstStyle/>
           <a:p>
             <a:pPr algn="ctr">
@@ -14874,7 +14432,7 @@
           </a:fontRef>
         </p:style>
         <p:txBody>
-          <a:bodyPr rtlCol="0" anchor="ctr" wrap="square" lIns="54864" rIns="54864" tIns="27432" bIns="27432"/>
+          <a:bodyPr wrap="square" lIns="54864" tIns="27432" rIns="54864" bIns="27432" rtlCol="0" anchor="ctr"/>
           <a:lstStyle/>
           <a:p>
             <a:pPr algn="ctr">
@@ -14971,7 +14529,7 @@
           </a:fontRef>
         </p:style>
         <p:txBody>
-          <a:bodyPr rtlCol="0" anchor="ctr" wrap="square" lIns="54864" rIns="54864" tIns="27432" bIns="27432"/>
+          <a:bodyPr wrap="square" lIns="54864" tIns="27432" rIns="54864" bIns="27432" rtlCol="0" anchor="ctr"/>
           <a:lstStyle/>
           <a:p>
             <a:pPr algn="ctr">
@@ -15084,7 +14642,7 @@
           </a:fontRef>
         </p:style>
         <p:txBody>
-          <a:bodyPr rtlCol="0" anchor="ctr" wrap="square" lIns="54864" rIns="54864" tIns="27432" bIns="27432"/>
+          <a:bodyPr wrap="square" lIns="54864" tIns="27432" rIns="54864" bIns="27432" rtlCol="0" anchor="ctr"/>
           <a:lstStyle/>
           <a:p>
             <a:pPr algn="ctr">
@@ -15197,7 +14755,7 @@
           </a:fontRef>
         </p:style>
         <p:txBody>
-          <a:bodyPr rtlCol="0" anchor="ctr" wrap="square" lIns="54864" rIns="54864" tIns="27432" bIns="27432"/>
+          <a:bodyPr wrap="square" lIns="54864" tIns="27432" rIns="54864" bIns="27432" rtlCol="0" anchor="ctr"/>
           <a:lstStyle/>
           <a:p>
             <a:pPr algn="ctr">
@@ -15310,7 +14868,7 @@
           </a:fontRef>
         </p:style>
         <p:txBody>
-          <a:bodyPr rtlCol="0" anchor="ctr" wrap="square" lIns="54864" rIns="54864" tIns="27432" bIns="27432"/>
+          <a:bodyPr wrap="square" lIns="54864" tIns="27432" rIns="54864" bIns="27432" rtlCol="0" anchor="ctr"/>
           <a:lstStyle/>
           <a:p>
             <a:pPr algn="ctr">
@@ -15387,7 +14945,7 @@
           </a:fontRef>
         </p:style>
         <p:txBody>
-          <a:bodyPr rtlCol="0" anchor="ctr" wrap="square" lIns="54864" rIns="54864" tIns="27432" bIns="27432"/>
+          <a:bodyPr wrap="square" lIns="54864" tIns="27432" rIns="54864" bIns="27432" rtlCol="0" anchor="ctr"/>
           <a:lstStyle/>
           <a:p>
             <a:pPr algn="ctr">
@@ -15415,12 +14973,12 @@
 </p:sld>
 </file>
 
-<file path=ppt/slides/slide7.xml><?xml version="1.0" encoding="utf-8"?>
-<p:sld xmlns:a="http://schemas.openxmlformats.org/drawingml/2006/main" xmlns:r="http://schemas.openxmlformats.org/officeDocument/2006/relationships" xmlns:mc="http://schemas.openxmlformats.org/markup-compatibility/2006" xmlns:mv="urn:schemas-microsoft-com:mac:vml" xmlns:p="http://schemas.openxmlformats.org/presentationml/2006/main" xmlns:c="http://schemas.openxmlformats.org/drawingml/2006/chart" xmlns:dgm="http://schemas.openxmlformats.org/drawingml/2006/diagram" xmlns:o="urn:schemas-microsoft-com:office:office" xmlns:v="urn:schemas-microsoft-com:vml" xmlns:pvml="urn:schemas-microsoft-com:office:powerpoint" xmlns:com="http://schemas.openxmlformats.org/drawingml/2006/compatibility" xmlns:p14="http://schemas.microsoft.com/office/powerpoint/2010/main" xmlns:p15="http://schemas.microsoft.com/office/powerpoint/2012/main" xmlns:ahyp="http://schemas.microsoft.com/office/drawing/2018/hyperlinkcolor">
+<file path=ppt/slides/slide6.xml><?xml version="1.0" encoding="utf-8"?>
+<p:sld xmlns:a="http://schemas.openxmlformats.org/drawingml/2006/main" xmlns:r="http://schemas.openxmlformats.org/officeDocument/2006/relationships" xmlns:p="http://schemas.openxmlformats.org/presentationml/2006/main">
   <p:cSld>
     <p:spTree>
       <p:nvGrpSpPr>
-        <p:cNvPr id="99" name="Shape 99"/>
+        <p:cNvPr id="1" name="Shape 99"/>
         <p:cNvGrpSpPr/>
         <p:nvPr/>
       </p:nvGrpSpPr>
@@ -15442,7 +15000,7 @@
           <a:blip r:embed="rId3">
             <a:alphaModFix/>
           </a:blip>
-          <a:srcRect b="98001" l="0" r="0" t="0"/>
+          <a:srcRect b="98001"/>
           <a:stretch/>
         </p:blipFill>
         <p:spPr>
@@ -15509,23 +15067,20 @@
           </a:ln>
         </p:spPr>
         <p:txBody>
-          <a:bodyPr anchorCtr="0" anchor="ctr" bIns="91425" lIns="91425" spcFirstLastPara="1" rIns="91425" wrap="square" tIns="91425">
+          <a:bodyPr spcFirstLastPara="1" wrap="square" lIns="91425" tIns="91425" rIns="91425" bIns="91425" anchor="ctr" anchorCtr="0">
             <a:noAutofit/>
           </a:bodyPr>
           <a:lstStyle/>
           <a:p>
-            <a:pPr indent="0" lvl="0" marL="0" rtl="0" algn="ctr">
-              <a:spcBef>
-                <a:spcPts val="0"/>
-              </a:spcBef>
-              <a:spcAft>
-                <a:spcPts val="0"/>
-              </a:spcAft>
-              <a:buNone/>
-            </a:pPr>
-            <a:r>
-              <a:t/>
-            </a:r>
+            <a:pPr marL="0" lvl="0" indent="0" algn="ctr" rtl="0">
+              <a:spcBef>
+                <a:spcPts val="0"/>
+              </a:spcBef>
+              <a:spcAft>
+                <a:spcPts val="0"/>
+              </a:spcAft>
+              <a:buNone/>
+            </a:pPr>
             <a:endParaRPr/>
           </a:p>
         </p:txBody>
@@ -15550,12 +15105,12 @@
           </a:ln>
         </p:spPr>
         <p:txBody>
-          <a:bodyPr anchorCtr="0" anchor="t" bIns="91425" lIns="91425" spcFirstLastPara="1" rIns="91425" wrap="square" tIns="91425">
+          <a:bodyPr spcFirstLastPara="1" wrap="square" lIns="91425" tIns="91425" rIns="91425" bIns="91425" anchor="t" anchorCtr="0">
             <a:noAutofit/>
           </a:bodyPr>
           <a:lstStyle/>
           <a:p>
-            <a:pPr indent="0" lvl="0" marL="0" rtl="0" algn="l">
+            <a:pPr marL="0" lvl="0" indent="0" algn="l" rtl="0">
               <a:spcBef>
                 <a:spcPts val="0"/>
               </a:spcBef>
@@ -15623,10 +15178,11 @@
           </a:fontRef>
         </p:style>
         <p:txBody>
-          <a:bodyPr rtlCol="0" anchor="ctr" wrap="square" lIns="54864" rIns="54864" tIns="27432" bIns="27432"/>
+          <a:bodyPr wrap="square" lIns="54864" tIns="27432" rIns="54864" bIns="27432" rtlCol="0" anchor="ctr"/>
           <a:lstStyle/>
           <a:p>
             <a:pPr algn="ctr"/>
+            <a:endParaRPr/>
           </a:p>
         </p:txBody>
       </p:sp>
@@ -15667,7 +15223,7 @@
           </a:fontRef>
         </p:style>
         <p:txBody>
-          <a:bodyPr rtlCol="0" anchor="ctr" wrap="square" lIns="54864" rIns="54864" tIns="27432" bIns="27432"/>
+          <a:bodyPr wrap="square" lIns="54864" tIns="27432" rIns="54864" bIns="27432" rtlCol="0" anchor="ctr"/>
           <a:lstStyle/>
           <a:p>
             <a:pPr algn="ctr">
@@ -15724,7 +15280,7 @@
           </a:fontRef>
         </p:style>
         <p:txBody>
-          <a:bodyPr rtlCol="0" anchor="t" wrap="square" lIns="54864" rIns="54864" tIns="27432" bIns="27432"/>
+          <a:bodyPr wrap="square" lIns="54864" tIns="27432" rIns="54864" bIns="27432" rtlCol="0" anchor="t"/>
           <a:lstStyle/>
           <a:p>
             <a:pPr algn="l">
@@ -15801,7 +15357,7 @@
           </a:fontRef>
         </p:style>
         <p:txBody>
-          <a:bodyPr rtlCol="0" anchor="ctr" wrap="square" lIns="54864" rIns="54864" tIns="27432" bIns="27432"/>
+          <a:bodyPr wrap="square" lIns="54864" tIns="27432" rIns="54864" bIns="27432" rtlCol="0" anchor="ctr"/>
           <a:lstStyle/>
           <a:p>
             <a:pPr algn="ctr">
@@ -15862,7 +15418,7 @@
           </a:fontRef>
         </p:style>
         <p:txBody>
-          <a:bodyPr rtlCol="0" anchor="ctr" wrap="square" lIns="54864" rIns="54864" tIns="27432" bIns="27432"/>
+          <a:bodyPr wrap="square" lIns="54864" tIns="27432" rIns="54864" bIns="27432" rtlCol="0" anchor="ctr"/>
           <a:lstStyle/>
           <a:p>
             <a:pPr algn="ctr">
@@ -15923,7 +15479,7 @@
           </a:fontRef>
         </p:style>
         <p:txBody>
-          <a:bodyPr rtlCol="0" anchor="ctr" wrap="square" lIns="54864" rIns="54864" tIns="27432" bIns="27432"/>
+          <a:bodyPr wrap="square" lIns="54864" tIns="27432" rIns="54864" bIns="27432" rtlCol="0" anchor="ctr"/>
           <a:lstStyle/>
           <a:p>
             <a:pPr algn="ctr">
@@ -15984,10 +15540,11 @@
           </a:fontRef>
         </p:style>
         <p:txBody>
-          <a:bodyPr rtlCol="0" anchor="ctr" wrap="square" lIns="54864" rIns="54864" tIns="27432" bIns="27432"/>
+          <a:bodyPr wrap="square" lIns="54864" tIns="27432" rIns="54864" bIns="27432" rtlCol="0" anchor="ctr"/>
           <a:lstStyle/>
           <a:p>
             <a:pPr algn="ctr"/>
+            <a:endParaRPr/>
           </a:p>
         </p:txBody>
       </p:sp>
@@ -16028,7 +15585,7 @@
           </a:fontRef>
         </p:style>
         <p:txBody>
-          <a:bodyPr rtlCol="0" anchor="ctr" wrap="square" lIns="54864" rIns="54864" tIns="27432" bIns="27432"/>
+          <a:bodyPr wrap="square" lIns="54864" tIns="27432" rIns="54864" bIns="27432" rtlCol="0" anchor="ctr"/>
           <a:lstStyle/>
           <a:p>
             <a:pPr algn="ctr">
@@ -16085,7 +15642,7 @@
           </a:fontRef>
         </p:style>
         <p:txBody>
-          <a:bodyPr rtlCol="0" anchor="t" wrap="square" lIns="54864" rIns="54864" tIns="27432" bIns="27432"/>
+          <a:bodyPr wrap="square" lIns="54864" tIns="27432" rIns="54864" bIns="27432" rtlCol="0" anchor="t"/>
           <a:lstStyle/>
           <a:p>
             <a:pPr algn="l">
@@ -16210,7 +15767,7 @@
           </a:fontRef>
         </p:style>
         <p:txBody>
-          <a:bodyPr rtlCol="0" anchor="ctr" wrap="square" lIns="54864" rIns="54864" tIns="27432" bIns="27432"/>
+          <a:bodyPr wrap="square" lIns="54864" tIns="27432" rIns="54864" bIns="27432" rtlCol="0" anchor="ctr"/>
           <a:lstStyle/>
           <a:p>
             <a:pPr algn="ctr">
@@ -16271,7 +15828,7 @@
           </a:fontRef>
         </p:style>
         <p:txBody>
-          <a:bodyPr rtlCol="0" anchor="ctr" wrap="square" lIns="54864" rIns="54864" tIns="27432" bIns="27432"/>
+          <a:bodyPr wrap="square" lIns="54864" tIns="27432" rIns="54864" bIns="27432" rtlCol="0" anchor="ctr"/>
           <a:lstStyle/>
           <a:p>
             <a:pPr algn="ctr">
@@ -16332,7 +15889,7 @@
           </a:fontRef>
         </p:style>
         <p:txBody>
-          <a:bodyPr rtlCol="0" anchor="ctr" wrap="square" lIns="54864" rIns="54864" tIns="27432" bIns="27432"/>
+          <a:bodyPr wrap="square" lIns="54864" tIns="27432" rIns="54864" bIns="27432" rtlCol="0" anchor="ctr"/>
           <a:lstStyle/>
           <a:p>
             <a:pPr algn="ctr">
@@ -16393,10 +15950,11 @@
           </a:fontRef>
         </p:style>
         <p:txBody>
-          <a:bodyPr rtlCol="0" anchor="ctr" wrap="square" lIns="54864" rIns="54864" tIns="27432" bIns="27432"/>
+          <a:bodyPr wrap="square" lIns="54864" tIns="27432" rIns="54864" bIns="27432" rtlCol="0" anchor="ctr"/>
           <a:lstStyle/>
           <a:p>
             <a:pPr algn="ctr"/>
+            <a:endParaRPr/>
           </a:p>
         </p:txBody>
       </p:sp>
@@ -16437,7 +15995,7 @@
           </a:fontRef>
         </p:style>
         <p:txBody>
-          <a:bodyPr rtlCol="0" anchor="ctr" wrap="square" lIns="54864" rIns="54864" tIns="27432" bIns="27432"/>
+          <a:bodyPr wrap="square" lIns="54864" tIns="27432" rIns="54864" bIns="27432" rtlCol="0" anchor="ctr"/>
           <a:lstStyle/>
           <a:p>
             <a:pPr algn="ctr">
@@ -16494,7 +16052,7 @@
           </a:fontRef>
         </p:style>
         <p:txBody>
-          <a:bodyPr rtlCol="0" anchor="t" wrap="square" lIns="54864" rIns="54864" tIns="27432" bIns="27432"/>
+          <a:bodyPr wrap="square" lIns="54864" tIns="27432" rIns="54864" bIns="27432" rtlCol="0" anchor="t"/>
           <a:lstStyle/>
           <a:p>
             <a:pPr algn="l">
@@ -16635,7 +16193,7 @@
           </a:fontRef>
         </p:style>
         <p:txBody>
-          <a:bodyPr rtlCol="0" anchor="ctr" wrap="square" lIns="54864" rIns="54864" tIns="27432" bIns="27432"/>
+          <a:bodyPr wrap="square" lIns="54864" tIns="27432" rIns="54864" bIns="27432" rtlCol="0" anchor="ctr"/>
           <a:lstStyle/>
           <a:p>
             <a:pPr algn="ctr">
@@ -16696,7 +16254,7 @@
           </a:fontRef>
         </p:style>
         <p:txBody>
-          <a:bodyPr rtlCol="0" anchor="ctr" wrap="square" lIns="54864" rIns="54864" tIns="27432" bIns="27432"/>
+          <a:bodyPr wrap="square" lIns="54864" tIns="27432" rIns="54864" bIns="27432" rtlCol="0" anchor="ctr"/>
           <a:lstStyle/>
           <a:p>
             <a:pPr algn="ctr">
@@ -16757,7 +16315,7 @@
           </a:fontRef>
         </p:style>
         <p:txBody>
-          <a:bodyPr rtlCol="0" anchor="ctr" wrap="square" lIns="54864" rIns="54864" tIns="27432" bIns="27432"/>
+          <a:bodyPr wrap="square" lIns="54864" tIns="27432" rIns="54864" bIns="27432" rtlCol="0" anchor="ctr"/>
           <a:lstStyle/>
           <a:p>
             <a:pPr algn="ctr">
@@ -16785,12 +16343,12 @@
 </p:sld>
 </file>
 
-<file path=ppt/slides/slide8.xml><?xml version="1.0" encoding="utf-8"?>
-<p:sld xmlns:a="http://schemas.openxmlformats.org/drawingml/2006/main" xmlns:r="http://schemas.openxmlformats.org/officeDocument/2006/relationships" xmlns:mc="http://schemas.openxmlformats.org/markup-compatibility/2006" xmlns:mv="urn:schemas-microsoft-com:mac:vml" xmlns:p="http://schemas.openxmlformats.org/presentationml/2006/main" xmlns:c="http://schemas.openxmlformats.org/drawingml/2006/chart" xmlns:dgm="http://schemas.openxmlformats.org/drawingml/2006/diagram" xmlns:o="urn:schemas-microsoft-com:office:office" xmlns:v="urn:schemas-microsoft-com:vml" xmlns:pvml="urn:schemas-microsoft-com:office:powerpoint" xmlns:com="http://schemas.openxmlformats.org/drawingml/2006/compatibility" xmlns:p14="http://schemas.microsoft.com/office/powerpoint/2010/main" xmlns:p15="http://schemas.microsoft.com/office/powerpoint/2012/main" xmlns:ahyp="http://schemas.microsoft.com/office/drawing/2018/hyperlinkcolor">
+<file path=ppt/slides/slide7.xml><?xml version="1.0" encoding="utf-8"?>
+<p:sld xmlns:a="http://schemas.openxmlformats.org/drawingml/2006/main" xmlns:r="http://schemas.openxmlformats.org/officeDocument/2006/relationships" xmlns:p="http://schemas.openxmlformats.org/presentationml/2006/main">
   <p:cSld>
     <p:spTree>
       <p:nvGrpSpPr>
-        <p:cNvPr id="107" name="Shape 107"/>
+        <p:cNvPr id="1" name="Shape 107"/>
         <p:cNvGrpSpPr/>
         <p:nvPr/>
       </p:nvGrpSpPr>
@@ -16812,7 +16370,7 @@
           <a:blip r:embed="rId3">
             <a:alphaModFix/>
           </a:blip>
-          <a:srcRect b="98001" l="0" r="0" t="0"/>
+          <a:srcRect b="98001"/>
           <a:stretch/>
         </p:blipFill>
         <p:spPr>
@@ -16879,23 +16437,20 @@
           </a:ln>
         </p:spPr>
         <p:txBody>
-          <a:bodyPr anchorCtr="0" anchor="ctr" bIns="91425" lIns="91425" spcFirstLastPara="1" rIns="91425" wrap="square" tIns="91425">
+          <a:bodyPr spcFirstLastPara="1" wrap="square" lIns="91425" tIns="91425" rIns="91425" bIns="91425" anchor="ctr" anchorCtr="0">
             <a:noAutofit/>
           </a:bodyPr>
           <a:lstStyle/>
           <a:p>
-            <a:pPr indent="0" lvl="0" marL="0" rtl="0" algn="ctr">
-              <a:spcBef>
-                <a:spcPts val="0"/>
-              </a:spcBef>
-              <a:spcAft>
-                <a:spcPts val="0"/>
-              </a:spcAft>
-              <a:buNone/>
-            </a:pPr>
-            <a:r>
-              <a:t/>
-            </a:r>
+            <a:pPr marL="0" lvl="0" indent="0" algn="ctr" rtl="0">
+              <a:spcBef>
+                <a:spcPts val="0"/>
+              </a:spcBef>
+              <a:spcAft>
+                <a:spcPts val="0"/>
+              </a:spcAft>
+              <a:buNone/>
+            </a:pPr>
             <a:endParaRPr/>
           </a:p>
         </p:txBody>
@@ -16920,12 +16475,12 @@
           </a:ln>
         </p:spPr>
         <p:txBody>
-          <a:bodyPr anchorCtr="0" anchor="t" bIns="91425" lIns="91425" spcFirstLastPara="1" rIns="91425" wrap="square" tIns="91425">
+          <a:bodyPr spcFirstLastPara="1" wrap="square" lIns="91425" tIns="91425" rIns="91425" bIns="91425" anchor="t" anchorCtr="0">
             <a:noAutofit/>
           </a:bodyPr>
           <a:lstStyle/>
           <a:p>
-            <a:pPr indent="0" lvl="0" marL="0" rtl="0" algn="l">
+            <a:pPr marL="0" lvl="0" indent="0" algn="l" rtl="0">
               <a:spcBef>
                 <a:spcPts val="0"/>
               </a:spcBef>
@@ -16993,7 +16548,7 @@
           </a:fontRef>
         </p:style>
         <p:txBody>
-          <a:bodyPr rtlCol="0" anchor="ctr" wrap="square" lIns="54864" rIns="54864" tIns="27432" bIns="27432"/>
+          <a:bodyPr wrap="square" lIns="54864" tIns="27432" rIns="54864" bIns="27432" rtlCol="0" anchor="ctr"/>
           <a:lstStyle/>
           <a:p>
             <a:pPr algn="ctr">
@@ -17070,7 +16625,7 @@
           </a:fontRef>
         </p:style>
         <p:txBody>
-          <a:bodyPr rtlCol="0" anchor="t" wrap="square" lIns="54864" rIns="54864" tIns="27432" bIns="27432"/>
+          <a:bodyPr wrap="square" lIns="54864" tIns="27432" rIns="54864" bIns="27432" rtlCol="0" anchor="t"/>
           <a:lstStyle/>
           <a:p>
             <a:pPr algn="ctr">
@@ -17131,7 +16686,7 @@
           </a:fontRef>
         </p:style>
         <p:txBody>
-          <a:bodyPr rtlCol="0" anchor="ctr" wrap="square" lIns="54864" rIns="54864" tIns="27432" bIns="27432"/>
+          <a:bodyPr wrap="square" lIns="54864" tIns="27432" rIns="54864" bIns="27432" rtlCol="0" anchor="ctr"/>
           <a:lstStyle/>
           <a:p>
             <a:pPr algn="ctr">
@@ -17192,7 +16747,7 @@
           </a:fontRef>
         </p:style>
         <p:txBody>
-          <a:bodyPr rtlCol="0" anchor="ctr" wrap="square" lIns="54864" rIns="54864" tIns="27432" bIns="27432"/>
+          <a:bodyPr wrap="square" lIns="54864" tIns="27432" rIns="54864" bIns="27432" rtlCol="0" anchor="ctr"/>
           <a:lstStyle/>
           <a:p>
             <a:pPr algn="ctr">
@@ -17253,7 +16808,7 @@
           </a:fontRef>
         </p:style>
         <p:txBody>
-          <a:bodyPr rtlCol="0" anchor="ctr" wrap="square" lIns="54864" rIns="54864" tIns="27432" bIns="27432"/>
+          <a:bodyPr wrap="square" lIns="54864" tIns="27432" rIns="54864" bIns="27432" rtlCol="0" anchor="ctr"/>
           <a:lstStyle/>
           <a:p>
             <a:pPr algn="ctr">
@@ -17314,7 +16869,7 @@
           </a:fontRef>
         </p:style>
         <p:txBody>
-          <a:bodyPr rtlCol="0" anchor="ctr" wrap="square" lIns="54864" rIns="54864" tIns="27432" bIns="27432"/>
+          <a:bodyPr wrap="square" lIns="54864" tIns="27432" rIns="54864" bIns="27432" rtlCol="0" anchor="ctr"/>
           <a:lstStyle/>
           <a:p>
             <a:pPr algn="ctr">
@@ -17375,7 +16930,7 @@
           </a:fontRef>
         </p:style>
         <p:txBody>
-          <a:bodyPr rtlCol="0" anchor="ctr" wrap="square" lIns="54864" rIns="54864" tIns="27432" bIns="27432"/>
+          <a:bodyPr wrap="square" lIns="54864" tIns="27432" rIns="54864" bIns="27432" rtlCol="0" anchor="ctr"/>
           <a:lstStyle/>
           <a:p>
             <a:pPr algn="ctr">
@@ -17452,7 +17007,7 @@
           </a:fontRef>
         </p:style>
         <p:txBody>
-          <a:bodyPr rtlCol="0" anchor="ctr" wrap="square" lIns="54864" rIns="54864" tIns="27432" bIns="27432"/>
+          <a:bodyPr wrap="square" lIns="54864" tIns="27432" rIns="54864" bIns="27432" rtlCol="0" anchor="ctr"/>
           <a:lstStyle/>
           <a:p>
             <a:pPr algn="ctr">
@@ -17529,7 +17084,7 @@
           </a:fontRef>
         </p:style>
         <p:txBody>
-          <a:bodyPr rtlCol="0" anchor="ctr" wrap="square" lIns="54864" rIns="54864" tIns="27432" bIns="27432"/>
+          <a:bodyPr wrap="square" lIns="54864" tIns="27432" rIns="54864" bIns="27432" rtlCol="0" anchor="ctr"/>
           <a:lstStyle/>
           <a:p>
             <a:pPr algn="ctr">
@@ -17606,7 +17161,7 @@
           </a:fontRef>
         </p:style>
         <p:txBody>
-          <a:bodyPr rtlCol="0" anchor="ctr" wrap="square" lIns="54864" rIns="54864" tIns="27432" bIns="27432"/>
+          <a:bodyPr wrap="square" lIns="54864" tIns="27432" rIns="54864" bIns="27432" rtlCol="0" anchor="ctr"/>
           <a:lstStyle/>
           <a:p>
             <a:pPr algn="ctr">
@@ -17911,7 +17466,7 @@
           <a:noFill/>
         </p:spPr>
         <p:txBody>
-          <a:bodyPr wrap="square" anchor="t" lIns="36576" rIns="36576" tIns="18288" bIns="18288">
+          <a:bodyPr wrap="square" lIns="36576" tIns="18288" rIns="36576" bIns="18288" anchor="t">
             <a:spAutoFit/>
           </a:bodyPr>
           <a:lstStyle/>
@@ -17950,7 +17505,7 @@
           <a:noFill/>
         </p:spPr>
         <p:txBody>
-          <a:bodyPr wrap="square" anchor="t" lIns="36576" rIns="36576" tIns="18288" bIns="18288">
+          <a:bodyPr wrap="square" lIns="36576" tIns="18288" rIns="36576" bIns="18288" anchor="t">
             <a:spAutoFit/>
           </a:bodyPr>
           <a:lstStyle/>
@@ -17989,7 +17544,7 @@
           <a:noFill/>
         </p:spPr>
         <p:txBody>
-          <a:bodyPr wrap="square" anchor="t" lIns="36576" rIns="36576" tIns="18288" bIns="18288">
+          <a:bodyPr wrap="square" lIns="36576" tIns="18288" rIns="36576" bIns="18288" anchor="t">
             <a:spAutoFit/>
           </a:bodyPr>
           <a:lstStyle/>
@@ -18019,12 +17574,12 @@
 </p:sld>
 </file>
 
-<file path=ppt/slides/slide9.xml><?xml version="1.0" encoding="utf-8"?>
-<p:sld xmlns:a="http://schemas.openxmlformats.org/drawingml/2006/main" xmlns:r="http://schemas.openxmlformats.org/officeDocument/2006/relationships" xmlns:mc="http://schemas.openxmlformats.org/markup-compatibility/2006" xmlns:mv="urn:schemas-microsoft-com:mac:vml" xmlns:p="http://schemas.openxmlformats.org/presentationml/2006/main" xmlns:c="http://schemas.openxmlformats.org/drawingml/2006/chart" xmlns:dgm="http://schemas.openxmlformats.org/drawingml/2006/diagram" xmlns:o="urn:schemas-microsoft-com:office:office" xmlns:v="urn:schemas-microsoft-com:vml" xmlns:pvml="urn:schemas-microsoft-com:office:powerpoint" xmlns:com="http://schemas.openxmlformats.org/drawingml/2006/compatibility" xmlns:p14="http://schemas.microsoft.com/office/powerpoint/2010/main" xmlns:p15="http://schemas.microsoft.com/office/powerpoint/2012/main" xmlns:ahyp="http://schemas.microsoft.com/office/drawing/2018/hyperlinkcolor">
+<file path=ppt/slides/slide8.xml><?xml version="1.0" encoding="utf-8"?>
+<p:sld xmlns:a="http://schemas.openxmlformats.org/drawingml/2006/main" xmlns:r="http://schemas.openxmlformats.org/officeDocument/2006/relationships" xmlns:p="http://schemas.openxmlformats.org/presentationml/2006/main">
   <p:cSld>
     <p:spTree>
       <p:nvGrpSpPr>
-        <p:cNvPr id="115" name="Shape 115"/>
+        <p:cNvPr id="1" name="Shape 115"/>
         <p:cNvGrpSpPr/>
         <p:nvPr/>
       </p:nvGrpSpPr>
@@ -18046,7 +17601,7 @@
           <a:blip r:embed="rId3">
             <a:alphaModFix/>
           </a:blip>
-          <a:srcRect b="98001" l="0" r="0" t="0"/>
+          <a:srcRect b="98001"/>
           <a:stretch/>
         </p:blipFill>
         <p:spPr>
@@ -18113,23 +17668,20 @@
           </a:ln>
         </p:spPr>
         <p:txBody>
-          <a:bodyPr anchorCtr="0" anchor="ctr" bIns="91425" lIns="91425" spcFirstLastPara="1" rIns="91425" wrap="square" tIns="91425">
+          <a:bodyPr spcFirstLastPara="1" wrap="square" lIns="91425" tIns="91425" rIns="91425" bIns="91425" anchor="ctr" anchorCtr="0">
             <a:noAutofit/>
           </a:bodyPr>
           <a:lstStyle/>
           <a:p>
-            <a:pPr indent="0" lvl="0" marL="0" rtl="0" algn="ctr">
-              <a:spcBef>
-                <a:spcPts val="0"/>
-              </a:spcBef>
-              <a:spcAft>
-                <a:spcPts val="0"/>
-              </a:spcAft>
-              <a:buNone/>
-            </a:pPr>
-            <a:r>
-              <a:t/>
-            </a:r>
+            <a:pPr marL="0" lvl="0" indent="0" algn="ctr" rtl="0">
+              <a:spcBef>
+                <a:spcPts val="0"/>
+              </a:spcBef>
+              <a:spcAft>
+                <a:spcPts val="0"/>
+              </a:spcAft>
+              <a:buNone/>
+            </a:pPr>
             <a:endParaRPr/>
           </a:p>
         </p:txBody>
@@ -18154,12 +17706,12 @@
           </a:ln>
         </p:spPr>
         <p:txBody>
-          <a:bodyPr anchorCtr="0" anchor="t" bIns="91425" lIns="91425" spcFirstLastPara="1" rIns="91425" wrap="square" tIns="91425">
+          <a:bodyPr spcFirstLastPara="1" wrap="square" lIns="91425" tIns="91425" rIns="91425" bIns="91425" anchor="t" anchorCtr="0">
             <a:noAutofit/>
           </a:bodyPr>
           <a:lstStyle/>
           <a:p>
-            <a:pPr indent="0" lvl="0" marL="0" rtl="0" algn="l">
+            <a:pPr marL="0" lvl="0" indent="0" algn="l" rtl="0">
               <a:spcBef>
                 <a:spcPts val="0"/>
               </a:spcBef>
@@ -18201,18 +17753,36 @@
         <a:graphic>
           <a:graphicData uri="http://schemas.openxmlformats.org/drawingml/2006/table">
             <a:tbl>
-              <a:tblPr firstRow="0" bandRow="0">
+              <a:tblPr>
                 <a:tableStyleId>{5940675A-B579-460E-94D1-54222C63F5DA}</a:tableStyleId>
               </a:tblPr>
               <a:tblGrid>
-                <a:gridCol w="1325880"/>
-                <a:gridCol w="3337560"/>
-                <a:gridCol w="3931920"/>
+                <a:gridCol w="1325880">
+                  <a:extLst>
+                    <a:ext uri="{9D8B030D-6E8A-4147-A177-3AD203B41FA5}">
+                      <a16:colId xmlns:a16="http://schemas.microsoft.com/office/drawing/2014/main" val="20000"/>
+                    </a:ext>
+                  </a:extLst>
+                </a:gridCol>
+                <a:gridCol w="3337560">
+                  <a:extLst>
+                    <a:ext uri="{9D8B030D-6E8A-4147-A177-3AD203B41FA5}">
+                      <a16:colId xmlns:a16="http://schemas.microsoft.com/office/drawing/2014/main" val="20001"/>
+                    </a:ext>
+                  </a:extLst>
+                </a:gridCol>
+                <a:gridCol w="3931920">
+                  <a:extLst>
+                    <a:ext uri="{9D8B030D-6E8A-4147-A177-3AD203B41FA5}">
+                      <a16:colId xmlns:a16="http://schemas.microsoft.com/office/drawing/2014/main" val="20002"/>
+                    </a:ext>
+                  </a:extLst>
+                </a:gridCol>
               </a:tblGrid>
               <a:tr h="475488">
                 <a:tc>
                   <a:txBody>
-                    <a:bodyPr wrap="square"/>
+                    <a:bodyPr/>
                     <a:lstStyle/>
                     <a:p>
                       <a:r>
@@ -18234,7 +17804,7 @@
                 </a:tc>
                 <a:tc>
                   <a:txBody>
-                    <a:bodyPr wrap="square"/>
+                    <a:bodyPr/>
                     <a:lstStyle/>
                     <a:p>
                       <a:r>
@@ -18256,7 +17826,7 @@
                 </a:tc>
                 <a:tc>
                   <a:txBody>
-                    <a:bodyPr wrap="square"/>
+                    <a:bodyPr/>
                     <a:lstStyle/>
                     <a:p>
                       <a:r>
@@ -18276,11 +17846,16 @@
                     </a:solidFill>
                   </a:tcPr>
                 </a:tc>
+                <a:extLst>
+                  <a:ext uri="{0D108BD9-81ED-4DB2-BD59-A6C34878D82A}">
+                    <a16:rowId xmlns:a16="http://schemas.microsoft.com/office/drawing/2014/main" val="10000"/>
+                  </a:ext>
+                </a:extLst>
               </a:tr>
               <a:tr h="475488">
                 <a:tc>
                   <a:txBody>
-                    <a:bodyPr wrap="square"/>
+                    <a:bodyPr/>
                     <a:lstStyle/>
                     <a:p>
                       <a:r>
@@ -18302,7 +17877,7 @@
                 </a:tc>
                 <a:tc>
                   <a:txBody>
-                    <a:bodyPr wrap="square"/>
+                    <a:bodyPr/>
                     <a:lstStyle/>
                     <a:p>
                       <a:r>
@@ -18324,7 +17899,7 @@
                 </a:tc>
                 <a:tc>
                   <a:txBody>
-                    <a:bodyPr wrap="square"/>
+                    <a:bodyPr/>
                     <a:lstStyle/>
                     <a:p>
                       <a:r>
@@ -18344,11 +17919,16 @@
                     </a:solidFill>
                   </a:tcPr>
                 </a:tc>
+                <a:extLst>
+                  <a:ext uri="{0D108BD9-81ED-4DB2-BD59-A6C34878D82A}">
+                    <a16:rowId xmlns:a16="http://schemas.microsoft.com/office/drawing/2014/main" val="10001"/>
+                  </a:ext>
+                </a:extLst>
               </a:tr>
               <a:tr h="475488">
                 <a:tc>
                   <a:txBody>
-                    <a:bodyPr wrap="square"/>
+                    <a:bodyPr/>
                     <a:lstStyle/>
                     <a:p>
                       <a:r>
@@ -18370,7 +17950,7 @@
                 </a:tc>
                 <a:tc>
                   <a:txBody>
-                    <a:bodyPr wrap="square"/>
+                    <a:bodyPr/>
                     <a:lstStyle/>
                     <a:p>
                       <a:r>
@@ -18392,7 +17972,7 @@
                 </a:tc>
                 <a:tc>
                   <a:txBody>
-                    <a:bodyPr wrap="square"/>
+                    <a:bodyPr/>
                     <a:lstStyle/>
                     <a:p>
                       <a:r>
@@ -18412,11 +17992,16 @@
                     </a:solidFill>
                   </a:tcPr>
                 </a:tc>
+                <a:extLst>
+                  <a:ext uri="{0D108BD9-81ED-4DB2-BD59-A6C34878D82A}">
+                    <a16:rowId xmlns:a16="http://schemas.microsoft.com/office/drawing/2014/main" val="10002"/>
+                  </a:ext>
+                </a:extLst>
               </a:tr>
               <a:tr h="475488">
                 <a:tc>
                   <a:txBody>
-                    <a:bodyPr wrap="square"/>
+                    <a:bodyPr/>
                     <a:lstStyle/>
                     <a:p>
                       <a:r>
@@ -18438,7 +18023,7 @@
                 </a:tc>
                 <a:tc>
                   <a:txBody>
-                    <a:bodyPr wrap="square"/>
+                    <a:bodyPr/>
                     <a:lstStyle/>
                     <a:p>
                       <a:r>
@@ -18460,7 +18045,7 @@
                 </a:tc>
                 <a:tc>
                   <a:txBody>
-                    <a:bodyPr wrap="square"/>
+                    <a:bodyPr/>
                     <a:lstStyle/>
                     <a:p>
                       <a:r>
@@ -18480,11 +18065,16 @@
                     </a:solidFill>
                   </a:tcPr>
                 </a:tc>
+                <a:extLst>
+                  <a:ext uri="{0D108BD9-81ED-4DB2-BD59-A6C34878D82A}">
+                    <a16:rowId xmlns:a16="http://schemas.microsoft.com/office/drawing/2014/main" val="10003"/>
+                  </a:ext>
+                </a:extLst>
               </a:tr>
               <a:tr h="475488">
                 <a:tc>
                   <a:txBody>
-                    <a:bodyPr wrap="square"/>
+                    <a:bodyPr/>
                     <a:lstStyle/>
                     <a:p>
                       <a:r>
@@ -18506,7 +18096,7 @@
                 </a:tc>
                 <a:tc>
                   <a:txBody>
-                    <a:bodyPr wrap="square"/>
+                    <a:bodyPr/>
                     <a:lstStyle/>
                     <a:p>
                       <a:r>
@@ -18528,7 +18118,7 @@
                 </a:tc>
                 <a:tc>
                   <a:txBody>
-                    <a:bodyPr wrap="square"/>
+                    <a:bodyPr/>
                     <a:lstStyle/>
                     <a:p>
                       <a:r>
@@ -18548,11 +18138,16 @@
                     </a:solidFill>
                   </a:tcPr>
                 </a:tc>
+                <a:extLst>
+                  <a:ext uri="{0D108BD9-81ED-4DB2-BD59-A6C34878D82A}">
+                    <a16:rowId xmlns:a16="http://schemas.microsoft.com/office/drawing/2014/main" val="10004"/>
+                  </a:ext>
+                </a:extLst>
               </a:tr>
               <a:tr h="475488">
                 <a:tc>
                   <a:txBody>
-                    <a:bodyPr wrap="square"/>
+                    <a:bodyPr/>
                     <a:lstStyle/>
                     <a:p>
                       <a:r>
@@ -18574,7 +18169,7 @@
                 </a:tc>
                 <a:tc>
                   <a:txBody>
-                    <a:bodyPr wrap="square"/>
+                    <a:bodyPr/>
                     <a:lstStyle/>
                     <a:p>
                       <a:r>
@@ -18596,7 +18191,7 @@
                 </a:tc>
                 <a:tc>
                   <a:txBody>
-                    <a:bodyPr wrap="square"/>
+                    <a:bodyPr/>
                     <a:lstStyle/>
                     <a:p>
                       <a:r>
@@ -18616,11 +18211,16 @@
                     </a:solidFill>
                   </a:tcPr>
                 </a:tc>
+                <a:extLst>
+                  <a:ext uri="{0D108BD9-81ED-4DB2-BD59-A6C34878D82A}">
+                    <a16:rowId xmlns:a16="http://schemas.microsoft.com/office/drawing/2014/main" val="10005"/>
+                  </a:ext>
+                </a:extLst>
               </a:tr>
               <a:tr h="475488">
                 <a:tc>
                   <a:txBody>
-                    <a:bodyPr wrap="square"/>
+                    <a:bodyPr/>
                     <a:lstStyle/>
                     <a:p>
                       <a:r>
@@ -18642,7 +18242,7 @@
                 </a:tc>
                 <a:tc>
                   <a:txBody>
-                    <a:bodyPr wrap="square"/>
+                    <a:bodyPr/>
                     <a:lstStyle/>
                     <a:p>
                       <a:r>
@@ -18664,7 +18264,7 @@
                 </a:tc>
                 <a:tc>
                   <a:txBody>
-                    <a:bodyPr wrap="square"/>
+                    <a:bodyPr/>
                     <a:lstStyle/>
                     <a:p>
                       <a:r>
@@ -18684,6 +18284,11 @@
                     </a:solidFill>
                   </a:tcPr>
                 </a:tc>
+                <a:extLst>
+                  <a:ext uri="{0D108BD9-81ED-4DB2-BD59-A6C34878D82A}">
+                    <a16:rowId xmlns:a16="http://schemas.microsoft.com/office/drawing/2014/main" val="10006"/>
+                  </a:ext>
+                </a:extLst>
               </a:tr>
             </a:tbl>
           </a:graphicData>
@@ -18697,8 +18302,1056 @@
 </p:sld>
 </file>
 
+<file path=ppt/slides/slide9.xml><?xml version="1.0" encoding="utf-8"?>
+<p:sld xmlns:a="http://schemas.openxmlformats.org/drawingml/2006/main" xmlns:r="http://schemas.openxmlformats.org/officeDocument/2006/relationships" xmlns:p="http://schemas.openxmlformats.org/presentationml/2006/main">
+  <p:cSld>
+    <p:spTree>
+      <p:nvGrpSpPr>
+        <p:cNvPr id="1" name="Shape 123"/>
+        <p:cNvGrpSpPr/>
+        <p:nvPr/>
+      </p:nvGrpSpPr>
+      <p:grpSpPr>
+        <a:xfrm>
+          <a:off x="0" y="0"/>
+          <a:ext cx="0" cy="0"/>
+          <a:chOff x="0" y="0"/>
+          <a:chExt cx="0" cy="0"/>
+        </a:xfrm>
+      </p:grpSpPr>
+      <p:pic>
+        <p:nvPicPr>
+          <p:cNvPr id="124" name="Google Shape;124;p22" title="Frame 144.png"/>
+          <p:cNvPicPr preferRelativeResize="0"/>
+          <p:nvPr/>
+        </p:nvPicPr>
+        <p:blipFill rotWithShape="1">
+          <a:blip r:embed="rId3">
+            <a:alphaModFix/>
+          </a:blip>
+          <a:srcRect b="98001"/>
+          <a:stretch/>
+        </p:blipFill>
+        <p:spPr>
+          <a:xfrm>
+            <a:off x="0" y="5093562"/>
+            <a:ext cx="9144000" cy="54275"/>
+          </a:xfrm>
+          <a:prstGeom prst="rect">
+            <a:avLst/>
+          </a:prstGeom>
+          <a:noFill/>
+          <a:ln>
+            <a:noFill/>
+          </a:ln>
+        </p:spPr>
+      </p:pic>
+      <p:pic>
+        <p:nvPicPr>
+          <p:cNvPr id="125" name="Google Shape;125;p22" title="Group 427319979.png"/>
+          <p:cNvPicPr preferRelativeResize="0"/>
+          <p:nvPr/>
+        </p:nvPicPr>
+        <p:blipFill>
+          <a:blip r:embed="rId4">
+            <a:alphaModFix/>
+          </a:blip>
+          <a:stretch>
+            <a:fillRect/>
+          </a:stretch>
+        </p:blipFill>
+        <p:spPr>
+          <a:xfrm>
+            <a:off x="0" y="1"/>
+            <a:ext cx="9144000" cy="507359"/>
+          </a:xfrm>
+          <a:prstGeom prst="rect">
+            <a:avLst/>
+          </a:prstGeom>
+          <a:noFill/>
+          <a:ln>
+            <a:noFill/>
+          </a:ln>
+        </p:spPr>
+      </p:pic>
+      <p:sp>
+        <p:nvSpPr>
+          <p:cNvPr id="126" name="Google Shape;126;p22"/>
+          <p:cNvSpPr/>
+          <p:nvPr/>
+        </p:nvSpPr>
+        <p:spPr>
+          <a:xfrm>
+            <a:off x="-29250" y="5071875"/>
+            <a:ext cx="9173400" cy="97800"/>
+          </a:xfrm>
+          <a:prstGeom prst="rect">
+            <a:avLst/>
+          </a:prstGeom>
+          <a:solidFill>
+            <a:schemeClr val="dk1"/>
+          </a:solidFill>
+          <a:ln>
+            <a:noFill/>
+          </a:ln>
+        </p:spPr>
+        <p:txBody>
+          <a:bodyPr spcFirstLastPara="1" wrap="square" lIns="91425" tIns="91425" rIns="91425" bIns="91425" anchor="ctr" anchorCtr="0">
+            <a:noAutofit/>
+          </a:bodyPr>
+          <a:lstStyle/>
+          <a:p>
+            <a:pPr marL="0" lvl="0" indent="0" algn="ctr" rtl="0">
+              <a:spcBef>
+                <a:spcPts val="0"/>
+              </a:spcBef>
+              <a:spcAft>
+                <a:spcPts val="0"/>
+              </a:spcAft>
+              <a:buNone/>
+            </a:pPr>
+            <a:endParaRPr/>
+          </a:p>
+        </p:txBody>
+      </p:sp>
+      <p:sp>
+        <p:nvSpPr>
+          <p:cNvPr id="127" name="Google Shape;127;p22"/>
+          <p:cNvSpPr txBox="1"/>
+          <p:nvPr/>
+        </p:nvSpPr>
+        <p:spPr>
+          <a:xfrm>
+            <a:off x="265350" y="663825"/>
+            <a:ext cx="8943000" cy="561900"/>
+          </a:xfrm>
+          <a:prstGeom prst="rect">
+            <a:avLst/>
+          </a:prstGeom>
+          <a:noFill/>
+          <a:ln>
+            <a:noFill/>
+          </a:ln>
+        </p:spPr>
+        <p:txBody>
+          <a:bodyPr spcFirstLastPara="1" wrap="square" lIns="91425" tIns="91425" rIns="91425" bIns="91425" anchor="t" anchorCtr="0">
+            <a:noAutofit/>
+          </a:bodyPr>
+          <a:lstStyle/>
+          <a:p>
+            <a:pPr marL="0" lvl="0" indent="0" algn="l" rtl="0">
+              <a:spcBef>
+                <a:spcPts val="0"/>
+              </a:spcBef>
+              <a:spcAft>
+                <a:spcPts val="0"/>
+              </a:spcAft>
+              <a:buNone/>
+            </a:pPr>
+            <a:r>
+              <a:rPr lang="en-GB" sz="1600">
+                <a:latin typeface="Google Sans Flex Medium"/>
+                <a:ea typeface="Google Sans Flex Medium"/>
+                <a:cs typeface="Google Sans Flex Medium"/>
+                <a:sym typeface="Google Sans Flex Medium"/>
+              </a:rPr>
+              <a:t>Estimated implementation cost (optional)</a:t>
+            </a:r>
+            <a:endParaRPr sz="1600">
+              <a:latin typeface="Google Sans Flex Medium"/>
+              <a:ea typeface="Google Sans Flex Medium"/>
+              <a:cs typeface="Google Sans Flex Medium"/>
+              <a:sym typeface="Google Sans Flex Medium"/>
+            </a:endParaRPr>
+          </a:p>
+        </p:txBody>
+      </p:sp>
+      <p:graphicFrame>
+        <p:nvGraphicFramePr>
+          <p:cNvPr id="128" name="Table 127"/>
+          <p:cNvGraphicFramePr>
+            <a:graphicFrameLocks noGrp="1"/>
+          </p:cNvGraphicFramePr>
+          <p:nvPr/>
+        </p:nvGraphicFramePr>
+        <p:xfrm>
+          <a:off x="274320" y="1143000"/>
+          <a:ext cx="8595360" cy="2816352"/>
+        </p:xfrm>
+        <a:graphic>
+          <a:graphicData uri="http://schemas.openxmlformats.org/drawingml/2006/table">
+            <a:tbl>
+              <a:tblPr>
+                <a:tableStyleId>{5940675A-B579-460E-94D1-54222C63F5DA}</a:tableStyleId>
+              </a:tblPr>
+              <a:tblGrid>
+                <a:gridCol w="2926080">
+                  <a:extLst>
+                    <a:ext uri="{9D8B030D-6E8A-4147-A177-3AD203B41FA5}">
+                      <a16:colId xmlns:a16="http://schemas.microsoft.com/office/drawing/2014/main" val="20000"/>
+                    </a:ext>
+                  </a:extLst>
+                </a:gridCol>
+                <a:gridCol w="2743200">
+                  <a:extLst>
+                    <a:ext uri="{9D8B030D-6E8A-4147-A177-3AD203B41FA5}">
+                      <a16:colId xmlns:a16="http://schemas.microsoft.com/office/drawing/2014/main" val="20001"/>
+                    </a:ext>
+                  </a:extLst>
+                </a:gridCol>
+                <a:gridCol w="2926080">
+                  <a:extLst>
+                    <a:ext uri="{9D8B030D-6E8A-4147-A177-3AD203B41FA5}">
+                      <a16:colId xmlns:a16="http://schemas.microsoft.com/office/drawing/2014/main" val="20002"/>
+                    </a:ext>
+                  </a:extLst>
+                </a:gridCol>
+              </a:tblGrid>
+              <a:tr h="402336">
+                <a:tc>
+                  <a:txBody>
+                    <a:bodyPr/>
+                    <a:lstStyle/>
+                    <a:p>
+                      <a:r>
+                        <a:rPr sz="1000" b="1" i="0">
+                          <a:solidFill>
+                            <a:srgbClr val="FFFFFF"/>
+                          </a:solidFill>
+                          <a:latin typeface="Arial"/>
+                        </a:rPr>
+                        <a:t>Item</a:t>
+                      </a:r>
+                    </a:p>
+                  </a:txBody>
+                  <a:tcPr marL="54864" marR="54864" marT="22860" marB="22860" anchor="ctr">
+                    <a:solidFill>
+                      <a:srgbClr val="3451D1"/>
+                    </a:solidFill>
+                  </a:tcPr>
+                </a:tc>
+                <a:tc>
+                  <a:txBody>
+                    <a:bodyPr/>
+                    <a:lstStyle/>
+                    <a:p>
+                      <a:r>
+                        <a:rPr sz="1000" b="1" i="0">
+                          <a:solidFill>
+                            <a:srgbClr val="FFFFFF"/>
+                          </a:solidFill>
+                          <a:latin typeface="Arial"/>
+                        </a:rPr>
+                        <a:t>Estimate</a:t>
+                      </a:r>
+                    </a:p>
+                  </a:txBody>
+                  <a:tcPr marL="54864" marR="54864" marT="22860" marB="22860" anchor="ctr">
+                    <a:solidFill>
+                      <a:srgbClr val="3451D1"/>
+                    </a:solidFill>
+                  </a:tcPr>
+                </a:tc>
+                <a:tc>
+                  <a:txBody>
+                    <a:bodyPr/>
+                    <a:lstStyle/>
+                    <a:p>
+                      <a:r>
+                        <a:rPr sz="1000" b="1" i="0">
+                          <a:solidFill>
+                            <a:srgbClr val="FFFFFF"/>
+                          </a:solidFill>
+                          <a:latin typeface="Arial"/>
+                        </a:rPr>
+                        <a:t>Basis</a:t>
+                      </a:r>
+                    </a:p>
+                  </a:txBody>
+                  <a:tcPr marL="54864" marR="54864" marT="22860" marB="22860" anchor="ctr">
+                    <a:solidFill>
+                      <a:srgbClr val="3451D1"/>
+                    </a:solidFill>
+                  </a:tcPr>
+                </a:tc>
+                <a:extLst>
+                  <a:ext uri="{0D108BD9-81ED-4DB2-BD59-A6C34878D82A}">
+                    <a16:rowId xmlns:a16="http://schemas.microsoft.com/office/drawing/2014/main" val="10000"/>
+                  </a:ext>
+                </a:extLst>
+              </a:tr>
+              <a:tr h="402336">
+                <a:tc>
+                  <a:txBody>
+                    <a:bodyPr/>
+                    <a:lstStyle/>
+                    <a:p>
+                      <a:r>
+                        <a:rPr sz="1000" b="1" i="0">
+                          <a:solidFill>
+                            <a:srgbClr val="101828"/>
+                          </a:solidFill>
+                          <a:latin typeface="Arial"/>
+                        </a:rPr>
+                        <a:t>One Gemini audit</a:t>
+                      </a:r>
+                    </a:p>
+                  </a:txBody>
+                  <a:tcPr marL="54864" marR="54864" marT="22860" marB="22860" anchor="ctr">
+                    <a:solidFill>
+                      <a:srgbClr val="FFFFFF"/>
+                    </a:solidFill>
+                  </a:tcPr>
+                </a:tc>
+                <a:tc>
+                  <a:txBody>
+                    <a:bodyPr/>
+                    <a:lstStyle/>
+                    <a:p>
+                      <a:r>
+                        <a:rPr sz="1000" b="0" i="0">
+                          <a:solidFill>
+                            <a:srgbClr val="101828"/>
+                          </a:solidFill>
+                          <a:latin typeface="Arial"/>
+                        </a:rPr>
+                        <a:t>about $0.002</a:t>
+                      </a:r>
+                    </a:p>
+                  </a:txBody>
+                  <a:tcPr marL="54864" marR="54864" marT="22860" marB="22860" anchor="ctr">
+                    <a:solidFill>
+                      <a:srgbClr val="FFFFFF"/>
+                    </a:solidFill>
+                  </a:tcPr>
+                </a:tc>
+                <a:tc>
+                  <a:txBody>
+                    <a:bodyPr/>
+                    <a:lstStyle/>
+                    <a:p>
+                      <a:r>
+                        <a:rPr sz="1000" b="0" i="0">
+                          <a:solidFill>
+                            <a:srgbClr val="101828"/>
+                          </a:solidFill>
+                          <a:latin typeface="Arial"/>
+                        </a:rPr>
+                        <a:t>Measured tokens x Vertex AI list price</a:t>
+                      </a:r>
+                    </a:p>
+                  </a:txBody>
+                  <a:tcPr marL="54864" marR="54864" marT="22860" marB="22860" anchor="ctr">
+                    <a:solidFill>
+                      <a:srgbClr val="FFFFFF"/>
+                    </a:solidFill>
+                  </a:tcPr>
+                </a:tc>
+                <a:extLst>
+                  <a:ext uri="{0D108BD9-81ED-4DB2-BD59-A6C34878D82A}">
+                    <a16:rowId xmlns:a16="http://schemas.microsoft.com/office/drawing/2014/main" val="10001"/>
+                  </a:ext>
+                </a:extLst>
+              </a:tr>
+              <a:tr h="402336">
+                <a:tc>
+                  <a:txBody>
+                    <a:bodyPr/>
+                    <a:lstStyle/>
+                    <a:p>
+                      <a:r>
+                        <a:rPr sz="1000" b="1" i="0">
+                          <a:solidFill>
+                            <a:srgbClr val="101828"/>
+                          </a:solidFill>
+                          <a:latin typeface="Arial"/>
+                        </a:rPr>
+                        <a:t>One five-leg trip (1 plan + 5 audits)</a:t>
+                      </a:r>
+                    </a:p>
+                  </a:txBody>
+                  <a:tcPr marL="54864" marR="54864" marT="22860" marB="22860" anchor="ctr">
+                    <a:solidFill>
+                      <a:srgbClr val="F2F4F7"/>
+                    </a:solidFill>
+                  </a:tcPr>
+                </a:tc>
+                <a:tc>
+                  <a:txBody>
+                    <a:bodyPr/>
+                    <a:lstStyle/>
+                    <a:p>
+                      <a:r>
+                        <a:rPr sz="1000" b="0" i="0">
+                          <a:solidFill>
+                            <a:srgbClr val="101828"/>
+                          </a:solidFill>
+                          <a:latin typeface="Arial"/>
+                        </a:rPr>
+                        <a:t>about $0.015</a:t>
+                      </a:r>
+                    </a:p>
+                  </a:txBody>
+                  <a:tcPr marL="54864" marR="54864" marT="22860" marB="22860" anchor="ctr">
+                    <a:solidFill>
+                      <a:srgbClr val="F2F4F7"/>
+                    </a:solidFill>
+                  </a:tcPr>
+                </a:tc>
+                <a:tc>
+                  <a:txBody>
+                    <a:bodyPr/>
+                    <a:lstStyle/>
+                    <a:p>
+                      <a:r>
+                        <a:rPr sz="1000" b="0" i="0">
+                          <a:solidFill>
+                            <a:srgbClr val="101828"/>
+                          </a:solidFill>
+                          <a:latin typeface="Arial"/>
+                        </a:rPr>
+                        <a:t>Same</a:t>
+                      </a:r>
+                    </a:p>
+                  </a:txBody>
+                  <a:tcPr marL="54864" marR="54864" marT="22860" marB="22860" anchor="ctr">
+                    <a:solidFill>
+                      <a:srgbClr val="F2F4F7"/>
+                    </a:solidFill>
+                  </a:tcPr>
+                </a:tc>
+                <a:extLst>
+                  <a:ext uri="{0D108BD9-81ED-4DB2-BD59-A6C34878D82A}">
+                    <a16:rowId xmlns:a16="http://schemas.microsoft.com/office/drawing/2014/main" val="10002"/>
+                  </a:ext>
+                </a:extLst>
+              </a:tr>
+              <a:tr h="402336">
+                <a:tc>
+                  <a:txBody>
+                    <a:bodyPr/>
+                    <a:lstStyle/>
+                    <a:p>
+                      <a:r>
+                        <a:rPr sz="1000" b="1" i="0">
+                          <a:solidFill>
+                            <a:srgbClr val="101828"/>
+                          </a:solidFill>
+                          <a:latin typeface="Arial"/>
+                        </a:rPr>
+                        <a:t>10,000 audited bookings per month</a:t>
+                      </a:r>
+                    </a:p>
+                  </a:txBody>
+                  <a:tcPr marL="54864" marR="54864" marT="22860" marB="22860" anchor="ctr">
+                    <a:solidFill>
+                      <a:srgbClr val="FFFFFF"/>
+                    </a:solidFill>
+                  </a:tcPr>
+                </a:tc>
+                <a:tc>
+                  <a:txBody>
+                    <a:bodyPr/>
+                    <a:lstStyle/>
+                    <a:p>
+                      <a:r>
+                        <a:rPr sz="1000" b="0" i="0">
+                          <a:solidFill>
+                            <a:srgbClr val="101828"/>
+                          </a:solidFill>
+                          <a:latin typeface="Arial"/>
+                        </a:rPr>
+                        <a:t>about $20 of Gemini</a:t>
+                      </a:r>
+                    </a:p>
+                  </a:txBody>
+                  <a:tcPr marL="54864" marR="54864" marT="22860" marB="22860" anchor="ctr">
+                    <a:solidFill>
+                      <a:srgbClr val="FFFFFF"/>
+                    </a:solidFill>
+                  </a:tcPr>
+                </a:tc>
+                <a:tc>
+                  <a:txBody>
+                    <a:bodyPr/>
+                    <a:lstStyle/>
+                    <a:p>
+                      <a:r>
+                        <a:rPr sz="1000" b="0" i="0">
+                          <a:solidFill>
+                            <a:srgbClr val="101828"/>
+                          </a:solidFill>
+                          <a:latin typeface="Arial"/>
+                        </a:rPr>
+                        <a:t>10,000 x $0.002</a:t>
+                      </a:r>
+                    </a:p>
+                  </a:txBody>
+                  <a:tcPr marL="54864" marR="54864" marT="22860" marB="22860" anchor="ctr">
+                    <a:solidFill>
+                      <a:srgbClr val="FFFFFF"/>
+                    </a:solidFill>
+                  </a:tcPr>
+                </a:tc>
+                <a:extLst>
+                  <a:ext uri="{0D108BD9-81ED-4DB2-BD59-A6C34878D82A}">
+                    <a16:rowId xmlns:a16="http://schemas.microsoft.com/office/drawing/2014/main" val="10003"/>
+                  </a:ext>
+                </a:extLst>
+              </a:tr>
+              <a:tr h="402336">
+                <a:tc>
+                  <a:txBody>
+                    <a:bodyPr/>
+                    <a:lstStyle/>
+                    <a:p>
+                      <a:r>
+                        <a:rPr sz="1000" b="1" i="0">
+                          <a:solidFill>
+                            <a:srgbClr val="101828"/>
+                          </a:solidFill>
+                          <a:latin typeface="Arial"/>
+                        </a:rPr>
+                        <a:t>Cloud Run</a:t>
+                      </a:r>
+                    </a:p>
+                  </a:txBody>
+                  <a:tcPr marL="54864" marR="54864" marT="22860" marB="22860" anchor="ctr">
+                    <a:solidFill>
+                      <a:srgbClr val="F2F4F7"/>
+                    </a:solidFill>
+                  </a:tcPr>
+                </a:tc>
+                <a:tc>
+                  <a:txBody>
+                    <a:bodyPr/>
+                    <a:lstStyle/>
+                    <a:p>
+                      <a:r>
+                        <a:rPr sz="1000" b="0" i="0">
+                          <a:solidFill>
+                            <a:srgbClr val="101828"/>
+                          </a:solidFill>
+                          <a:latin typeface="Arial"/>
+                        </a:rPr>
+                        <a:t>Scales to zero; one always-on instance about $7 to $8 a month</a:t>
+                      </a:r>
+                    </a:p>
+                  </a:txBody>
+                  <a:tcPr marL="54864" marR="54864" marT="22860" marB="22860" anchor="ctr">
+                    <a:solidFill>
+                      <a:srgbClr val="F2F4F7"/>
+                    </a:solidFill>
+                  </a:tcPr>
+                </a:tc>
+                <a:tc>
+                  <a:txBody>
+                    <a:bodyPr/>
+                    <a:lstStyle/>
+                    <a:p>
+                      <a:r>
+                        <a:rPr sz="1000" b="0" i="0">
+                          <a:solidFill>
+                            <a:srgbClr val="101828"/>
+                          </a:solidFill>
+                          <a:latin typeface="Arial"/>
+                        </a:rPr>
+                        <a:t>List-price estimate</a:t>
+                      </a:r>
+                    </a:p>
+                  </a:txBody>
+                  <a:tcPr marL="54864" marR="54864" marT="22860" marB="22860" anchor="ctr">
+                    <a:solidFill>
+                      <a:srgbClr val="F2F4F7"/>
+                    </a:solidFill>
+                  </a:tcPr>
+                </a:tc>
+                <a:extLst>
+                  <a:ext uri="{0D108BD9-81ED-4DB2-BD59-A6C34878D82A}">
+                    <a16:rowId xmlns:a16="http://schemas.microsoft.com/office/drawing/2014/main" val="10004"/>
+                  </a:ext>
+                </a:extLst>
+              </a:tr>
+              <a:tr h="402336">
+                <a:tc>
+                  <a:txBody>
+                    <a:bodyPr/>
+                    <a:lstStyle/>
+                    <a:p>
+                      <a:r>
+                        <a:rPr sz="1000" b="1" i="0">
+                          <a:solidFill>
+                            <a:srgbClr val="101828"/>
+                          </a:solidFill>
+                          <a:latin typeface="Arial"/>
+                        </a:rPr>
+                        <a:t>Firestore, Hosting, Secret Manager</a:t>
+                      </a:r>
+                    </a:p>
+                  </a:txBody>
+                  <a:tcPr marL="54864" marR="54864" marT="22860" marB="22860" anchor="ctr">
+                    <a:solidFill>
+                      <a:srgbClr val="FFFFFF"/>
+                    </a:solidFill>
+                  </a:tcPr>
+                </a:tc>
+                <a:tc>
+                  <a:txBody>
+                    <a:bodyPr/>
+                    <a:lstStyle/>
+                    <a:p>
+                      <a:r>
+                        <a:rPr sz="1000" b="0" i="0">
+                          <a:solidFill>
+                            <a:srgbClr val="101828"/>
+                          </a:solidFill>
+                          <a:latin typeface="Arial"/>
+                        </a:rPr>
+                        <a:t>Free tier at demo scale; under $1 per 10,000 decisions</a:t>
+                      </a:r>
+                    </a:p>
+                  </a:txBody>
+                  <a:tcPr marL="54864" marR="54864" marT="22860" marB="22860" anchor="ctr">
+                    <a:solidFill>
+                      <a:srgbClr val="FFFFFF"/>
+                    </a:solidFill>
+                  </a:tcPr>
+                </a:tc>
+                <a:tc>
+                  <a:txBody>
+                    <a:bodyPr/>
+                    <a:lstStyle/>
+                    <a:p>
+                      <a:r>
+                        <a:rPr sz="1000" b="0" i="0">
+                          <a:solidFill>
+                            <a:srgbClr val="101828"/>
+                          </a:solidFill>
+                          <a:latin typeface="Arial"/>
+                        </a:rPr>
+                        <a:t>Estimate</a:t>
+                      </a:r>
+                    </a:p>
+                  </a:txBody>
+                  <a:tcPr marL="54864" marR="54864" marT="22860" marB="22860" anchor="ctr">
+                    <a:solidFill>
+                      <a:srgbClr val="FFFFFF"/>
+                    </a:solidFill>
+                  </a:tcPr>
+                </a:tc>
+                <a:extLst>
+                  <a:ext uri="{0D108BD9-81ED-4DB2-BD59-A6C34878D82A}">
+                    <a16:rowId xmlns:a16="http://schemas.microsoft.com/office/drawing/2014/main" val="10005"/>
+                  </a:ext>
+                </a:extLst>
+              </a:tr>
+              <a:tr h="402336">
+                <a:tc>
+                  <a:txBody>
+                    <a:bodyPr/>
+                    <a:lstStyle/>
+                    <a:p>
+                      <a:r>
+                        <a:rPr sz="1000" b="1" i="0">
+                          <a:solidFill>
+                            <a:srgbClr val="101828"/>
+                          </a:solidFill>
+                          <a:latin typeface="Arial"/>
+                        </a:rPr>
+                        <a:t>Third-party services</a:t>
+                      </a:r>
+                    </a:p>
+                  </a:txBody>
+                  <a:tcPr marL="54864" marR="54864" marT="22860" marB="22860" anchor="ctr">
+                    <a:solidFill>
+                      <a:srgbClr val="F2F4F7"/>
+                    </a:solidFill>
+                  </a:tcPr>
+                </a:tc>
+                <a:tc>
+                  <a:txBody>
+                    <a:bodyPr/>
+                    <a:lstStyle/>
+                    <a:p>
+                      <a:r>
+                        <a:rPr sz="1000" b="0" i="0">
+                          <a:solidFill>
+                            <a:srgbClr val="101828"/>
+                          </a:solidFill>
+                          <a:latin typeface="Arial"/>
+                        </a:rPr>
+                        <a:t>None: runs only on Google Cloud</a:t>
+                      </a:r>
+                    </a:p>
+                  </a:txBody>
+                  <a:tcPr marL="54864" marR="54864" marT="22860" marB="22860" anchor="ctr">
+                    <a:solidFill>
+                      <a:srgbClr val="F2F4F7"/>
+                    </a:solidFill>
+                  </a:tcPr>
+                </a:tc>
+                <a:tc>
+                  <a:txBody>
+                    <a:bodyPr/>
+                    <a:lstStyle/>
+                    <a:p>
+                      <a:r>
+                        <a:rPr sz="1000" b="0" i="0">
+                          <a:solidFill>
+                            <a:srgbClr val="101828"/>
+                          </a:solidFill>
+                          <a:latin typeface="Arial"/>
+                        </a:rPr>
+                        <a:t>-</a:t>
+                      </a:r>
+                    </a:p>
+                  </a:txBody>
+                  <a:tcPr marL="54864" marR="54864" marT="22860" marB="22860" anchor="ctr">
+                    <a:solidFill>
+                      <a:srgbClr val="F2F4F7"/>
+                    </a:solidFill>
+                  </a:tcPr>
+                </a:tc>
+                <a:extLst>
+                  <a:ext uri="{0D108BD9-81ED-4DB2-BD59-A6C34878D82A}">
+                    <a16:rowId xmlns:a16="http://schemas.microsoft.com/office/drawing/2014/main" val="10006"/>
+                  </a:ext>
+                </a:extLst>
+              </a:tr>
+            </a:tbl>
+          </a:graphicData>
+        </a:graphic>
+      </p:graphicFrame>
+      <p:sp>
+        <p:nvSpPr>
+          <p:cNvPr id="129" name="TextBox 128"/>
+          <p:cNvSpPr txBox="1"/>
+          <p:nvPr/>
+        </p:nvSpPr>
+        <p:spPr>
+          <a:xfrm>
+            <a:off x="274320" y="4114800"/>
+            <a:ext cx="8595360" cy="457200"/>
+          </a:xfrm>
+          <a:prstGeom prst="rect">
+            <a:avLst/>
+          </a:prstGeom>
+          <a:noFill/>
+        </p:spPr>
+        <p:txBody>
+          <a:bodyPr wrap="square" lIns="36576" tIns="18288" rIns="36576" bIns="18288" anchor="t">
+            <a:spAutoFit/>
+          </a:bodyPr>
+          <a:lstStyle/>
+          <a:p>
+            <a:pPr>
+              <a:spcAft>
+                <a:spcPts val="200"/>
+              </a:spcAft>
+            </a:pPr>
+            <a:r>
+              <a:rPr sz="950" b="0" i="1">
+                <a:solidFill>
+                  <a:srgbClr val="667085"/>
+                </a:solidFill>
+                <a:latin typeface="Arial"/>
+              </a:rPr>
+              <a:t>Estimates from list prices, not billing data. A production deployment adds real supplier and payment integrations and single sign-on.</a:t>
+            </a:r>
+          </a:p>
+        </p:txBody>
+      </p:sp>
+    </p:spTree>
+  </p:cSld>
+  <p:clrMapOvr>
+    <a:masterClrMapping/>
+  </p:clrMapOvr>
+</p:sld>
+</file>
+
 <file path=ppt/theme/theme1.xml><?xml version="1.0" encoding="utf-8"?>
-<a:theme xmlns:a="http://schemas.openxmlformats.org/drawingml/2006/main" xmlns:r="http://schemas.openxmlformats.org/officeDocument/2006/relationships">
+<a:theme xmlns:a="http://schemas.openxmlformats.org/drawingml/2006/main" name="Simple Light">
+  <a:themeElements>
+    <a:clrScheme name="Simple Light">
+      <a:dk1>
+        <a:srgbClr val="000000"/>
+      </a:dk1>
+      <a:lt1>
+        <a:srgbClr val="FFFFFF"/>
+      </a:lt1>
+      <a:dk2>
+        <a:srgbClr val="595959"/>
+      </a:dk2>
+      <a:lt2>
+        <a:srgbClr val="EEEEEE"/>
+      </a:lt2>
+      <a:accent1>
+        <a:srgbClr val="4285F4"/>
+      </a:accent1>
+      <a:accent2>
+        <a:srgbClr val="212121"/>
+      </a:accent2>
+      <a:accent3>
+        <a:srgbClr val="78909C"/>
+      </a:accent3>
+      <a:accent4>
+        <a:srgbClr val="FFAB40"/>
+      </a:accent4>
+      <a:accent5>
+        <a:srgbClr val="0097A7"/>
+      </a:accent5>
+      <a:accent6>
+        <a:srgbClr val="EEFF41"/>
+      </a:accent6>
+      <a:hlink>
+        <a:srgbClr val="0097A7"/>
+      </a:hlink>
+      <a:folHlink>
+        <a:srgbClr val="0097A7"/>
+      </a:folHlink>
+    </a:clrScheme>
+    <a:fontScheme name="Office">
+      <a:majorFont>
+        <a:latin typeface="Arial"/>
+        <a:ea typeface=""/>
+        <a:cs typeface=""/>
+        <a:font script="Jpan" typeface="ＭＳ Ｐゴシック"/>
+        <a:font script="Hang" typeface="맑은 고딕"/>
+        <a:font script="Hans" typeface="宋体"/>
+        <a:font script="Hant" typeface="新細明體"/>
+        <a:font script="Arab" typeface="Times New Roman"/>
+        <a:font script="Hebr" typeface="Times New Roman"/>
+        <a:font script="Thai" typeface="Angsana New"/>
+        <a:font script="Ethi" typeface="Nyala"/>
+        <a:font script="Beng" typeface="Vrinda"/>
+        <a:font script="Gujr" typeface="Shruti"/>
+        <a:font script="Khmr" typeface="MoolBoran"/>
+        <a:font script="Knda" typeface="Tunga"/>
+        <a:font script="Guru" typeface="Raavi"/>
+        <a:font script="Cans" typeface="Euphemia"/>
+        <a:font script="Cher" typeface="Plantagenet Cherokee"/>
+        <a:font script="Yiii" typeface="Microsoft Yi Baiti"/>
+        <a:font script="Tibt" typeface="Microsoft Himalaya"/>
+        <a:font script="Thaa" typeface="MV Boli"/>
+        <a:font script="Deva" typeface="Mangal"/>
+        <a:font script="Telu" typeface="Gautami"/>
+        <a:font script="Taml" typeface="Latha"/>
+        <a:font script="Syrc" typeface="Estrangelo Edessa"/>
+        <a:font script="Orya" typeface="Kalinga"/>
+        <a:font script="Mlym" typeface="Kartika"/>
+        <a:font script="Laoo" typeface="DokChampa"/>
+        <a:font script="Sinh" typeface="Iskoola Pota"/>
+        <a:font script="Mong" typeface="Mongolian Baiti"/>
+        <a:font script="Viet" typeface="Times New Roman"/>
+        <a:font script="Uigh" typeface="Microsoft Uighur"/>
+        <a:font script="Geor" typeface="Sylfaen"/>
+      </a:majorFont>
+      <a:minorFont>
+        <a:latin typeface="Arial"/>
+        <a:ea typeface=""/>
+        <a:cs typeface=""/>
+        <a:font script="Jpan" typeface="ＭＳ Ｐゴシック"/>
+        <a:font script="Hang" typeface="맑은 고딕"/>
+        <a:font script="Hans" typeface="宋体"/>
+        <a:font script="Hant" typeface="新細明體"/>
+        <a:font script="Arab" typeface="Arial"/>
+        <a:font script="Hebr" typeface="Arial"/>
+        <a:font script="Thai" typeface="Cordia New"/>
+        <a:font script="Ethi" typeface="Nyala"/>
+        <a:font script="Beng" typeface="Vrinda"/>
+        <a:font script="Gujr" typeface="Shruti"/>
+        <a:font script="Khmr" typeface="DaunPenh"/>
+        <a:font script="Knda" typeface="Tunga"/>
+        <a:font script="Guru" typeface="Raavi"/>
+        <a:font script="Cans" typeface="Euphemia"/>
+        <a:font script="Cher" typeface="Plantagenet Cherokee"/>
+        <a:font script="Yiii" typeface="Microsoft Yi Baiti"/>
+        <a:font script="Tibt" typeface="Microsoft Himalaya"/>
+        <a:font script="Thaa" typeface="MV Boli"/>
+        <a:font script="Deva" typeface="Mangal"/>
+        <a:font script="Telu" typeface="Gautami"/>
+        <a:font script="Taml" typeface="Latha"/>
+        <a:font script="Syrc" typeface="Estrangelo Edessa"/>
+        <a:font script="Orya" typeface="Kalinga"/>
+        <a:font script="Mlym" typeface="Kartika"/>
+        <a:font script="Laoo" typeface="DokChampa"/>
+        <a:font script="Sinh" typeface="Iskoola Pota"/>
+        <a:font script="Mong" typeface="Mongolian Baiti"/>
+        <a:font script="Viet" typeface="Arial"/>
+        <a:font script="Uigh" typeface="Microsoft Uighur"/>
+        <a:font script="Geor" typeface="Sylfaen"/>
+      </a:minorFont>
+    </a:fontScheme>
+    <a:fmtScheme name="Office">
+      <a:fillStyleLst>
+        <a:solidFill>
+          <a:schemeClr val="phClr"/>
+        </a:solidFill>
+        <a:gradFill rotWithShape="1">
+          <a:gsLst>
+            <a:gs pos="0">
+              <a:schemeClr val="phClr">
+                <a:tint val="50000"/>
+                <a:satMod val="300000"/>
+              </a:schemeClr>
+            </a:gs>
+            <a:gs pos="35000">
+              <a:schemeClr val="phClr">
+                <a:tint val="37000"/>
+                <a:satMod val="300000"/>
+              </a:schemeClr>
+            </a:gs>
+            <a:gs pos="100000">
+              <a:schemeClr val="phClr">
+                <a:tint val="15000"/>
+                <a:satMod val="350000"/>
+              </a:schemeClr>
+            </a:gs>
+          </a:gsLst>
+          <a:lin ang="16200000" scaled="1"/>
+        </a:gradFill>
+        <a:gradFill rotWithShape="1">
+          <a:gsLst>
+            <a:gs pos="0">
+              <a:schemeClr val="phClr">
+                <a:tint val="100000"/>
+                <a:shade val="100000"/>
+                <a:satMod val="130000"/>
+              </a:schemeClr>
+            </a:gs>
+            <a:gs pos="100000">
+              <a:schemeClr val="phClr">
+                <a:tint val="50000"/>
+                <a:shade val="100000"/>
+                <a:satMod val="350000"/>
+              </a:schemeClr>
+            </a:gs>
+          </a:gsLst>
+          <a:lin ang="16200000" scaled="0"/>
+        </a:gradFill>
+      </a:fillStyleLst>
+      <a:lnStyleLst>
+        <a:ln w="9525" cap="flat" cmpd="sng" algn="ctr">
+          <a:solidFill>
+            <a:schemeClr val="phClr">
+              <a:shade val="95000"/>
+              <a:satMod val="105000"/>
+            </a:schemeClr>
+          </a:solidFill>
+          <a:prstDash val="solid"/>
+        </a:ln>
+        <a:ln w="25400" cap="flat" cmpd="sng" algn="ctr">
+          <a:solidFill>
+            <a:schemeClr val="phClr"/>
+          </a:solidFill>
+          <a:prstDash val="solid"/>
+        </a:ln>
+        <a:ln w="38100" cap="flat" cmpd="sng" algn="ctr">
+          <a:solidFill>
+            <a:schemeClr val="phClr"/>
+          </a:solidFill>
+          <a:prstDash val="solid"/>
+        </a:ln>
+      </a:lnStyleLst>
+      <a:effectStyleLst>
+        <a:effectStyle>
+          <a:effectLst>
+            <a:outerShdw blurRad="40000" dist="20000" dir="5400000" rotWithShape="0">
+              <a:srgbClr val="000000">
+                <a:alpha val="38000"/>
+              </a:srgbClr>
+            </a:outerShdw>
+          </a:effectLst>
+        </a:effectStyle>
+        <a:effectStyle>
+          <a:effectLst>
+            <a:outerShdw blurRad="40000" dist="23000" dir="5400000" rotWithShape="0">
+              <a:srgbClr val="000000">
+                <a:alpha val="35000"/>
+              </a:srgbClr>
+            </a:outerShdw>
+          </a:effectLst>
+        </a:effectStyle>
+        <a:effectStyle>
+          <a:effectLst>
+            <a:outerShdw blurRad="40000" dist="23000" dir="5400000" rotWithShape="0">
+              <a:srgbClr val="000000">
+                <a:alpha val="35000"/>
+              </a:srgbClr>
+            </a:outerShdw>
+          </a:effectLst>
+          <a:scene3d>
+            <a:camera prst="orthographicFront">
+              <a:rot lat="0" lon="0" rev="0"/>
+            </a:camera>
+            <a:lightRig rig="threePt" dir="t">
+              <a:rot lat="0" lon="0" rev="1200000"/>
+            </a:lightRig>
+          </a:scene3d>
+          <a:sp3d>
+            <a:bevelT w="63500" h="25400"/>
+          </a:sp3d>
+        </a:effectStyle>
+      </a:effectStyleLst>
+      <a:bgFillStyleLst>
+        <a:solidFill>
+          <a:schemeClr val="phClr"/>
+        </a:solidFill>
+        <a:gradFill rotWithShape="1">
+          <a:gsLst>
+            <a:gs pos="0">
+              <a:schemeClr val="phClr">
+                <a:tint val="40000"/>
+                <a:satMod val="350000"/>
+              </a:schemeClr>
+            </a:gs>
+            <a:gs pos="40000">
+              <a:schemeClr val="phClr">
+                <a:tint val="45000"/>
+                <a:shade val="99000"/>
+                <a:satMod val="350000"/>
+              </a:schemeClr>
+            </a:gs>
+            <a:gs pos="100000">
+              <a:schemeClr val="phClr">
+                <a:shade val="20000"/>
+                <a:satMod val="255000"/>
+              </a:schemeClr>
+            </a:gs>
+          </a:gsLst>
+          <a:path path="circle">
+            <a:fillToRect l="50000" t="-80000" r="50000" b="180000"/>
+          </a:path>
+        </a:gradFill>
+        <a:gradFill rotWithShape="1">
+          <a:gsLst>
+            <a:gs pos="0">
+              <a:schemeClr val="phClr">
+                <a:tint val="80000"/>
+                <a:satMod val="300000"/>
+              </a:schemeClr>
+            </a:gs>
+            <a:gs pos="100000">
+              <a:schemeClr val="phClr">
+                <a:shade val="30000"/>
+                <a:satMod val="200000"/>
+              </a:schemeClr>
+            </a:gs>
+          </a:gsLst>
+          <a:path path="circle">
+            <a:fillToRect l="50000" t="50000" r="50000" b="50000"/>
+          </a:path>
+        </a:gradFill>
+      </a:bgFillStyleLst>
+    </a:fmtScheme>
+  </a:themeElements>
+  <a:objectDefaults/>
+  <a:extraClrSchemeLst/>
+</a:theme>
+</file>
+
+<file path=ppt/theme/theme2.xml><?xml version="1.0" encoding="utf-8"?>
+<a:theme xmlns:a="http://schemas.openxmlformats.org/drawingml/2006/main">
   <a:themeElements>
     <a:clrScheme name="Default">
       <a:dk1>
@@ -18973,284 +19626,7 @@
       </a:bgFillStyleLst>
     </a:fmtScheme>
   </a:themeElements>
-</a:theme>
-</file>
-
-<file path=ppt/theme/theme2.xml><?xml version="1.0" encoding="utf-8"?>
-<a:theme xmlns:a="http://schemas.openxmlformats.org/drawingml/2006/main" xmlns:r="http://schemas.openxmlformats.org/officeDocument/2006/relationships" name="Simple Light">
-  <a:themeElements>
-    <a:clrScheme name="Simple Light">
-      <a:dk1>
-        <a:srgbClr val="000000"/>
-      </a:dk1>
-      <a:lt1>
-        <a:srgbClr val="FFFFFF"/>
-      </a:lt1>
-      <a:dk2>
-        <a:srgbClr val="595959"/>
-      </a:dk2>
-      <a:lt2>
-        <a:srgbClr val="EEEEEE"/>
-      </a:lt2>
-      <a:accent1>
-        <a:srgbClr val="4285F4"/>
-      </a:accent1>
-      <a:accent2>
-        <a:srgbClr val="212121"/>
-      </a:accent2>
-      <a:accent3>
-        <a:srgbClr val="78909C"/>
-      </a:accent3>
-      <a:accent4>
-        <a:srgbClr val="FFAB40"/>
-      </a:accent4>
-      <a:accent5>
-        <a:srgbClr val="0097A7"/>
-      </a:accent5>
-      <a:accent6>
-        <a:srgbClr val="EEFF41"/>
-      </a:accent6>
-      <a:hlink>
-        <a:srgbClr val="0097A7"/>
-      </a:hlink>
-      <a:folHlink>
-        <a:srgbClr val="0097A7"/>
-      </a:folHlink>
-    </a:clrScheme>
-    <a:fontScheme name="Office">
-      <a:majorFont>
-        <a:latin typeface="Arial"/>
-        <a:ea typeface=""/>
-        <a:cs typeface=""/>
-        <a:font script="Jpan" typeface="ＭＳ Ｐゴシック"/>
-        <a:font script="Hang" typeface="맑은 고딕"/>
-        <a:font script="Hans" typeface="宋体"/>
-        <a:font script="Hant" typeface="新細明體"/>
-        <a:font script="Arab" typeface="Times New Roman"/>
-        <a:font script="Hebr" typeface="Times New Roman"/>
-        <a:font script="Thai" typeface="Angsana New"/>
-        <a:font script="Ethi" typeface="Nyala"/>
-        <a:font script="Beng" typeface="Vrinda"/>
-        <a:font script="Gujr" typeface="Shruti"/>
-        <a:font script="Khmr" typeface="MoolBoran"/>
-        <a:font script="Knda" typeface="Tunga"/>
-        <a:font script="Guru" typeface="Raavi"/>
-        <a:font script="Cans" typeface="Euphemia"/>
-        <a:font script="Cher" typeface="Plantagenet Cherokee"/>
-        <a:font script="Yiii" typeface="Microsoft Yi Baiti"/>
-        <a:font script="Tibt" typeface="Microsoft Himalaya"/>
-        <a:font script="Thaa" typeface="MV Boli"/>
-        <a:font script="Deva" typeface="Mangal"/>
-        <a:font script="Telu" typeface="Gautami"/>
-        <a:font script="Taml" typeface="Latha"/>
-        <a:font script="Syrc" typeface="Estrangelo Edessa"/>
-        <a:font script="Orya" typeface="Kalinga"/>
-        <a:font script="Mlym" typeface="Kartika"/>
-        <a:font script="Laoo" typeface="DokChampa"/>
-        <a:font script="Sinh" typeface="Iskoola Pota"/>
-        <a:font script="Mong" typeface="Mongolian Baiti"/>
-        <a:font script="Viet" typeface="Times New Roman"/>
-        <a:font script="Uigh" typeface="Microsoft Uighur"/>
-        <a:font script="Geor" typeface="Sylfaen"/>
-      </a:majorFont>
-      <a:minorFont>
-        <a:latin typeface="Arial"/>
-        <a:ea typeface=""/>
-        <a:cs typeface=""/>
-        <a:font script="Jpan" typeface="ＭＳ Ｐゴシック"/>
-        <a:font script="Hang" typeface="맑은 고딕"/>
-        <a:font script="Hans" typeface="宋体"/>
-        <a:font script="Hant" typeface="新細明體"/>
-        <a:font script="Arab" typeface="Arial"/>
-        <a:font script="Hebr" typeface="Arial"/>
-        <a:font script="Thai" typeface="Cordia New"/>
-        <a:font script="Ethi" typeface="Nyala"/>
-        <a:font script="Beng" typeface="Vrinda"/>
-        <a:font script="Gujr" typeface="Shruti"/>
-        <a:font script="Khmr" typeface="DaunPenh"/>
-        <a:font script="Knda" typeface="Tunga"/>
-        <a:font script="Guru" typeface="Raavi"/>
-        <a:font script="Cans" typeface="Euphemia"/>
-        <a:font script="Cher" typeface="Plantagenet Cherokee"/>
-        <a:font script="Yiii" typeface="Microsoft Yi Baiti"/>
-        <a:font script="Tibt" typeface="Microsoft Himalaya"/>
-        <a:font script="Thaa" typeface="MV Boli"/>
-        <a:font script="Deva" typeface="Mangal"/>
-        <a:font script="Telu" typeface="Gautami"/>
-        <a:font script="Taml" typeface="Latha"/>
-        <a:font script="Syrc" typeface="Estrangelo Edessa"/>
-        <a:font script="Orya" typeface="Kalinga"/>
-        <a:font script="Mlym" typeface="Kartika"/>
-        <a:font script="Laoo" typeface="DokChampa"/>
-        <a:font script="Sinh" typeface="Iskoola Pota"/>
-        <a:font script="Mong" typeface="Mongolian Baiti"/>
-        <a:font script="Viet" typeface="Arial"/>
-        <a:font script="Uigh" typeface="Microsoft Uighur"/>
-        <a:font script="Geor" typeface="Sylfaen"/>
-      </a:minorFont>
-    </a:fontScheme>
-    <a:fmtScheme name="Office">
-      <a:fillStyleLst>
-        <a:solidFill>
-          <a:schemeClr val="phClr"/>
-        </a:solidFill>
-        <a:gradFill rotWithShape="1">
-          <a:gsLst>
-            <a:gs pos="0">
-              <a:schemeClr val="phClr">
-                <a:tint val="50000"/>
-                <a:satMod val="300000"/>
-              </a:schemeClr>
-            </a:gs>
-            <a:gs pos="35000">
-              <a:schemeClr val="phClr">
-                <a:tint val="37000"/>
-                <a:satMod val="300000"/>
-              </a:schemeClr>
-            </a:gs>
-            <a:gs pos="100000">
-              <a:schemeClr val="phClr">
-                <a:tint val="15000"/>
-                <a:satMod val="350000"/>
-              </a:schemeClr>
-            </a:gs>
-          </a:gsLst>
-          <a:lin ang="16200000" scaled="1"/>
-        </a:gradFill>
-        <a:gradFill rotWithShape="1">
-          <a:gsLst>
-            <a:gs pos="0">
-              <a:schemeClr val="phClr">
-                <a:tint val="100000"/>
-                <a:shade val="100000"/>
-                <a:satMod val="130000"/>
-              </a:schemeClr>
-            </a:gs>
-            <a:gs pos="100000">
-              <a:schemeClr val="phClr">
-                <a:tint val="50000"/>
-                <a:shade val="100000"/>
-                <a:satMod val="350000"/>
-              </a:schemeClr>
-            </a:gs>
-          </a:gsLst>
-          <a:lin ang="16200000" scaled="0"/>
-        </a:gradFill>
-      </a:fillStyleLst>
-      <a:lnStyleLst>
-        <a:ln w="9525" cap="flat" cmpd="sng" algn="ctr">
-          <a:solidFill>
-            <a:schemeClr val="phClr">
-              <a:shade val="95000"/>
-              <a:satMod val="105000"/>
-            </a:schemeClr>
-          </a:solidFill>
-          <a:prstDash val="solid"/>
-        </a:ln>
-        <a:ln w="25400" cap="flat" cmpd="sng" algn="ctr">
-          <a:solidFill>
-            <a:schemeClr val="phClr"/>
-          </a:solidFill>
-          <a:prstDash val="solid"/>
-        </a:ln>
-        <a:ln w="38100" cap="flat" cmpd="sng" algn="ctr">
-          <a:solidFill>
-            <a:schemeClr val="phClr"/>
-          </a:solidFill>
-          <a:prstDash val="solid"/>
-        </a:ln>
-      </a:lnStyleLst>
-      <a:effectStyleLst>
-        <a:effectStyle>
-          <a:effectLst>
-            <a:outerShdw blurRad="40000" dist="20000" dir="5400000" rotWithShape="0">
-              <a:srgbClr val="000000">
-                <a:alpha val="38000"/>
-              </a:srgbClr>
-            </a:outerShdw>
-          </a:effectLst>
-        </a:effectStyle>
-        <a:effectStyle>
-          <a:effectLst>
-            <a:outerShdw blurRad="40000" dist="23000" dir="5400000" rotWithShape="0">
-              <a:srgbClr val="000000">
-                <a:alpha val="35000"/>
-              </a:srgbClr>
-            </a:outerShdw>
-          </a:effectLst>
-        </a:effectStyle>
-        <a:effectStyle>
-          <a:effectLst>
-            <a:outerShdw blurRad="40000" dist="23000" dir="5400000" rotWithShape="0">
-              <a:srgbClr val="000000">
-                <a:alpha val="35000"/>
-              </a:srgbClr>
-            </a:outerShdw>
-          </a:effectLst>
-          <a:scene3d>
-            <a:camera prst="orthographicFront">
-              <a:rot lat="0" lon="0" rev="0"/>
-            </a:camera>
-            <a:lightRig rig="threePt" dir="t">
-              <a:rot lat="0" lon="0" rev="1200000"/>
-            </a:lightRig>
-          </a:scene3d>
-          <a:sp3d>
-            <a:bevelT w="63500" h="25400"/>
-          </a:sp3d>
-        </a:effectStyle>
-      </a:effectStyleLst>
-      <a:bgFillStyleLst>
-        <a:solidFill>
-          <a:schemeClr val="phClr"/>
-        </a:solidFill>
-        <a:gradFill rotWithShape="1">
-          <a:gsLst>
-            <a:gs pos="0">
-              <a:schemeClr val="phClr">
-                <a:tint val="40000"/>
-                <a:satMod val="350000"/>
-              </a:schemeClr>
-            </a:gs>
-            <a:gs pos="40000">
-              <a:schemeClr val="phClr">
-                <a:tint val="45000"/>
-                <a:shade val="99000"/>
-                <a:satMod val="350000"/>
-              </a:schemeClr>
-            </a:gs>
-            <a:gs pos="100000">
-              <a:schemeClr val="phClr">
-                <a:shade val="20000"/>
-                <a:satMod val="255000"/>
-              </a:schemeClr>
-            </a:gs>
-          </a:gsLst>
-          <a:path path="circle">
-            <a:fillToRect l="50000" t="-80000" r="50000" b="180000"/>
-          </a:path>
-        </a:gradFill>
-        <a:gradFill rotWithShape="1">
-          <a:gsLst>
-            <a:gs pos="0">
-              <a:schemeClr val="phClr">
-                <a:tint val="80000"/>
-                <a:satMod val="300000"/>
-              </a:schemeClr>
-            </a:gs>
-            <a:gs pos="100000">
-              <a:schemeClr val="phClr">
-                <a:shade val="30000"/>
-                <a:satMod val="200000"/>
-              </a:schemeClr>
-            </a:gs>
-          </a:gsLst>
-          <a:path path="circle">
-            <a:fillToRect l="50000" t="50000" r="50000" b="50000"/>
-          </a:path>
-        </a:gradFill>
-      </a:bgFillStyleLst>
-    </a:fmtScheme>
-  </a:themeElements>
+  <a:objectDefaults/>
+  <a:extraClrSchemeLst/>
 </a:theme>
 </file>